--- a/presentation/dist/Maiershirts_Master.pptx
+++ b/presentation/dist/Maiershirts_Master.pptx
@@ -1656,7 +1656,7 @@
       </p:grpSpPr>
       <p:pic>
         <p:nvPicPr>
-          <p:cNvPr id="2" name="Image 0" descr="/home/user/lexware-angebot-tool/presentation/assets/logo-light.png">    </p:cNvPr>
+          <p:cNvPr id="2" name="Image 0" descr="/Users/stefanmaier/Documents/GitHub/lexware-angebot-tool/presentation/assets/logo-light.png">    </p:cNvPr>
           <p:cNvPicPr>
             <a:picLocks noChangeAspect="1"/>
           </p:cNvPicPr>
@@ -1863,7 +1863,7 @@
       </p:grpSpPr>
       <p:pic>
         <p:nvPicPr>
-          <p:cNvPr id="2" name="Image 0" descr="/home/user/lexware-angebot-tool/presentation/assets/logo-light.png">    </p:cNvPr>
+          <p:cNvPr id="2" name="Image 0" descr="/Users/stefanmaier/Documents/GitHub/lexware-angebot-tool/presentation/assets/logo-light.png">    </p:cNvPr>
           <p:cNvPicPr>
             <a:picLocks noChangeAspect="1"/>
           </p:cNvPicPr>
@@ -2077,7 +2077,7 @@
       </p:grpSpPr>
       <p:pic>
         <p:nvPicPr>
-          <p:cNvPr id="2" name="Image 0" descr="/home/user/lexware-angebot-tool/presentation/assets/logo-dark.png">    </p:cNvPr>
+          <p:cNvPr id="2" name="Image 0" descr="/Users/stefanmaier/Documents/GitHub/lexware-angebot-tool/presentation/assets/logo-dark.png">    </p:cNvPr>
           <p:cNvPicPr>
             <a:picLocks noChangeAspect="1"/>
           </p:cNvPicPr>
@@ -2279,7 +2279,7 @@
       </p:grpSpPr>
       <p:pic>
         <p:nvPicPr>
-          <p:cNvPr id="2" name="Image 0" descr="/home/user/lexware-angebot-tool/presentation/assets/logo-light.png">    </p:cNvPr>
+          <p:cNvPr id="2" name="Image 0" descr="/Users/stefanmaier/Documents/GitHub/lexware-angebot-tool/presentation/assets/logo-light.png">    </p:cNvPr>
           <p:cNvPicPr>
             <a:picLocks noChangeAspect="1"/>
           </p:cNvPicPr>

--- a/presentation/dist/Maiershirts_Master.pptx
+++ b/presentation/dist/Maiershirts_Master.pptx
@@ -940,7 +940,7 @@
           <a:p>
             <a:r>
               <a:rPr lang="en-US" dirty="0"/>
-              <a:t>Layout MS_REFERENZEN: zwölf Logo-Felder. Logo per Klick auf das Platzhalterbild einsetzen; bei Beschnitt: Bildformat → Zuschneiden → Anpassen.</a:t>
+              <a:t>Layout MS_REFERENZEN: zwölf Logo-Felder. 7 Logo(s) aus assets/referenzen eingesetzt. Logo per Klick auf das Platzhalterbild einsetzen; bei Beschnitt: Bildformat → Zuschneiden → Anpassen.</a:t>
             </a:r>
             <a:endParaRPr lang="en-US" dirty="0"/>
           </a:p>
@@ -12314,7 +12314,7 @@
       </p:sp>
       <p:pic>
         <p:nvPicPr>
-          <p:cNvPr id="3" name="Image 0" descr="/var/folders/hm/sgq6d80d0vq133k7n8dc9bnw0000gn/T/maiershirts-sXhBDw/ph-logo-446x194.png">    </p:cNvPr>
+          <p:cNvPr id="3" name="Image 0" descr="/Users/stefanmaier/Documents/GitHub/lexware-angebot-tool/presentation/assets/referenzen/01-seibold.png">    </p:cNvPr>
           <p:cNvPicPr>
             <a:picLocks noChangeAspect="1"/>
           </p:cNvPicPr>
@@ -12324,14 +12324,13 @@
         </p:nvPicPr>
         <p:blipFill>
           <a:blip r:embed="rId1"/>
-          <a:stretch>
-            <a:fillRect/>
-          </a:stretch>
+          <a:srcRect l="0" r="0" t="0" b="0"/>
+          <a:stretch/>
         </p:blipFill>
         <p:spPr>
           <a:xfrm>
             <a:off x="566928" y="1344168"/>
-            <a:ext cx="1700784" cy="740664"/>
+            <a:ext cx="1444752" cy="484632"/>
           </a:xfrm>
           <a:prstGeom prst="rect">
             <a:avLst/>
@@ -12340,7 +12339,7 @@
       </p:pic>
       <p:pic>
         <p:nvPicPr>
-          <p:cNvPr id="4" name="Image 1" descr="/var/folders/hm/sgq6d80d0vq133k7n8dc9bnw0000gn/T/maiershirts-sXhBDw/ph-logo-446x194.png">    </p:cNvPr>
+          <p:cNvPr id="4" name="Image 1" descr="/Users/stefanmaier/Documents/GitHub/lexware-angebot-tool/presentation/assets/referenzen/02-bego-bau.png">    </p:cNvPr>
           <p:cNvPicPr>
             <a:picLocks noChangeAspect="1"/>
           </p:cNvPicPr>
@@ -12350,14 +12349,13 @@
         </p:nvPicPr>
         <p:blipFill>
           <a:blip r:embed="rId2"/>
-          <a:stretch>
-            <a:fillRect/>
-          </a:stretch>
+          <a:srcRect l="0" r="0" t="0" b="0"/>
+          <a:stretch/>
         </p:blipFill>
         <p:spPr>
           <a:xfrm>
             <a:off x="2670048" y="1344168"/>
-            <a:ext cx="1700784" cy="740664"/>
+            <a:ext cx="1444752" cy="484632"/>
           </a:xfrm>
           <a:prstGeom prst="rect">
             <a:avLst/>
@@ -12366,7 +12364,7 @@
       </p:pic>
       <p:pic>
         <p:nvPicPr>
-          <p:cNvPr id="5" name="Image 2" descr="/var/folders/hm/sgq6d80d0vq133k7n8dc9bnw0000gn/T/maiershirts-sXhBDw/ph-logo-446x194.png">    </p:cNvPr>
+          <p:cNvPr id="5" name="Image 2" descr="/Users/stefanmaier/Documents/GitHub/lexware-angebot-tool/presentation/assets/referenzen/03-elektro-stuerz.png">    </p:cNvPr>
           <p:cNvPicPr>
             <a:picLocks noChangeAspect="1"/>
           </p:cNvPicPr>
@@ -12376,14 +12374,13 @@
         </p:nvPicPr>
         <p:blipFill>
           <a:blip r:embed="rId3"/>
-          <a:stretch>
-            <a:fillRect/>
-          </a:stretch>
+          <a:srcRect l="0" r="0" t="0" b="0"/>
+          <a:stretch/>
         </p:blipFill>
         <p:spPr>
           <a:xfrm>
             <a:off x="4773168" y="1344168"/>
-            <a:ext cx="1700784" cy="740664"/>
+            <a:ext cx="1444752" cy="484632"/>
           </a:xfrm>
           <a:prstGeom prst="rect">
             <a:avLst/>
@@ -12392,7 +12389,7 @@
       </p:pic>
       <p:pic>
         <p:nvPicPr>
-          <p:cNvPr id="6" name="Image 3" descr="/var/folders/hm/sgq6d80d0vq133k7n8dc9bnw0000gn/T/maiershirts-sXhBDw/ph-logo-446x194.png">    </p:cNvPr>
+          <p:cNvPr id="6" name="Image 3" descr="/Users/stefanmaier/Documents/GitHub/lexware-angebot-tool/presentation/assets/referenzen/04-dav-tuebingen.jpg">    </p:cNvPr>
           <p:cNvPicPr>
             <a:picLocks noChangeAspect="1"/>
           </p:cNvPicPr>
@@ -12402,14 +12399,13 @@
         </p:nvPicPr>
         <p:blipFill>
           <a:blip r:embed="rId4"/>
-          <a:stretch>
-            <a:fillRect/>
-          </a:stretch>
+          <a:srcRect l="0" r="0" t="0" b="0"/>
+          <a:stretch/>
         </p:blipFill>
         <p:spPr>
           <a:xfrm>
             <a:off x="6876288" y="1344168"/>
-            <a:ext cx="1700784" cy="740664"/>
+            <a:ext cx="1444752" cy="484632"/>
           </a:xfrm>
           <a:prstGeom prst="rect">
             <a:avLst/>
@@ -12418,7 +12414,7 @@
       </p:pic>
       <p:pic>
         <p:nvPicPr>
-          <p:cNvPr id="7" name="Image 4" descr="/var/folders/hm/sgq6d80d0vq133k7n8dc9bnw0000gn/T/maiershirts-sXhBDw/ph-logo-446x194.png">    </p:cNvPr>
+          <p:cNvPr id="7" name="Image 4" descr="/Users/stefanmaier/Documents/GitHub/lexware-angebot-tool/presentation/assets/referenzen/05-rox-herrenberg.jpg">    </p:cNvPr>
           <p:cNvPicPr>
             <a:picLocks noChangeAspect="1"/>
           </p:cNvPicPr>
@@ -12428,14 +12424,13 @@
         </p:nvPicPr>
         <p:blipFill>
           <a:blip r:embed="rId5"/>
-          <a:stretch>
-            <a:fillRect/>
-          </a:stretch>
+          <a:srcRect l="0" r="0" t="0" b="0"/>
+          <a:stretch/>
         </p:blipFill>
         <p:spPr>
           <a:xfrm>
             <a:off x="566928" y="2441448"/>
-            <a:ext cx="1700784" cy="740664"/>
+            <a:ext cx="1444752" cy="484632"/>
           </a:xfrm>
           <a:prstGeom prst="rect">
             <a:avLst/>
@@ -12444,7 +12439,7 @@
       </p:pic>
       <p:pic>
         <p:nvPicPr>
-          <p:cNvPr id="8" name="Image 5" descr="/var/folders/hm/sgq6d80d0vq133k7n8dc9bnw0000gn/T/maiershirts-sXhBDw/ph-logo-446x194.png">    </p:cNvPr>
+          <p:cNvPr id="8" name="Image 5" descr="/Users/stefanmaier/Documents/GitHub/lexware-angebot-tool/presentation/assets/referenzen/06-paarsch-schaefer.png">    </p:cNvPr>
           <p:cNvPicPr>
             <a:picLocks noChangeAspect="1"/>
           </p:cNvPicPr>
@@ -12454,14 +12449,13 @@
         </p:nvPicPr>
         <p:blipFill>
           <a:blip r:embed="rId6"/>
-          <a:stretch>
-            <a:fillRect/>
-          </a:stretch>
+          <a:srcRect l="0" r="0" t="0" b="0"/>
+          <a:stretch/>
         </p:blipFill>
         <p:spPr>
           <a:xfrm>
             <a:off x="2670048" y="2441448"/>
-            <a:ext cx="1700784" cy="740664"/>
+            <a:ext cx="1444752" cy="484632"/>
           </a:xfrm>
           <a:prstGeom prst="rect">
             <a:avLst/>
@@ -12470,7 +12464,7 @@
       </p:pic>
       <p:pic>
         <p:nvPicPr>
-          <p:cNvPr id="9" name="Image 6" descr="/var/folders/hm/sgq6d80d0vq133k7n8dc9bnw0000gn/T/maiershirts-sXhBDw/ph-logo-446x194.png">    </p:cNvPr>
+          <p:cNvPr id="9" name="Image 6" descr="/Users/stefanmaier/Documents/GitHub/lexware-angebot-tool/presentation/assets/referenzen/07-suedweststrom.png">    </p:cNvPr>
           <p:cNvPicPr>
             <a:picLocks noChangeAspect="1"/>
           </p:cNvPicPr>
@@ -12480,14 +12474,13 @@
         </p:nvPicPr>
         <p:blipFill>
           <a:blip r:embed="rId7"/>
-          <a:stretch>
-            <a:fillRect/>
-          </a:stretch>
+          <a:srcRect l="0" r="0" t="0" b="0"/>
+          <a:stretch/>
         </p:blipFill>
         <p:spPr>
           <a:xfrm>
             <a:off x="4773168" y="2441448"/>
-            <a:ext cx="1700784" cy="740664"/>
+            <a:ext cx="1444752" cy="484632"/>
           </a:xfrm>
           <a:prstGeom prst="rect">
             <a:avLst/>
@@ -12496,7 +12489,7 @@
       </p:pic>
       <p:pic>
         <p:nvPicPr>
-          <p:cNvPr id="10" name="Image 7" descr="/var/folders/hm/sgq6d80d0vq133k7n8dc9bnw0000gn/T/maiershirts-sXhBDw/ph-logo-446x194.png">    </p:cNvPr>
+          <p:cNvPr id="10" name="Image 7" descr="/var/folders/hm/sgq6d80d0vq133k7n8dc9bnw0000gn/T/maiershirts-HMJAPF/ph-logo-446x194.png">    </p:cNvPr>
           <p:cNvPicPr>
             <a:picLocks noChangeAspect="1"/>
           </p:cNvPicPr>
@@ -12522,7 +12515,7 @@
       </p:pic>
       <p:pic>
         <p:nvPicPr>
-          <p:cNvPr id="11" name="Image 8" descr="/var/folders/hm/sgq6d80d0vq133k7n8dc9bnw0000gn/T/maiershirts-sXhBDw/ph-logo-446x194.png">    </p:cNvPr>
+          <p:cNvPr id="11" name="Image 8" descr="/var/folders/hm/sgq6d80d0vq133k7n8dc9bnw0000gn/T/maiershirts-HMJAPF/ph-logo-446x194.png">    </p:cNvPr>
           <p:cNvPicPr>
             <a:picLocks noChangeAspect="1"/>
           </p:cNvPicPr>
@@ -12548,7 +12541,7 @@
       </p:pic>
       <p:pic>
         <p:nvPicPr>
-          <p:cNvPr id="12" name="Image 9" descr="/var/folders/hm/sgq6d80d0vq133k7n8dc9bnw0000gn/T/maiershirts-sXhBDw/ph-logo-446x194.png">    </p:cNvPr>
+          <p:cNvPr id="12" name="Image 9" descr="/var/folders/hm/sgq6d80d0vq133k7n8dc9bnw0000gn/T/maiershirts-HMJAPF/ph-logo-446x194.png">    </p:cNvPr>
           <p:cNvPicPr>
             <a:picLocks noChangeAspect="1"/>
           </p:cNvPicPr>
@@ -12574,7 +12567,7 @@
       </p:pic>
       <p:pic>
         <p:nvPicPr>
-          <p:cNvPr id="13" name="Image 10" descr="/var/folders/hm/sgq6d80d0vq133k7n8dc9bnw0000gn/T/maiershirts-sXhBDw/ph-logo-446x194.png">    </p:cNvPr>
+          <p:cNvPr id="13" name="Image 10" descr="/var/folders/hm/sgq6d80d0vq133k7n8dc9bnw0000gn/T/maiershirts-HMJAPF/ph-logo-446x194.png">    </p:cNvPr>
           <p:cNvPicPr>
             <a:picLocks noChangeAspect="1"/>
           </p:cNvPicPr>
@@ -12600,7 +12593,7 @@
       </p:pic>
       <p:pic>
         <p:nvPicPr>
-          <p:cNvPr id="14" name="Image 11" descr="/var/folders/hm/sgq6d80d0vq133k7n8dc9bnw0000gn/T/maiershirts-sXhBDw/ph-logo-446x194.png">    </p:cNvPr>
+          <p:cNvPr id="14" name="Image 11" descr="/var/folders/hm/sgq6d80d0vq133k7n8dc9bnw0000gn/T/maiershirts-HMJAPF/ph-logo-446x194.png">    </p:cNvPr>
           <p:cNvPicPr>
             <a:picLocks noChangeAspect="1"/>
           </p:cNvPicPr>
@@ -12740,7 +12733,7 @@
       </p:sp>
       <p:pic>
         <p:nvPicPr>
-          <p:cNvPr id="3" name="Image 0" descr="/var/folders/hm/sgq6d80d0vq133k7n8dc9bnw0000gn/T/maiershirts-sXhBDw/ph-foto-1056x840.png">    </p:cNvPr>
+          <p:cNvPr id="3" name="Image 0" descr="/var/folders/hm/sgq6d80d0vq133k7n8dc9bnw0000gn/T/maiershirts-HMJAPF/ph-foto-1056x840.png">    </p:cNvPr>
           <p:cNvPicPr>
             <a:picLocks noChangeAspect="1"/>
           </p:cNvPicPr>
@@ -13552,7 +13545,7 @@
       </p:sp>
       <p:pic>
         <p:nvPicPr>
-          <p:cNvPr id="4" name="Image 0" descr="/var/folders/hm/sgq6d80d0vq133k7n8dc9bnw0000gn/T/maiershirts-sXhBDw/ph-portrait-252x252.png">    </p:cNvPr>
+          <p:cNvPr id="4" name="Image 0" descr="/var/folders/hm/sgq6d80d0vq133k7n8dc9bnw0000gn/T/maiershirts-HMJAPF/ph-portrait-252x252.png">    </p:cNvPr>
           <p:cNvPicPr>
             <a:picLocks noChangeAspect="1"/>
           </p:cNvPicPr>
@@ -13761,7 +13754,7 @@
       </p:sp>
       <p:pic>
         <p:nvPicPr>
-          <p:cNvPr id="9" name="Image 1" descr="/var/folders/hm/sgq6d80d0vq133k7n8dc9bnw0000gn/T/maiershirts-sXhBDw/ph-qr-240x240.png">    </p:cNvPr>
+          <p:cNvPr id="9" name="Image 1" descr="/var/folders/hm/sgq6d80d0vq133k7n8dc9bnw0000gn/T/maiershirts-HMJAPF/ph-qr-240x240.png">    </p:cNvPr>
           <p:cNvPicPr>
             <a:picLocks noChangeAspect="1"/>
           </p:cNvPicPr>
@@ -15177,7 +15170,7 @@
       </p:grpSpPr>
       <p:pic>
         <p:nvPicPr>
-          <p:cNvPr id="2" name="Image 0" descr="/var/folders/hm/sgq6d80d0vq133k7n8dc9bnw0000gn/T/maiershirts-sXhBDw/ph-foto-2400x1008.png">    </p:cNvPr>
+          <p:cNvPr id="2" name="Image 0" descr="/var/folders/hm/sgq6d80d0vq133k7n8dc9bnw0000gn/T/maiershirts-HMJAPF/ph-foto-2400x1008.png">    </p:cNvPr>
           <p:cNvPicPr>
             <a:picLocks noChangeAspect="1"/>
           </p:cNvPicPr>
@@ -16335,7 +16328,7 @@
       </p:sp>
       <p:pic>
         <p:nvPicPr>
-          <p:cNvPr id="3" name="Image 0" descr="/var/folders/hm/sgq6d80d0vq133k7n8dc9bnw0000gn/T/maiershirts-sXhBDw/ph-foto-696x456.png">    </p:cNvPr>
+          <p:cNvPr id="3" name="Image 0" descr="/var/folders/hm/sgq6d80d0vq133k7n8dc9bnw0000gn/T/maiershirts-HMJAPF/ph-foto-696x456.png">    </p:cNvPr>
           <p:cNvPicPr>
             <a:picLocks noChangeAspect="1"/>
           </p:cNvPicPr>
@@ -16505,7 +16498,7 @@
       </p:sp>
       <p:pic>
         <p:nvPicPr>
-          <p:cNvPr id="7" name="Image 1" descr="/var/folders/hm/sgq6d80d0vq133k7n8dc9bnw0000gn/T/maiershirts-sXhBDw/ph-foto-696x456.png">    </p:cNvPr>
+          <p:cNvPr id="7" name="Image 1" descr="/var/folders/hm/sgq6d80d0vq133k7n8dc9bnw0000gn/T/maiershirts-HMJAPF/ph-foto-696x456.png">    </p:cNvPr>
           <p:cNvPicPr>
             <a:picLocks noChangeAspect="1"/>
           </p:cNvPicPr>
@@ -16675,7 +16668,7 @@
       </p:sp>
       <p:pic>
         <p:nvPicPr>
-          <p:cNvPr id="11" name="Image 2" descr="/var/folders/hm/sgq6d80d0vq133k7n8dc9bnw0000gn/T/maiershirts-sXhBDw/ph-foto-696x456.png">    </p:cNvPr>
+          <p:cNvPr id="11" name="Image 2" descr="/var/folders/hm/sgq6d80d0vq133k7n8dc9bnw0000gn/T/maiershirts-HMJAPF/ph-foto-696x456.png">    </p:cNvPr>
           <p:cNvPicPr>
             <a:picLocks noChangeAspect="1"/>
           </p:cNvPicPr>

--- a/presentation/dist/Maiershirts_Master.pptx
+++ b/presentation/dist/Maiershirts_Master.pptx
@@ -940,7 +940,7 @@
           <a:p>
             <a:r>
               <a:rPr lang="en-US" dirty="0"/>
-              <a:t>Layout MS_REFERENZEN: zwölf Logo-Felder. 7 Logo(s) aus assets/referenzen eingesetzt. Logo per Klick auf das Platzhalterbild einsetzen; bei Beschnitt: Bildformat → Zuschneiden → Anpassen.</a:t>
+              <a:t>Layout MS_REFERENZEN: zwölf Logo-Felder. 10 Logo(s) aus assets/referenzen eingesetzt. Logo per Klick auf das Platzhalterbild einsetzen; bei Beschnitt: Bildformat → Zuschneiden → Anpassen.</a:t>
             </a:r>
             <a:endParaRPr lang="en-US" dirty="0"/>
           </a:p>
@@ -12489,7 +12489,7 @@
       </p:pic>
       <p:pic>
         <p:nvPicPr>
-          <p:cNvPr id="10" name="Image 7" descr="/var/folders/hm/sgq6d80d0vq133k7n8dc9bnw0000gn/T/maiershirts-HMJAPF/ph-logo-446x194.png">    </p:cNvPr>
+          <p:cNvPr id="10" name="Image 7" descr="/Users/stefanmaier/Documents/GitHub/lexware-angebot-tool/presentation/assets/referenzen/08-gottlieb-binder.png">    </p:cNvPr>
           <p:cNvPicPr>
             <a:picLocks noChangeAspect="1"/>
           </p:cNvPicPr>
@@ -12499,14 +12499,13 @@
         </p:nvPicPr>
         <p:blipFill>
           <a:blip r:embed="rId8"/>
-          <a:stretch>
-            <a:fillRect/>
-          </a:stretch>
+          <a:srcRect l="0" r="0" t="0" b="0"/>
+          <a:stretch/>
         </p:blipFill>
         <p:spPr>
           <a:xfrm>
             <a:off x="6876288" y="2441448"/>
-            <a:ext cx="1700784" cy="740664"/>
+            <a:ext cx="1444752" cy="484632"/>
           </a:xfrm>
           <a:prstGeom prst="rect">
             <a:avLst/>
@@ -12515,7 +12514,7 @@
       </p:pic>
       <p:pic>
         <p:nvPicPr>
-          <p:cNvPr id="11" name="Image 8" descr="/var/folders/hm/sgq6d80d0vq133k7n8dc9bnw0000gn/T/maiershirts-HMJAPF/ph-logo-446x194.png">    </p:cNvPr>
+          <p:cNvPr id="11" name="Image 8" descr="/Users/stefanmaier/Documents/GitHub/lexware-angebot-tool/presentation/assets/referenzen/09-emin-isic.png">    </p:cNvPr>
           <p:cNvPicPr>
             <a:picLocks noChangeAspect="1"/>
           </p:cNvPicPr>
@@ -12525,14 +12524,13 @@
         </p:nvPicPr>
         <p:blipFill>
           <a:blip r:embed="rId9"/>
-          <a:stretch>
-            <a:fillRect/>
-          </a:stretch>
+          <a:srcRect l="0" r="0" t="0" b="0"/>
+          <a:stretch/>
         </p:blipFill>
         <p:spPr>
           <a:xfrm>
             <a:off x="566928" y="3538728"/>
-            <a:ext cx="1700784" cy="740664"/>
+            <a:ext cx="1444752" cy="484632"/>
           </a:xfrm>
           <a:prstGeom prst="rect">
             <a:avLst/>
@@ -12541,7 +12539,7 @@
       </p:pic>
       <p:pic>
         <p:nvPicPr>
-          <p:cNvPr id="12" name="Image 9" descr="/var/folders/hm/sgq6d80d0vq133k7n8dc9bnw0000gn/T/maiershirts-HMJAPF/ph-logo-446x194.png">    </p:cNvPr>
+          <p:cNvPr id="12" name="Image 9" descr="/Users/stefanmaier/Documents/GitHub/lexware-angebot-tool/presentation/assets/referenzen/10-karnick.png">    </p:cNvPr>
           <p:cNvPicPr>
             <a:picLocks noChangeAspect="1"/>
           </p:cNvPicPr>
@@ -12551,14 +12549,13 @@
         </p:nvPicPr>
         <p:blipFill>
           <a:blip r:embed="rId10"/>
-          <a:stretch>
-            <a:fillRect/>
-          </a:stretch>
+          <a:srcRect l="0" r="0" t="0" b="0"/>
+          <a:stretch/>
         </p:blipFill>
         <p:spPr>
           <a:xfrm>
             <a:off x="2670048" y="3538728"/>
-            <a:ext cx="1700784" cy="740664"/>
+            <a:ext cx="1444752" cy="484632"/>
           </a:xfrm>
           <a:prstGeom prst="rect">
             <a:avLst/>
@@ -12567,7 +12564,7 @@
       </p:pic>
       <p:pic>
         <p:nvPicPr>
-          <p:cNvPr id="13" name="Image 10" descr="/var/folders/hm/sgq6d80d0vq133k7n8dc9bnw0000gn/T/maiershirts-HMJAPF/ph-logo-446x194.png">    </p:cNvPr>
+          <p:cNvPr id="13" name="Image 10" descr="/var/folders/hm/sgq6d80d0vq133k7n8dc9bnw0000gn/T/maiershirts-xNybMV/ph-logo-446x194.png">    </p:cNvPr>
           <p:cNvPicPr>
             <a:picLocks noChangeAspect="1"/>
           </p:cNvPicPr>
@@ -12593,7 +12590,7 @@
       </p:pic>
       <p:pic>
         <p:nvPicPr>
-          <p:cNvPr id="14" name="Image 11" descr="/var/folders/hm/sgq6d80d0vq133k7n8dc9bnw0000gn/T/maiershirts-HMJAPF/ph-logo-446x194.png">    </p:cNvPr>
+          <p:cNvPr id="14" name="Image 11" descr="/var/folders/hm/sgq6d80d0vq133k7n8dc9bnw0000gn/T/maiershirts-xNybMV/ph-logo-446x194.png">    </p:cNvPr>
           <p:cNvPicPr>
             <a:picLocks noChangeAspect="1"/>
           </p:cNvPicPr>
@@ -12733,7 +12730,7 @@
       </p:sp>
       <p:pic>
         <p:nvPicPr>
-          <p:cNvPr id="3" name="Image 0" descr="/var/folders/hm/sgq6d80d0vq133k7n8dc9bnw0000gn/T/maiershirts-HMJAPF/ph-foto-1056x840.png">    </p:cNvPr>
+          <p:cNvPr id="3" name="Image 0" descr="/var/folders/hm/sgq6d80d0vq133k7n8dc9bnw0000gn/T/maiershirts-xNybMV/ph-foto-1056x840.png">    </p:cNvPr>
           <p:cNvPicPr>
             <a:picLocks noChangeAspect="1"/>
           </p:cNvPicPr>
@@ -13545,7 +13542,7 @@
       </p:sp>
       <p:pic>
         <p:nvPicPr>
-          <p:cNvPr id="4" name="Image 0" descr="/var/folders/hm/sgq6d80d0vq133k7n8dc9bnw0000gn/T/maiershirts-HMJAPF/ph-portrait-252x252.png">    </p:cNvPr>
+          <p:cNvPr id="4" name="Image 0" descr="/var/folders/hm/sgq6d80d0vq133k7n8dc9bnw0000gn/T/maiershirts-xNybMV/ph-portrait-252x252.png">    </p:cNvPr>
           <p:cNvPicPr>
             <a:picLocks noChangeAspect="1"/>
           </p:cNvPicPr>
@@ -13754,7 +13751,7 @@
       </p:sp>
       <p:pic>
         <p:nvPicPr>
-          <p:cNvPr id="9" name="Image 1" descr="/var/folders/hm/sgq6d80d0vq133k7n8dc9bnw0000gn/T/maiershirts-HMJAPF/ph-qr-240x240.png">    </p:cNvPr>
+          <p:cNvPr id="9" name="Image 1" descr="/var/folders/hm/sgq6d80d0vq133k7n8dc9bnw0000gn/T/maiershirts-xNybMV/ph-qr-240x240.png">    </p:cNvPr>
           <p:cNvPicPr>
             <a:picLocks noChangeAspect="1"/>
           </p:cNvPicPr>
@@ -15170,7 +15167,7 @@
       </p:grpSpPr>
       <p:pic>
         <p:nvPicPr>
-          <p:cNvPr id="2" name="Image 0" descr="/var/folders/hm/sgq6d80d0vq133k7n8dc9bnw0000gn/T/maiershirts-HMJAPF/ph-foto-2400x1008.png">    </p:cNvPr>
+          <p:cNvPr id="2" name="Image 0" descr="/var/folders/hm/sgq6d80d0vq133k7n8dc9bnw0000gn/T/maiershirts-xNybMV/ph-foto-2400x1008.png">    </p:cNvPr>
           <p:cNvPicPr>
             <a:picLocks noChangeAspect="1"/>
           </p:cNvPicPr>
@@ -16328,7 +16325,7 @@
       </p:sp>
       <p:pic>
         <p:nvPicPr>
-          <p:cNvPr id="3" name="Image 0" descr="/var/folders/hm/sgq6d80d0vq133k7n8dc9bnw0000gn/T/maiershirts-HMJAPF/ph-foto-696x456.png">    </p:cNvPr>
+          <p:cNvPr id="3" name="Image 0" descr="/var/folders/hm/sgq6d80d0vq133k7n8dc9bnw0000gn/T/maiershirts-xNybMV/ph-foto-696x456.png">    </p:cNvPr>
           <p:cNvPicPr>
             <a:picLocks noChangeAspect="1"/>
           </p:cNvPicPr>
@@ -16498,7 +16495,7 @@
       </p:sp>
       <p:pic>
         <p:nvPicPr>
-          <p:cNvPr id="7" name="Image 1" descr="/var/folders/hm/sgq6d80d0vq133k7n8dc9bnw0000gn/T/maiershirts-HMJAPF/ph-foto-696x456.png">    </p:cNvPr>
+          <p:cNvPr id="7" name="Image 1" descr="/var/folders/hm/sgq6d80d0vq133k7n8dc9bnw0000gn/T/maiershirts-xNybMV/ph-foto-696x456.png">    </p:cNvPr>
           <p:cNvPicPr>
             <a:picLocks noChangeAspect="1"/>
           </p:cNvPicPr>
@@ -16668,7 +16665,7 @@
       </p:sp>
       <p:pic>
         <p:nvPicPr>
-          <p:cNvPr id="11" name="Image 2" descr="/var/folders/hm/sgq6d80d0vq133k7n8dc9bnw0000gn/T/maiershirts-HMJAPF/ph-foto-696x456.png">    </p:cNvPr>
+          <p:cNvPr id="11" name="Image 2" descr="/var/folders/hm/sgq6d80d0vq133k7n8dc9bnw0000gn/T/maiershirts-xNybMV/ph-foto-696x456.png">    </p:cNvPr>
           <p:cNvPicPr>
             <a:picLocks noChangeAspect="1"/>
           </p:cNvPicPr>

--- a/presentation/dist/Maiershirts_Master.pptx
+++ b/presentation/dist/Maiershirts_Master.pptx
@@ -940,7 +940,7 @@
           <a:p>
             <a:r>
               <a:rPr lang="en-US" dirty="0"/>
-              <a:t>Layout MS_REFERENZEN: zwölf Logo-Felder. 10 Logo(s) aus assets/referenzen eingesetzt. Logo per Klick auf das Platzhalterbild einsetzen; bei Beschnitt: Bildformat → Zuschneiden → Anpassen.</a:t>
+              <a:t>Layout MS_REFERENZEN: zwölf Logo-Felder. 11 Logo(s) aus assets/referenzen eingesetzt. Logo per Klick auf das Platzhalterbild einsetzen; bei Beschnitt: Bildformat → Zuschneiden → Anpassen.</a:t>
             </a:r>
             <a:endParaRPr lang="en-US" dirty="0"/>
           </a:p>
@@ -12314,7 +12314,7 @@
       </p:sp>
       <p:pic>
         <p:nvPicPr>
-          <p:cNvPr id="3" name="Image 0" descr="/Users/stefanmaier/Documents/GitHub/lexware-angebot-tool/presentation/assets/referenzen/01-seibold.png">    </p:cNvPr>
+          <p:cNvPr id="3" name="Image 0" descr="/var/folders/hm/sgq6d80d0vq133k7n8dc9bnw0000gn/T/maiershirts-dzZNxb/ref-0.png">    </p:cNvPr>
           <p:cNvPicPr>
             <a:picLocks noChangeAspect="1"/>
           </p:cNvPicPr>
@@ -12324,13 +12324,14 @@
         </p:nvPicPr>
         <p:blipFill>
           <a:blip r:embed="rId1"/>
-          <a:srcRect l="0" r="0" t="0" b="0"/>
-          <a:stretch/>
+          <a:stretch>
+            <a:fillRect/>
+          </a:stretch>
         </p:blipFill>
         <p:spPr>
           <a:xfrm>
-            <a:off x="566928" y="1344168"/>
-            <a:ext cx="1444752" cy="484632"/>
+            <a:off x="713232" y="1519438"/>
+            <a:ext cx="1408176" cy="390124"/>
           </a:xfrm>
           <a:prstGeom prst="rect">
             <a:avLst/>
@@ -12339,7 +12340,7 @@
       </p:pic>
       <p:pic>
         <p:nvPicPr>
-          <p:cNvPr id="4" name="Image 1" descr="/Users/stefanmaier/Documents/GitHub/lexware-angebot-tool/presentation/assets/referenzen/02-bego-bau.png">    </p:cNvPr>
+          <p:cNvPr id="4" name="Image 1" descr="/var/folders/hm/sgq6d80d0vq133k7n8dc9bnw0000gn/T/maiershirts-dzZNxb/ref-1.png">    </p:cNvPr>
           <p:cNvPicPr>
             <a:picLocks noChangeAspect="1"/>
           </p:cNvPicPr>
@@ -12349,13 +12350,14 @@
         </p:nvPicPr>
         <p:blipFill>
           <a:blip r:embed="rId2"/>
-          <a:srcRect l="0" r="0" t="0" b="0"/>
-          <a:stretch/>
+          <a:stretch>
+            <a:fillRect/>
+          </a:stretch>
         </p:blipFill>
         <p:spPr>
           <a:xfrm>
-            <a:off x="2670048" y="1344168"/>
-            <a:ext cx="1444752" cy="484632"/>
+            <a:off x="2816352" y="1607820"/>
+            <a:ext cx="1408176" cy="213360"/>
           </a:xfrm>
           <a:prstGeom prst="rect">
             <a:avLst/>
@@ -12364,7 +12366,7 @@
       </p:pic>
       <p:pic>
         <p:nvPicPr>
-          <p:cNvPr id="5" name="Image 2" descr="/Users/stefanmaier/Documents/GitHub/lexware-angebot-tool/presentation/assets/referenzen/03-elektro-stuerz.png">    </p:cNvPr>
+          <p:cNvPr id="5" name="Image 2" descr="/var/folders/hm/sgq6d80d0vq133k7n8dc9bnw0000gn/T/maiershirts-dzZNxb/ref-2.png">    </p:cNvPr>
           <p:cNvPicPr>
             <a:picLocks noChangeAspect="1"/>
           </p:cNvPicPr>
@@ -12374,13 +12376,14 @@
         </p:nvPicPr>
         <p:blipFill>
           <a:blip r:embed="rId3"/>
-          <a:srcRect l="0" r="0" t="0" b="0"/>
-          <a:stretch/>
+          <a:stretch>
+            <a:fillRect/>
+          </a:stretch>
         </p:blipFill>
         <p:spPr>
           <a:xfrm>
-            <a:off x="4773168" y="1344168"/>
-            <a:ext cx="1444752" cy="484632"/>
+            <a:off x="4919472" y="1562265"/>
+            <a:ext cx="1408176" cy="304470"/>
           </a:xfrm>
           <a:prstGeom prst="rect">
             <a:avLst/>
@@ -12389,7 +12392,7 @@
       </p:pic>
       <p:pic>
         <p:nvPicPr>
-          <p:cNvPr id="6" name="Image 3" descr="/Users/stefanmaier/Documents/GitHub/lexware-angebot-tool/presentation/assets/referenzen/04-dav-tuebingen.jpg">    </p:cNvPr>
+          <p:cNvPr id="6" name="Image 3" descr="/var/folders/hm/sgq6d80d0vq133k7n8dc9bnw0000gn/T/maiershirts-dzZNxb/ref-3.png">    </p:cNvPr>
           <p:cNvPicPr>
             <a:picLocks noChangeAspect="1"/>
           </p:cNvPicPr>
@@ -12399,13 +12402,14 @@
         </p:nvPicPr>
         <p:blipFill>
           <a:blip r:embed="rId4"/>
-          <a:srcRect l="0" r="0" t="0" b="0"/>
-          <a:stretch/>
+          <a:stretch>
+            <a:fillRect/>
+          </a:stretch>
         </p:blipFill>
         <p:spPr>
           <a:xfrm>
-            <a:off x="6876288" y="1344168"/>
-            <a:ext cx="1444752" cy="484632"/>
+            <a:off x="7341461" y="1490472"/>
+            <a:ext cx="770438" cy="448056"/>
           </a:xfrm>
           <a:prstGeom prst="rect">
             <a:avLst/>
@@ -12414,7 +12418,7 @@
       </p:pic>
       <p:pic>
         <p:nvPicPr>
-          <p:cNvPr id="7" name="Image 4" descr="/Users/stefanmaier/Documents/GitHub/lexware-angebot-tool/presentation/assets/referenzen/05-rox-herrenberg.jpg">    </p:cNvPr>
+          <p:cNvPr id="7" name="Image 4" descr="/var/folders/hm/sgq6d80d0vq133k7n8dc9bnw0000gn/T/maiershirts-dzZNxb/ref-4.png">    </p:cNvPr>
           <p:cNvPicPr>
             <a:picLocks noChangeAspect="1"/>
           </p:cNvPicPr>
@@ -12424,13 +12428,14 @@
         </p:nvPicPr>
         <p:blipFill>
           <a:blip r:embed="rId5"/>
-          <a:srcRect l="0" r="0" t="0" b="0"/>
-          <a:stretch/>
+          <a:stretch>
+            <a:fillRect/>
+          </a:stretch>
         </p:blipFill>
         <p:spPr>
           <a:xfrm>
-            <a:off x="566928" y="2441448"/>
-            <a:ext cx="1444752" cy="484632"/>
+            <a:off x="972998" y="2587752"/>
+            <a:ext cx="888644" cy="448056"/>
           </a:xfrm>
           <a:prstGeom prst="rect">
             <a:avLst/>
@@ -12439,7 +12444,7 @@
       </p:pic>
       <p:pic>
         <p:nvPicPr>
-          <p:cNvPr id="8" name="Image 5" descr="/Users/stefanmaier/Documents/GitHub/lexware-angebot-tool/presentation/assets/referenzen/06-paarsch-schaefer.png">    </p:cNvPr>
+          <p:cNvPr id="8" name="Image 5" descr="/var/folders/hm/sgq6d80d0vq133k7n8dc9bnw0000gn/T/maiershirts-dzZNxb/ref-5.png">    </p:cNvPr>
           <p:cNvPicPr>
             <a:picLocks noChangeAspect="1"/>
           </p:cNvPicPr>
@@ -12449,13 +12454,14 @@
         </p:nvPicPr>
         <p:blipFill>
           <a:blip r:embed="rId6"/>
-          <a:srcRect l="0" r="0" t="0" b="0"/>
-          <a:stretch/>
+          <a:stretch>
+            <a:fillRect/>
+          </a:stretch>
         </p:blipFill>
         <p:spPr>
           <a:xfrm>
-            <a:off x="2670048" y="2441448"/>
-            <a:ext cx="1444752" cy="484632"/>
+            <a:off x="2967838" y="2587752"/>
+            <a:ext cx="1105205" cy="448056"/>
           </a:xfrm>
           <a:prstGeom prst="rect">
             <a:avLst/>
@@ -12464,7 +12470,7 @@
       </p:pic>
       <p:pic>
         <p:nvPicPr>
-          <p:cNvPr id="9" name="Image 6" descr="/Users/stefanmaier/Documents/GitHub/lexware-angebot-tool/presentation/assets/referenzen/07-suedweststrom.png">    </p:cNvPr>
+          <p:cNvPr id="9" name="Image 6" descr="/var/folders/hm/sgq6d80d0vq133k7n8dc9bnw0000gn/T/maiershirts-dzZNxb/ref-6.png">    </p:cNvPr>
           <p:cNvPicPr>
             <a:picLocks noChangeAspect="1"/>
           </p:cNvPicPr>
@@ -12474,13 +12480,14 @@
         </p:nvPicPr>
         <p:blipFill>
           <a:blip r:embed="rId7"/>
-          <a:srcRect l="0" r="0" t="0" b="0"/>
-          <a:stretch/>
+          <a:stretch>
+            <a:fillRect/>
+          </a:stretch>
         </p:blipFill>
         <p:spPr>
           <a:xfrm>
-            <a:off x="4773168" y="2441448"/>
-            <a:ext cx="1444752" cy="484632"/>
+            <a:off x="5296660" y="2587752"/>
+            <a:ext cx="653799" cy="448056"/>
           </a:xfrm>
           <a:prstGeom prst="rect">
             <a:avLst/>
@@ -12489,7 +12496,7 @@
       </p:pic>
       <p:pic>
         <p:nvPicPr>
-          <p:cNvPr id="10" name="Image 7" descr="/Users/stefanmaier/Documents/GitHub/lexware-angebot-tool/presentation/assets/referenzen/08-gottlieb-binder.png">    </p:cNvPr>
+          <p:cNvPr id="10" name="Image 7" descr="/var/folders/hm/sgq6d80d0vq133k7n8dc9bnw0000gn/T/maiershirts-dzZNxb/ref-7.png">    </p:cNvPr>
           <p:cNvPicPr>
             <a:picLocks noChangeAspect="1"/>
           </p:cNvPicPr>
@@ -12499,13 +12506,14 @@
         </p:nvPicPr>
         <p:blipFill>
           <a:blip r:embed="rId8"/>
-          <a:srcRect l="0" r="0" t="0" b="0"/>
-          <a:stretch/>
+          <a:stretch>
+            <a:fillRect/>
+          </a:stretch>
         </p:blipFill>
         <p:spPr>
           <a:xfrm>
-            <a:off x="6876288" y="2441448"/>
-            <a:ext cx="1444752" cy="484632"/>
+            <a:off x="7067042" y="2587752"/>
+            <a:ext cx="1319276" cy="448056"/>
           </a:xfrm>
           <a:prstGeom prst="rect">
             <a:avLst/>
@@ -12514,7 +12522,7 @@
       </p:pic>
       <p:pic>
         <p:nvPicPr>
-          <p:cNvPr id="11" name="Image 8" descr="/Users/stefanmaier/Documents/GitHub/lexware-angebot-tool/presentation/assets/referenzen/09-emin-isic.png">    </p:cNvPr>
+          <p:cNvPr id="11" name="Image 8" descr="/var/folders/hm/sgq6d80d0vq133k7n8dc9bnw0000gn/T/maiershirts-dzZNxb/ref-8.png">    </p:cNvPr>
           <p:cNvPicPr>
             <a:picLocks noChangeAspect="1"/>
           </p:cNvPicPr>
@@ -12524,13 +12532,14 @@
         </p:nvPicPr>
         <p:blipFill>
           <a:blip r:embed="rId9"/>
-          <a:srcRect l="0" r="0" t="0" b="0"/>
-          <a:stretch/>
+          <a:stretch>
+            <a:fillRect/>
+          </a:stretch>
         </p:blipFill>
         <p:spPr>
           <a:xfrm>
-            <a:off x="566928" y="3538728"/>
-            <a:ext cx="1444752" cy="484632"/>
+            <a:off x="1150941" y="3685032"/>
+            <a:ext cx="532758" cy="448056"/>
           </a:xfrm>
           <a:prstGeom prst="rect">
             <a:avLst/>
@@ -12539,7 +12548,7 @@
       </p:pic>
       <p:pic>
         <p:nvPicPr>
-          <p:cNvPr id="12" name="Image 9" descr="/Users/stefanmaier/Documents/GitHub/lexware-angebot-tool/presentation/assets/referenzen/10-karnick.png">    </p:cNvPr>
+          <p:cNvPr id="12" name="Image 9" descr="/var/folders/hm/sgq6d80d0vq133k7n8dc9bnw0000gn/T/maiershirts-dzZNxb/ref-9.png">    </p:cNvPr>
           <p:cNvPicPr>
             <a:picLocks noChangeAspect="1"/>
           </p:cNvPicPr>
@@ -12549,13 +12558,14 @@
         </p:nvPicPr>
         <p:blipFill>
           <a:blip r:embed="rId10"/>
-          <a:srcRect l="0" r="0" t="0" b="0"/>
-          <a:stretch/>
+          <a:stretch>
+            <a:fillRect/>
+          </a:stretch>
         </p:blipFill>
         <p:spPr>
           <a:xfrm>
-            <a:off x="2670048" y="3538728"/>
-            <a:ext cx="1444752" cy="484632"/>
+            <a:off x="3017937" y="3685032"/>
+            <a:ext cx="1005007" cy="448056"/>
           </a:xfrm>
           <a:prstGeom prst="rect">
             <a:avLst/>
@@ -12564,7 +12574,7 @@
       </p:pic>
       <p:pic>
         <p:nvPicPr>
-          <p:cNvPr id="13" name="Image 10" descr="/var/folders/hm/sgq6d80d0vq133k7n8dc9bnw0000gn/T/maiershirts-xNybMV/ph-logo-446x194.png">    </p:cNvPr>
+          <p:cNvPr id="13" name="Image 10" descr="/var/folders/hm/sgq6d80d0vq133k7n8dc9bnw0000gn/T/maiershirts-dzZNxb/ref-10.png">    </p:cNvPr>
           <p:cNvPicPr>
             <a:picLocks noChangeAspect="1"/>
           </p:cNvPicPr>
@@ -12580,8 +12590,8 @@
         </p:blipFill>
         <p:spPr>
           <a:xfrm>
-            <a:off x="4773168" y="3538728"/>
-            <a:ext cx="1700784" cy="740664"/>
+            <a:off x="5179067" y="3685032"/>
+            <a:ext cx="888987" cy="448056"/>
           </a:xfrm>
           <a:prstGeom prst="rect">
             <a:avLst/>
@@ -12590,7 +12600,7 @@
       </p:pic>
       <p:pic>
         <p:nvPicPr>
-          <p:cNvPr id="14" name="Image 11" descr="/var/folders/hm/sgq6d80d0vq133k7n8dc9bnw0000gn/T/maiershirts-xNybMV/ph-logo-446x194.png">    </p:cNvPr>
+          <p:cNvPr id="14" name="Image 11" descr="/var/folders/hm/sgq6d80d0vq133k7n8dc9bnw0000gn/T/maiershirts-dzZNxb/ph-logo-446x194.png">    </p:cNvPr>
           <p:cNvPicPr>
             <a:picLocks noChangeAspect="1"/>
           </p:cNvPicPr>
@@ -12730,7 +12740,7 @@
       </p:sp>
       <p:pic>
         <p:nvPicPr>
-          <p:cNvPr id="3" name="Image 0" descr="/var/folders/hm/sgq6d80d0vq133k7n8dc9bnw0000gn/T/maiershirts-xNybMV/ph-foto-1056x840.png">    </p:cNvPr>
+          <p:cNvPr id="3" name="Image 0" descr="/var/folders/hm/sgq6d80d0vq133k7n8dc9bnw0000gn/T/maiershirts-dzZNxb/ph-foto-1056x840.png">    </p:cNvPr>
           <p:cNvPicPr>
             <a:picLocks noChangeAspect="1"/>
           </p:cNvPicPr>
@@ -13542,7 +13552,7 @@
       </p:sp>
       <p:pic>
         <p:nvPicPr>
-          <p:cNvPr id="4" name="Image 0" descr="/var/folders/hm/sgq6d80d0vq133k7n8dc9bnw0000gn/T/maiershirts-xNybMV/ph-portrait-252x252.png">    </p:cNvPr>
+          <p:cNvPr id="4" name="Image 0" descr="/var/folders/hm/sgq6d80d0vq133k7n8dc9bnw0000gn/T/maiershirts-dzZNxb/ph-portrait-252x252.png">    </p:cNvPr>
           <p:cNvPicPr>
             <a:picLocks noChangeAspect="1"/>
           </p:cNvPicPr>
@@ -13751,7 +13761,7 @@
       </p:sp>
       <p:pic>
         <p:nvPicPr>
-          <p:cNvPr id="9" name="Image 1" descr="/var/folders/hm/sgq6d80d0vq133k7n8dc9bnw0000gn/T/maiershirts-xNybMV/ph-qr-240x240.png">    </p:cNvPr>
+          <p:cNvPr id="9" name="Image 1" descr="/var/folders/hm/sgq6d80d0vq133k7n8dc9bnw0000gn/T/maiershirts-dzZNxb/ph-qr-240x240.png">    </p:cNvPr>
           <p:cNvPicPr>
             <a:picLocks noChangeAspect="1"/>
           </p:cNvPicPr>
@@ -15167,7 +15177,7 @@
       </p:grpSpPr>
       <p:pic>
         <p:nvPicPr>
-          <p:cNvPr id="2" name="Image 0" descr="/var/folders/hm/sgq6d80d0vq133k7n8dc9bnw0000gn/T/maiershirts-xNybMV/ph-foto-2400x1008.png">    </p:cNvPr>
+          <p:cNvPr id="2" name="Image 0" descr="/var/folders/hm/sgq6d80d0vq133k7n8dc9bnw0000gn/T/maiershirts-dzZNxb/ph-foto-2400x1008.png">    </p:cNvPr>
           <p:cNvPicPr>
             <a:picLocks noChangeAspect="1"/>
           </p:cNvPicPr>
@@ -16325,7 +16335,7 @@
       </p:sp>
       <p:pic>
         <p:nvPicPr>
-          <p:cNvPr id="3" name="Image 0" descr="/var/folders/hm/sgq6d80d0vq133k7n8dc9bnw0000gn/T/maiershirts-xNybMV/ph-foto-696x456.png">    </p:cNvPr>
+          <p:cNvPr id="3" name="Image 0" descr="/var/folders/hm/sgq6d80d0vq133k7n8dc9bnw0000gn/T/maiershirts-dzZNxb/ph-foto-696x456.png">    </p:cNvPr>
           <p:cNvPicPr>
             <a:picLocks noChangeAspect="1"/>
           </p:cNvPicPr>
@@ -16495,7 +16505,7 @@
       </p:sp>
       <p:pic>
         <p:nvPicPr>
-          <p:cNvPr id="7" name="Image 1" descr="/var/folders/hm/sgq6d80d0vq133k7n8dc9bnw0000gn/T/maiershirts-xNybMV/ph-foto-696x456.png">    </p:cNvPr>
+          <p:cNvPr id="7" name="Image 1" descr="/var/folders/hm/sgq6d80d0vq133k7n8dc9bnw0000gn/T/maiershirts-dzZNxb/ph-foto-696x456.png">    </p:cNvPr>
           <p:cNvPicPr>
             <a:picLocks noChangeAspect="1"/>
           </p:cNvPicPr>
@@ -16665,7 +16675,7 @@
       </p:sp>
       <p:pic>
         <p:nvPicPr>
-          <p:cNvPr id="11" name="Image 2" descr="/var/folders/hm/sgq6d80d0vq133k7n8dc9bnw0000gn/T/maiershirts-xNybMV/ph-foto-696x456.png">    </p:cNvPr>
+          <p:cNvPr id="11" name="Image 2" descr="/var/folders/hm/sgq6d80d0vq133k7n8dc9bnw0000gn/T/maiershirts-dzZNxb/ph-foto-696x456.png">    </p:cNvPr>
           <p:cNvPicPr>
             <a:picLocks noChangeAspect="1"/>
           </p:cNvPicPr>

--- a/presentation/dist/Maiershirts_Master.pptx
+++ b/presentation/dist/Maiershirts_Master.pptx
@@ -20,9 +20,10 @@
     <p:sldId id="268" r:id="rId14"/>
     <p:sldId id="269" r:id="rId15"/>
     <p:sldId id="270" r:id="rId16"/>
+    <p:sldId id="271" r:id="rId17"/>
   </p:sldIdLst>
   <p:notesMasterIdLst>
-    <p:notesMasterId r:id="rId17"/>
+    <p:notesMasterId r:id="rId18"/>
   </p:notesMasterIdLst>
   <p:sldSz cx="9144000" cy="5143500"/>
   <p:notesSz cx="5143500" cy="9144000"/>
@@ -940,7 +941,7 @@
           <a:p>
             <a:r>
               <a:rPr lang="en-US" dirty="0"/>
-              <a:t>Layout MS_REFERENZEN: zwölf Logo-Felder. 11 Logo(s) aus assets/referenzen eingesetzt. Logo per Klick auf das Platzhalterbild einsetzen; bei Beschnitt: Bildformat → Zuschneiden → Anpassen.</a:t>
+              <a:t>Layout MS_REFERENZEN: 12 Logo-Felder. 9 Logo(s) aus assets/referenzen/unternehmen eingesetzt. Logo per Klick auf das Platzhalterbild einsetzen; bei Beschnitt: Bildformat → Zuschneiden → Anpassen.</a:t>
             </a:r>
             <a:endParaRPr lang="en-US" dirty="0"/>
           </a:p>
@@ -1028,7 +1029,7 @@
           <a:p>
             <a:r>
               <a:rPr lang="en-US" dirty="0"/>
-              <a:t>Layout MS_BILD: Foto links, Textkörper rechts.</a:t>
+              <a:t>Layout MS_REFERENZEN_WAPPEN: 8 Logo-Felder. 7 Logo(s) aus assets/referenzen/vereine eingesetzt. Logo per Klick auf das Platzhalterbild einsetzen; bei Beschnitt: Bildformat → Zuschneiden → Anpassen.</a:t>
             </a:r>
             <a:endParaRPr lang="en-US" dirty="0"/>
           </a:p>
@@ -1116,7 +1117,7 @@
           <a:p>
             <a:r>
               <a:rPr lang="en-US" dirty="0"/>
-              <a:t>Layout MS_FREI mit nativem Säulendiagramm links und Kernaussage rechts.</a:t>
+              <a:t>Layout MS_BILD: Foto links, Textkörper rechts.</a:t>
             </a:r>
             <a:endParaRPr lang="en-US" dirty="0"/>
           </a:p>
@@ -1204,7 +1205,7 @@
           <a:p>
             <a:r>
               <a:rPr lang="en-US" dirty="0"/>
-              <a:t>Layout MS_INHALT: Titel und Textkörper mit Aufzählung.</a:t>
+              <a:t>Layout MS_FREI mit nativem Säulendiagramm links und Kernaussage rechts.</a:t>
             </a:r>
             <a:endParaRPr lang="en-US" dirty="0"/>
           </a:p>
@@ -1292,7 +1293,7 @@
           <a:p>
             <a:r>
               <a:rPr lang="en-US" dirty="0"/>
-              <a:t>Layout MS_ABSCHLUSS: Handlungsaufforderung, Ansprechpartner mit Foto, nächster Schritt mit Termin, QR-Code. Kontaktdaten sind Platzhalter.</a:t>
+              <a:t>Layout MS_INHALT: Titel und Textkörper mit Aufzählung.</a:t>
             </a:r>
             <a:endParaRPr lang="en-US" dirty="0"/>
           </a:p>
@@ -1316,6 +1317,94 @@
             <a:fld id="{F7021451-1387-4CA6-816F-3879F97B5CBC}" type="slidenum">
               <a:rPr lang="en-US"/>
               <a:t>15</a:t>
+            </a:fld>
+            <a:endParaRPr lang="en-US"/>
+          </a:p>
+        </p:txBody>
+      </p:sp>
+    </p:spTree>
+    <p:extLst>
+      <p:ext uri="{BB962C8B-B14F-4D97-AF65-F5344CB8AC3E}">
+        <p14:creationId xmlns:p14="http://schemas.microsoft.com/office/powerpoint/2010/main" val="1024086991"/>
+      </p:ext>
+    </p:extLst>
+  </p:cSld>
+  <p:clrMapOvr>
+    <a:masterClrMapping/>
+  </p:clrMapOvr>
+</p:notes>
+</file>
+
+<file path=ppt/notesSlides/notesSlide16.xml><?xml version="1.0" encoding="utf-8"?>
+<p:notes xmlns:a="http://schemas.openxmlformats.org/drawingml/2006/main" xmlns:r="http://schemas.openxmlformats.org/officeDocument/2006/relationships" xmlns:p="http://schemas.openxmlformats.org/presentationml/2006/main">
+  <p:cSld>
+    <p:spTree>
+      <p:nvGrpSpPr>
+        <p:cNvPr id="1" name=""/>
+        <p:cNvGrpSpPr/>
+        <p:nvPr/>
+      </p:nvGrpSpPr>
+      <p:grpSpPr>
+        <a:xfrm>
+          <a:off x="0" y="0"/>
+          <a:ext cx="0" cy="0"/>
+          <a:chOff x="0" y="0"/>
+          <a:chExt cx="0" cy="0"/>
+        </a:xfrm>
+      </p:grpSpPr>
+      <p:sp>
+        <p:nvSpPr>
+          <p:cNvPr id="2" name="Slide Image Placeholder 1"/>
+          <p:cNvSpPr>
+            <a:spLocks noGrp="1" noRot="1" noChangeAspect="1"/>
+          </p:cNvSpPr>
+          <p:nvPr>
+            <p:ph type="sldImg"/>
+          </p:nvPr>
+        </p:nvSpPr>
+        <p:spPr/>
+      </p:sp>
+      <p:sp>
+        <p:nvSpPr>
+          <p:cNvPr id="3" name="Notes Placeholder 2"/>
+          <p:cNvSpPr>
+            <a:spLocks noGrp="1"/>
+          </p:cNvSpPr>
+          <p:nvPr>
+            <p:ph type="body" idx="1"/>
+          </p:nvPr>
+        </p:nvSpPr>
+        <p:spPr/>
+        <p:txBody>
+          <a:bodyPr/>
+          <a:lstStyle/>
+          <a:p>
+            <a:r>
+              <a:rPr lang="en-US" dirty="0"/>
+              <a:t>Layout MS_ABSCHLUSS: Handlungsaufforderung, Ansprechpartner mit Foto, nächster Schritt mit Termin, QR-Code. Kontaktdaten sind Platzhalter.</a:t>
+            </a:r>
+            <a:endParaRPr lang="en-US" dirty="0"/>
+          </a:p>
+        </p:txBody>
+      </p:sp>
+      <p:sp>
+        <p:nvSpPr>
+          <p:cNvPr id="4" name="Slide Number Placeholder 3"/>
+          <p:cNvSpPr>
+            <a:spLocks noGrp="1"/>
+          </p:cNvSpPr>
+          <p:nvPr>
+            <p:ph type="sldNum" sz="quarter" idx="10"/>
+          </p:nvPr>
+        </p:nvSpPr>
+        <p:spPr/>
+        <p:txBody>
+          <a:bodyPr/>
+          <a:lstStyle/>
+          <a:p>
+            <a:fld id="{F7021451-1387-4CA6-816F-3879F97B5CBC}" type="slidenum">
+              <a:rPr lang="en-US"/>
+              <a:t>16</a:t>
             </a:fld>
             <a:endParaRPr lang="en-US"/>
           </a:p>
@@ -6815,6 +6904,666 @@
 
 <file path=ppt/slideLayouts/slideLayout16.xml><?xml version="1.0" encoding="utf-8"?>
 <p:sldLayout xmlns:a="http://schemas.openxmlformats.org/drawingml/2006/main" xmlns:r="http://schemas.openxmlformats.org/officeDocument/2006/relationships" xmlns:p="http://schemas.openxmlformats.org/presentationml/2006/main" preserve="1">
+  <p:cSld name="MS_REFERENZEN_WAPPEN">
+    <p:bg>
+      <p:bgPr>
+        <a:blipFill dpi="0" rotWithShape="1">
+          <a:blip r:embed="rId2">
+            <a:lum/>
+          </a:blip>
+          <a:srcRect/>
+          <a:stretch>
+            <a:fillRect/>
+          </a:stretch>
+        </a:blipFill>
+        <a:effectLst/>
+      </p:bgPr>
+    </p:bg>
+    <p:spTree>
+      <p:nvGrpSpPr>
+        <p:cNvPr id="1" name=""/>
+        <p:cNvGrpSpPr/>
+        <p:nvPr/>
+      </p:nvGrpSpPr>
+      <p:grpSpPr>
+        <a:xfrm>
+          <a:off x="0" y="0"/>
+          <a:ext cx="0" cy="0"/>
+          <a:chOff x="0" y="0"/>
+          <a:chExt cx="0" cy="0"/>
+        </a:xfrm>
+      </p:grpSpPr>
+      <p:pic>
+        <p:nvPicPr>
+          <p:cNvPr id="2" name="Image 0" descr="/Users/stefanmaier/Documents/GitHub/lexware-angebot-tool/presentation/assets/logo-dark.png">    </p:cNvPr>
+          <p:cNvPicPr>
+            <a:picLocks noChangeAspect="1"/>
+          </p:cNvPicPr>
+          <p:nvPr/>
+        </p:nvPicPr>
+        <p:blipFill>
+          <a:blip r:embed="rId1"/>
+          <a:srcRect l="0" r="0" t="0" b="0"/>
+          <a:stretch/>
+        </p:blipFill>
+        <p:spPr>
+          <a:xfrm>
+            <a:off x="7818120" y="365760"/>
+            <a:ext cx="868680" cy="457200"/>
+          </a:xfrm>
+          <a:prstGeom prst="rect">
+            <a:avLst/>
+          </a:prstGeom>
+        </p:spPr>
+      </p:pic>
+      <p:sp>
+        <p:nvSpPr>
+          <p:cNvPr id="3" name="Text 0"/>
+          <p:cNvSpPr/>
+          <p:nvPr>
+            <p:ph idx="101" type="title" hasCustomPrompt="1"/>
+          </p:nvPr>
+        </p:nvSpPr>
+        <p:spPr>
+          <a:xfrm>
+            <a:off x="457200" y="320040"/>
+            <a:ext cx="7132320" cy="640080"/>
+          </a:xfrm>
+          <a:prstGeom prst="rect">
+            <a:avLst/>
+          </a:prstGeom>
+          <a:noFill/>
+          <a:ln/>
+        </p:spPr>
+        <p:txBody>
+          <a:bodyPr wrap="square" rtlCol="0"/>
+          <a:lstStyle>
+            <a:lvl1pPr algn="l" indent="0" marL="0">
+              <a:buNone/>
+              <a:defRPr lang="en-US" sz="2800" b="1" dirty="0">
+                <a:solidFill>
+                  <a:srgbClr val="0F0F0F"/>
+                </a:solidFill>
+                <a:latin typeface="Inter" pitchFamily="34" charset="0"/>
+                <a:ea typeface="Inter" pitchFamily="34" charset="-122"/>
+                <a:cs typeface="Inter" pitchFamily="34" charset="-120"/>
+              </a:defRPr>
+            </a:lvl1pPr>
+          </a:lstStyle>
+          <a:p>
+            <a:pPr algn="l" indent="0" marL="0">
+              <a:buNone/>
+            </a:pPr>
+            <a:r>
+              <a:rPr lang="en-US" sz="2800" b="1" dirty="0">
+                <a:solidFill>
+                  <a:srgbClr val="0F0F0F"/>
+                </a:solidFill>
+                <a:latin typeface="Inter" pitchFamily="34" charset="0"/>
+                <a:ea typeface="Inter" pitchFamily="34" charset="-122"/>
+                <a:cs typeface="Inter" pitchFamily="34" charset="-120"/>
+              </a:rPr>
+              <a:t>Folientitel</a:t>
+            </a:r>
+            <a:endParaRPr lang="en-US" sz="2800" dirty="0"/>
+          </a:p>
+        </p:txBody>
+      </p:sp>
+      <p:sp>
+        <p:nvSpPr>
+          <p:cNvPr id="4" name="Text 0"/>
+          <p:cNvSpPr/>
+          <p:nvPr>
+            <p:ph idx="102" type="pic" hasCustomPrompt="1"/>
+          </p:nvPr>
+        </p:nvSpPr>
+        <p:spPr>
+          <a:xfrm>
+            <a:off x="566928" y="1344168"/>
+            <a:ext cx="1700784" cy="1243584"/>
+          </a:xfrm>
+          <a:prstGeom prst="rect">
+            <a:avLst/>
+          </a:prstGeom>
+          <a:noFill/>
+          <a:ln/>
+        </p:spPr>
+        <p:txBody>
+          <a:bodyPr wrap="square" rtlCol="0"/>
+          <a:lstStyle>
+            <a:lvl1pPr algn="ctr" indent="0" marL="0">
+              <a:buNone/>
+              <a:defRPr lang="en-US" sz="1200" dirty="0">
+                <a:solidFill>
+                  <a:srgbClr val="0F0F0F">
+                    <a:alpha val="60000"/>
+                  </a:srgbClr>
+                </a:solidFill>
+                <a:latin typeface="Inter" pitchFamily="34" charset="0"/>
+                <a:ea typeface="Inter" pitchFamily="34" charset="-122"/>
+                <a:cs typeface="Inter" pitchFamily="34" charset="-120"/>
+              </a:defRPr>
+            </a:lvl1pPr>
+          </a:lstStyle>
+          <a:p>
+            <a:pPr algn="ctr" indent="0" marL="0">
+              <a:buNone/>
+            </a:pPr>
+            <a:r>
+              <a:rPr lang="en-US" sz="1200" dirty="0">
+                <a:solidFill>
+                  <a:srgbClr val="0F0F0F">
+                    <a:alpha val="60000"/>
+                  </a:srgbClr>
+                </a:solidFill>
+                <a:latin typeface="Inter" pitchFamily="34" charset="0"/>
+                <a:ea typeface="Inter" pitchFamily="34" charset="-122"/>
+                <a:cs typeface="Inter" pitchFamily="34" charset="-120"/>
+              </a:rPr>
+              <a:t>Logo einfügen</a:t>
+            </a:r>
+            <a:endParaRPr lang="en-US" sz="1200" dirty="0"/>
+          </a:p>
+        </p:txBody>
+      </p:sp>
+      <p:sp>
+        <p:nvSpPr>
+          <p:cNvPr id="5" name="Text 0"/>
+          <p:cNvSpPr/>
+          <p:nvPr>
+            <p:ph idx="103" type="pic" hasCustomPrompt="1"/>
+          </p:nvPr>
+        </p:nvSpPr>
+        <p:spPr>
+          <a:xfrm>
+            <a:off x="2670048" y="1344168"/>
+            <a:ext cx="1700784" cy="1243584"/>
+          </a:xfrm>
+          <a:prstGeom prst="rect">
+            <a:avLst/>
+          </a:prstGeom>
+          <a:noFill/>
+          <a:ln/>
+        </p:spPr>
+        <p:txBody>
+          <a:bodyPr wrap="square" rtlCol="0"/>
+          <a:lstStyle>
+            <a:lvl1pPr algn="ctr" indent="0" marL="0">
+              <a:buNone/>
+              <a:defRPr lang="en-US" sz="1200" dirty="0">
+                <a:solidFill>
+                  <a:srgbClr val="0F0F0F">
+                    <a:alpha val="60000"/>
+                  </a:srgbClr>
+                </a:solidFill>
+                <a:latin typeface="Inter" pitchFamily="34" charset="0"/>
+                <a:ea typeface="Inter" pitchFamily="34" charset="-122"/>
+                <a:cs typeface="Inter" pitchFamily="34" charset="-120"/>
+              </a:defRPr>
+            </a:lvl1pPr>
+          </a:lstStyle>
+          <a:p>
+            <a:pPr algn="ctr" indent="0" marL="0">
+              <a:buNone/>
+            </a:pPr>
+            <a:r>
+              <a:rPr lang="en-US" sz="1200" dirty="0">
+                <a:solidFill>
+                  <a:srgbClr val="0F0F0F">
+                    <a:alpha val="60000"/>
+                  </a:srgbClr>
+                </a:solidFill>
+                <a:latin typeface="Inter" pitchFamily="34" charset="0"/>
+                <a:ea typeface="Inter" pitchFamily="34" charset="-122"/>
+                <a:cs typeface="Inter" pitchFamily="34" charset="-120"/>
+              </a:rPr>
+              <a:t>Logo einfügen</a:t>
+            </a:r>
+            <a:endParaRPr lang="en-US" sz="1200" dirty="0"/>
+          </a:p>
+        </p:txBody>
+      </p:sp>
+      <p:sp>
+        <p:nvSpPr>
+          <p:cNvPr id="6" name="Text 0"/>
+          <p:cNvSpPr/>
+          <p:nvPr>
+            <p:ph idx="104" type="pic" hasCustomPrompt="1"/>
+          </p:nvPr>
+        </p:nvSpPr>
+        <p:spPr>
+          <a:xfrm>
+            <a:off x="4773168" y="1344168"/>
+            <a:ext cx="1700784" cy="1243584"/>
+          </a:xfrm>
+          <a:prstGeom prst="rect">
+            <a:avLst/>
+          </a:prstGeom>
+          <a:noFill/>
+          <a:ln/>
+        </p:spPr>
+        <p:txBody>
+          <a:bodyPr wrap="square" rtlCol="0"/>
+          <a:lstStyle>
+            <a:lvl1pPr algn="ctr" indent="0" marL="0">
+              <a:buNone/>
+              <a:defRPr lang="en-US" sz="1200" dirty="0">
+                <a:solidFill>
+                  <a:srgbClr val="0F0F0F">
+                    <a:alpha val="60000"/>
+                  </a:srgbClr>
+                </a:solidFill>
+                <a:latin typeface="Inter" pitchFamily="34" charset="0"/>
+                <a:ea typeface="Inter" pitchFamily="34" charset="-122"/>
+                <a:cs typeface="Inter" pitchFamily="34" charset="-120"/>
+              </a:defRPr>
+            </a:lvl1pPr>
+          </a:lstStyle>
+          <a:p>
+            <a:pPr algn="ctr" indent="0" marL="0">
+              <a:buNone/>
+            </a:pPr>
+            <a:r>
+              <a:rPr lang="en-US" sz="1200" dirty="0">
+                <a:solidFill>
+                  <a:srgbClr val="0F0F0F">
+                    <a:alpha val="60000"/>
+                  </a:srgbClr>
+                </a:solidFill>
+                <a:latin typeface="Inter" pitchFamily="34" charset="0"/>
+                <a:ea typeface="Inter" pitchFamily="34" charset="-122"/>
+                <a:cs typeface="Inter" pitchFamily="34" charset="-120"/>
+              </a:rPr>
+              <a:t>Logo einfügen</a:t>
+            </a:r>
+            <a:endParaRPr lang="en-US" sz="1200" dirty="0"/>
+          </a:p>
+        </p:txBody>
+      </p:sp>
+      <p:sp>
+        <p:nvSpPr>
+          <p:cNvPr id="7" name="Text 0"/>
+          <p:cNvSpPr/>
+          <p:nvPr>
+            <p:ph idx="105" type="pic" hasCustomPrompt="1"/>
+          </p:nvPr>
+        </p:nvSpPr>
+        <p:spPr>
+          <a:xfrm>
+            <a:off x="6876288" y="1344168"/>
+            <a:ext cx="1700784" cy="1243584"/>
+          </a:xfrm>
+          <a:prstGeom prst="rect">
+            <a:avLst/>
+          </a:prstGeom>
+          <a:noFill/>
+          <a:ln/>
+        </p:spPr>
+        <p:txBody>
+          <a:bodyPr wrap="square" rtlCol="0"/>
+          <a:lstStyle>
+            <a:lvl1pPr algn="ctr" indent="0" marL="0">
+              <a:buNone/>
+              <a:defRPr lang="en-US" sz="1200" dirty="0">
+                <a:solidFill>
+                  <a:srgbClr val="0F0F0F">
+                    <a:alpha val="60000"/>
+                  </a:srgbClr>
+                </a:solidFill>
+                <a:latin typeface="Inter" pitchFamily="34" charset="0"/>
+                <a:ea typeface="Inter" pitchFamily="34" charset="-122"/>
+                <a:cs typeface="Inter" pitchFamily="34" charset="-120"/>
+              </a:defRPr>
+            </a:lvl1pPr>
+          </a:lstStyle>
+          <a:p>
+            <a:pPr algn="ctr" indent="0" marL="0">
+              <a:buNone/>
+            </a:pPr>
+            <a:r>
+              <a:rPr lang="en-US" sz="1200" dirty="0">
+                <a:solidFill>
+                  <a:srgbClr val="0F0F0F">
+                    <a:alpha val="60000"/>
+                  </a:srgbClr>
+                </a:solidFill>
+                <a:latin typeface="Inter" pitchFamily="34" charset="0"/>
+                <a:ea typeface="Inter" pitchFamily="34" charset="-122"/>
+                <a:cs typeface="Inter" pitchFamily="34" charset="-120"/>
+              </a:rPr>
+              <a:t>Logo einfügen</a:t>
+            </a:r>
+            <a:endParaRPr lang="en-US" sz="1200" dirty="0"/>
+          </a:p>
+        </p:txBody>
+      </p:sp>
+      <p:sp>
+        <p:nvSpPr>
+          <p:cNvPr id="8" name="Text 0"/>
+          <p:cNvSpPr/>
+          <p:nvPr>
+            <p:ph idx="106" type="pic" hasCustomPrompt="1"/>
+          </p:nvPr>
+        </p:nvSpPr>
+        <p:spPr>
+          <a:xfrm>
+            <a:off x="566928" y="2944368"/>
+            <a:ext cx="1700784" cy="1243584"/>
+          </a:xfrm>
+          <a:prstGeom prst="rect">
+            <a:avLst/>
+          </a:prstGeom>
+          <a:noFill/>
+          <a:ln/>
+        </p:spPr>
+        <p:txBody>
+          <a:bodyPr wrap="square" rtlCol="0"/>
+          <a:lstStyle>
+            <a:lvl1pPr algn="ctr" indent="0" marL="0">
+              <a:buNone/>
+              <a:defRPr lang="en-US" sz="1200" dirty="0">
+                <a:solidFill>
+                  <a:srgbClr val="0F0F0F">
+                    <a:alpha val="60000"/>
+                  </a:srgbClr>
+                </a:solidFill>
+                <a:latin typeface="Inter" pitchFamily="34" charset="0"/>
+                <a:ea typeface="Inter" pitchFamily="34" charset="-122"/>
+                <a:cs typeface="Inter" pitchFamily="34" charset="-120"/>
+              </a:defRPr>
+            </a:lvl1pPr>
+          </a:lstStyle>
+          <a:p>
+            <a:pPr algn="ctr" indent="0" marL="0">
+              <a:buNone/>
+            </a:pPr>
+            <a:r>
+              <a:rPr lang="en-US" sz="1200" dirty="0">
+                <a:solidFill>
+                  <a:srgbClr val="0F0F0F">
+                    <a:alpha val="60000"/>
+                  </a:srgbClr>
+                </a:solidFill>
+                <a:latin typeface="Inter" pitchFamily="34" charset="0"/>
+                <a:ea typeface="Inter" pitchFamily="34" charset="-122"/>
+                <a:cs typeface="Inter" pitchFamily="34" charset="-120"/>
+              </a:rPr>
+              <a:t>Logo einfügen</a:t>
+            </a:r>
+            <a:endParaRPr lang="en-US" sz="1200" dirty="0"/>
+          </a:p>
+        </p:txBody>
+      </p:sp>
+      <p:sp>
+        <p:nvSpPr>
+          <p:cNvPr id="9" name="Text 0"/>
+          <p:cNvSpPr/>
+          <p:nvPr>
+            <p:ph idx="107" type="pic" hasCustomPrompt="1"/>
+          </p:nvPr>
+        </p:nvSpPr>
+        <p:spPr>
+          <a:xfrm>
+            <a:off x="2670048" y="2944368"/>
+            <a:ext cx="1700784" cy="1243584"/>
+          </a:xfrm>
+          <a:prstGeom prst="rect">
+            <a:avLst/>
+          </a:prstGeom>
+          <a:noFill/>
+          <a:ln/>
+        </p:spPr>
+        <p:txBody>
+          <a:bodyPr wrap="square" rtlCol="0"/>
+          <a:lstStyle>
+            <a:lvl1pPr algn="ctr" indent="0" marL="0">
+              <a:buNone/>
+              <a:defRPr lang="en-US" sz="1200" dirty="0">
+                <a:solidFill>
+                  <a:srgbClr val="0F0F0F">
+                    <a:alpha val="60000"/>
+                  </a:srgbClr>
+                </a:solidFill>
+                <a:latin typeface="Inter" pitchFamily="34" charset="0"/>
+                <a:ea typeface="Inter" pitchFamily="34" charset="-122"/>
+                <a:cs typeface="Inter" pitchFamily="34" charset="-120"/>
+              </a:defRPr>
+            </a:lvl1pPr>
+          </a:lstStyle>
+          <a:p>
+            <a:pPr algn="ctr" indent="0" marL="0">
+              <a:buNone/>
+            </a:pPr>
+            <a:r>
+              <a:rPr lang="en-US" sz="1200" dirty="0">
+                <a:solidFill>
+                  <a:srgbClr val="0F0F0F">
+                    <a:alpha val="60000"/>
+                  </a:srgbClr>
+                </a:solidFill>
+                <a:latin typeface="Inter" pitchFamily="34" charset="0"/>
+                <a:ea typeface="Inter" pitchFamily="34" charset="-122"/>
+                <a:cs typeface="Inter" pitchFamily="34" charset="-120"/>
+              </a:rPr>
+              <a:t>Logo einfügen</a:t>
+            </a:r>
+            <a:endParaRPr lang="en-US" sz="1200" dirty="0"/>
+          </a:p>
+        </p:txBody>
+      </p:sp>
+      <p:sp>
+        <p:nvSpPr>
+          <p:cNvPr id="10" name="Text 0"/>
+          <p:cNvSpPr/>
+          <p:nvPr>
+            <p:ph idx="108" type="pic" hasCustomPrompt="1"/>
+          </p:nvPr>
+        </p:nvSpPr>
+        <p:spPr>
+          <a:xfrm>
+            <a:off x="4773168" y="2944368"/>
+            <a:ext cx="1700784" cy="1243584"/>
+          </a:xfrm>
+          <a:prstGeom prst="rect">
+            <a:avLst/>
+          </a:prstGeom>
+          <a:noFill/>
+          <a:ln/>
+        </p:spPr>
+        <p:txBody>
+          <a:bodyPr wrap="square" rtlCol="0"/>
+          <a:lstStyle>
+            <a:lvl1pPr algn="ctr" indent="0" marL="0">
+              <a:buNone/>
+              <a:defRPr lang="en-US" sz="1200" dirty="0">
+                <a:solidFill>
+                  <a:srgbClr val="0F0F0F">
+                    <a:alpha val="60000"/>
+                  </a:srgbClr>
+                </a:solidFill>
+                <a:latin typeface="Inter" pitchFamily="34" charset="0"/>
+                <a:ea typeface="Inter" pitchFamily="34" charset="-122"/>
+                <a:cs typeface="Inter" pitchFamily="34" charset="-120"/>
+              </a:defRPr>
+            </a:lvl1pPr>
+          </a:lstStyle>
+          <a:p>
+            <a:pPr algn="ctr" indent="0" marL="0">
+              <a:buNone/>
+            </a:pPr>
+            <a:r>
+              <a:rPr lang="en-US" sz="1200" dirty="0">
+                <a:solidFill>
+                  <a:srgbClr val="0F0F0F">
+                    <a:alpha val="60000"/>
+                  </a:srgbClr>
+                </a:solidFill>
+                <a:latin typeface="Inter" pitchFamily="34" charset="0"/>
+                <a:ea typeface="Inter" pitchFamily="34" charset="-122"/>
+                <a:cs typeface="Inter" pitchFamily="34" charset="-120"/>
+              </a:rPr>
+              <a:t>Logo einfügen</a:t>
+            </a:r>
+            <a:endParaRPr lang="en-US" sz="1200" dirty="0"/>
+          </a:p>
+        </p:txBody>
+      </p:sp>
+      <p:sp>
+        <p:nvSpPr>
+          <p:cNvPr id="11" name="Text 0"/>
+          <p:cNvSpPr/>
+          <p:nvPr>
+            <p:ph idx="109" type="pic" hasCustomPrompt="1"/>
+          </p:nvPr>
+        </p:nvSpPr>
+        <p:spPr>
+          <a:xfrm>
+            <a:off x="6876288" y="2944368"/>
+            <a:ext cx="1700784" cy="1243584"/>
+          </a:xfrm>
+          <a:prstGeom prst="rect">
+            <a:avLst/>
+          </a:prstGeom>
+          <a:noFill/>
+          <a:ln/>
+        </p:spPr>
+        <p:txBody>
+          <a:bodyPr wrap="square" rtlCol="0"/>
+          <a:lstStyle>
+            <a:lvl1pPr algn="ctr" indent="0" marL="0">
+              <a:buNone/>
+              <a:defRPr lang="en-US" sz="1200" dirty="0">
+                <a:solidFill>
+                  <a:srgbClr val="0F0F0F">
+                    <a:alpha val="60000"/>
+                  </a:srgbClr>
+                </a:solidFill>
+                <a:latin typeface="Inter" pitchFamily="34" charset="0"/>
+                <a:ea typeface="Inter" pitchFamily="34" charset="-122"/>
+                <a:cs typeface="Inter" pitchFamily="34" charset="-120"/>
+              </a:defRPr>
+            </a:lvl1pPr>
+          </a:lstStyle>
+          <a:p>
+            <a:pPr algn="ctr" indent="0" marL="0">
+              <a:buNone/>
+            </a:pPr>
+            <a:r>
+              <a:rPr lang="en-US" sz="1200" dirty="0">
+                <a:solidFill>
+                  <a:srgbClr val="0F0F0F">
+                    <a:alpha val="60000"/>
+                  </a:srgbClr>
+                </a:solidFill>
+                <a:latin typeface="Inter" pitchFamily="34" charset="0"/>
+                <a:ea typeface="Inter" pitchFamily="34" charset="-122"/>
+                <a:cs typeface="Inter" pitchFamily="34" charset="-120"/>
+              </a:rPr>
+              <a:t>Logo einfügen</a:t>
+            </a:r>
+            <a:endParaRPr lang="en-US" sz="1200" dirty="0"/>
+          </a:p>
+        </p:txBody>
+      </p:sp>
+      <p:sp>
+        <p:nvSpPr>
+          <p:cNvPr id="12" name="Text 0"/>
+          <p:cNvSpPr/>
+          <p:nvPr/>
+        </p:nvSpPr>
+        <p:spPr>
+          <a:xfrm>
+            <a:off x="457200" y="4709160"/>
+            <a:ext cx="2743200" cy="274320"/>
+          </a:xfrm>
+          <a:prstGeom prst="rect">
+            <a:avLst/>
+          </a:prstGeom>
+          <a:noFill/>
+          <a:ln/>
+        </p:spPr>
+        <p:txBody>
+          <a:bodyPr wrap="square" lIns="0" tIns="0" rIns="0" bIns="0" rtlCol="0" anchor="ctr"/>
+          <a:lstStyle/>
+          <a:p>
+            <a:pPr indent="0" marL="0">
+              <a:buNone/>
+            </a:pPr>
+            <a:r>
+              <a:rPr lang="en-US" sz="1000" dirty="0">
+                <a:solidFill>
+                  <a:srgbClr val="0F0F0F">
+                    <a:alpha val="60000"/>
+                  </a:srgbClr>
+                </a:solidFill>
+                <a:latin typeface="Inter" pitchFamily="34" charset="0"/>
+                <a:ea typeface="Inter" pitchFamily="34" charset="-122"/>
+                <a:cs typeface="Inter" pitchFamily="34" charset="-120"/>
+              </a:rPr>
+              <a:t>maiershirts.de</a:t>
+            </a:r>
+            <a:endParaRPr lang="en-US" sz="1000" dirty="0"/>
+          </a:p>
+        </p:txBody>
+      </p:sp>
+      <p:sp>
+        <p:nvSpPr>
+          <p:cNvPr id="25" name="Slide Number Placeholder 0"/>
+          <p:cNvSpPr>
+            <a:spLocks noGrp="1"/>
+          </p:cNvSpPr>
+          <p:nvPr>
+            <p:ph type="sldNum" sz="quarter" idx="4294967295"/>
+          </p:nvPr>
+        </p:nvSpPr>
+        <p:spPr>
+          <a:xfrm>
+            <a:off x="8229600" y="4709160"/>
+            <a:ext cx="457200" cy="274320"/>
+          </a:xfrm>
+          <a:prstGeom prst="rect">
+            <a:avLst/>
+          </a:prstGeom>
+          <a:extLst>
+            <a:ext uri="{C572A759-6A51-4108-AA02-DFA0A04FC94B}">
+              <ma14:wrappingTextBoxFlag xmlns:ma14="http://schemas.microsoft.com/office/mac/drawingml/2011/main" val="0"/>
+            </a:ext>
+          </a:extLst>
+        </p:spPr>
+        <p:txBody>
+          <a:bodyPr lIns="0" tIns="0" rIns="0" bIns="0"/>
+          <a:lstStyle>
+            <a:lvl1pPr>
+              <a:defRPr sz="1000">
+                <a:solidFill>
+                  <a:srgbClr val="0F0F0F"/>
+                </a:solidFill>
+                <a:latin typeface="Inter"/>
+                <a:ea typeface="Inter"/>
+                <a:cs typeface="Inter"/>
+              </a:defRPr>
+            </a:lvl1pPr>
+          </a:lstStyle>
+          <a:p>
+            <a:pPr algn="r"/>
+            <a:fld id="{F7021451-1387-4CA6-816F-3879F97B5CBC}" type="slidenum">
+              <a:rPr b="0" lang="en-US"/>
+              <a:t>1016</a:t>
+            </a:fld>
+            <a:endParaRPr lang="en-US"/>
+          </a:p>
+        </p:txBody>
+      </p:sp>
+    </p:spTree>
+  </p:cSld>
+  <p:clrMapOvr>
+    <a:masterClrMapping/>
+  </p:clrMapOvr>
+</p:sldLayout>
+</file>
+
+<file path=ppt/slideLayouts/slideLayout17.xml><?xml version="1.0" encoding="utf-8"?>
+<p:sldLayout xmlns:a="http://schemas.openxmlformats.org/drawingml/2006/main" xmlns:r="http://schemas.openxmlformats.org/officeDocument/2006/relationships" xmlns:p="http://schemas.openxmlformats.org/presentationml/2006/main" preserve="1">
   <p:cSld name="MS_ABSCHLUSS">
     <p:bg>
       <p:bgPr>
@@ -9474,6 +10223,7 @@
     <p:sldLayoutId id="2147483662" r:id="rId14"/>
     <p:sldLayoutId id="2147483663" r:id="rId15"/>
     <p:sldLayoutId id="2147483664" r:id="rId16"/>
+    <p:sldLayoutId id="2147483665" r:id="rId17"/>
   </p:sldLayoutIdLst>
   <p:hf sldNum="0" hdr="0" ftr="0" dt="0"/>
   <p:txStyles>
@@ -12306,7 +13056,7 @@
                 <a:ea typeface="Inter" pitchFamily="34" charset="-122"/>
                 <a:cs typeface="Inter" pitchFamily="34" charset="-120"/>
               </a:rPr>
-              <a:t>Vereine und Unternehmen, die uns vertrauen</a:t>
+              <a:t>Unternehmen, die uns vertrauen</a:t>
             </a:r>
             <a:endParaRPr lang="en-US" sz="2800" dirty="0"/>
           </a:p>
@@ -12314,7 +13064,7 @@
       </p:sp>
       <p:pic>
         <p:nvPicPr>
-          <p:cNvPr id="3" name="Image 0" descr="/var/folders/hm/sgq6d80d0vq133k7n8dc9bnw0000gn/T/maiershirts-dzZNxb/ref-0.png">    </p:cNvPr>
+          <p:cNvPr id="3" name="Image 0" descr="/var/folders/hm/sgq6d80d0vq133k7n8dc9bnw0000gn/T/maiershirts-J4Eovy/ref-unternehmen-0.png">    </p:cNvPr>
           <p:cNvPicPr>
             <a:picLocks noChangeAspect="1"/>
           </p:cNvPicPr>
@@ -12340,7 +13090,7 @@
       </p:pic>
       <p:pic>
         <p:nvPicPr>
-          <p:cNvPr id="4" name="Image 1" descr="/var/folders/hm/sgq6d80d0vq133k7n8dc9bnw0000gn/T/maiershirts-dzZNxb/ref-1.png">    </p:cNvPr>
+          <p:cNvPr id="4" name="Image 1" descr="/var/folders/hm/sgq6d80d0vq133k7n8dc9bnw0000gn/T/maiershirts-J4Eovy/ref-unternehmen-1.png">    </p:cNvPr>
           <p:cNvPicPr>
             <a:picLocks noChangeAspect="1"/>
           </p:cNvPicPr>
@@ -12366,7 +13116,7 @@
       </p:pic>
       <p:pic>
         <p:nvPicPr>
-          <p:cNvPr id="5" name="Image 2" descr="/var/folders/hm/sgq6d80d0vq133k7n8dc9bnw0000gn/T/maiershirts-dzZNxb/ref-2.png">    </p:cNvPr>
+          <p:cNvPr id="5" name="Image 2" descr="/var/folders/hm/sgq6d80d0vq133k7n8dc9bnw0000gn/T/maiershirts-J4Eovy/ref-unternehmen-2.png">    </p:cNvPr>
           <p:cNvPicPr>
             <a:picLocks noChangeAspect="1"/>
           </p:cNvPicPr>
@@ -12392,7 +13142,7 @@
       </p:pic>
       <p:pic>
         <p:nvPicPr>
-          <p:cNvPr id="6" name="Image 3" descr="/var/folders/hm/sgq6d80d0vq133k7n8dc9bnw0000gn/T/maiershirts-dzZNxb/ref-3.png">    </p:cNvPr>
+          <p:cNvPr id="6" name="Image 3" descr="/var/folders/hm/sgq6d80d0vq133k7n8dc9bnw0000gn/T/maiershirts-J4Eovy/ref-unternehmen-3.png">    </p:cNvPr>
           <p:cNvPicPr>
             <a:picLocks noChangeAspect="1"/>
           </p:cNvPicPr>
@@ -12408,8 +13158,8 @@
         </p:blipFill>
         <p:spPr>
           <a:xfrm>
-            <a:off x="7341461" y="1490472"/>
-            <a:ext cx="770438" cy="448056"/>
+            <a:off x="7174078" y="1490472"/>
+            <a:ext cx="1105205" cy="448056"/>
           </a:xfrm>
           <a:prstGeom prst="rect">
             <a:avLst/>
@@ -12418,7 +13168,7 @@
       </p:pic>
       <p:pic>
         <p:nvPicPr>
-          <p:cNvPr id="7" name="Image 4" descr="/var/folders/hm/sgq6d80d0vq133k7n8dc9bnw0000gn/T/maiershirts-dzZNxb/ref-4.png">    </p:cNvPr>
+          <p:cNvPr id="7" name="Image 4" descr="/var/folders/hm/sgq6d80d0vq133k7n8dc9bnw0000gn/T/maiershirts-J4Eovy/ref-unternehmen-4.png">    </p:cNvPr>
           <p:cNvPicPr>
             <a:picLocks noChangeAspect="1"/>
           </p:cNvPicPr>
@@ -12434,8 +13184,8 @@
         </p:blipFill>
         <p:spPr>
           <a:xfrm>
-            <a:off x="972998" y="2587752"/>
-            <a:ext cx="888644" cy="448056"/>
+            <a:off x="1090420" y="2587752"/>
+            <a:ext cx="653799" cy="448056"/>
           </a:xfrm>
           <a:prstGeom prst="rect">
             <a:avLst/>
@@ -12444,7 +13194,7 @@
       </p:pic>
       <p:pic>
         <p:nvPicPr>
-          <p:cNvPr id="8" name="Image 5" descr="/var/folders/hm/sgq6d80d0vq133k7n8dc9bnw0000gn/T/maiershirts-dzZNxb/ref-5.png">    </p:cNvPr>
+          <p:cNvPr id="8" name="Image 5" descr="/var/folders/hm/sgq6d80d0vq133k7n8dc9bnw0000gn/T/maiershirts-J4Eovy/ref-unternehmen-5.png">    </p:cNvPr>
           <p:cNvPicPr>
             <a:picLocks noChangeAspect="1"/>
           </p:cNvPicPr>
@@ -12460,8 +13210,8 @@
         </p:blipFill>
         <p:spPr>
           <a:xfrm>
-            <a:off x="2967838" y="2587752"/>
-            <a:ext cx="1105205" cy="448056"/>
+            <a:off x="2860802" y="2587752"/>
+            <a:ext cx="1319276" cy="448056"/>
           </a:xfrm>
           <a:prstGeom prst="rect">
             <a:avLst/>
@@ -12470,7 +13220,7 @@
       </p:pic>
       <p:pic>
         <p:nvPicPr>
-          <p:cNvPr id="9" name="Image 6" descr="/var/folders/hm/sgq6d80d0vq133k7n8dc9bnw0000gn/T/maiershirts-dzZNxb/ref-6.png">    </p:cNvPr>
+          <p:cNvPr id="9" name="Image 6" descr="/var/folders/hm/sgq6d80d0vq133k7n8dc9bnw0000gn/T/maiershirts-J4Eovy/ref-unternehmen-6.png">    </p:cNvPr>
           <p:cNvPicPr>
             <a:picLocks noChangeAspect="1"/>
           </p:cNvPicPr>
@@ -12486,8 +13236,8 @@
         </p:blipFill>
         <p:spPr>
           <a:xfrm>
-            <a:off x="5296660" y="2587752"/>
-            <a:ext cx="653799" cy="448056"/>
+            <a:off x="5357181" y="2587752"/>
+            <a:ext cx="532758" cy="448056"/>
           </a:xfrm>
           <a:prstGeom prst="rect">
             <a:avLst/>
@@ -12496,7 +13246,7 @@
       </p:pic>
       <p:pic>
         <p:nvPicPr>
-          <p:cNvPr id="10" name="Image 7" descr="/var/folders/hm/sgq6d80d0vq133k7n8dc9bnw0000gn/T/maiershirts-dzZNxb/ref-7.png">    </p:cNvPr>
+          <p:cNvPr id="10" name="Image 7" descr="/var/folders/hm/sgq6d80d0vq133k7n8dc9bnw0000gn/T/maiershirts-J4Eovy/ref-unternehmen-7.png">    </p:cNvPr>
           <p:cNvPicPr>
             <a:picLocks noChangeAspect="1"/>
           </p:cNvPicPr>
@@ -12512,8 +13262,8 @@
         </p:blipFill>
         <p:spPr>
           <a:xfrm>
-            <a:off x="7067042" y="2587752"/>
-            <a:ext cx="1319276" cy="448056"/>
+            <a:off x="7224177" y="2587752"/>
+            <a:ext cx="1005007" cy="448056"/>
           </a:xfrm>
           <a:prstGeom prst="rect">
             <a:avLst/>
@@ -12522,7 +13272,7 @@
       </p:pic>
       <p:pic>
         <p:nvPicPr>
-          <p:cNvPr id="11" name="Image 8" descr="/var/folders/hm/sgq6d80d0vq133k7n8dc9bnw0000gn/T/maiershirts-dzZNxb/ref-8.png">    </p:cNvPr>
+          <p:cNvPr id="11" name="Image 8" descr="/var/folders/hm/sgq6d80d0vq133k7n8dc9bnw0000gn/T/maiershirts-J4Eovy/ref-unternehmen-8.png">    </p:cNvPr>
           <p:cNvPicPr>
             <a:picLocks noChangeAspect="1"/>
           </p:cNvPicPr>
@@ -12538,8 +13288,8 @@
         </p:blipFill>
         <p:spPr>
           <a:xfrm>
-            <a:off x="1150941" y="3685032"/>
-            <a:ext cx="532758" cy="448056"/>
+            <a:off x="972998" y="3685032"/>
+            <a:ext cx="888644" cy="448056"/>
           </a:xfrm>
           <a:prstGeom prst="rect">
             <a:avLst/>
@@ -12548,7 +13298,7 @@
       </p:pic>
       <p:pic>
         <p:nvPicPr>
-          <p:cNvPr id="12" name="Image 9" descr="/var/folders/hm/sgq6d80d0vq133k7n8dc9bnw0000gn/T/maiershirts-dzZNxb/ref-9.png">    </p:cNvPr>
+          <p:cNvPr id="12" name="Image 9" descr="/var/folders/hm/sgq6d80d0vq133k7n8dc9bnw0000gn/T/maiershirts-J4Eovy/ph-logo-446x194.png">    </p:cNvPr>
           <p:cNvPicPr>
             <a:picLocks noChangeAspect="1"/>
           </p:cNvPicPr>
@@ -12564,8 +13314,8 @@
         </p:blipFill>
         <p:spPr>
           <a:xfrm>
-            <a:off x="3017937" y="3685032"/>
-            <a:ext cx="1005007" cy="448056"/>
+            <a:off x="2670048" y="3538728"/>
+            <a:ext cx="1700784" cy="740664"/>
           </a:xfrm>
           <a:prstGeom prst="rect">
             <a:avLst/>
@@ -12574,7 +13324,7 @@
       </p:pic>
       <p:pic>
         <p:nvPicPr>
-          <p:cNvPr id="13" name="Image 10" descr="/var/folders/hm/sgq6d80d0vq133k7n8dc9bnw0000gn/T/maiershirts-dzZNxb/ref-10.png">    </p:cNvPr>
+          <p:cNvPr id="13" name="Image 10" descr="/var/folders/hm/sgq6d80d0vq133k7n8dc9bnw0000gn/T/maiershirts-J4Eovy/ph-logo-446x194.png">    </p:cNvPr>
           <p:cNvPicPr>
             <a:picLocks noChangeAspect="1"/>
           </p:cNvPicPr>
@@ -12590,8 +13340,8 @@
         </p:blipFill>
         <p:spPr>
           <a:xfrm>
-            <a:off x="5179067" y="3685032"/>
-            <a:ext cx="888987" cy="448056"/>
+            <a:off x="4773168" y="3538728"/>
+            <a:ext cx="1700784" cy="740664"/>
           </a:xfrm>
           <a:prstGeom prst="rect">
             <a:avLst/>
@@ -12600,7 +13350,7 @@
       </p:pic>
       <p:pic>
         <p:nvPicPr>
-          <p:cNvPr id="14" name="Image 11" descr="/var/folders/hm/sgq6d80d0vq133k7n8dc9bnw0000gn/T/maiershirts-dzZNxb/ph-logo-446x194.png">    </p:cNvPr>
+          <p:cNvPr id="14" name="Image 11" descr="/var/folders/hm/sgq6d80d0vq133k7n8dc9bnw0000gn/T/maiershirts-J4Eovy/ph-logo-446x194.png">    </p:cNvPr>
           <p:cNvPicPr>
             <a:picLocks noChangeAspect="1"/>
           </p:cNvPicPr>
@@ -12732,7 +13482,7 @@
                 <a:ea typeface="Inter" pitchFamily="34" charset="-122"/>
                 <a:cs typeface="Inter" pitchFamily="34" charset="-120"/>
               </a:rPr>
-              <a:t>Stickerei im Detail</a:t>
+              <a:t>Vereine, die uns vertrauen</a:t>
             </a:r>
             <a:endParaRPr lang="en-US" sz="2800" dirty="0"/>
           </a:p>
@@ -12740,7 +13490,7 @@
       </p:sp>
       <p:pic>
         <p:nvPicPr>
-          <p:cNvPr id="3" name="Image 0" descr="/var/folders/hm/sgq6d80d0vq133k7n8dc9bnw0000gn/T/maiershirts-dzZNxb/ph-foto-1056x840.png">    </p:cNvPr>
+          <p:cNvPr id="3" name="Image 0" descr="/var/folders/hm/sgq6d80d0vq133k7n8dc9bnw0000gn/T/maiershirts-J4Eovy/ref-vereine-0.png">    </p:cNvPr>
           <p:cNvPicPr>
             <a:picLocks noChangeAspect="1"/>
           </p:cNvPicPr>
@@ -12756,122 +13506,196 @@
         </p:blipFill>
         <p:spPr>
           <a:xfrm>
-            <a:off x="457200" y="1234440"/>
-            <a:ext cx="4023360" cy="3200400"/>
+            <a:off x="713232" y="1556490"/>
+            <a:ext cx="1408176" cy="818939"/>
           </a:xfrm>
           <a:prstGeom prst="rect">
             <a:avLst/>
           </a:prstGeom>
         </p:spPr>
       </p:pic>
-      <p:sp>
-        <p:nvSpPr>
-          <p:cNvPr id="4" name="Text 0"/>
-          <p:cNvSpPr txBox="1"/>
-          <p:nvPr>
-            <p:ph idx="103" type="body" hasCustomPrompt="1"/>
-          </p:nvPr>
-        </p:nvSpPr>
-        <p:spPr>
-          <a:xfrm>
-            <a:off x="4846320" y="1234440"/>
-            <a:ext cx="3840480" cy="3200400"/>
-          </a:xfrm>
-          <a:prstGeom prst="rect">
-            <a:avLst/>
-          </a:prstGeom>
-          <a:noFill/>
-          <a:ln/>
-        </p:spPr>
-        <p:txBody>
-          <a:bodyPr wrap="square" lIns="0" tIns="0" rIns="0" bIns="0" rtlCol="0" anchor="t"/>
-          <a:lstStyle/>
-          <a:p>
-            <a:pPr algn="l" marL="342900" indent="-342900">
-              <a:spcAft>
-                <a:spcPts val="800"/>
-              </a:spcAft>
-              <a:buSzPct val="100000"/>
-              <a:buChar char="•"/>
-            </a:pPr>
-            <a:r>
-              <a:rPr lang="en-US" sz="1600" dirty="0">
-                <a:solidFill>
-                  <a:srgbClr val="0F0F0F"/>
-                </a:solidFill>
-                <a:latin typeface="Inter" pitchFamily="34" charset="0"/>
-                <a:ea typeface="Inter" pitchFamily="34" charset="-122"/>
-                <a:cs typeface="Inter" pitchFamily="34" charset="-120"/>
-              </a:rPr>
-              <a:t>Bis zu 12 Garnfarben pro Motiv</a:t>
-            </a:r>
-            <a:endParaRPr lang="en-US" sz="1600" dirty="0"/>
-          </a:p>
-          <a:p>
-            <a:pPr algn="l" marL="342900" indent="-342900">
-              <a:spcAft>
-                <a:spcPts val="800"/>
-              </a:spcAft>
-              <a:buSzPct val="100000"/>
-              <a:buChar char="•"/>
-            </a:pPr>
-            <a:r>
-              <a:rPr lang="en-US" sz="1600" dirty="0">
-                <a:solidFill>
-                  <a:srgbClr val="0F0F0F"/>
-                </a:solidFill>
-                <a:latin typeface="Inter" pitchFamily="34" charset="0"/>
-                <a:ea typeface="Inter" pitchFamily="34" charset="-122"/>
-                <a:cs typeface="Inter" pitchFamily="34" charset="-120"/>
-              </a:rPr>
-              <a:t>Waschbeständig bis 60 °C</a:t>
-            </a:r>
-            <a:endParaRPr lang="en-US" sz="1600" dirty="0"/>
-          </a:p>
-          <a:p>
-            <a:pPr algn="l" marL="342900" indent="-342900">
-              <a:spcAft>
-                <a:spcPts val="800"/>
-              </a:spcAft>
-              <a:buSzPct val="100000"/>
-              <a:buChar char="•"/>
-            </a:pPr>
-            <a:r>
-              <a:rPr lang="en-US" sz="1600" dirty="0">
-                <a:solidFill>
-                  <a:srgbClr val="0F0F0F"/>
-                </a:solidFill>
-                <a:latin typeface="Inter" pitchFamily="34" charset="0"/>
-                <a:ea typeface="Inter" pitchFamily="34" charset="-122"/>
-                <a:cs typeface="Inter" pitchFamily="34" charset="-120"/>
-              </a:rPr>
-              <a:t>Ideal für Polos, Jacken und Caps</a:t>
-            </a:r>
-            <a:endParaRPr lang="en-US" sz="1600" dirty="0"/>
-          </a:p>
-          <a:p>
-            <a:pPr algn="l" marL="342900" indent="-342900">
-              <a:spcAft>
-                <a:spcPts val="800"/>
-              </a:spcAft>
-              <a:buSzPct val="100000"/>
-              <a:buChar char="•"/>
-            </a:pPr>
-            <a:r>
-              <a:rPr lang="en-US" sz="1600" dirty="0">
-                <a:solidFill>
-                  <a:srgbClr val="0F0F0F"/>
-                </a:solidFill>
-                <a:latin typeface="Inter" pitchFamily="34" charset="0"/>
-                <a:ea typeface="Inter" pitchFamily="34" charset="-122"/>
-                <a:cs typeface="Inter" pitchFamily="34" charset="-120"/>
-              </a:rPr>
-              <a:t>Motivdigitalisierung im Haus</a:t>
-            </a:r>
-            <a:endParaRPr lang="en-US" sz="1600" dirty="0"/>
-          </a:p>
-        </p:txBody>
-      </p:sp>
+      <p:pic>
+        <p:nvPicPr>
+          <p:cNvPr id="4" name="Image 1" descr="/var/folders/hm/sgq6d80d0vq133k7n8dc9bnw0000gn/T/maiershirts-J4Eovy/ref-vereine-1.png">    </p:cNvPr>
+          <p:cNvPicPr>
+            <a:picLocks noChangeAspect="1"/>
+          </p:cNvPicPr>
+          <p:nvPr>
+            <p:ph idx="103" type="pic" hasCustomPrompt="1"/>
+          </p:nvPr>
+        </p:nvPicPr>
+        <p:blipFill>
+          <a:blip r:embed="rId2"/>
+          <a:stretch>
+            <a:fillRect/>
+          </a:stretch>
+        </p:blipFill>
+        <p:spPr>
+          <a:xfrm>
+            <a:off x="2816352" y="1611094"/>
+            <a:ext cx="1408176" cy="709731"/>
+          </a:xfrm>
+          <a:prstGeom prst="rect">
+            <a:avLst/>
+          </a:prstGeom>
+        </p:spPr>
+      </p:pic>
+      <p:pic>
+        <p:nvPicPr>
+          <p:cNvPr id="5" name="Image 2" descr="/var/folders/hm/sgq6d80d0vq133k7n8dc9bnw0000gn/T/maiershirts-J4Eovy/ref-vereine-2.png">    </p:cNvPr>
+          <p:cNvPicPr>
+            <a:picLocks noChangeAspect="1"/>
+          </p:cNvPicPr>
+          <p:nvPr>
+            <p:ph idx="104" type="pic" hasCustomPrompt="1"/>
+          </p:nvPr>
+        </p:nvPicPr>
+        <p:blipFill>
+          <a:blip r:embed="rId3"/>
+          <a:stretch>
+            <a:fillRect/>
+          </a:stretch>
+        </p:blipFill>
+        <p:spPr>
+          <a:xfrm>
+            <a:off x="5261000" y="1490472"/>
+            <a:ext cx="725119" cy="950976"/>
+          </a:xfrm>
+          <a:prstGeom prst="rect">
+            <a:avLst/>
+          </a:prstGeom>
+        </p:spPr>
+      </p:pic>
+      <p:pic>
+        <p:nvPicPr>
+          <p:cNvPr id="6" name="Image 3" descr="/var/folders/hm/sgq6d80d0vq133k7n8dc9bnw0000gn/T/maiershirts-J4Eovy/ref-vereine-3.png">    </p:cNvPr>
+          <p:cNvPicPr>
+            <a:picLocks noChangeAspect="1"/>
+          </p:cNvPicPr>
+          <p:nvPr>
+            <p:ph idx="105" type="pic" hasCustomPrompt="1"/>
+          </p:nvPr>
+        </p:nvPicPr>
+        <p:blipFill>
+          <a:blip r:embed="rId4"/>
+          <a:stretch>
+            <a:fillRect/>
+          </a:stretch>
+        </p:blipFill>
+        <p:spPr>
+          <a:xfrm>
+            <a:off x="7251192" y="1490472"/>
+            <a:ext cx="950976" cy="950976"/>
+          </a:xfrm>
+          <a:prstGeom prst="rect">
+            <a:avLst/>
+          </a:prstGeom>
+        </p:spPr>
+      </p:pic>
+      <p:pic>
+        <p:nvPicPr>
+          <p:cNvPr id="7" name="Image 4" descr="/var/folders/hm/sgq6d80d0vq133k7n8dc9bnw0000gn/T/maiershirts-J4Eovy/ref-vereine-4.png">    </p:cNvPr>
+          <p:cNvPicPr>
+            <a:picLocks noChangeAspect="1"/>
+          </p:cNvPicPr>
+          <p:nvPr>
+            <p:ph idx="106" type="pic" hasCustomPrompt="1"/>
+          </p:nvPr>
+        </p:nvPicPr>
+        <p:blipFill>
+          <a:blip r:embed="rId5"/>
+          <a:stretch>
+            <a:fillRect/>
+          </a:stretch>
+        </p:blipFill>
+        <p:spPr>
+          <a:xfrm>
+            <a:off x="927202" y="3090672"/>
+            <a:ext cx="980237" cy="950976"/>
+          </a:xfrm>
+          <a:prstGeom prst="rect">
+            <a:avLst/>
+          </a:prstGeom>
+        </p:spPr>
+      </p:pic>
+      <p:pic>
+        <p:nvPicPr>
+          <p:cNvPr id="8" name="Image 5" descr="/var/folders/hm/sgq6d80d0vq133k7n8dc9bnw0000gn/T/maiershirts-J4Eovy/ref-vereine-5.png">    </p:cNvPr>
+          <p:cNvPicPr>
+            <a:picLocks noChangeAspect="1"/>
+          </p:cNvPicPr>
+          <p:nvPr>
+            <p:ph idx="107" type="pic" hasCustomPrompt="1"/>
+          </p:nvPr>
+        </p:nvPicPr>
+        <p:blipFill>
+          <a:blip r:embed="rId6"/>
+          <a:stretch>
+            <a:fillRect/>
+          </a:stretch>
+        </p:blipFill>
+        <p:spPr>
+          <a:xfrm>
+            <a:off x="3044952" y="3090672"/>
+            <a:ext cx="950976" cy="950976"/>
+          </a:xfrm>
+          <a:prstGeom prst="rect">
+            <a:avLst/>
+          </a:prstGeom>
+        </p:spPr>
+      </p:pic>
+      <p:pic>
+        <p:nvPicPr>
+          <p:cNvPr id="9" name="Image 6" descr="/var/folders/hm/sgq6d80d0vq133k7n8dc9bnw0000gn/T/maiershirts-J4Eovy/ref-vereine-6.png">    </p:cNvPr>
+          <p:cNvPicPr>
+            <a:picLocks noChangeAspect="1"/>
+          </p:cNvPicPr>
+          <p:nvPr>
+            <p:ph idx="108" type="pic" hasCustomPrompt="1"/>
+          </p:nvPr>
+        </p:nvPicPr>
+        <p:blipFill>
+          <a:blip r:embed="rId7"/>
+          <a:stretch>
+            <a:fillRect/>
+          </a:stretch>
+        </p:blipFill>
+        <p:spPr>
+          <a:xfrm>
+            <a:off x="5146014" y="3090672"/>
+            <a:ext cx="955093" cy="950976"/>
+          </a:xfrm>
+          <a:prstGeom prst="rect">
+            <a:avLst/>
+          </a:prstGeom>
+        </p:spPr>
+      </p:pic>
+      <p:pic>
+        <p:nvPicPr>
+          <p:cNvPr id="10" name="Image 7" descr="/var/folders/hm/sgq6d80d0vq133k7n8dc9bnw0000gn/T/maiershirts-J4Eovy/ph-logo-446x326.png">    </p:cNvPr>
+          <p:cNvPicPr>
+            <a:picLocks noChangeAspect="1"/>
+          </p:cNvPicPr>
+          <p:nvPr>
+            <p:ph idx="109" type="pic" hasCustomPrompt="1"/>
+          </p:nvPr>
+        </p:nvPicPr>
+        <p:blipFill>
+          <a:blip r:embed="rId8"/>
+          <a:stretch>
+            <a:fillRect/>
+          </a:stretch>
+        </p:blipFill>
+        <p:spPr>
+          <a:xfrm>
+            <a:off x="6876288" y="2944368"/>
+            <a:ext cx="1700784" cy="1243584"/>
+          </a:xfrm>
+          <a:prstGeom prst="rect">
+            <a:avLst/>
+          </a:prstGeom>
+        </p:spPr>
+      </p:pic>
       <p:sp>
         <p:nvSpPr>
           <p:cNvPr id="25" name="Slide Number Placeholder 0"/>
@@ -12980,145 +13804,50 @@
                 <a:ea typeface="Inter" pitchFamily="34" charset="-122"/>
                 <a:cs typeface="Inter" pitchFamily="34" charset="-120"/>
               </a:rPr>
-              <a:t>Auftragsvolumen nach Produktgruppe</a:t>
+              <a:t>Stickerei im Detail</a:t>
             </a:r>
             <a:endParaRPr lang="en-US" sz="2800" dirty="0"/>
           </a:p>
         </p:txBody>
       </p:sp>
-      <p:graphicFrame>
-        <p:nvGraphicFramePr>
-          <p:cNvPr id="3" name="Chart 0" descr=""/>
-          <p:cNvGraphicFramePr/>
-          <p:nvPr/>
-        </p:nvGraphicFramePr>
-        <p:xfrm>
-          <a:off x="457200" y="1188720"/>
-          <a:ext cx="5303520" cy="3291840"/>
-        </p:xfrm>
-        <a:graphic xmlns:a="http://schemas.openxmlformats.org/drawingml/2006/main">
-          <a:graphicData uri="http://schemas.openxmlformats.org/drawingml/2006/chart">
-            <c:chart xmlns:c="http://schemas.openxmlformats.org/drawingml/2006/chart" r:id="rId1"/>
-          </a:graphicData>
-        </a:graphic>
-      </p:graphicFrame>
-      <p:sp>
-        <p:nvSpPr>
-          <p:cNvPr id="4" name="Shape 1"/>
-          <p:cNvSpPr/>
-          <p:nvPr/>
-        </p:nvSpPr>
-        <p:spPr>
-          <a:xfrm>
-            <a:off x="6035040" y="1188720"/>
-            <a:ext cx="2651760" cy="3291840"/>
-          </a:xfrm>
-          <a:prstGeom prst="roundRect">
-            <a:avLst>
-              <a:gd name="adj" fmla="val 4138"/>
-            </a:avLst>
-          </a:prstGeom>
-          <a:solidFill>
-            <a:srgbClr val="E8DFD0"/>
-          </a:solidFill>
-          <a:ln w="12700">
-            <a:solidFill>
-              <a:srgbClr val="E8DFD0"/>
-            </a:solidFill>
-            <a:prstDash val="solid"/>
-          </a:ln>
-        </p:spPr>
-      </p:sp>
-      <p:sp>
-        <p:nvSpPr>
-          <p:cNvPr id="5" name="Text 2"/>
+      <p:pic>
+        <p:nvPicPr>
+          <p:cNvPr id="3" name="Image 0" descr="/var/folders/hm/sgq6d80d0vq133k7n8dc9bnw0000gn/T/maiershirts-J4Eovy/ph-foto-1056x840.png">    </p:cNvPr>
+          <p:cNvPicPr>
+            <a:picLocks noChangeAspect="1"/>
+          </p:cNvPicPr>
+          <p:nvPr>
+            <p:ph idx="102" type="pic" hasCustomPrompt="1"/>
+          </p:nvPr>
+        </p:nvPicPr>
+        <p:blipFill>
+          <a:blip r:embed="rId1"/>
+          <a:stretch>
+            <a:fillRect/>
+          </a:stretch>
+        </p:blipFill>
+        <p:spPr>
+          <a:xfrm>
+            <a:off x="457200" y="1234440"/>
+            <a:ext cx="4023360" cy="3200400"/>
+          </a:xfrm>
+          <a:prstGeom prst="rect">
+            <a:avLst/>
+          </a:prstGeom>
+        </p:spPr>
+      </p:pic>
+      <p:sp>
+        <p:nvSpPr>
+          <p:cNvPr id="4" name="Text 0"/>
           <p:cNvSpPr txBox="1"/>
-          <p:nvPr/>
-        </p:nvSpPr>
-        <p:spPr>
-          <a:xfrm>
-            <a:off x="6263640" y="1371600"/>
-            <a:ext cx="2194560" cy="274320"/>
-          </a:xfrm>
-          <a:prstGeom prst="rect">
-            <a:avLst/>
-          </a:prstGeom>
-          <a:noFill/>
-          <a:ln/>
-        </p:spPr>
-        <p:txBody>
-          <a:bodyPr wrap="square" lIns="0" tIns="0" rIns="0" bIns="0" rtlCol="0" anchor="ctr"/>
-          <a:lstStyle/>
-          <a:p>
-            <a:pPr indent="0" marL="0">
-              <a:buNone/>
-            </a:pPr>
-            <a:r>
-              <a:rPr lang="en-US" sz="1200" dirty="0">
-                <a:solidFill>
-                  <a:srgbClr val="0F0F0F">
-                    <a:alpha val="60000"/>
-                  </a:srgbClr>
-                </a:solidFill>
-                <a:latin typeface="Inter" pitchFamily="34" charset="0"/>
-                <a:ea typeface="Inter" pitchFamily="34" charset="-122"/>
-                <a:cs typeface="Inter" pitchFamily="34" charset="-120"/>
-              </a:rPr>
-              <a:t>Beispieldaten</a:t>
-            </a:r>
-            <a:endParaRPr lang="en-US" sz="1200" dirty="0"/>
-          </a:p>
-        </p:txBody>
-      </p:sp>
-      <p:sp>
-        <p:nvSpPr>
-          <p:cNvPr id="6" name="Text 3"/>
-          <p:cNvSpPr txBox="1"/>
-          <p:nvPr/>
-        </p:nvSpPr>
-        <p:spPr>
-          <a:xfrm>
-            <a:off x="6263640" y="1691640"/>
-            <a:ext cx="2194560" cy="640080"/>
-          </a:xfrm>
-          <a:prstGeom prst="rect">
-            <a:avLst/>
-          </a:prstGeom>
-          <a:noFill/>
-          <a:ln/>
-        </p:spPr>
-        <p:txBody>
-          <a:bodyPr wrap="square" lIns="0" tIns="0" rIns="0" bIns="0" rtlCol="0" anchor="ctr"/>
-          <a:lstStyle/>
-          <a:p>
-            <a:pPr indent="0" marL="0">
-              <a:buNone/>
-            </a:pPr>
-            <a:r>
-              <a:rPr lang="en-US" sz="1600" b="1" dirty="0">
-                <a:solidFill>
-                  <a:srgbClr val="0F0F0F"/>
-                </a:solidFill>
-                <a:latin typeface="Inter" pitchFamily="34" charset="0"/>
-                <a:ea typeface="Inter" pitchFamily="34" charset="-122"/>
-                <a:cs typeface="Inter" pitchFamily="34" charset="-120"/>
-              </a:rPr>
-              <a:t>T-Shirts machen den größten Anteil aus</a:t>
-            </a:r>
-            <a:endParaRPr lang="en-US" sz="1600" dirty="0"/>
-          </a:p>
-        </p:txBody>
-      </p:sp>
-      <p:sp>
-        <p:nvSpPr>
-          <p:cNvPr id="7" name="Text 4"/>
-          <p:cNvSpPr txBox="1"/>
-          <p:nvPr/>
-        </p:nvSpPr>
-        <p:spPr>
-          <a:xfrm>
-            <a:off x="6263640" y="2423160"/>
-            <a:ext cx="2194560" cy="1097280"/>
+          <p:nvPr>
+            <p:ph idx="103" type="body" hasCustomPrompt="1"/>
+          </p:nvPr>
+        </p:nvSpPr>
+        <p:spPr>
+          <a:xfrm>
+            <a:off x="4846320" y="1234440"/>
+            <a:ext cx="3840480" cy="3200400"/>
           </a:xfrm>
           <a:prstGeom prst="rect">
             <a:avLst/>
@@ -13130,23 +13859,88 @@
           <a:bodyPr wrap="square" lIns="0" tIns="0" rIns="0" bIns="0" rtlCol="0" anchor="t"/>
           <a:lstStyle/>
           <a:p>
-            <a:pPr indent="0" marL="0">
-              <a:buNone/>
-            </a:pPr>
-            <a:r>
-              <a:rPr lang="en-US" sz="1200" dirty="0">
-                <a:solidFill>
-                  <a:srgbClr val="0F0F0F">
-                    <a:alpha val="60000"/>
-                  </a:srgbClr>
-                </a:solidFill>
-                <a:latin typeface="Inter" pitchFamily="34" charset="0"/>
-                <a:ea typeface="Inter" pitchFamily="34" charset="-122"/>
-                <a:cs typeface="Inter" pitchFamily="34" charset="-120"/>
-              </a:rPr>
-              <a:t>Natives Diagramm: Werte per Rechtsklick → „Daten bearbeiten“ ändern.</a:t>
-            </a:r>
-            <a:endParaRPr lang="en-US" sz="1200" dirty="0"/>
+            <a:pPr algn="l" marL="342900" indent="-342900">
+              <a:spcAft>
+                <a:spcPts val="800"/>
+              </a:spcAft>
+              <a:buSzPct val="100000"/>
+              <a:buChar char="•"/>
+            </a:pPr>
+            <a:r>
+              <a:rPr lang="en-US" sz="1600" dirty="0">
+                <a:solidFill>
+                  <a:srgbClr val="0F0F0F"/>
+                </a:solidFill>
+                <a:latin typeface="Inter" pitchFamily="34" charset="0"/>
+                <a:ea typeface="Inter" pitchFamily="34" charset="-122"/>
+                <a:cs typeface="Inter" pitchFamily="34" charset="-120"/>
+              </a:rPr>
+              <a:t>Bis zu 12 Garnfarben pro Motiv</a:t>
+            </a:r>
+            <a:endParaRPr lang="en-US" sz="1600" dirty="0"/>
+          </a:p>
+          <a:p>
+            <a:pPr algn="l" marL="342900" indent="-342900">
+              <a:spcAft>
+                <a:spcPts val="800"/>
+              </a:spcAft>
+              <a:buSzPct val="100000"/>
+              <a:buChar char="•"/>
+            </a:pPr>
+            <a:r>
+              <a:rPr lang="en-US" sz="1600" dirty="0">
+                <a:solidFill>
+                  <a:srgbClr val="0F0F0F"/>
+                </a:solidFill>
+                <a:latin typeface="Inter" pitchFamily="34" charset="0"/>
+                <a:ea typeface="Inter" pitchFamily="34" charset="-122"/>
+                <a:cs typeface="Inter" pitchFamily="34" charset="-120"/>
+              </a:rPr>
+              <a:t>Waschbeständig bis 60 °C</a:t>
+            </a:r>
+            <a:endParaRPr lang="en-US" sz="1600" dirty="0"/>
+          </a:p>
+          <a:p>
+            <a:pPr algn="l" marL="342900" indent="-342900">
+              <a:spcAft>
+                <a:spcPts val="800"/>
+              </a:spcAft>
+              <a:buSzPct val="100000"/>
+              <a:buChar char="•"/>
+            </a:pPr>
+            <a:r>
+              <a:rPr lang="en-US" sz="1600" dirty="0">
+                <a:solidFill>
+                  <a:srgbClr val="0F0F0F"/>
+                </a:solidFill>
+                <a:latin typeface="Inter" pitchFamily="34" charset="0"/>
+                <a:ea typeface="Inter" pitchFamily="34" charset="-122"/>
+                <a:cs typeface="Inter" pitchFamily="34" charset="-120"/>
+              </a:rPr>
+              <a:t>Ideal für Polos, Jacken und Caps</a:t>
+            </a:r>
+            <a:endParaRPr lang="en-US" sz="1600" dirty="0"/>
+          </a:p>
+          <a:p>
+            <a:pPr algn="l" marL="342900" indent="-342900">
+              <a:spcAft>
+                <a:spcPts val="800"/>
+              </a:spcAft>
+              <a:buSzPct val="100000"/>
+              <a:buChar char="•"/>
+            </a:pPr>
+            <a:r>
+              <a:rPr lang="en-US" sz="1600" dirty="0">
+                <a:solidFill>
+                  <a:srgbClr val="0F0F0F"/>
+                </a:solidFill>
+                <a:latin typeface="Inter" pitchFamily="34" charset="0"/>
+                <a:ea typeface="Inter" pitchFamily="34" charset="-122"/>
+                <a:cs typeface="Inter" pitchFamily="34" charset="-120"/>
+              </a:rPr>
+              <a:t>Motivdigitalisierung im Haus</a:t>
+            </a:r>
+            <a:endParaRPr lang="en-US" sz="1600" dirty="0"/>
           </a:p>
         </p:txBody>
       </p:sp>
@@ -13258,24 +14052,145 @@
                 <a:ea typeface="Inter" pitchFamily="34" charset="-122"/>
                 <a:cs typeface="Inter" pitchFamily="34" charset="-120"/>
               </a:rPr>
-              <a:t>Folientitel</a:t>
+              <a:t>Auftragsvolumen nach Produktgruppe</a:t>
             </a:r>
             <a:endParaRPr lang="en-US" sz="2800" dirty="0"/>
           </a:p>
         </p:txBody>
       </p:sp>
-      <p:sp>
-        <p:nvSpPr>
-          <p:cNvPr id="3" name="Text 0"/>
+      <p:graphicFrame>
+        <p:nvGraphicFramePr>
+          <p:cNvPr id="3" name="Chart 0" descr=""/>
+          <p:cNvGraphicFramePr/>
+          <p:nvPr/>
+        </p:nvGraphicFramePr>
+        <p:xfrm>
+          <a:off x="457200" y="1188720"/>
+          <a:ext cx="5303520" cy="3291840"/>
+        </p:xfrm>
+        <a:graphic xmlns:a="http://schemas.openxmlformats.org/drawingml/2006/main">
+          <a:graphicData uri="http://schemas.openxmlformats.org/drawingml/2006/chart">
+            <c:chart xmlns:c="http://schemas.openxmlformats.org/drawingml/2006/chart" r:id="rId1"/>
+          </a:graphicData>
+        </a:graphic>
+      </p:graphicFrame>
+      <p:sp>
+        <p:nvSpPr>
+          <p:cNvPr id="4" name="Shape 1"/>
+          <p:cNvSpPr/>
+          <p:nvPr/>
+        </p:nvSpPr>
+        <p:spPr>
+          <a:xfrm>
+            <a:off x="6035040" y="1188720"/>
+            <a:ext cx="2651760" cy="3291840"/>
+          </a:xfrm>
+          <a:prstGeom prst="roundRect">
+            <a:avLst>
+              <a:gd name="adj" fmla="val 4138"/>
+            </a:avLst>
+          </a:prstGeom>
+          <a:solidFill>
+            <a:srgbClr val="E8DFD0"/>
+          </a:solidFill>
+          <a:ln w="12700">
+            <a:solidFill>
+              <a:srgbClr val="E8DFD0"/>
+            </a:solidFill>
+            <a:prstDash val="solid"/>
+          </a:ln>
+        </p:spPr>
+      </p:sp>
+      <p:sp>
+        <p:nvSpPr>
+          <p:cNvPr id="5" name="Text 2"/>
           <p:cNvSpPr txBox="1"/>
-          <p:nvPr>
-            <p:ph idx="102" type="body" hasCustomPrompt="1"/>
-          </p:nvPr>
-        </p:nvSpPr>
-        <p:spPr>
-          <a:xfrm>
-            <a:off x="457200" y="1234440"/>
-            <a:ext cx="8229600" cy="3200400"/>
+          <p:nvPr/>
+        </p:nvSpPr>
+        <p:spPr>
+          <a:xfrm>
+            <a:off x="6263640" y="1371600"/>
+            <a:ext cx="2194560" cy="274320"/>
+          </a:xfrm>
+          <a:prstGeom prst="rect">
+            <a:avLst/>
+          </a:prstGeom>
+          <a:noFill/>
+          <a:ln/>
+        </p:spPr>
+        <p:txBody>
+          <a:bodyPr wrap="square" lIns="0" tIns="0" rIns="0" bIns="0" rtlCol="0" anchor="ctr"/>
+          <a:lstStyle/>
+          <a:p>
+            <a:pPr indent="0" marL="0">
+              <a:buNone/>
+            </a:pPr>
+            <a:r>
+              <a:rPr lang="en-US" sz="1200" dirty="0">
+                <a:solidFill>
+                  <a:srgbClr val="0F0F0F">
+                    <a:alpha val="60000"/>
+                  </a:srgbClr>
+                </a:solidFill>
+                <a:latin typeface="Inter" pitchFamily="34" charset="0"/>
+                <a:ea typeface="Inter" pitchFamily="34" charset="-122"/>
+                <a:cs typeface="Inter" pitchFamily="34" charset="-120"/>
+              </a:rPr>
+              <a:t>Beispieldaten</a:t>
+            </a:r>
+            <a:endParaRPr lang="en-US" sz="1200" dirty="0"/>
+          </a:p>
+        </p:txBody>
+      </p:sp>
+      <p:sp>
+        <p:nvSpPr>
+          <p:cNvPr id="6" name="Text 3"/>
+          <p:cNvSpPr txBox="1"/>
+          <p:nvPr/>
+        </p:nvSpPr>
+        <p:spPr>
+          <a:xfrm>
+            <a:off x="6263640" y="1691640"/>
+            <a:ext cx="2194560" cy="640080"/>
+          </a:xfrm>
+          <a:prstGeom prst="rect">
+            <a:avLst/>
+          </a:prstGeom>
+          <a:noFill/>
+          <a:ln/>
+        </p:spPr>
+        <p:txBody>
+          <a:bodyPr wrap="square" lIns="0" tIns="0" rIns="0" bIns="0" rtlCol="0" anchor="ctr"/>
+          <a:lstStyle/>
+          <a:p>
+            <a:pPr indent="0" marL="0">
+              <a:buNone/>
+            </a:pPr>
+            <a:r>
+              <a:rPr lang="en-US" sz="1600" b="1" dirty="0">
+                <a:solidFill>
+                  <a:srgbClr val="0F0F0F"/>
+                </a:solidFill>
+                <a:latin typeface="Inter" pitchFamily="34" charset="0"/>
+                <a:ea typeface="Inter" pitchFamily="34" charset="-122"/>
+                <a:cs typeface="Inter" pitchFamily="34" charset="-120"/>
+              </a:rPr>
+              <a:t>T-Shirts machen den größten Anteil aus</a:t>
+            </a:r>
+            <a:endParaRPr lang="en-US" sz="1600" dirty="0"/>
+          </a:p>
+        </p:txBody>
+      </p:sp>
+      <p:sp>
+        <p:nvSpPr>
+          <p:cNvPr id="7" name="Text 4"/>
+          <p:cNvSpPr txBox="1"/>
+          <p:nvPr/>
+        </p:nvSpPr>
+        <p:spPr>
+          <a:xfrm>
+            <a:off x="6263640" y="2423160"/>
+            <a:ext cx="2194560" cy="1097280"/>
           </a:xfrm>
           <a:prstGeom prst="rect">
             <a:avLst/>
@@ -13287,109 +14202,23 @@
           <a:bodyPr wrap="square" lIns="0" tIns="0" rIns="0" bIns="0" rtlCol="0" anchor="t"/>
           <a:lstStyle/>
           <a:p>
-            <a:pPr algn="l" marL="342900" indent="-342900">
-              <a:spcAft>
-                <a:spcPts val="800"/>
-              </a:spcAft>
-              <a:buSzPct val="100000"/>
-              <a:buChar char="•"/>
-            </a:pPr>
-            <a:r>
-              <a:rPr lang="en-US" sz="1600" dirty="0">
-                <a:solidFill>
-                  <a:srgbClr val="0F0F0F"/>
-                </a:solidFill>
-                <a:latin typeface="Inter" pitchFamily="34" charset="0"/>
-                <a:ea typeface="Inter" pitchFamily="34" charset="-122"/>
-                <a:cs typeface="Inter" pitchFamily="34" charset="-120"/>
-              </a:rPr>
-              <a:t>Erste Aussage der Folie</a:t>
-            </a:r>
-            <a:endParaRPr lang="en-US" sz="1600" dirty="0"/>
-          </a:p>
-          <a:p>
-            <a:pPr algn="l" marL="342900" indent="-342900">
-              <a:spcAft>
-                <a:spcPts val="800"/>
-              </a:spcAft>
-              <a:buSzPct val="100000"/>
-              <a:buChar char="•"/>
-            </a:pPr>
-            <a:r>
-              <a:rPr lang="en-US" sz="1600" dirty="0">
-                <a:solidFill>
-                  <a:srgbClr val="0F0F0F"/>
-                </a:solidFill>
-                <a:latin typeface="Inter" pitchFamily="34" charset="0"/>
-                <a:ea typeface="Inter" pitchFamily="34" charset="-122"/>
-                <a:cs typeface="Inter" pitchFamily="34" charset="-120"/>
-              </a:rPr>
-              <a:t>Zweite Aussage mit einer kurzen Erläuterung</a:t>
-            </a:r>
-            <a:endParaRPr lang="en-US" sz="1600" dirty="0"/>
-          </a:p>
-          <a:p>
-            <a:pPr algn="l" marL="342900" indent="-342900">
-              <a:spcAft>
-                <a:spcPts val="800"/>
-              </a:spcAft>
-              <a:buSzPct val="100000"/>
-              <a:buChar char="•"/>
-            </a:pPr>
-            <a:r>
-              <a:rPr lang="en-US" sz="1600" dirty="0">
-                <a:solidFill>
-                  <a:srgbClr val="0F0F0F"/>
-                </a:solidFill>
-                <a:latin typeface="Inter" pitchFamily="34" charset="0"/>
-                <a:ea typeface="Inter" pitchFamily="34" charset="-122"/>
-                <a:cs typeface="Inter" pitchFamily="34" charset="-120"/>
-              </a:rPr>
-              <a:t>Dritte Aussage</a:t>
-            </a:r>
-            <a:endParaRPr lang="en-US" sz="1600" dirty="0"/>
-          </a:p>
-          <a:p>
-            <a:pPr algn="l" lvl="1" marL="685800" indent="-342900">
-              <a:spcAft>
-                <a:spcPts val="800"/>
-              </a:spcAft>
-              <a:buSzPct val="100000"/>
-              <a:buChar char="•"/>
-            </a:pPr>
-            <a:r>
-              <a:rPr lang="en-US" sz="1600" dirty="0">
-                <a:solidFill>
-                  <a:srgbClr val="0F0F0F"/>
-                </a:solidFill>
-                <a:latin typeface="Inter" pitchFamily="34" charset="0"/>
-                <a:ea typeface="Inter" pitchFamily="34" charset="-122"/>
-                <a:cs typeface="Inter" pitchFamily="34" charset="-120"/>
-              </a:rPr>
-              <a:t>Unterpunkt zur dritten Aussage</a:t>
-            </a:r>
-            <a:endParaRPr lang="en-US" sz="1600" dirty="0"/>
-          </a:p>
-          <a:p>
-            <a:pPr algn="l" lvl="1" marL="685800" indent="-342900">
-              <a:spcAft>
-                <a:spcPts val="800"/>
-              </a:spcAft>
-              <a:buSzPct val="100000"/>
-              <a:buChar char="•"/>
-            </a:pPr>
-            <a:r>
-              <a:rPr lang="en-US" sz="1600" dirty="0">
-                <a:solidFill>
-                  <a:srgbClr val="0F0F0F"/>
-                </a:solidFill>
-                <a:latin typeface="Inter" pitchFamily="34" charset="0"/>
-                <a:ea typeface="Inter" pitchFamily="34" charset="-122"/>
-                <a:cs typeface="Inter" pitchFamily="34" charset="-120"/>
-              </a:rPr>
-              <a:t>Weiterer Unterpunkt</a:t>
-            </a:r>
-            <a:endParaRPr lang="en-US" sz="1600" dirty="0"/>
+            <a:pPr indent="0" marL="0">
+              <a:buNone/>
+            </a:pPr>
+            <a:r>
+              <a:rPr lang="en-US" sz="1200" dirty="0">
+                <a:solidFill>
+                  <a:srgbClr val="0F0F0F">
+                    <a:alpha val="60000"/>
+                  </a:srgbClr>
+                </a:solidFill>
+                <a:latin typeface="Inter" pitchFamily="34" charset="0"/>
+                <a:ea typeface="Inter" pitchFamily="34" charset="-122"/>
+                <a:cs typeface="Inter" pitchFamily="34" charset="-120"/>
+              </a:rPr>
+              <a:t>Natives Diagramm: Werte per Rechtsklick → „Daten bearbeiten“ ändern.</a:t>
+            </a:r>
+            <a:endParaRPr lang="en-US" sz="1200" dirty="0"/>
           </a:p>
         </p:txBody>
       </p:sp>
@@ -13476,6 +14305,249 @@
         </p:nvSpPr>
         <p:spPr>
           <a:xfrm>
+            <a:off x="457200" y="320040"/>
+            <a:ext cx="7132320" cy="640080"/>
+          </a:xfrm>
+          <a:prstGeom prst="rect">
+            <a:avLst/>
+          </a:prstGeom>
+          <a:noFill/>
+          <a:ln/>
+        </p:spPr>
+        <p:txBody>
+          <a:bodyPr wrap="square" lIns="0" tIns="0" rIns="0" bIns="0" rtlCol="0" anchor="ctr"/>
+          <a:lstStyle/>
+          <a:p>
+            <a:pPr algn="l" indent="0" marL="0">
+              <a:buNone/>
+            </a:pPr>
+            <a:r>
+              <a:rPr lang="en-US" sz="2800" b="1" dirty="0">
+                <a:solidFill>
+                  <a:srgbClr val="0F0F0F"/>
+                </a:solidFill>
+                <a:latin typeface="Inter" pitchFamily="34" charset="0"/>
+                <a:ea typeface="Inter" pitchFamily="34" charset="-122"/>
+                <a:cs typeface="Inter" pitchFamily="34" charset="-120"/>
+              </a:rPr>
+              <a:t>Folientitel</a:t>
+            </a:r>
+            <a:endParaRPr lang="en-US" sz="2800" dirty="0"/>
+          </a:p>
+        </p:txBody>
+      </p:sp>
+      <p:sp>
+        <p:nvSpPr>
+          <p:cNvPr id="3" name="Text 0"/>
+          <p:cNvSpPr txBox="1"/>
+          <p:nvPr>
+            <p:ph idx="102" type="body" hasCustomPrompt="1"/>
+          </p:nvPr>
+        </p:nvSpPr>
+        <p:spPr>
+          <a:xfrm>
+            <a:off x="457200" y="1234440"/>
+            <a:ext cx="8229600" cy="3200400"/>
+          </a:xfrm>
+          <a:prstGeom prst="rect">
+            <a:avLst/>
+          </a:prstGeom>
+          <a:noFill/>
+          <a:ln/>
+        </p:spPr>
+        <p:txBody>
+          <a:bodyPr wrap="square" lIns="0" tIns="0" rIns="0" bIns="0" rtlCol="0" anchor="t"/>
+          <a:lstStyle/>
+          <a:p>
+            <a:pPr algn="l" marL="342900" indent="-342900">
+              <a:spcAft>
+                <a:spcPts val="800"/>
+              </a:spcAft>
+              <a:buSzPct val="100000"/>
+              <a:buChar char="•"/>
+            </a:pPr>
+            <a:r>
+              <a:rPr lang="en-US" sz="1600" dirty="0">
+                <a:solidFill>
+                  <a:srgbClr val="0F0F0F"/>
+                </a:solidFill>
+                <a:latin typeface="Inter" pitchFamily="34" charset="0"/>
+                <a:ea typeface="Inter" pitchFamily="34" charset="-122"/>
+                <a:cs typeface="Inter" pitchFamily="34" charset="-120"/>
+              </a:rPr>
+              <a:t>Erste Aussage der Folie</a:t>
+            </a:r>
+            <a:endParaRPr lang="en-US" sz="1600" dirty="0"/>
+          </a:p>
+          <a:p>
+            <a:pPr algn="l" marL="342900" indent="-342900">
+              <a:spcAft>
+                <a:spcPts val="800"/>
+              </a:spcAft>
+              <a:buSzPct val="100000"/>
+              <a:buChar char="•"/>
+            </a:pPr>
+            <a:r>
+              <a:rPr lang="en-US" sz="1600" dirty="0">
+                <a:solidFill>
+                  <a:srgbClr val="0F0F0F"/>
+                </a:solidFill>
+                <a:latin typeface="Inter" pitchFamily="34" charset="0"/>
+                <a:ea typeface="Inter" pitchFamily="34" charset="-122"/>
+                <a:cs typeface="Inter" pitchFamily="34" charset="-120"/>
+              </a:rPr>
+              <a:t>Zweite Aussage mit einer kurzen Erläuterung</a:t>
+            </a:r>
+            <a:endParaRPr lang="en-US" sz="1600" dirty="0"/>
+          </a:p>
+          <a:p>
+            <a:pPr algn="l" marL="342900" indent="-342900">
+              <a:spcAft>
+                <a:spcPts val="800"/>
+              </a:spcAft>
+              <a:buSzPct val="100000"/>
+              <a:buChar char="•"/>
+            </a:pPr>
+            <a:r>
+              <a:rPr lang="en-US" sz="1600" dirty="0">
+                <a:solidFill>
+                  <a:srgbClr val="0F0F0F"/>
+                </a:solidFill>
+                <a:latin typeface="Inter" pitchFamily="34" charset="0"/>
+                <a:ea typeface="Inter" pitchFamily="34" charset="-122"/>
+                <a:cs typeface="Inter" pitchFamily="34" charset="-120"/>
+              </a:rPr>
+              <a:t>Dritte Aussage</a:t>
+            </a:r>
+            <a:endParaRPr lang="en-US" sz="1600" dirty="0"/>
+          </a:p>
+          <a:p>
+            <a:pPr algn="l" lvl="1" marL="685800" indent="-342900">
+              <a:spcAft>
+                <a:spcPts val="800"/>
+              </a:spcAft>
+              <a:buSzPct val="100000"/>
+              <a:buChar char="•"/>
+            </a:pPr>
+            <a:r>
+              <a:rPr lang="en-US" sz="1600" dirty="0">
+                <a:solidFill>
+                  <a:srgbClr val="0F0F0F"/>
+                </a:solidFill>
+                <a:latin typeface="Inter" pitchFamily="34" charset="0"/>
+                <a:ea typeface="Inter" pitchFamily="34" charset="-122"/>
+                <a:cs typeface="Inter" pitchFamily="34" charset="-120"/>
+              </a:rPr>
+              <a:t>Unterpunkt zur dritten Aussage</a:t>
+            </a:r>
+            <a:endParaRPr lang="en-US" sz="1600" dirty="0"/>
+          </a:p>
+          <a:p>
+            <a:pPr algn="l" lvl="1" marL="685800" indent="-342900">
+              <a:spcAft>
+                <a:spcPts val="800"/>
+              </a:spcAft>
+              <a:buSzPct val="100000"/>
+              <a:buChar char="•"/>
+            </a:pPr>
+            <a:r>
+              <a:rPr lang="en-US" sz="1600" dirty="0">
+                <a:solidFill>
+                  <a:srgbClr val="0F0F0F"/>
+                </a:solidFill>
+                <a:latin typeface="Inter" pitchFamily="34" charset="0"/>
+                <a:ea typeface="Inter" pitchFamily="34" charset="-122"/>
+                <a:cs typeface="Inter" pitchFamily="34" charset="-120"/>
+              </a:rPr>
+              <a:t>Weiterer Unterpunkt</a:t>
+            </a:r>
+            <a:endParaRPr lang="en-US" sz="1600" dirty="0"/>
+          </a:p>
+        </p:txBody>
+      </p:sp>
+      <p:sp>
+        <p:nvSpPr>
+          <p:cNvPr id="25" name="Slide Number Placeholder 0"/>
+          <p:cNvSpPr>
+            <a:spLocks noGrp="1"/>
+          </p:cNvSpPr>
+          <p:nvPr>
+            <p:ph type="sldNum" sz="quarter" idx="4294967295"/>
+          </p:nvPr>
+        </p:nvSpPr>
+        <p:spPr>
+          <a:xfrm>
+            <a:off x="8229600" y="4709160"/>
+            <a:ext cx="457200" cy="274320"/>
+          </a:xfrm>
+          <a:prstGeom prst="rect">
+            <a:avLst/>
+          </a:prstGeom>
+          <a:extLst>
+            <a:ext uri="{C572A759-6A51-4108-AA02-DFA0A04FC94B}">
+              <ma14:wrappingTextBoxFlag xmlns:ma14="http://schemas.microsoft.com/office/mac/drawingml/2011/main" val="0"/>
+            </a:ext>
+          </a:extLst>
+        </p:spPr>
+        <p:txBody>
+          <a:bodyPr lIns="0" tIns="0" rIns="0" bIns="0"/>
+          <a:lstStyle>
+            <a:lvl1pPr>
+              <a:defRPr sz="1000">
+                <a:solidFill>
+                  <a:srgbClr val="0F0F0F"/>
+                </a:solidFill>
+                <a:latin typeface="Inter"/>
+                <a:ea typeface="Inter"/>
+                <a:cs typeface="Inter"/>
+              </a:defRPr>
+            </a:lvl1pPr>
+          </a:lstStyle>
+          <a:p>
+            <a:pPr algn="r"/>
+            <a:fld id="{F7021451-1387-4CA6-816F-3879F97B5CBC}" type="slidenum">
+              <a:rPr b="0" lang="en-US"/>
+              <a:t>15</a:t>
+            </a:fld>
+            <a:endParaRPr lang="en-US"/>
+          </a:p>
+        </p:txBody>
+      </p:sp>
+    </p:spTree>
+  </p:cSld>
+  <p:clrMapOvr>
+    <a:masterClrMapping/>
+  </p:clrMapOvr>
+</p:sld>
+</file>
+
+<file path=ppt/slides/slide16.xml><?xml version="1.0" encoding="utf-8"?>
+<p:sld xmlns:a="http://schemas.openxmlformats.org/drawingml/2006/main" xmlns:r="http://schemas.openxmlformats.org/officeDocument/2006/relationships" xmlns:p="http://schemas.openxmlformats.org/presentationml/2006/main">
+  <p:cSld name="Slide 16">
+    <p:spTree>
+      <p:nvGrpSpPr>
+        <p:cNvPr id="1" name=""/>
+        <p:cNvGrpSpPr/>
+        <p:nvPr/>
+      </p:nvGrpSpPr>
+      <p:grpSpPr>
+        <a:xfrm>
+          <a:off x="0" y="0"/>
+          <a:ext cx="0" cy="0"/>
+          <a:chOff x="0" y="0"/>
+          <a:chExt cx="0" cy="0"/>
+        </a:xfrm>
+      </p:grpSpPr>
+      <p:sp>
+        <p:nvSpPr>
+          <p:cNvPr id="2" name="Text 0"/>
+          <p:cNvSpPr txBox="1"/>
+          <p:nvPr>
+            <p:ph idx="101" type="title" hasCustomPrompt="1"/>
+          </p:nvPr>
+        </p:nvSpPr>
+        <p:spPr>
+          <a:xfrm>
             <a:off x="548640" y="1371600"/>
             <a:ext cx="4846320" cy="1005840"/>
           </a:xfrm>
@@ -13552,7 +14624,7 @@
       </p:sp>
       <p:pic>
         <p:nvPicPr>
-          <p:cNvPr id="4" name="Image 0" descr="/var/folders/hm/sgq6d80d0vq133k7n8dc9bnw0000gn/T/maiershirts-dzZNxb/ph-portrait-252x252.png">    </p:cNvPr>
+          <p:cNvPr id="4" name="Image 0" descr="/var/folders/hm/sgq6d80d0vq133k7n8dc9bnw0000gn/T/maiershirts-J4Eovy/ph-portrait-252x252.png">    </p:cNvPr>
           <p:cNvPicPr>
             <a:picLocks noChangeAspect="1"/>
           </p:cNvPicPr>
@@ -13761,7 +14833,7 @@
       </p:sp>
       <p:pic>
         <p:nvPicPr>
-          <p:cNvPr id="9" name="Image 1" descr="/var/folders/hm/sgq6d80d0vq133k7n8dc9bnw0000gn/T/maiershirts-dzZNxb/ph-qr-240x240.png">    </p:cNvPr>
+          <p:cNvPr id="9" name="Image 1" descr="/var/folders/hm/sgq6d80d0vq133k7n8dc9bnw0000gn/T/maiershirts-J4Eovy/ph-qr-240x240.png">    </p:cNvPr>
           <p:cNvPicPr>
             <a:picLocks noChangeAspect="1"/>
           </p:cNvPicPr>
@@ -15177,7 +16249,7 @@
       </p:grpSpPr>
       <p:pic>
         <p:nvPicPr>
-          <p:cNvPr id="2" name="Image 0" descr="/var/folders/hm/sgq6d80d0vq133k7n8dc9bnw0000gn/T/maiershirts-dzZNxb/ph-foto-2400x1008.png">    </p:cNvPr>
+          <p:cNvPr id="2" name="Image 0" descr="/var/folders/hm/sgq6d80d0vq133k7n8dc9bnw0000gn/T/maiershirts-J4Eovy/ph-foto-2400x1008.png">    </p:cNvPr>
           <p:cNvPicPr>
             <a:picLocks noChangeAspect="1"/>
           </p:cNvPicPr>
@@ -16335,7 +17407,7 @@
       </p:sp>
       <p:pic>
         <p:nvPicPr>
-          <p:cNvPr id="3" name="Image 0" descr="/var/folders/hm/sgq6d80d0vq133k7n8dc9bnw0000gn/T/maiershirts-dzZNxb/ph-foto-696x456.png">    </p:cNvPr>
+          <p:cNvPr id="3" name="Image 0" descr="/var/folders/hm/sgq6d80d0vq133k7n8dc9bnw0000gn/T/maiershirts-J4Eovy/ph-foto-696x456.png">    </p:cNvPr>
           <p:cNvPicPr>
             <a:picLocks noChangeAspect="1"/>
           </p:cNvPicPr>
@@ -16505,7 +17577,7 @@
       </p:sp>
       <p:pic>
         <p:nvPicPr>
-          <p:cNvPr id="7" name="Image 1" descr="/var/folders/hm/sgq6d80d0vq133k7n8dc9bnw0000gn/T/maiershirts-dzZNxb/ph-foto-696x456.png">    </p:cNvPr>
+          <p:cNvPr id="7" name="Image 1" descr="/var/folders/hm/sgq6d80d0vq133k7n8dc9bnw0000gn/T/maiershirts-J4Eovy/ph-foto-696x456.png">    </p:cNvPr>
           <p:cNvPicPr>
             <a:picLocks noChangeAspect="1"/>
           </p:cNvPicPr>
@@ -16675,7 +17747,7 @@
       </p:sp>
       <p:pic>
         <p:nvPicPr>
-          <p:cNvPr id="11" name="Image 2" descr="/var/folders/hm/sgq6d80d0vq133k7n8dc9bnw0000gn/T/maiershirts-dzZNxb/ph-foto-696x456.png">    </p:cNvPr>
+          <p:cNvPr id="11" name="Image 2" descr="/var/folders/hm/sgq6d80d0vq133k7n8dc9bnw0000gn/T/maiershirts-J4Eovy/ph-foto-696x456.png">    </p:cNvPr>
           <p:cNvPicPr>
             <a:picLocks noChangeAspect="1"/>
           </p:cNvPicPr>

--- a/presentation/dist/Maiershirts_Master.pptx
+++ b/presentation/dist/Maiershirts_Master.pptx
@@ -7020,7 +7020,7 @@
         <p:spPr>
           <a:xfrm>
             <a:off x="566928" y="1344168"/>
-            <a:ext cx="1700784" cy="1243584"/>
+            <a:ext cx="1700784" cy="960120"/>
           </a:xfrm>
           <a:prstGeom prst="rect">
             <a:avLst/>
@@ -7071,13 +7071,13 @@
           <p:cNvPr id="5" name="Text 0"/>
           <p:cNvSpPr/>
           <p:nvPr>
-            <p:ph idx="103" type="pic" hasCustomPrompt="1"/>
-          </p:nvPr>
-        </p:nvSpPr>
-        <p:spPr>
-          <a:xfrm>
-            <a:off x="2670048" y="1344168"/>
-            <a:ext cx="1700784" cy="1243584"/>
+            <p:ph idx="103" type="body" hasCustomPrompt="1"/>
+          </p:nvPr>
+        </p:nvSpPr>
+        <p:spPr>
+          <a:xfrm>
+            <a:off x="566928" y="2414016"/>
+            <a:ext cx="1700784" cy="274320"/>
           </a:xfrm>
           <a:prstGeom prst="rect">
             <a:avLst/>
@@ -7090,6 +7090,59 @@
           <a:lstStyle>
             <a:lvl1pPr algn="ctr" indent="0" marL="0">
               <a:buNone/>
+              <a:defRPr lang="en-US" sz="1100" b="1" dirty="0">
+                <a:solidFill>
+                  <a:srgbClr val="0F0F0F"/>
+                </a:solidFill>
+                <a:latin typeface="Inter" pitchFamily="34" charset="0"/>
+                <a:ea typeface="Inter" pitchFamily="34" charset="-122"/>
+                <a:cs typeface="Inter" pitchFamily="34" charset="-120"/>
+              </a:defRPr>
+            </a:lvl1pPr>
+          </a:lstStyle>
+          <a:p>
+            <a:pPr algn="ctr" indent="0" marL="0">
+              <a:buNone/>
+            </a:pPr>
+            <a:r>
+              <a:rPr lang="en-US" sz="1100" b="1" dirty="0">
+                <a:solidFill>
+                  <a:srgbClr val="0F0F0F"/>
+                </a:solidFill>
+                <a:latin typeface="Inter" pitchFamily="34" charset="0"/>
+                <a:ea typeface="Inter" pitchFamily="34" charset="-122"/>
+                <a:cs typeface="Inter" pitchFamily="34" charset="-120"/>
+              </a:rPr>
+              <a:t>Vereinsname</a:t>
+            </a:r>
+            <a:endParaRPr lang="en-US" sz="1100" dirty="0"/>
+          </a:p>
+        </p:txBody>
+      </p:sp>
+      <p:sp>
+        <p:nvSpPr>
+          <p:cNvPr id="6" name="Text 0"/>
+          <p:cNvSpPr/>
+          <p:nvPr>
+            <p:ph idx="104" type="pic" hasCustomPrompt="1"/>
+          </p:nvPr>
+        </p:nvSpPr>
+        <p:spPr>
+          <a:xfrm>
+            <a:off x="2670048" y="1344168"/>
+            <a:ext cx="1700784" cy="960120"/>
+          </a:xfrm>
+          <a:prstGeom prst="rect">
+            <a:avLst/>
+          </a:prstGeom>
+          <a:noFill/>
+          <a:ln/>
+        </p:spPr>
+        <p:txBody>
+          <a:bodyPr wrap="square" rtlCol="0"/>
+          <a:lstStyle>
+            <a:lvl1pPr algn="ctr" indent="0" marL="0">
+              <a:buNone/>
               <a:defRPr lang="en-US" sz="1200" dirty="0">
                 <a:solidFill>
                   <a:srgbClr val="0F0F0F">
@@ -7125,16 +7178,16 @@
       </p:sp>
       <p:sp>
         <p:nvSpPr>
-          <p:cNvPr id="6" name="Text 0"/>
+          <p:cNvPr id="7" name="Text 0"/>
           <p:cNvSpPr/>
           <p:nvPr>
-            <p:ph idx="104" type="pic" hasCustomPrompt="1"/>
-          </p:nvPr>
-        </p:nvSpPr>
-        <p:spPr>
-          <a:xfrm>
-            <a:off x="4773168" y="1344168"/>
-            <a:ext cx="1700784" cy="1243584"/>
+            <p:ph idx="105" type="body" hasCustomPrompt="1"/>
+          </p:nvPr>
+        </p:nvSpPr>
+        <p:spPr>
+          <a:xfrm>
+            <a:off x="2670048" y="2414016"/>
+            <a:ext cx="1700784" cy="274320"/>
           </a:xfrm>
           <a:prstGeom prst="rect">
             <a:avLst/>
@@ -7147,6 +7200,59 @@
           <a:lstStyle>
             <a:lvl1pPr algn="ctr" indent="0" marL="0">
               <a:buNone/>
+              <a:defRPr lang="en-US" sz="1100" b="1" dirty="0">
+                <a:solidFill>
+                  <a:srgbClr val="0F0F0F"/>
+                </a:solidFill>
+                <a:latin typeface="Inter" pitchFamily="34" charset="0"/>
+                <a:ea typeface="Inter" pitchFamily="34" charset="-122"/>
+                <a:cs typeface="Inter" pitchFamily="34" charset="-120"/>
+              </a:defRPr>
+            </a:lvl1pPr>
+          </a:lstStyle>
+          <a:p>
+            <a:pPr algn="ctr" indent="0" marL="0">
+              <a:buNone/>
+            </a:pPr>
+            <a:r>
+              <a:rPr lang="en-US" sz="1100" b="1" dirty="0">
+                <a:solidFill>
+                  <a:srgbClr val="0F0F0F"/>
+                </a:solidFill>
+                <a:latin typeface="Inter" pitchFamily="34" charset="0"/>
+                <a:ea typeface="Inter" pitchFamily="34" charset="-122"/>
+                <a:cs typeface="Inter" pitchFamily="34" charset="-120"/>
+              </a:rPr>
+              <a:t>Vereinsname</a:t>
+            </a:r>
+            <a:endParaRPr lang="en-US" sz="1100" dirty="0"/>
+          </a:p>
+        </p:txBody>
+      </p:sp>
+      <p:sp>
+        <p:nvSpPr>
+          <p:cNvPr id="8" name="Text 0"/>
+          <p:cNvSpPr/>
+          <p:nvPr>
+            <p:ph idx="106" type="pic" hasCustomPrompt="1"/>
+          </p:nvPr>
+        </p:nvSpPr>
+        <p:spPr>
+          <a:xfrm>
+            <a:off x="4773168" y="1344168"/>
+            <a:ext cx="1700784" cy="960120"/>
+          </a:xfrm>
+          <a:prstGeom prst="rect">
+            <a:avLst/>
+          </a:prstGeom>
+          <a:noFill/>
+          <a:ln/>
+        </p:spPr>
+        <p:txBody>
+          <a:bodyPr wrap="square" rtlCol="0"/>
+          <a:lstStyle>
+            <a:lvl1pPr algn="ctr" indent="0" marL="0">
+              <a:buNone/>
               <a:defRPr lang="en-US" sz="1200" dirty="0">
                 <a:solidFill>
                   <a:srgbClr val="0F0F0F">
@@ -7182,16 +7288,16 @@
       </p:sp>
       <p:sp>
         <p:nvSpPr>
-          <p:cNvPr id="7" name="Text 0"/>
+          <p:cNvPr id="9" name="Text 0"/>
           <p:cNvSpPr/>
           <p:nvPr>
-            <p:ph idx="105" type="pic" hasCustomPrompt="1"/>
-          </p:nvPr>
-        </p:nvSpPr>
-        <p:spPr>
-          <a:xfrm>
-            <a:off x="6876288" y="1344168"/>
-            <a:ext cx="1700784" cy="1243584"/>
+            <p:ph idx="107" type="body" hasCustomPrompt="1"/>
+          </p:nvPr>
+        </p:nvSpPr>
+        <p:spPr>
+          <a:xfrm>
+            <a:off x="4773168" y="2414016"/>
+            <a:ext cx="1700784" cy="274320"/>
           </a:xfrm>
           <a:prstGeom prst="rect">
             <a:avLst/>
@@ -7204,6 +7310,59 @@
           <a:lstStyle>
             <a:lvl1pPr algn="ctr" indent="0" marL="0">
               <a:buNone/>
+              <a:defRPr lang="en-US" sz="1100" b="1" dirty="0">
+                <a:solidFill>
+                  <a:srgbClr val="0F0F0F"/>
+                </a:solidFill>
+                <a:latin typeface="Inter" pitchFamily="34" charset="0"/>
+                <a:ea typeface="Inter" pitchFamily="34" charset="-122"/>
+                <a:cs typeface="Inter" pitchFamily="34" charset="-120"/>
+              </a:defRPr>
+            </a:lvl1pPr>
+          </a:lstStyle>
+          <a:p>
+            <a:pPr algn="ctr" indent="0" marL="0">
+              <a:buNone/>
+            </a:pPr>
+            <a:r>
+              <a:rPr lang="en-US" sz="1100" b="1" dirty="0">
+                <a:solidFill>
+                  <a:srgbClr val="0F0F0F"/>
+                </a:solidFill>
+                <a:latin typeface="Inter" pitchFamily="34" charset="0"/>
+                <a:ea typeface="Inter" pitchFamily="34" charset="-122"/>
+                <a:cs typeface="Inter" pitchFamily="34" charset="-120"/>
+              </a:rPr>
+              <a:t>Vereinsname</a:t>
+            </a:r>
+            <a:endParaRPr lang="en-US" sz="1100" dirty="0"/>
+          </a:p>
+        </p:txBody>
+      </p:sp>
+      <p:sp>
+        <p:nvSpPr>
+          <p:cNvPr id="10" name="Text 0"/>
+          <p:cNvSpPr/>
+          <p:nvPr>
+            <p:ph idx="108" type="pic" hasCustomPrompt="1"/>
+          </p:nvPr>
+        </p:nvSpPr>
+        <p:spPr>
+          <a:xfrm>
+            <a:off x="6876288" y="1344168"/>
+            <a:ext cx="1700784" cy="960120"/>
+          </a:xfrm>
+          <a:prstGeom prst="rect">
+            <a:avLst/>
+          </a:prstGeom>
+          <a:noFill/>
+          <a:ln/>
+        </p:spPr>
+        <p:txBody>
+          <a:bodyPr wrap="square" rtlCol="0"/>
+          <a:lstStyle>
+            <a:lvl1pPr algn="ctr" indent="0" marL="0">
+              <a:buNone/>
               <a:defRPr lang="en-US" sz="1200" dirty="0">
                 <a:solidFill>
                   <a:srgbClr val="0F0F0F">
@@ -7239,16 +7398,16 @@
       </p:sp>
       <p:sp>
         <p:nvSpPr>
-          <p:cNvPr id="8" name="Text 0"/>
+          <p:cNvPr id="11" name="Text 0"/>
           <p:cNvSpPr/>
           <p:nvPr>
-            <p:ph idx="106" type="pic" hasCustomPrompt="1"/>
-          </p:nvPr>
-        </p:nvSpPr>
-        <p:spPr>
-          <a:xfrm>
-            <a:off x="566928" y="2944368"/>
-            <a:ext cx="1700784" cy="1243584"/>
+            <p:ph idx="109" type="body" hasCustomPrompt="1"/>
+          </p:nvPr>
+        </p:nvSpPr>
+        <p:spPr>
+          <a:xfrm>
+            <a:off x="6876288" y="2414016"/>
+            <a:ext cx="1700784" cy="274320"/>
           </a:xfrm>
           <a:prstGeom prst="rect">
             <a:avLst/>
@@ -7261,6 +7420,59 @@
           <a:lstStyle>
             <a:lvl1pPr algn="ctr" indent="0" marL="0">
               <a:buNone/>
+              <a:defRPr lang="en-US" sz="1100" b="1" dirty="0">
+                <a:solidFill>
+                  <a:srgbClr val="0F0F0F"/>
+                </a:solidFill>
+                <a:latin typeface="Inter" pitchFamily="34" charset="0"/>
+                <a:ea typeface="Inter" pitchFamily="34" charset="-122"/>
+                <a:cs typeface="Inter" pitchFamily="34" charset="-120"/>
+              </a:defRPr>
+            </a:lvl1pPr>
+          </a:lstStyle>
+          <a:p>
+            <a:pPr algn="ctr" indent="0" marL="0">
+              <a:buNone/>
+            </a:pPr>
+            <a:r>
+              <a:rPr lang="en-US" sz="1100" b="1" dirty="0">
+                <a:solidFill>
+                  <a:srgbClr val="0F0F0F"/>
+                </a:solidFill>
+                <a:latin typeface="Inter" pitchFamily="34" charset="0"/>
+                <a:ea typeface="Inter" pitchFamily="34" charset="-122"/>
+                <a:cs typeface="Inter" pitchFamily="34" charset="-120"/>
+              </a:rPr>
+              <a:t>Vereinsname</a:t>
+            </a:r>
+            <a:endParaRPr lang="en-US" sz="1100" dirty="0"/>
+          </a:p>
+        </p:txBody>
+      </p:sp>
+      <p:sp>
+        <p:nvSpPr>
+          <p:cNvPr id="12" name="Text 0"/>
+          <p:cNvSpPr/>
+          <p:nvPr>
+            <p:ph idx="110" type="pic" hasCustomPrompt="1"/>
+          </p:nvPr>
+        </p:nvSpPr>
+        <p:spPr>
+          <a:xfrm>
+            <a:off x="566928" y="2944368"/>
+            <a:ext cx="1700784" cy="960120"/>
+          </a:xfrm>
+          <a:prstGeom prst="rect">
+            <a:avLst/>
+          </a:prstGeom>
+          <a:noFill/>
+          <a:ln/>
+        </p:spPr>
+        <p:txBody>
+          <a:bodyPr wrap="square" rtlCol="0"/>
+          <a:lstStyle>
+            <a:lvl1pPr algn="ctr" indent="0" marL="0">
+              <a:buNone/>
               <a:defRPr lang="en-US" sz="1200" dirty="0">
                 <a:solidFill>
                   <a:srgbClr val="0F0F0F">
@@ -7296,16 +7508,16 @@
       </p:sp>
       <p:sp>
         <p:nvSpPr>
-          <p:cNvPr id="9" name="Text 0"/>
+          <p:cNvPr id="13" name="Text 0"/>
           <p:cNvSpPr/>
           <p:nvPr>
-            <p:ph idx="107" type="pic" hasCustomPrompt="1"/>
-          </p:nvPr>
-        </p:nvSpPr>
-        <p:spPr>
-          <a:xfrm>
-            <a:off x="2670048" y="2944368"/>
-            <a:ext cx="1700784" cy="1243584"/>
+            <p:ph idx="111" type="body" hasCustomPrompt="1"/>
+          </p:nvPr>
+        </p:nvSpPr>
+        <p:spPr>
+          <a:xfrm>
+            <a:off x="566928" y="4014216"/>
+            <a:ext cx="1700784" cy="274320"/>
           </a:xfrm>
           <a:prstGeom prst="rect">
             <a:avLst/>
@@ -7318,6 +7530,59 @@
           <a:lstStyle>
             <a:lvl1pPr algn="ctr" indent="0" marL="0">
               <a:buNone/>
+              <a:defRPr lang="en-US" sz="1100" b="1" dirty="0">
+                <a:solidFill>
+                  <a:srgbClr val="0F0F0F"/>
+                </a:solidFill>
+                <a:latin typeface="Inter" pitchFamily="34" charset="0"/>
+                <a:ea typeface="Inter" pitchFamily="34" charset="-122"/>
+                <a:cs typeface="Inter" pitchFamily="34" charset="-120"/>
+              </a:defRPr>
+            </a:lvl1pPr>
+          </a:lstStyle>
+          <a:p>
+            <a:pPr algn="ctr" indent="0" marL="0">
+              <a:buNone/>
+            </a:pPr>
+            <a:r>
+              <a:rPr lang="en-US" sz="1100" b="1" dirty="0">
+                <a:solidFill>
+                  <a:srgbClr val="0F0F0F"/>
+                </a:solidFill>
+                <a:latin typeface="Inter" pitchFamily="34" charset="0"/>
+                <a:ea typeface="Inter" pitchFamily="34" charset="-122"/>
+                <a:cs typeface="Inter" pitchFamily="34" charset="-120"/>
+              </a:rPr>
+              <a:t>Vereinsname</a:t>
+            </a:r>
+            <a:endParaRPr lang="en-US" sz="1100" dirty="0"/>
+          </a:p>
+        </p:txBody>
+      </p:sp>
+      <p:sp>
+        <p:nvSpPr>
+          <p:cNvPr id="14" name="Text 0"/>
+          <p:cNvSpPr/>
+          <p:nvPr>
+            <p:ph idx="112" type="pic" hasCustomPrompt="1"/>
+          </p:nvPr>
+        </p:nvSpPr>
+        <p:spPr>
+          <a:xfrm>
+            <a:off x="2670048" y="2944368"/>
+            <a:ext cx="1700784" cy="960120"/>
+          </a:xfrm>
+          <a:prstGeom prst="rect">
+            <a:avLst/>
+          </a:prstGeom>
+          <a:noFill/>
+          <a:ln/>
+        </p:spPr>
+        <p:txBody>
+          <a:bodyPr wrap="square" rtlCol="0"/>
+          <a:lstStyle>
+            <a:lvl1pPr algn="ctr" indent="0" marL="0">
+              <a:buNone/>
               <a:defRPr lang="en-US" sz="1200" dirty="0">
                 <a:solidFill>
                   <a:srgbClr val="0F0F0F">
@@ -7353,16 +7618,16 @@
       </p:sp>
       <p:sp>
         <p:nvSpPr>
-          <p:cNvPr id="10" name="Text 0"/>
+          <p:cNvPr id="15" name="Text 0"/>
           <p:cNvSpPr/>
           <p:nvPr>
-            <p:ph idx="108" type="pic" hasCustomPrompt="1"/>
-          </p:nvPr>
-        </p:nvSpPr>
-        <p:spPr>
-          <a:xfrm>
-            <a:off x="4773168" y="2944368"/>
-            <a:ext cx="1700784" cy="1243584"/>
+            <p:ph idx="113" type="body" hasCustomPrompt="1"/>
+          </p:nvPr>
+        </p:nvSpPr>
+        <p:spPr>
+          <a:xfrm>
+            <a:off x="2670048" y="4014216"/>
+            <a:ext cx="1700784" cy="274320"/>
           </a:xfrm>
           <a:prstGeom prst="rect">
             <a:avLst/>
@@ -7375,6 +7640,59 @@
           <a:lstStyle>
             <a:lvl1pPr algn="ctr" indent="0" marL="0">
               <a:buNone/>
+              <a:defRPr lang="en-US" sz="1100" b="1" dirty="0">
+                <a:solidFill>
+                  <a:srgbClr val="0F0F0F"/>
+                </a:solidFill>
+                <a:latin typeface="Inter" pitchFamily="34" charset="0"/>
+                <a:ea typeface="Inter" pitchFamily="34" charset="-122"/>
+                <a:cs typeface="Inter" pitchFamily="34" charset="-120"/>
+              </a:defRPr>
+            </a:lvl1pPr>
+          </a:lstStyle>
+          <a:p>
+            <a:pPr algn="ctr" indent="0" marL="0">
+              <a:buNone/>
+            </a:pPr>
+            <a:r>
+              <a:rPr lang="en-US" sz="1100" b="1" dirty="0">
+                <a:solidFill>
+                  <a:srgbClr val="0F0F0F"/>
+                </a:solidFill>
+                <a:latin typeface="Inter" pitchFamily="34" charset="0"/>
+                <a:ea typeface="Inter" pitchFamily="34" charset="-122"/>
+                <a:cs typeface="Inter" pitchFamily="34" charset="-120"/>
+              </a:rPr>
+              <a:t>Vereinsname</a:t>
+            </a:r>
+            <a:endParaRPr lang="en-US" sz="1100" dirty="0"/>
+          </a:p>
+        </p:txBody>
+      </p:sp>
+      <p:sp>
+        <p:nvSpPr>
+          <p:cNvPr id="16" name="Text 0"/>
+          <p:cNvSpPr/>
+          <p:nvPr>
+            <p:ph idx="114" type="pic" hasCustomPrompt="1"/>
+          </p:nvPr>
+        </p:nvSpPr>
+        <p:spPr>
+          <a:xfrm>
+            <a:off x="4773168" y="2944368"/>
+            <a:ext cx="1700784" cy="960120"/>
+          </a:xfrm>
+          <a:prstGeom prst="rect">
+            <a:avLst/>
+          </a:prstGeom>
+          <a:noFill/>
+          <a:ln/>
+        </p:spPr>
+        <p:txBody>
+          <a:bodyPr wrap="square" rtlCol="0"/>
+          <a:lstStyle>
+            <a:lvl1pPr algn="ctr" indent="0" marL="0">
+              <a:buNone/>
               <a:defRPr lang="en-US" sz="1200" dirty="0">
                 <a:solidFill>
                   <a:srgbClr val="0F0F0F">
@@ -7410,16 +7728,16 @@
       </p:sp>
       <p:sp>
         <p:nvSpPr>
-          <p:cNvPr id="11" name="Text 0"/>
+          <p:cNvPr id="17" name="Text 0"/>
           <p:cNvSpPr/>
           <p:nvPr>
-            <p:ph idx="109" type="pic" hasCustomPrompt="1"/>
-          </p:nvPr>
-        </p:nvSpPr>
-        <p:spPr>
-          <a:xfrm>
-            <a:off x="6876288" y="2944368"/>
-            <a:ext cx="1700784" cy="1243584"/>
+            <p:ph idx="115" type="body" hasCustomPrompt="1"/>
+          </p:nvPr>
+        </p:nvSpPr>
+        <p:spPr>
+          <a:xfrm>
+            <a:off x="4773168" y="4014216"/>
+            <a:ext cx="1700784" cy="274320"/>
           </a:xfrm>
           <a:prstGeom prst="rect">
             <a:avLst/>
@@ -7432,6 +7750,59 @@
           <a:lstStyle>
             <a:lvl1pPr algn="ctr" indent="0" marL="0">
               <a:buNone/>
+              <a:defRPr lang="en-US" sz="1100" b="1" dirty="0">
+                <a:solidFill>
+                  <a:srgbClr val="0F0F0F"/>
+                </a:solidFill>
+                <a:latin typeface="Inter" pitchFamily="34" charset="0"/>
+                <a:ea typeface="Inter" pitchFamily="34" charset="-122"/>
+                <a:cs typeface="Inter" pitchFamily="34" charset="-120"/>
+              </a:defRPr>
+            </a:lvl1pPr>
+          </a:lstStyle>
+          <a:p>
+            <a:pPr algn="ctr" indent="0" marL="0">
+              <a:buNone/>
+            </a:pPr>
+            <a:r>
+              <a:rPr lang="en-US" sz="1100" b="1" dirty="0">
+                <a:solidFill>
+                  <a:srgbClr val="0F0F0F"/>
+                </a:solidFill>
+                <a:latin typeface="Inter" pitchFamily="34" charset="0"/>
+                <a:ea typeface="Inter" pitchFamily="34" charset="-122"/>
+                <a:cs typeface="Inter" pitchFamily="34" charset="-120"/>
+              </a:rPr>
+              <a:t>Vereinsname</a:t>
+            </a:r>
+            <a:endParaRPr lang="en-US" sz="1100" dirty="0"/>
+          </a:p>
+        </p:txBody>
+      </p:sp>
+      <p:sp>
+        <p:nvSpPr>
+          <p:cNvPr id="18" name="Text 0"/>
+          <p:cNvSpPr/>
+          <p:nvPr>
+            <p:ph idx="116" type="pic" hasCustomPrompt="1"/>
+          </p:nvPr>
+        </p:nvSpPr>
+        <p:spPr>
+          <a:xfrm>
+            <a:off x="6876288" y="2944368"/>
+            <a:ext cx="1700784" cy="960120"/>
+          </a:xfrm>
+          <a:prstGeom prst="rect">
+            <a:avLst/>
+          </a:prstGeom>
+          <a:noFill/>
+          <a:ln/>
+        </p:spPr>
+        <p:txBody>
+          <a:bodyPr wrap="square" rtlCol="0"/>
+          <a:lstStyle>
+            <a:lvl1pPr algn="ctr" indent="0" marL="0">
+              <a:buNone/>
               <a:defRPr lang="en-US" sz="1200" dirty="0">
                 <a:solidFill>
                   <a:srgbClr val="0F0F0F">
@@ -7467,7 +7838,60 @@
       </p:sp>
       <p:sp>
         <p:nvSpPr>
-          <p:cNvPr id="12" name="Text 0"/>
+          <p:cNvPr id="19" name="Text 0"/>
+          <p:cNvSpPr/>
+          <p:nvPr>
+            <p:ph idx="117" type="body" hasCustomPrompt="1"/>
+          </p:nvPr>
+        </p:nvSpPr>
+        <p:spPr>
+          <a:xfrm>
+            <a:off x="6876288" y="4014216"/>
+            <a:ext cx="1700784" cy="274320"/>
+          </a:xfrm>
+          <a:prstGeom prst="rect">
+            <a:avLst/>
+          </a:prstGeom>
+          <a:noFill/>
+          <a:ln/>
+        </p:spPr>
+        <p:txBody>
+          <a:bodyPr wrap="square" rtlCol="0"/>
+          <a:lstStyle>
+            <a:lvl1pPr algn="ctr" indent="0" marL="0">
+              <a:buNone/>
+              <a:defRPr lang="en-US" sz="1100" b="1" dirty="0">
+                <a:solidFill>
+                  <a:srgbClr val="0F0F0F"/>
+                </a:solidFill>
+                <a:latin typeface="Inter" pitchFamily="34" charset="0"/>
+                <a:ea typeface="Inter" pitchFamily="34" charset="-122"/>
+                <a:cs typeface="Inter" pitchFamily="34" charset="-120"/>
+              </a:defRPr>
+            </a:lvl1pPr>
+          </a:lstStyle>
+          <a:p>
+            <a:pPr algn="ctr" indent="0" marL="0">
+              <a:buNone/>
+            </a:pPr>
+            <a:r>
+              <a:rPr lang="en-US" sz="1100" b="1" dirty="0">
+                <a:solidFill>
+                  <a:srgbClr val="0F0F0F"/>
+                </a:solidFill>
+                <a:latin typeface="Inter" pitchFamily="34" charset="0"/>
+                <a:ea typeface="Inter" pitchFamily="34" charset="-122"/>
+                <a:cs typeface="Inter" pitchFamily="34" charset="-120"/>
+              </a:rPr>
+              <a:t>Vereinsname</a:t>
+            </a:r>
+            <a:endParaRPr lang="en-US" sz="1100" dirty="0"/>
+          </a:p>
+        </p:txBody>
+      </p:sp>
+      <p:sp>
+        <p:nvSpPr>
+          <p:cNvPr id="20" name="Text 0"/>
           <p:cNvSpPr/>
           <p:nvPr/>
         </p:nvSpPr>
@@ -13064,7 +13488,7 @@
       </p:sp>
       <p:pic>
         <p:nvPicPr>
-          <p:cNvPr id="3" name="Image 0" descr="/var/folders/hm/sgq6d80d0vq133k7n8dc9bnw0000gn/T/maiershirts-J4Eovy/ref-unternehmen-0.png">    </p:cNvPr>
+          <p:cNvPr id="3" name="Image 0" descr="/var/folders/hm/sgq6d80d0vq133k7n8dc9bnw0000gn/T/maiershirts-skcBUc/ref-unternehmen-0.png">    </p:cNvPr>
           <p:cNvPicPr>
             <a:picLocks noChangeAspect="1"/>
           </p:cNvPicPr>
@@ -13090,7 +13514,7 @@
       </p:pic>
       <p:pic>
         <p:nvPicPr>
-          <p:cNvPr id="4" name="Image 1" descr="/var/folders/hm/sgq6d80d0vq133k7n8dc9bnw0000gn/T/maiershirts-J4Eovy/ref-unternehmen-1.png">    </p:cNvPr>
+          <p:cNvPr id="4" name="Image 1" descr="/var/folders/hm/sgq6d80d0vq133k7n8dc9bnw0000gn/T/maiershirts-skcBUc/ref-unternehmen-1.png">    </p:cNvPr>
           <p:cNvPicPr>
             <a:picLocks noChangeAspect="1"/>
           </p:cNvPicPr>
@@ -13116,7 +13540,7 @@
       </p:pic>
       <p:pic>
         <p:nvPicPr>
-          <p:cNvPr id="5" name="Image 2" descr="/var/folders/hm/sgq6d80d0vq133k7n8dc9bnw0000gn/T/maiershirts-J4Eovy/ref-unternehmen-2.png">    </p:cNvPr>
+          <p:cNvPr id="5" name="Image 2" descr="/var/folders/hm/sgq6d80d0vq133k7n8dc9bnw0000gn/T/maiershirts-skcBUc/ref-unternehmen-2.png">    </p:cNvPr>
           <p:cNvPicPr>
             <a:picLocks noChangeAspect="1"/>
           </p:cNvPicPr>
@@ -13142,7 +13566,7 @@
       </p:pic>
       <p:pic>
         <p:nvPicPr>
-          <p:cNvPr id="6" name="Image 3" descr="/var/folders/hm/sgq6d80d0vq133k7n8dc9bnw0000gn/T/maiershirts-J4Eovy/ref-unternehmen-3.png">    </p:cNvPr>
+          <p:cNvPr id="6" name="Image 3" descr="/var/folders/hm/sgq6d80d0vq133k7n8dc9bnw0000gn/T/maiershirts-skcBUc/ref-unternehmen-3.png">    </p:cNvPr>
           <p:cNvPicPr>
             <a:picLocks noChangeAspect="1"/>
           </p:cNvPicPr>
@@ -13168,7 +13592,7 @@
       </p:pic>
       <p:pic>
         <p:nvPicPr>
-          <p:cNvPr id="7" name="Image 4" descr="/var/folders/hm/sgq6d80d0vq133k7n8dc9bnw0000gn/T/maiershirts-J4Eovy/ref-unternehmen-4.png">    </p:cNvPr>
+          <p:cNvPr id="7" name="Image 4" descr="/var/folders/hm/sgq6d80d0vq133k7n8dc9bnw0000gn/T/maiershirts-skcBUc/ref-unternehmen-4.png">    </p:cNvPr>
           <p:cNvPicPr>
             <a:picLocks noChangeAspect="1"/>
           </p:cNvPicPr>
@@ -13194,7 +13618,7 @@
       </p:pic>
       <p:pic>
         <p:nvPicPr>
-          <p:cNvPr id="8" name="Image 5" descr="/var/folders/hm/sgq6d80d0vq133k7n8dc9bnw0000gn/T/maiershirts-J4Eovy/ref-unternehmen-5.png">    </p:cNvPr>
+          <p:cNvPr id="8" name="Image 5" descr="/var/folders/hm/sgq6d80d0vq133k7n8dc9bnw0000gn/T/maiershirts-skcBUc/ref-unternehmen-5.png">    </p:cNvPr>
           <p:cNvPicPr>
             <a:picLocks noChangeAspect="1"/>
           </p:cNvPicPr>
@@ -13220,7 +13644,7 @@
       </p:pic>
       <p:pic>
         <p:nvPicPr>
-          <p:cNvPr id="9" name="Image 6" descr="/var/folders/hm/sgq6d80d0vq133k7n8dc9bnw0000gn/T/maiershirts-J4Eovy/ref-unternehmen-6.png">    </p:cNvPr>
+          <p:cNvPr id="9" name="Image 6" descr="/var/folders/hm/sgq6d80d0vq133k7n8dc9bnw0000gn/T/maiershirts-skcBUc/ref-unternehmen-6.png">    </p:cNvPr>
           <p:cNvPicPr>
             <a:picLocks noChangeAspect="1"/>
           </p:cNvPicPr>
@@ -13246,7 +13670,7 @@
       </p:pic>
       <p:pic>
         <p:nvPicPr>
-          <p:cNvPr id="10" name="Image 7" descr="/var/folders/hm/sgq6d80d0vq133k7n8dc9bnw0000gn/T/maiershirts-J4Eovy/ref-unternehmen-7.png">    </p:cNvPr>
+          <p:cNvPr id="10" name="Image 7" descr="/var/folders/hm/sgq6d80d0vq133k7n8dc9bnw0000gn/T/maiershirts-skcBUc/ref-unternehmen-7.png">    </p:cNvPr>
           <p:cNvPicPr>
             <a:picLocks noChangeAspect="1"/>
           </p:cNvPicPr>
@@ -13272,7 +13696,7 @@
       </p:pic>
       <p:pic>
         <p:nvPicPr>
-          <p:cNvPr id="11" name="Image 8" descr="/var/folders/hm/sgq6d80d0vq133k7n8dc9bnw0000gn/T/maiershirts-J4Eovy/ref-unternehmen-8.png">    </p:cNvPr>
+          <p:cNvPr id="11" name="Image 8" descr="/var/folders/hm/sgq6d80d0vq133k7n8dc9bnw0000gn/T/maiershirts-skcBUc/ref-unternehmen-8.png">    </p:cNvPr>
           <p:cNvPicPr>
             <a:picLocks noChangeAspect="1"/>
           </p:cNvPicPr>
@@ -13298,7 +13722,7 @@
       </p:pic>
       <p:pic>
         <p:nvPicPr>
-          <p:cNvPr id="12" name="Image 9" descr="/var/folders/hm/sgq6d80d0vq133k7n8dc9bnw0000gn/T/maiershirts-J4Eovy/ph-logo-446x194.png">    </p:cNvPr>
+          <p:cNvPr id="12" name="Image 9" descr="/var/folders/hm/sgq6d80d0vq133k7n8dc9bnw0000gn/T/maiershirts-skcBUc/ph-logo-446x194.png">    </p:cNvPr>
           <p:cNvPicPr>
             <a:picLocks noChangeAspect="1"/>
           </p:cNvPicPr>
@@ -13324,7 +13748,7 @@
       </p:pic>
       <p:pic>
         <p:nvPicPr>
-          <p:cNvPr id="13" name="Image 10" descr="/var/folders/hm/sgq6d80d0vq133k7n8dc9bnw0000gn/T/maiershirts-J4Eovy/ph-logo-446x194.png">    </p:cNvPr>
+          <p:cNvPr id="13" name="Image 10" descr="/var/folders/hm/sgq6d80d0vq133k7n8dc9bnw0000gn/T/maiershirts-skcBUc/ph-logo-446x194.png">    </p:cNvPr>
           <p:cNvPicPr>
             <a:picLocks noChangeAspect="1"/>
           </p:cNvPicPr>
@@ -13350,7 +13774,7 @@
       </p:pic>
       <p:pic>
         <p:nvPicPr>
-          <p:cNvPr id="14" name="Image 11" descr="/var/folders/hm/sgq6d80d0vq133k7n8dc9bnw0000gn/T/maiershirts-J4Eovy/ph-logo-446x194.png">    </p:cNvPr>
+          <p:cNvPr id="14" name="Image 11" descr="/var/folders/hm/sgq6d80d0vq133k7n8dc9bnw0000gn/T/maiershirts-skcBUc/ph-logo-446x194.png">    </p:cNvPr>
           <p:cNvPicPr>
             <a:picLocks noChangeAspect="1"/>
           </p:cNvPicPr>
@@ -13490,7 +13914,7 @@
       </p:sp>
       <p:pic>
         <p:nvPicPr>
-          <p:cNvPr id="3" name="Image 0" descr="/var/folders/hm/sgq6d80d0vq133k7n8dc9bnw0000gn/T/maiershirts-J4Eovy/ref-vereine-0.png">    </p:cNvPr>
+          <p:cNvPr id="3" name="Image 0" descr="/var/folders/hm/sgq6d80d0vq133k7n8dc9bnw0000gn/T/maiershirts-skcBUc/ref-vereine-0.png">    </p:cNvPr>
           <p:cNvPicPr>
             <a:picLocks noChangeAspect="1"/>
           </p:cNvPicPr>
@@ -13506,22 +13930,63 @@
         </p:blipFill>
         <p:spPr>
           <a:xfrm>
-            <a:off x="713232" y="1556490"/>
-            <a:ext cx="1408176" cy="818939"/>
+            <a:off x="843422" y="1490472"/>
+            <a:ext cx="1147795" cy="667512"/>
           </a:xfrm>
           <a:prstGeom prst="rect">
             <a:avLst/>
           </a:prstGeom>
         </p:spPr>
       </p:pic>
+      <p:sp>
+        <p:nvSpPr>
+          <p:cNvPr id="4" name="Text 0"/>
+          <p:cNvSpPr txBox="1"/>
+          <p:nvPr>
+            <p:ph idx="103" type="body" hasCustomPrompt="1"/>
+          </p:nvPr>
+        </p:nvSpPr>
+        <p:spPr>
+          <a:xfrm>
+            <a:off x="566928" y="2414016"/>
+            <a:ext cx="1700784" cy="274320"/>
+          </a:xfrm>
+          <a:prstGeom prst="rect">
+            <a:avLst/>
+          </a:prstGeom>
+          <a:noFill/>
+          <a:ln/>
+        </p:spPr>
+        <p:txBody>
+          <a:bodyPr wrap="square" lIns="0" tIns="0" rIns="0" bIns="0" rtlCol="0" anchor="ctr"/>
+          <a:lstStyle/>
+          <a:p>
+            <a:pPr algn="ctr" indent="0" marL="0">
+              <a:buNone/>
+            </a:pPr>
+            <a:r>
+              <a:rPr lang="en-US" sz="1100" b="1" dirty="0">
+                <a:solidFill>
+                  <a:srgbClr val="0F0F0F"/>
+                </a:solidFill>
+                <a:latin typeface="Inter" pitchFamily="34" charset="0"/>
+                <a:ea typeface="Inter" pitchFamily="34" charset="-122"/>
+                <a:cs typeface="Inter" pitchFamily="34" charset="-120"/>
+              </a:rPr>
+              <a:t>DAV Sektion Tübingen</a:t>
+            </a:r>
+            <a:endParaRPr lang="en-US" sz="1100" dirty="0"/>
+          </a:p>
+        </p:txBody>
+      </p:sp>
       <p:pic>
         <p:nvPicPr>
-          <p:cNvPr id="4" name="Image 1" descr="/var/folders/hm/sgq6d80d0vq133k7n8dc9bnw0000gn/T/maiershirts-J4Eovy/ref-vereine-1.png">    </p:cNvPr>
+          <p:cNvPr id="5" name="Image 1" descr="/var/folders/hm/sgq6d80d0vq133k7n8dc9bnw0000gn/T/maiershirts-skcBUc/ref-vereine-1.png">    </p:cNvPr>
           <p:cNvPicPr>
             <a:picLocks noChangeAspect="1"/>
           </p:cNvPicPr>
           <p:nvPr>
-            <p:ph idx="103" type="pic" hasCustomPrompt="1"/>
+            <p:ph idx="104" type="pic" hasCustomPrompt="1"/>
           </p:nvPr>
         </p:nvPicPr>
         <p:blipFill>
@@ -13532,22 +13997,63 @@
         </p:blipFill>
         <p:spPr>
           <a:xfrm>
-            <a:off x="2816352" y="1611094"/>
-            <a:ext cx="1408176" cy="709731"/>
+            <a:off x="2858236" y="1490472"/>
+            <a:ext cx="1324409" cy="667512"/>
           </a:xfrm>
           <a:prstGeom prst="rect">
             <a:avLst/>
           </a:prstGeom>
         </p:spPr>
       </p:pic>
+      <p:sp>
+        <p:nvSpPr>
+          <p:cNvPr id="6" name="Text 0"/>
+          <p:cNvSpPr txBox="1"/>
+          <p:nvPr>
+            <p:ph idx="105" type="body" hasCustomPrompt="1"/>
+          </p:nvPr>
+        </p:nvSpPr>
+        <p:spPr>
+          <a:xfrm>
+            <a:off x="2670048" y="2414016"/>
+            <a:ext cx="1700784" cy="274320"/>
+          </a:xfrm>
+          <a:prstGeom prst="rect">
+            <a:avLst/>
+          </a:prstGeom>
+          <a:noFill/>
+          <a:ln/>
+        </p:spPr>
+        <p:txBody>
+          <a:bodyPr wrap="square" lIns="0" tIns="0" rIns="0" bIns="0" rtlCol="0" anchor="ctr"/>
+          <a:lstStyle/>
+          <a:p>
+            <a:pPr algn="ctr" indent="0" marL="0">
+              <a:buNone/>
+            </a:pPr>
+            <a:r>
+              <a:rPr lang="en-US" sz="1100" b="1" dirty="0">
+                <a:solidFill>
+                  <a:srgbClr val="0F0F0F"/>
+                </a:solidFill>
+                <a:latin typeface="Inter" pitchFamily="34" charset="0"/>
+                <a:ea typeface="Inter" pitchFamily="34" charset="-122"/>
+                <a:cs typeface="Inter" pitchFamily="34" charset="-120"/>
+              </a:rPr>
+              <a:t>Tennisclub Ammerbuch</a:t>
+            </a:r>
+            <a:endParaRPr lang="en-US" sz="1100" dirty="0"/>
+          </a:p>
+        </p:txBody>
+      </p:sp>
       <p:pic>
         <p:nvPicPr>
-          <p:cNvPr id="5" name="Image 2" descr="/var/folders/hm/sgq6d80d0vq133k7n8dc9bnw0000gn/T/maiershirts-J4Eovy/ref-vereine-2.png">    </p:cNvPr>
+          <p:cNvPr id="7" name="Image 2" descr="/var/folders/hm/sgq6d80d0vq133k7n8dc9bnw0000gn/T/maiershirts-skcBUc/ref-vereine-2.png">    </p:cNvPr>
           <p:cNvPicPr>
             <a:picLocks noChangeAspect="1"/>
           </p:cNvPicPr>
           <p:nvPr>
-            <p:ph idx="104" type="pic" hasCustomPrompt="1"/>
+            <p:ph idx="106" type="pic" hasCustomPrompt="1"/>
           </p:nvPr>
         </p:nvPicPr>
         <p:blipFill>
@@ -13558,22 +14064,63 @@
         </p:blipFill>
         <p:spPr>
           <a:xfrm>
-            <a:off x="5261000" y="1490472"/>
-            <a:ext cx="725119" cy="950976"/>
+            <a:off x="5369071" y="1490472"/>
+            <a:ext cx="508978" cy="667512"/>
           </a:xfrm>
           <a:prstGeom prst="rect">
             <a:avLst/>
           </a:prstGeom>
         </p:spPr>
       </p:pic>
+      <p:sp>
+        <p:nvSpPr>
+          <p:cNvPr id="8" name="Text 0"/>
+          <p:cNvSpPr txBox="1"/>
+          <p:nvPr>
+            <p:ph idx="107" type="body" hasCustomPrompt="1"/>
+          </p:nvPr>
+        </p:nvSpPr>
+        <p:spPr>
+          <a:xfrm>
+            <a:off x="4773168" y="2414016"/>
+            <a:ext cx="1700784" cy="274320"/>
+          </a:xfrm>
+          <a:prstGeom prst="rect">
+            <a:avLst/>
+          </a:prstGeom>
+          <a:noFill/>
+          <a:ln/>
+        </p:spPr>
+        <p:txBody>
+          <a:bodyPr wrap="square" lIns="0" tIns="0" rIns="0" bIns="0" rtlCol="0" anchor="ctr"/>
+          <a:lstStyle/>
+          <a:p>
+            <a:pPr algn="ctr" indent="0" marL="0">
+              <a:buNone/>
+            </a:pPr>
+            <a:r>
+              <a:rPr lang="en-US" sz="1100" b="1" dirty="0">
+                <a:solidFill>
+                  <a:srgbClr val="0F0F0F"/>
+                </a:solidFill>
+                <a:latin typeface="Inter" pitchFamily="34" charset="0"/>
+                <a:ea typeface="Inter" pitchFamily="34" charset="-122"/>
+                <a:cs typeface="Inter" pitchFamily="34" charset="-120"/>
+              </a:rPr>
+              <a:t>TGV Entringen</a:t>
+            </a:r>
+            <a:endParaRPr lang="en-US" sz="1100" dirty="0"/>
+          </a:p>
+        </p:txBody>
+      </p:sp>
       <p:pic>
         <p:nvPicPr>
-          <p:cNvPr id="6" name="Image 3" descr="/var/folders/hm/sgq6d80d0vq133k7n8dc9bnw0000gn/T/maiershirts-J4Eovy/ref-vereine-3.png">    </p:cNvPr>
+          <p:cNvPr id="9" name="Image 3" descr="/var/folders/hm/sgq6d80d0vq133k7n8dc9bnw0000gn/T/maiershirts-skcBUc/ref-vereine-3.png">    </p:cNvPr>
           <p:cNvPicPr>
             <a:picLocks noChangeAspect="1"/>
           </p:cNvPicPr>
           <p:nvPr>
-            <p:ph idx="105" type="pic" hasCustomPrompt="1"/>
+            <p:ph idx="108" type="pic" hasCustomPrompt="1"/>
           </p:nvPr>
         </p:nvPicPr>
         <p:blipFill>
@@ -13584,22 +14131,63 @@
         </p:blipFill>
         <p:spPr>
           <a:xfrm>
-            <a:off x="7251192" y="1490472"/>
-            <a:ext cx="950976" cy="950976"/>
+            <a:off x="7392924" y="1490472"/>
+            <a:ext cx="667512" cy="667512"/>
           </a:xfrm>
           <a:prstGeom prst="rect">
             <a:avLst/>
           </a:prstGeom>
         </p:spPr>
       </p:pic>
+      <p:sp>
+        <p:nvSpPr>
+          <p:cNvPr id="10" name="Text 0"/>
+          <p:cNvSpPr txBox="1"/>
+          <p:nvPr>
+            <p:ph idx="109" type="body" hasCustomPrompt="1"/>
+          </p:nvPr>
+        </p:nvSpPr>
+        <p:spPr>
+          <a:xfrm>
+            <a:off x="6876288" y="2414016"/>
+            <a:ext cx="1700784" cy="274320"/>
+          </a:xfrm>
+          <a:prstGeom prst="rect">
+            <a:avLst/>
+          </a:prstGeom>
+          <a:noFill/>
+          <a:ln/>
+        </p:spPr>
+        <p:txBody>
+          <a:bodyPr wrap="square" lIns="0" tIns="0" rIns="0" bIns="0" rtlCol="0" anchor="ctr"/>
+          <a:lstStyle/>
+          <a:p>
+            <a:pPr algn="ctr" indent="0" marL="0">
+              <a:buNone/>
+            </a:pPr>
+            <a:r>
+              <a:rPr lang="en-US" sz="1100" b="1" dirty="0">
+                <a:solidFill>
+                  <a:srgbClr val="0F0F0F"/>
+                </a:solidFill>
+                <a:latin typeface="Inter" pitchFamily="34" charset="0"/>
+                <a:ea typeface="Inter" pitchFamily="34" charset="-122"/>
+                <a:cs typeface="Inter" pitchFamily="34" charset="-120"/>
+              </a:rPr>
+              <a:t>Hooriger Hund Sulzbach</a:t>
+            </a:r>
+            <a:endParaRPr lang="en-US" sz="1100" dirty="0"/>
+          </a:p>
+        </p:txBody>
+      </p:sp>
       <p:pic>
         <p:nvPicPr>
-          <p:cNvPr id="7" name="Image 4" descr="/var/folders/hm/sgq6d80d0vq133k7n8dc9bnw0000gn/T/maiershirts-J4Eovy/ref-vereine-4.png">    </p:cNvPr>
+          <p:cNvPr id="11" name="Image 4" descr="/var/folders/hm/sgq6d80d0vq133k7n8dc9bnw0000gn/T/maiershirts-skcBUc/ref-vereine-4.png">    </p:cNvPr>
           <p:cNvPicPr>
             <a:picLocks noChangeAspect="1"/>
           </p:cNvPicPr>
           <p:nvPr>
-            <p:ph idx="106" type="pic" hasCustomPrompt="1"/>
+            <p:ph idx="110" type="pic" hasCustomPrompt="1"/>
           </p:nvPr>
         </p:nvPicPr>
         <p:blipFill>
@@ -13610,22 +14198,63 @@
         </p:blipFill>
         <p:spPr>
           <a:xfrm>
-            <a:off x="927202" y="3090672"/>
-            <a:ext cx="980237" cy="950976"/>
+            <a:off x="1073295" y="3090672"/>
+            <a:ext cx="688051" cy="667512"/>
           </a:xfrm>
           <a:prstGeom prst="rect">
             <a:avLst/>
           </a:prstGeom>
         </p:spPr>
       </p:pic>
+      <p:sp>
+        <p:nvSpPr>
+          <p:cNvPr id="12" name="Text 0"/>
+          <p:cNvSpPr txBox="1"/>
+          <p:nvPr>
+            <p:ph idx="111" type="body" hasCustomPrompt="1"/>
+          </p:nvPr>
+        </p:nvSpPr>
+        <p:spPr>
+          <a:xfrm>
+            <a:off x="566928" y="4014216"/>
+            <a:ext cx="1700784" cy="274320"/>
+          </a:xfrm>
+          <a:prstGeom prst="rect">
+            <a:avLst/>
+          </a:prstGeom>
+          <a:noFill/>
+          <a:ln/>
+        </p:spPr>
+        <p:txBody>
+          <a:bodyPr wrap="square" lIns="0" tIns="0" rIns="0" bIns="0" rtlCol="0" anchor="ctr"/>
+          <a:lstStyle/>
+          <a:p>
+            <a:pPr algn="ctr" indent="0" marL="0">
+              <a:buNone/>
+            </a:pPr>
+            <a:r>
+              <a:rPr lang="en-US" sz="1100" b="1" dirty="0">
+                <a:solidFill>
+                  <a:srgbClr val="0F0F0F"/>
+                </a:solidFill>
+                <a:latin typeface="Inter" pitchFamily="34" charset="0"/>
+                <a:ea typeface="Inter" pitchFamily="34" charset="-122"/>
+                <a:cs typeface="Inter" pitchFamily="34" charset="-120"/>
+              </a:rPr>
+              <a:t>Sportfreunde Dußlingen</a:t>
+            </a:r>
+            <a:endParaRPr lang="en-US" sz="1100" dirty="0"/>
+          </a:p>
+        </p:txBody>
+      </p:sp>
       <p:pic>
         <p:nvPicPr>
-          <p:cNvPr id="8" name="Image 5" descr="/var/folders/hm/sgq6d80d0vq133k7n8dc9bnw0000gn/T/maiershirts-J4Eovy/ref-vereine-5.png">    </p:cNvPr>
+          <p:cNvPr id="13" name="Image 5" descr="/var/folders/hm/sgq6d80d0vq133k7n8dc9bnw0000gn/T/maiershirts-skcBUc/ref-vereine-5.png">    </p:cNvPr>
           <p:cNvPicPr>
             <a:picLocks noChangeAspect="1"/>
           </p:cNvPicPr>
           <p:nvPr>
-            <p:ph idx="107" type="pic" hasCustomPrompt="1"/>
+            <p:ph idx="112" type="pic" hasCustomPrompt="1"/>
           </p:nvPr>
         </p:nvPicPr>
         <p:blipFill>
@@ -13636,22 +14265,63 @@
         </p:blipFill>
         <p:spPr>
           <a:xfrm>
-            <a:off x="3044952" y="3090672"/>
-            <a:ext cx="950976" cy="950976"/>
+            <a:off x="3186684" y="3090672"/>
+            <a:ext cx="667512" cy="667512"/>
           </a:xfrm>
           <a:prstGeom prst="rect">
             <a:avLst/>
           </a:prstGeom>
         </p:spPr>
       </p:pic>
+      <p:sp>
+        <p:nvSpPr>
+          <p:cNvPr id="14" name="Text 0"/>
+          <p:cNvSpPr txBox="1"/>
+          <p:nvPr>
+            <p:ph idx="113" type="body" hasCustomPrompt="1"/>
+          </p:nvPr>
+        </p:nvSpPr>
+        <p:spPr>
+          <a:xfrm>
+            <a:off x="2670048" y="4014216"/>
+            <a:ext cx="1700784" cy="274320"/>
+          </a:xfrm>
+          <a:prstGeom prst="rect">
+            <a:avLst/>
+          </a:prstGeom>
+          <a:noFill/>
+          <a:ln/>
+        </p:spPr>
+        <p:txBody>
+          <a:bodyPr wrap="square" lIns="0" tIns="0" rIns="0" bIns="0" rtlCol="0" anchor="ctr"/>
+          <a:lstStyle/>
+          <a:p>
+            <a:pPr algn="ctr" indent="0" marL="0">
+              <a:buNone/>
+            </a:pPr>
+            <a:r>
+              <a:rPr lang="en-US" sz="1100" b="1" dirty="0">
+                <a:solidFill>
+                  <a:srgbClr val="0F0F0F"/>
+                </a:solidFill>
+                <a:latin typeface="Inter" pitchFamily="34" charset="0"/>
+                <a:ea typeface="Inter" pitchFamily="34" charset="-122"/>
+                <a:cs typeface="Inter" pitchFamily="34" charset="-120"/>
+              </a:rPr>
+              <a:t>SV Germania Bietigheim</a:t>
+            </a:r>
+            <a:endParaRPr lang="en-US" sz="1100" dirty="0"/>
+          </a:p>
+        </p:txBody>
+      </p:sp>
       <p:pic>
         <p:nvPicPr>
-          <p:cNvPr id="9" name="Image 6" descr="/var/folders/hm/sgq6d80d0vq133k7n8dc9bnw0000gn/T/maiershirts-J4Eovy/ref-vereine-6.png">    </p:cNvPr>
+          <p:cNvPr id="15" name="Image 6" descr="/var/folders/hm/sgq6d80d0vq133k7n8dc9bnw0000gn/T/maiershirts-skcBUc/ref-vereine-6.png">    </p:cNvPr>
           <p:cNvPicPr>
             <a:picLocks noChangeAspect="1"/>
           </p:cNvPicPr>
           <p:nvPr>
-            <p:ph idx="108" type="pic" hasCustomPrompt="1"/>
+            <p:ph idx="114" type="pic" hasCustomPrompt="1"/>
           </p:nvPr>
         </p:nvPicPr>
         <p:blipFill>
@@ -13662,22 +14332,63 @@
         </p:blipFill>
         <p:spPr>
           <a:xfrm>
-            <a:off x="5146014" y="3090672"/>
-            <a:ext cx="955093" cy="950976"/>
+            <a:off x="5288359" y="3090672"/>
+            <a:ext cx="670402" cy="667512"/>
           </a:xfrm>
           <a:prstGeom prst="rect">
             <a:avLst/>
           </a:prstGeom>
         </p:spPr>
       </p:pic>
+      <p:sp>
+        <p:nvSpPr>
+          <p:cNvPr id="16" name="Text 0"/>
+          <p:cNvSpPr txBox="1"/>
+          <p:nvPr>
+            <p:ph idx="115" type="body" hasCustomPrompt="1"/>
+          </p:nvPr>
+        </p:nvSpPr>
+        <p:spPr>
+          <a:xfrm>
+            <a:off x="4773168" y="4014216"/>
+            <a:ext cx="1700784" cy="274320"/>
+          </a:xfrm>
+          <a:prstGeom prst="rect">
+            <a:avLst/>
+          </a:prstGeom>
+          <a:noFill/>
+          <a:ln/>
+        </p:spPr>
+        <p:txBody>
+          <a:bodyPr wrap="square" lIns="0" tIns="0" rIns="0" bIns="0" rtlCol="0" anchor="ctr"/>
+          <a:lstStyle/>
+          <a:p>
+            <a:pPr algn="ctr" indent="0" marL="0">
+              <a:buNone/>
+            </a:pPr>
+            <a:r>
+              <a:rPr lang="en-US" sz="1100" b="1" dirty="0">
+                <a:solidFill>
+                  <a:srgbClr val="0F0F0F"/>
+                </a:solidFill>
+                <a:latin typeface="Inter" pitchFamily="34" charset="0"/>
+                <a:ea typeface="Inter" pitchFamily="34" charset="-122"/>
+                <a:cs typeface="Inter" pitchFamily="34" charset="-120"/>
+              </a:rPr>
+              <a:t>TV Mühlacker</a:t>
+            </a:r>
+            <a:endParaRPr lang="en-US" sz="1100" dirty="0"/>
+          </a:p>
+        </p:txBody>
+      </p:sp>
       <p:pic>
         <p:nvPicPr>
-          <p:cNvPr id="10" name="Image 7" descr="/var/folders/hm/sgq6d80d0vq133k7n8dc9bnw0000gn/T/maiershirts-J4Eovy/ph-logo-446x326.png">    </p:cNvPr>
+          <p:cNvPr id="17" name="Image 7" descr="/var/folders/hm/sgq6d80d0vq133k7n8dc9bnw0000gn/T/maiershirts-skcBUc/ph-logo-446x252.png">    </p:cNvPr>
           <p:cNvPicPr>
             <a:picLocks noChangeAspect="1"/>
           </p:cNvPicPr>
           <p:nvPr>
-            <p:ph idx="109" type="pic" hasCustomPrompt="1"/>
+            <p:ph idx="116" type="pic" hasCustomPrompt="1"/>
           </p:nvPr>
         </p:nvPicPr>
         <p:blipFill>
@@ -13689,13 +14400,43 @@
         <p:spPr>
           <a:xfrm>
             <a:off x="6876288" y="2944368"/>
-            <a:ext cx="1700784" cy="1243584"/>
+            <a:ext cx="1700784" cy="960120"/>
           </a:xfrm>
           <a:prstGeom prst="rect">
             <a:avLst/>
           </a:prstGeom>
         </p:spPr>
       </p:pic>
+      <p:sp>
+        <p:nvSpPr>
+          <p:cNvPr id="19" name="Text 0"/>
+          <p:cNvSpPr/>
+          <p:nvPr>
+            <p:ph idx="117" type="body" hasCustomPrompt="1"/>
+          </p:nvPr>
+        </p:nvSpPr>
+        <p:spPr>
+          <a:xfrm>
+            <a:off x="6876288" y="4014216"/>
+            <a:ext cx="1700784" cy="274320"/>
+          </a:xfrm>
+          <a:prstGeom prst="rect">
+            <a:avLst/>
+          </a:prstGeom>
+          <a:noFill/>
+          <a:ln/>
+        </p:spPr>
+        <p:txBody>
+          <a:bodyPr wrap="square" lIns="0" tIns="0" rIns="0" bIns="0" rtlCol="0" anchor="ctr"/>
+          <a:lstStyle/>
+          <a:p>
+            <a:pPr algn="ctr" indent="0" marL="0">
+              <a:buNone/>
+            </a:pPr>
+            <a:endParaRPr lang="en-US" sz="1100" dirty="0"/>
+          </a:p>
+        </p:txBody>
+      </p:sp>
       <p:sp>
         <p:nvSpPr>
           <p:cNvPr id="25" name="Slide Number Placeholder 0"/>
@@ -13812,7 +14553,7 @@
       </p:sp>
       <p:pic>
         <p:nvPicPr>
-          <p:cNvPr id="3" name="Image 0" descr="/var/folders/hm/sgq6d80d0vq133k7n8dc9bnw0000gn/T/maiershirts-J4Eovy/ph-foto-1056x840.png">    </p:cNvPr>
+          <p:cNvPr id="3" name="Image 0" descr="/var/folders/hm/sgq6d80d0vq133k7n8dc9bnw0000gn/T/maiershirts-skcBUc/ph-foto-1056x840.png">    </p:cNvPr>
           <p:cNvPicPr>
             <a:picLocks noChangeAspect="1"/>
           </p:cNvPicPr>
@@ -14624,7 +15365,7 @@
       </p:sp>
       <p:pic>
         <p:nvPicPr>
-          <p:cNvPr id="4" name="Image 0" descr="/var/folders/hm/sgq6d80d0vq133k7n8dc9bnw0000gn/T/maiershirts-J4Eovy/ph-portrait-252x252.png">    </p:cNvPr>
+          <p:cNvPr id="4" name="Image 0" descr="/var/folders/hm/sgq6d80d0vq133k7n8dc9bnw0000gn/T/maiershirts-skcBUc/ph-portrait-252x252.png">    </p:cNvPr>
           <p:cNvPicPr>
             <a:picLocks noChangeAspect="1"/>
           </p:cNvPicPr>
@@ -14833,7 +15574,7 @@
       </p:sp>
       <p:pic>
         <p:nvPicPr>
-          <p:cNvPr id="9" name="Image 1" descr="/var/folders/hm/sgq6d80d0vq133k7n8dc9bnw0000gn/T/maiershirts-J4Eovy/ph-qr-240x240.png">    </p:cNvPr>
+          <p:cNvPr id="9" name="Image 1" descr="/var/folders/hm/sgq6d80d0vq133k7n8dc9bnw0000gn/T/maiershirts-skcBUc/ph-qr-240x240.png">    </p:cNvPr>
           <p:cNvPicPr>
             <a:picLocks noChangeAspect="1"/>
           </p:cNvPicPr>
@@ -16249,7 +16990,7 @@
       </p:grpSpPr>
       <p:pic>
         <p:nvPicPr>
-          <p:cNvPr id="2" name="Image 0" descr="/var/folders/hm/sgq6d80d0vq133k7n8dc9bnw0000gn/T/maiershirts-J4Eovy/ph-foto-2400x1008.png">    </p:cNvPr>
+          <p:cNvPr id="2" name="Image 0" descr="/var/folders/hm/sgq6d80d0vq133k7n8dc9bnw0000gn/T/maiershirts-skcBUc/ph-foto-2400x1008.png">    </p:cNvPr>
           <p:cNvPicPr>
             <a:picLocks noChangeAspect="1"/>
           </p:cNvPicPr>
@@ -17407,7 +18148,7 @@
       </p:sp>
       <p:pic>
         <p:nvPicPr>
-          <p:cNvPr id="3" name="Image 0" descr="/var/folders/hm/sgq6d80d0vq133k7n8dc9bnw0000gn/T/maiershirts-J4Eovy/ph-foto-696x456.png">    </p:cNvPr>
+          <p:cNvPr id="3" name="Image 0" descr="/var/folders/hm/sgq6d80d0vq133k7n8dc9bnw0000gn/T/maiershirts-skcBUc/ph-foto-696x456.png">    </p:cNvPr>
           <p:cNvPicPr>
             <a:picLocks noChangeAspect="1"/>
           </p:cNvPicPr>
@@ -17577,7 +18318,7 @@
       </p:sp>
       <p:pic>
         <p:nvPicPr>
-          <p:cNvPr id="7" name="Image 1" descr="/var/folders/hm/sgq6d80d0vq133k7n8dc9bnw0000gn/T/maiershirts-J4Eovy/ph-foto-696x456.png">    </p:cNvPr>
+          <p:cNvPr id="7" name="Image 1" descr="/var/folders/hm/sgq6d80d0vq133k7n8dc9bnw0000gn/T/maiershirts-skcBUc/ph-foto-696x456.png">    </p:cNvPr>
           <p:cNvPicPr>
             <a:picLocks noChangeAspect="1"/>
           </p:cNvPicPr>
@@ -17747,7 +18488,7 @@
       </p:sp>
       <p:pic>
         <p:nvPicPr>
-          <p:cNvPr id="11" name="Image 2" descr="/var/folders/hm/sgq6d80d0vq133k7n8dc9bnw0000gn/T/maiershirts-J4Eovy/ph-foto-696x456.png">    </p:cNvPr>
+          <p:cNvPr id="11" name="Image 2" descr="/var/folders/hm/sgq6d80d0vq133k7n8dc9bnw0000gn/T/maiershirts-skcBUc/ph-foto-696x456.png">    </p:cNvPr>
           <p:cNvPicPr>
             <a:picLocks noChangeAspect="1"/>
           </p:cNvPicPr>

--- a/presentation/dist/Maiershirts_Master.pptx
+++ b/presentation/dist/Maiershirts_Master.pptx
@@ -941,7 +941,7 @@
           <a:p>
             <a:r>
               <a:rPr lang="en-US" dirty="0"/>
-              <a:t>Layout MS_REFERENZEN: 12 Logo-Felder. 9 Logo(s) aus assets/referenzen/unternehmen eingesetzt. Logo per Klick auf das Platzhalterbild einsetzen; bei Beschnitt: Bildformat → Zuschneiden → Anpassen.</a:t>
+              <a:t>Layout MS_REFERENZEN: 12 Logo-Felder. 10 Logo(s) aus assets/referenzen/unternehmen eingesetzt. Logo per Klick auf das Platzhalterbild einsetzen; bei Beschnitt: Bildformat → Zuschneiden → Anpassen.</a:t>
             </a:r>
             <a:endParaRPr lang="en-US" dirty="0"/>
           </a:p>
@@ -13488,7 +13488,7 @@
       </p:sp>
       <p:pic>
         <p:nvPicPr>
-          <p:cNvPr id="3" name="Image 0" descr="/var/folders/hm/sgq6d80d0vq133k7n8dc9bnw0000gn/T/maiershirts-skcBUc/ref-unternehmen-0.png">    </p:cNvPr>
+          <p:cNvPr id="3" name="Image 0" descr="/var/folders/hm/sgq6d80d0vq133k7n8dc9bnw0000gn/T/maiershirts-R3q5bi/ref-unternehmen-0.png">    </p:cNvPr>
           <p:cNvPicPr>
             <a:picLocks noChangeAspect="1"/>
           </p:cNvPicPr>
@@ -13514,7 +13514,7 @@
       </p:pic>
       <p:pic>
         <p:nvPicPr>
-          <p:cNvPr id="4" name="Image 1" descr="/var/folders/hm/sgq6d80d0vq133k7n8dc9bnw0000gn/T/maiershirts-skcBUc/ref-unternehmen-1.png">    </p:cNvPr>
+          <p:cNvPr id="4" name="Image 1" descr="/var/folders/hm/sgq6d80d0vq133k7n8dc9bnw0000gn/T/maiershirts-R3q5bi/ref-unternehmen-1.png">    </p:cNvPr>
           <p:cNvPicPr>
             <a:picLocks noChangeAspect="1"/>
           </p:cNvPicPr>
@@ -13540,7 +13540,7 @@
       </p:pic>
       <p:pic>
         <p:nvPicPr>
-          <p:cNvPr id="5" name="Image 2" descr="/var/folders/hm/sgq6d80d0vq133k7n8dc9bnw0000gn/T/maiershirts-skcBUc/ref-unternehmen-2.png">    </p:cNvPr>
+          <p:cNvPr id="5" name="Image 2" descr="/var/folders/hm/sgq6d80d0vq133k7n8dc9bnw0000gn/T/maiershirts-R3q5bi/ref-unternehmen-2.png">    </p:cNvPr>
           <p:cNvPicPr>
             <a:picLocks noChangeAspect="1"/>
           </p:cNvPicPr>
@@ -13566,7 +13566,7 @@
       </p:pic>
       <p:pic>
         <p:nvPicPr>
-          <p:cNvPr id="6" name="Image 3" descr="/var/folders/hm/sgq6d80d0vq133k7n8dc9bnw0000gn/T/maiershirts-skcBUc/ref-unternehmen-3.png">    </p:cNvPr>
+          <p:cNvPr id="6" name="Image 3" descr="/var/folders/hm/sgq6d80d0vq133k7n8dc9bnw0000gn/T/maiershirts-R3q5bi/ref-unternehmen-3.png">    </p:cNvPr>
           <p:cNvPicPr>
             <a:picLocks noChangeAspect="1"/>
           </p:cNvPicPr>
@@ -13592,7 +13592,7 @@
       </p:pic>
       <p:pic>
         <p:nvPicPr>
-          <p:cNvPr id="7" name="Image 4" descr="/var/folders/hm/sgq6d80d0vq133k7n8dc9bnw0000gn/T/maiershirts-skcBUc/ref-unternehmen-4.png">    </p:cNvPr>
+          <p:cNvPr id="7" name="Image 4" descr="/var/folders/hm/sgq6d80d0vq133k7n8dc9bnw0000gn/T/maiershirts-R3q5bi/ref-unternehmen-4.png">    </p:cNvPr>
           <p:cNvPicPr>
             <a:picLocks noChangeAspect="1"/>
           </p:cNvPicPr>
@@ -13618,7 +13618,7 @@
       </p:pic>
       <p:pic>
         <p:nvPicPr>
-          <p:cNvPr id="8" name="Image 5" descr="/var/folders/hm/sgq6d80d0vq133k7n8dc9bnw0000gn/T/maiershirts-skcBUc/ref-unternehmen-5.png">    </p:cNvPr>
+          <p:cNvPr id="8" name="Image 5" descr="/var/folders/hm/sgq6d80d0vq133k7n8dc9bnw0000gn/T/maiershirts-R3q5bi/ref-unternehmen-5.png">    </p:cNvPr>
           <p:cNvPicPr>
             <a:picLocks noChangeAspect="1"/>
           </p:cNvPicPr>
@@ -13644,7 +13644,7 @@
       </p:pic>
       <p:pic>
         <p:nvPicPr>
-          <p:cNvPr id="9" name="Image 6" descr="/var/folders/hm/sgq6d80d0vq133k7n8dc9bnw0000gn/T/maiershirts-skcBUc/ref-unternehmen-6.png">    </p:cNvPr>
+          <p:cNvPr id="9" name="Image 6" descr="/var/folders/hm/sgq6d80d0vq133k7n8dc9bnw0000gn/T/maiershirts-R3q5bi/ref-unternehmen-6.png">    </p:cNvPr>
           <p:cNvPicPr>
             <a:picLocks noChangeAspect="1"/>
           </p:cNvPicPr>
@@ -13670,7 +13670,7 @@
       </p:pic>
       <p:pic>
         <p:nvPicPr>
-          <p:cNvPr id="10" name="Image 7" descr="/var/folders/hm/sgq6d80d0vq133k7n8dc9bnw0000gn/T/maiershirts-skcBUc/ref-unternehmen-7.png">    </p:cNvPr>
+          <p:cNvPr id="10" name="Image 7" descr="/var/folders/hm/sgq6d80d0vq133k7n8dc9bnw0000gn/T/maiershirts-R3q5bi/ref-unternehmen-7.png">    </p:cNvPr>
           <p:cNvPicPr>
             <a:picLocks noChangeAspect="1"/>
           </p:cNvPicPr>
@@ -13696,7 +13696,7 @@
       </p:pic>
       <p:pic>
         <p:nvPicPr>
-          <p:cNvPr id="11" name="Image 8" descr="/var/folders/hm/sgq6d80d0vq133k7n8dc9bnw0000gn/T/maiershirts-skcBUc/ref-unternehmen-8.png">    </p:cNvPr>
+          <p:cNvPr id="11" name="Image 8" descr="/var/folders/hm/sgq6d80d0vq133k7n8dc9bnw0000gn/T/maiershirts-R3q5bi/ref-unternehmen-8.png">    </p:cNvPr>
           <p:cNvPicPr>
             <a:picLocks noChangeAspect="1"/>
           </p:cNvPicPr>
@@ -13722,7 +13722,7 @@
       </p:pic>
       <p:pic>
         <p:nvPicPr>
-          <p:cNvPr id="12" name="Image 9" descr="/var/folders/hm/sgq6d80d0vq133k7n8dc9bnw0000gn/T/maiershirts-skcBUc/ph-logo-446x194.png">    </p:cNvPr>
+          <p:cNvPr id="12" name="Image 9" descr="/var/folders/hm/sgq6d80d0vq133k7n8dc9bnw0000gn/T/maiershirts-R3q5bi/ref-unternehmen-9.png">    </p:cNvPr>
           <p:cNvPicPr>
             <a:picLocks noChangeAspect="1"/>
           </p:cNvPicPr>
@@ -13738,8 +13738,8 @@
         </p:blipFill>
         <p:spPr>
           <a:xfrm>
-            <a:off x="2670048" y="3538728"/>
-            <a:ext cx="1700784" cy="740664"/>
+            <a:off x="3186157" y="3685032"/>
+            <a:ext cx="668565" cy="448056"/>
           </a:xfrm>
           <a:prstGeom prst="rect">
             <a:avLst/>
@@ -13748,7 +13748,7 @@
       </p:pic>
       <p:pic>
         <p:nvPicPr>
-          <p:cNvPr id="13" name="Image 10" descr="/var/folders/hm/sgq6d80d0vq133k7n8dc9bnw0000gn/T/maiershirts-skcBUc/ph-logo-446x194.png">    </p:cNvPr>
+          <p:cNvPr id="13" name="Image 10" descr="/var/folders/hm/sgq6d80d0vq133k7n8dc9bnw0000gn/T/maiershirts-R3q5bi/ph-logo-446x194.png">    </p:cNvPr>
           <p:cNvPicPr>
             <a:picLocks noChangeAspect="1"/>
           </p:cNvPicPr>
@@ -13774,7 +13774,7 @@
       </p:pic>
       <p:pic>
         <p:nvPicPr>
-          <p:cNvPr id="14" name="Image 11" descr="/var/folders/hm/sgq6d80d0vq133k7n8dc9bnw0000gn/T/maiershirts-skcBUc/ph-logo-446x194.png">    </p:cNvPr>
+          <p:cNvPr id="14" name="Image 11" descr="/var/folders/hm/sgq6d80d0vq133k7n8dc9bnw0000gn/T/maiershirts-R3q5bi/ph-logo-446x194.png">    </p:cNvPr>
           <p:cNvPicPr>
             <a:picLocks noChangeAspect="1"/>
           </p:cNvPicPr>
@@ -13914,7 +13914,7 @@
       </p:sp>
       <p:pic>
         <p:nvPicPr>
-          <p:cNvPr id="3" name="Image 0" descr="/var/folders/hm/sgq6d80d0vq133k7n8dc9bnw0000gn/T/maiershirts-skcBUc/ref-vereine-0.png">    </p:cNvPr>
+          <p:cNvPr id="3" name="Image 0" descr="/var/folders/hm/sgq6d80d0vq133k7n8dc9bnw0000gn/T/maiershirts-R3q5bi/ref-vereine-0.png">    </p:cNvPr>
           <p:cNvPicPr>
             <a:picLocks noChangeAspect="1"/>
           </p:cNvPicPr>
@@ -13981,7 +13981,7 @@
       </p:sp>
       <p:pic>
         <p:nvPicPr>
-          <p:cNvPr id="5" name="Image 1" descr="/var/folders/hm/sgq6d80d0vq133k7n8dc9bnw0000gn/T/maiershirts-skcBUc/ref-vereine-1.png">    </p:cNvPr>
+          <p:cNvPr id="5" name="Image 1" descr="/var/folders/hm/sgq6d80d0vq133k7n8dc9bnw0000gn/T/maiershirts-R3q5bi/ref-vereine-1.png">    </p:cNvPr>
           <p:cNvPicPr>
             <a:picLocks noChangeAspect="1"/>
           </p:cNvPicPr>
@@ -14048,7 +14048,7 @@
       </p:sp>
       <p:pic>
         <p:nvPicPr>
-          <p:cNvPr id="7" name="Image 2" descr="/var/folders/hm/sgq6d80d0vq133k7n8dc9bnw0000gn/T/maiershirts-skcBUc/ref-vereine-2.png">    </p:cNvPr>
+          <p:cNvPr id="7" name="Image 2" descr="/var/folders/hm/sgq6d80d0vq133k7n8dc9bnw0000gn/T/maiershirts-R3q5bi/ref-vereine-2.png">    </p:cNvPr>
           <p:cNvPicPr>
             <a:picLocks noChangeAspect="1"/>
           </p:cNvPicPr>
@@ -14115,7 +14115,7 @@
       </p:sp>
       <p:pic>
         <p:nvPicPr>
-          <p:cNvPr id="9" name="Image 3" descr="/var/folders/hm/sgq6d80d0vq133k7n8dc9bnw0000gn/T/maiershirts-skcBUc/ref-vereine-3.png">    </p:cNvPr>
+          <p:cNvPr id="9" name="Image 3" descr="/var/folders/hm/sgq6d80d0vq133k7n8dc9bnw0000gn/T/maiershirts-R3q5bi/ref-vereine-3.png">    </p:cNvPr>
           <p:cNvPicPr>
             <a:picLocks noChangeAspect="1"/>
           </p:cNvPicPr>
@@ -14182,7 +14182,7 @@
       </p:sp>
       <p:pic>
         <p:nvPicPr>
-          <p:cNvPr id="11" name="Image 4" descr="/var/folders/hm/sgq6d80d0vq133k7n8dc9bnw0000gn/T/maiershirts-skcBUc/ref-vereine-4.png">    </p:cNvPr>
+          <p:cNvPr id="11" name="Image 4" descr="/var/folders/hm/sgq6d80d0vq133k7n8dc9bnw0000gn/T/maiershirts-R3q5bi/ref-vereine-4.png">    </p:cNvPr>
           <p:cNvPicPr>
             <a:picLocks noChangeAspect="1"/>
           </p:cNvPicPr>
@@ -14249,7 +14249,7 @@
       </p:sp>
       <p:pic>
         <p:nvPicPr>
-          <p:cNvPr id="13" name="Image 5" descr="/var/folders/hm/sgq6d80d0vq133k7n8dc9bnw0000gn/T/maiershirts-skcBUc/ref-vereine-5.png">    </p:cNvPr>
+          <p:cNvPr id="13" name="Image 5" descr="/var/folders/hm/sgq6d80d0vq133k7n8dc9bnw0000gn/T/maiershirts-R3q5bi/ref-vereine-5.png">    </p:cNvPr>
           <p:cNvPicPr>
             <a:picLocks noChangeAspect="1"/>
           </p:cNvPicPr>
@@ -14316,7 +14316,7 @@
       </p:sp>
       <p:pic>
         <p:nvPicPr>
-          <p:cNvPr id="15" name="Image 6" descr="/var/folders/hm/sgq6d80d0vq133k7n8dc9bnw0000gn/T/maiershirts-skcBUc/ref-vereine-6.png">    </p:cNvPr>
+          <p:cNvPr id="15" name="Image 6" descr="/var/folders/hm/sgq6d80d0vq133k7n8dc9bnw0000gn/T/maiershirts-R3q5bi/ref-vereine-6.png">    </p:cNvPr>
           <p:cNvPicPr>
             <a:picLocks noChangeAspect="1"/>
           </p:cNvPicPr>
@@ -14383,7 +14383,7 @@
       </p:sp>
       <p:pic>
         <p:nvPicPr>
-          <p:cNvPr id="17" name="Image 7" descr="/var/folders/hm/sgq6d80d0vq133k7n8dc9bnw0000gn/T/maiershirts-skcBUc/ph-logo-446x252.png">    </p:cNvPr>
+          <p:cNvPr id="17" name="Image 7" descr="/var/folders/hm/sgq6d80d0vq133k7n8dc9bnw0000gn/T/maiershirts-R3q5bi/ph-logo-446x252.png">    </p:cNvPr>
           <p:cNvPicPr>
             <a:picLocks noChangeAspect="1"/>
           </p:cNvPicPr>
@@ -14553,7 +14553,7 @@
       </p:sp>
       <p:pic>
         <p:nvPicPr>
-          <p:cNvPr id="3" name="Image 0" descr="/var/folders/hm/sgq6d80d0vq133k7n8dc9bnw0000gn/T/maiershirts-skcBUc/ph-foto-1056x840.png">    </p:cNvPr>
+          <p:cNvPr id="3" name="Image 0" descr="/var/folders/hm/sgq6d80d0vq133k7n8dc9bnw0000gn/T/maiershirts-R3q5bi/ph-foto-1056x840.png">    </p:cNvPr>
           <p:cNvPicPr>
             <a:picLocks noChangeAspect="1"/>
           </p:cNvPicPr>
@@ -15365,7 +15365,7 @@
       </p:sp>
       <p:pic>
         <p:nvPicPr>
-          <p:cNvPr id="4" name="Image 0" descr="/var/folders/hm/sgq6d80d0vq133k7n8dc9bnw0000gn/T/maiershirts-skcBUc/ph-portrait-252x252.png">    </p:cNvPr>
+          <p:cNvPr id="4" name="Image 0" descr="/var/folders/hm/sgq6d80d0vq133k7n8dc9bnw0000gn/T/maiershirts-R3q5bi/ph-portrait-252x252.png">    </p:cNvPr>
           <p:cNvPicPr>
             <a:picLocks noChangeAspect="1"/>
           </p:cNvPicPr>
@@ -15574,7 +15574,7 @@
       </p:sp>
       <p:pic>
         <p:nvPicPr>
-          <p:cNvPr id="9" name="Image 1" descr="/var/folders/hm/sgq6d80d0vq133k7n8dc9bnw0000gn/T/maiershirts-skcBUc/ph-qr-240x240.png">    </p:cNvPr>
+          <p:cNvPr id="9" name="Image 1" descr="/var/folders/hm/sgq6d80d0vq133k7n8dc9bnw0000gn/T/maiershirts-R3q5bi/ph-qr-240x240.png">    </p:cNvPr>
           <p:cNvPicPr>
             <a:picLocks noChangeAspect="1"/>
           </p:cNvPicPr>
@@ -16990,7 +16990,7 @@
       </p:grpSpPr>
       <p:pic>
         <p:nvPicPr>
-          <p:cNvPr id="2" name="Image 0" descr="/var/folders/hm/sgq6d80d0vq133k7n8dc9bnw0000gn/T/maiershirts-skcBUc/ph-foto-2400x1008.png">    </p:cNvPr>
+          <p:cNvPr id="2" name="Image 0" descr="/var/folders/hm/sgq6d80d0vq133k7n8dc9bnw0000gn/T/maiershirts-R3q5bi/ph-foto-2400x1008.png">    </p:cNvPr>
           <p:cNvPicPr>
             <a:picLocks noChangeAspect="1"/>
           </p:cNvPicPr>
@@ -18148,7 +18148,7 @@
       </p:sp>
       <p:pic>
         <p:nvPicPr>
-          <p:cNvPr id="3" name="Image 0" descr="/var/folders/hm/sgq6d80d0vq133k7n8dc9bnw0000gn/T/maiershirts-skcBUc/ph-foto-696x456.png">    </p:cNvPr>
+          <p:cNvPr id="3" name="Image 0" descr="/var/folders/hm/sgq6d80d0vq133k7n8dc9bnw0000gn/T/maiershirts-R3q5bi/ph-foto-696x456.png">    </p:cNvPr>
           <p:cNvPicPr>
             <a:picLocks noChangeAspect="1"/>
           </p:cNvPicPr>
@@ -18318,7 +18318,7 @@
       </p:sp>
       <p:pic>
         <p:nvPicPr>
-          <p:cNvPr id="7" name="Image 1" descr="/var/folders/hm/sgq6d80d0vq133k7n8dc9bnw0000gn/T/maiershirts-skcBUc/ph-foto-696x456.png">    </p:cNvPr>
+          <p:cNvPr id="7" name="Image 1" descr="/var/folders/hm/sgq6d80d0vq133k7n8dc9bnw0000gn/T/maiershirts-R3q5bi/ph-foto-696x456.png">    </p:cNvPr>
           <p:cNvPicPr>
             <a:picLocks noChangeAspect="1"/>
           </p:cNvPicPr>
@@ -18488,7 +18488,7 @@
       </p:sp>
       <p:pic>
         <p:nvPicPr>
-          <p:cNvPr id="11" name="Image 2" descr="/var/folders/hm/sgq6d80d0vq133k7n8dc9bnw0000gn/T/maiershirts-skcBUc/ph-foto-696x456.png">    </p:cNvPr>
+          <p:cNvPr id="11" name="Image 2" descr="/var/folders/hm/sgq6d80d0vq133k7n8dc9bnw0000gn/T/maiershirts-R3q5bi/ph-foto-696x456.png">    </p:cNvPr>
           <p:cNvPicPr>
             <a:picLocks noChangeAspect="1"/>
           </p:cNvPicPr>

--- a/presentation/dist/Maiershirts_Master.pptx
+++ b/presentation/dist/Maiershirts_Master.pptx
@@ -1029,7 +1029,7 @@
           <a:p>
             <a:r>
               <a:rPr lang="en-US" dirty="0"/>
-              <a:t>Layout MS_REFERENZEN_WAPPEN: 8 Logo-Felder. 7 Logo(s) aus assets/referenzen/vereine eingesetzt. Logo per Klick auf das Platzhalterbild einsetzen; bei Beschnitt: Bildformat → Zuschneiden → Anpassen.</a:t>
+              <a:t>Layout MS_REFERENZEN_WAPPEN: 8 Logo-Felder. 8 Logo(s) aus assets/referenzen/vereine eingesetzt. Logo per Klick auf das Platzhalterbild einsetzen; bei Beschnitt: Bildformat → Zuschneiden → Anpassen.</a:t>
             </a:r>
             <a:endParaRPr lang="en-US" dirty="0"/>
           </a:p>
@@ -13488,7 +13488,7 @@
       </p:sp>
       <p:pic>
         <p:nvPicPr>
-          <p:cNvPr id="3" name="Image 0" descr="/var/folders/hm/sgq6d80d0vq133k7n8dc9bnw0000gn/T/maiershirts-R3q5bi/ref-unternehmen-0.png">    </p:cNvPr>
+          <p:cNvPr id="3" name="Image 0" descr="/var/folders/hm/sgq6d80d0vq133k7n8dc9bnw0000gn/T/maiershirts-3efGbV/ref-unternehmen-0.png">    </p:cNvPr>
           <p:cNvPicPr>
             <a:picLocks noChangeAspect="1"/>
           </p:cNvPicPr>
@@ -13514,7 +13514,7 @@
       </p:pic>
       <p:pic>
         <p:nvPicPr>
-          <p:cNvPr id="4" name="Image 1" descr="/var/folders/hm/sgq6d80d0vq133k7n8dc9bnw0000gn/T/maiershirts-R3q5bi/ref-unternehmen-1.png">    </p:cNvPr>
+          <p:cNvPr id="4" name="Image 1" descr="/var/folders/hm/sgq6d80d0vq133k7n8dc9bnw0000gn/T/maiershirts-3efGbV/ref-unternehmen-1.png">    </p:cNvPr>
           <p:cNvPicPr>
             <a:picLocks noChangeAspect="1"/>
           </p:cNvPicPr>
@@ -13540,7 +13540,7 @@
       </p:pic>
       <p:pic>
         <p:nvPicPr>
-          <p:cNvPr id="5" name="Image 2" descr="/var/folders/hm/sgq6d80d0vq133k7n8dc9bnw0000gn/T/maiershirts-R3q5bi/ref-unternehmen-2.png">    </p:cNvPr>
+          <p:cNvPr id="5" name="Image 2" descr="/var/folders/hm/sgq6d80d0vq133k7n8dc9bnw0000gn/T/maiershirts-3efGbV/ref-unternehmen-2.png">    </p:cNvPr>
           <p:cNvPicPr>
             <a:picLocks noChangeAspect="1"/>
           </p:cNvPicPr>
@@ -13566,7 +13566,7 @@
       </p:pic>
       <p:pic>
         <p:nvPicPr>
-          <p:cNvPr id="6" name="Image 3" descr="/var/folders/hm/sgq6d80d0vq133k7n8dc9bnw0000gn/T/maiershirts-R3q5bi/ref-unternehmen-3.png">    </p:cNvPr>
+          <p:cNvPr id="6" name="Image 3" descr="/var/folders/hm/sgq6d80d0vq133k7n8dc9bnw0000gn/T/maiershirts-3efGbV/ref-unternehmen-3.png">    </p:cNvPr>
           <p:cNvPicPr>
             <a:picLocks noChangeAspect="1"/>
           </p:cNvPicPr>
@@ -13592,7 +13592,7 @@
       </p:pic>
       <p:pic>
         <p:nvPicPr>
-          <p:cNvPr id="7" name="Image 4" descr="/var/folders/hm/sgq6d80d0vq133k7n8dc9bnw0000gn/T/maiershirts-R3q5bi/ref-unternehmen-4.png">    </p:cNvPr>
+          <p:cNvPr id="7" name="Image 4" descr="/var/folders/hm/sgq6d80d0vq133k7n8dc9bnw0000gn/T/maiershirts-3efGbV/ref-unternehmen-4.png">    </p:cNvPr>
           <p:cNvPicPr>
             <a:picLocks noChangeAspect="1"/>
           </p:cNvPicPr>
@@ -13618,7 +13618,7 @@
       </p:pic>
       <p:pic>
         <p:nvPicPr>
-          <p:cNvPr id="8" name="Image 5" descr="/var/folders/hm/sgq6d80d0vq133k7n8dc9bnw0000gn/T/maiershirts-R3q5bi/ref-unternehmen-5.png">    </p:cNvPr>
+          <p:cNvPr id="8" name="Image 5" descr="/var/folders/hm/sgq6d80d0vq133k7n8dc9bnw0000gn/T/maiershirts-3efGbV/ref-unternehmen-5.png">    </p:cNvPr>
           <p:cNvPicPr>
             <a:picLocks noChangeAspect="1"/>
           </p:cNvPicPr>
@@ -13644,7 +13644,7 @@
       </p:pic>
       <p:pic>
         <p:nvPicPr>
-          <p:cNvPr id="9" name="Image 6" descr="/var/folders/hm/sgq6d80d0vq133k7n8dc9bnw0000gn/T/maiershirts-R3q5bi/ref-unternehmen-6.png">    </p:cNvPr>
+          <p:cNvPr id="9" name="Image 6" descr="/var/folders/hm/sgq6d80d0vq133k7n8dc9bnw0000gn/T/maiershirts-3efGbV/ref-unternehmen-6.png">    </p:cNvPr>
           <p:cNvPicPr>
             <a:picLocks noChangeAspect="1"/>
           </p:cNvPicPr>
@@ -13670,7 +13670,7 @@
       </p:pic>
       <p:pic>
         <p:nvPicPr>
-          <p:cNvPr id="10" name="Image 7" descr="/var/folders/hm/sgq6d80d0vq133k7n8dc9bnw0000gn/T/maiershirts-R3q5bi/ref-unternehmen-7.png">    </p:cNvPr>
+          <p:cNvPr id="10" name="Image 7" descr="/var/folders/hm/sgq6d80d0vq133k7n8dc9bnw0000gn/T/maiershirts-3efGbV/ref-unternehmen-7.png">    </p:cNvPr>
           <p:cNvPicPr>
             <a:picLocks noChangeAspect="1"/>
           </p:cNvPicPr>
@@ -13696,7 +13696,7 @@
       </p:pic>
       <p:pic>
         <p:nvPicPr>
-          <p:cNvPr id="11" name="Image 8" descr="/var/folders/hm/sgq6d80d0vq133k7n8dc9bnw0000gn/T/maiershirts-R3q5bi/ref-unternehmen-8.png">    </p:cNvPr>
+          <p:cNvPr id="11" name="Image 8" descr="/var/folders/hm/sgq6d80d0vq133k7n8dc9bnw0000gn/T/maiershirts-3efGbV/ref-unternehmen-8.png">    </p:cNvPr>
           <p:cNvPicPr>
             <a:picLocks noChangeAspect="1"/>
           </p:cNvPicPr>
@@ -13722,7 +13722,7 @@
       </p:pic>
       <p:pic>
         <p:nvPicPr>
-          <p:cNvPr id="12" name="Image 9" descr="/var/folders/hm/sgq6d80d0vq133k7n8dc9bnw0000gn/T/maiershirts-R3q5bi/ref-unternehmen-9.png">    </p:cNvPr>
+          <p:cNvPr id="12" name="Image 9" descr="/var/folders/hm/sgq6d80d0vq133k7n8dc9bnw0000gn/T/maiershirts-3efGbV/ref-unternehmen-9.png">    </p:cNvPr>
           <p:cNvPicPr>
             <a:picLocks noChangeAspect="1"/>
           </p:cNvPicPr>
@@ -13748,7 +13748,7 @@
       </p:pic>
       <p:pic>
         <p:nvPicPr>
-          <p:cNvPr id="13" name="Image 10" descr="/var/folders/hm/sgq6d80d0vq133k7n8dc9bnw0000gn/T/maiershirts-R3q5bi/ph-logo-446x194.png">    </p:cNvPr>
+          <p:cNvPr id="13" name="Image 10" descr="/var/folders/hm/sgq6d80d0vq133k7n8dc9bnw0000gn/T/maiershirts-3efGbV/ph-logo-446x194.png">    </p:cNvPr>
           <p:cNvPicPr>
             <a:picLocks noChangeAspect="1"/>
           </p:cNvPicPr>
@@ -13774,7 +13774,7 @@
       </p:pic>
       <p:pic>
         <p:nvPicPr>
-          <p:cNvPr id="14" name="Image 11" descr="/var/folders/hm/sgq6d80d0vq133k7n8dc9bnw0000gn/T/maiershirts-R3q5bi/ph-logo-446x194.png">    </p:cNvPr>
+          <p:cNvPr id="14" name="Image 11" descr="/var/folders/hm/sgq6d80d0vq133k7n8dc9bnw0000gn/T/maiershirts-3efGbV/ph-logo-446x194.png">    </p:cNvPr>
           <p:cNvPicPr>
             <a:picLocks noChangeAspect="1"/>
           </p:cNvPicPr>
@@ -13914,7 +13914,7 @@
       </p:sp>
       <p:pic>
         <p:nvPicPr>
-          <p:cNvPr id="3" name="Image 0" descr="/var/folders/hm/sgq6d80d0vq133k7n8dc9bnw0000gn/T/maiershirts-R3q5bi/ref-vereine-0.png">    </p:cNvPr>
+          <p:cNvPr id="3" name="Image 0" descr="/var/folders/hm/sgq6d80d0vq133k7n8dc9bnw0000gn/T/maiershirts-3efGbV/ref-vereine-0.png">    </p:cNvPr>
           <p:cNvPicPr>
             <a:picLocks noChangeAspect="1"/>
           </p:cNvPicPr>
@@ -13981,7 +13981,7 @@
       </p:sp>
       <p:pic>
         <p:nvPicPr>
-          <p:cNvPr id="5" name="Image 1" descr="/var/folders/hm/sgq6d80d0vq133k7n8dc9bnw0000gn/T/maiershirts-R3q5bi/ref-vereine-1.png">    </p:cNvPr>
+          <p:cNvPr id="5" name="Image 1" descr="/var/folders/hm/sgq6d80d0vq133k7n8dc9bnw0000gn/T/maiershirts-3efGbV/ref-vereine-1.png">    </p:cNvPr>
           <p:cNvPicPr>
             <a:picLocks noChangeAspect="1"/>
           </p:cNvPicPr>
@@ -14048,7 +14048,7 @@
       </p:sp>
       <p:pic>
         <p:nvPicPr>
-          <p:cNvPr id="7" name="Image 2" descr="/var/folders/hm/sgq6d80d0vq133k7n8dc9bnw0000gn/T/maiershirts-R3q5bi/ref-vereine-2.png">    </p:cNvPr>
+          <p:cNvPr id="7" name="Image 2" descr="/var/folders/hm/sgq6d80d0vq133k7n8dc9bnw0000gn/T/maiershirts-3efGbV/ref-vereine-2.png">    </p:cNvPr>
           <p:cNvPicPr>
             <a:picLocks noChangeAspect="1"/>
           </p:cNvPicPr>
@@ -14115,7 +14115,7 @@
       </p:sp>
       <p:pic>
         <p:nvPicPr>
-          <p:cNvPr id="9" name="Image 3" descr="/var/folders/hm/sgq6d80d0vq133k7n8dc9bnw0000gn/T/maiershirts-R3q5bi/ref-vereine-3.png">    </p:cNvPr>
+          <p:cNvPr id="9" name="Image 3" descr="/var/folders/hm/sgq6d80d0vq133k7n8dc9bnw0000gn/T/maiershirts-3efGbV/ref-vereine-3.png">    </p:cNvPr>
           <p:cNvPicPr>
             <a:picLocks noChangeAspect="1"/>
           </p:cNvPicPr>
@@ -14182,7 +14182,7 @@
       </p:sp>
       <p:pic>
         <p:nvPicPr>
-          <p:cNvPr id="11" name="Image 4" descr="/var/folders/hm/sgq6d80d0vq133k7n8dc9bnw0000gn/T/maiershirts-R3q5bi/ref-vereine-4.png">    </p:cNvPr>
+          <p:cNvPr id="11" name="Image 4" descr="/var/folders/hm/sgq6d80d0vq133k7n8dc9bnw0000gn/T/maiershirts-3efGbV/ref-vereine-4.png">    </p:cNvPr>
           <p:cNvPicPr>
             <a:picLocks noChangeAspect="1"/>
           </p:cNvPicPr>
@@ -14249,7 +14249,7 @@
       </p:sp>
       <p:pic>
         <p:nvPicPr>
-          <p:cNvPr id="13" name="Image 5" descr="/var/folders/hm/sgq6d80d0vq133k7n8dc9bnw0000gn/T/maiershirts-R3q5bi/ref-vereine-5.png">    </p:cNvPr>
+          <p:cNvPr id="13" name="Image 5" descr="/var/folders/hm/sgq6d80d0vq133k7n8dc9bnw0000gn/T/maiershirts-3efGbV/ref-vereine-5.png">    </p:cNvPr>
           <p:cNvPicPr>
             <a:picLocks noChangeAspect="1"/>
           </p:cNvPicPr>
@@ -14316,7 +14316,7 @@
       </p:sp>
       <p:pic>
         <p:nvPicPr>
-          <p:cNvPr id="15" name="Image 6" descr="/var/folders/hm/sgq6d80d0vq133k7n8dc9bnw0000gn/T/maiershirts-R3q5bi/ref-vereine-6.png">    </p:cNvPr>
+          <p:cNvPr id="15" name="Image 6" descr="/var/folders/hm/sgq6d80d0vq133k7n8dc9bnw0000gn/T/maiershirts-3efGbV/ref-vereine-6.png">    </p:cNvPr>
           <p:cNvPicPr>
             <a:picLocks noChangeAspect="1"/>
           </p:cNvPicPr>
@@ -14383,7 +14383,7 @@
       </p:sp>
       <p:pic>
         <p:nvPicPr>
-          <p:cNvPr id="17" name="Image 7" descr="/var/folders/hm/sgq6d80d0vq133k7n8dc9bnw0000gn/T/maiershirts-R3q5bi/ph-logo-446x252.png">    </p:cNvPr>
+          <p:cNvPr id="17" name="Image 7" descr="/var/folders/hm/sgq6d80d0vq133k7n8dc9bnw0000gn/T/maiershirts-3efGbV/ref-vereine-7.png">    </p:cNvPr>
           <p:cNvPicPr>
             <a:picLocks noChangeAspect="1"/>
           </p:cNvPicPr>
@@ -14399,8 +14399,8 @@
         </p:blipFill>
         <p:spPr>
           <a:xfrm>
-            <a:off x="6876288" y="2944368"/>
-            <a:ext cx="1700784" cy="960120"/>
+            <a:off x="7022592" y="3098331"/>
+            <a:ext cx="1408176" cy="652193"/>
           </a:xfrm>
           <a:prstGeom prst="rect">
             <a:avLst/>
@@ -14409,8 +14409,8 @@
       </p:pic>
       <p:sp>
         <p:nvSpPr>
-          <p:cNvPr id="19" name="Text 0"/>
-          <p:cNvSpPr/>
+          <p:cNvPr id="18" name="Text 0"/>
+          <p:cNvSpPr txBox="1"/>
           <p:nvPr>
             <p:ph idx="117" type="body" hasCustomPrompt="1"/>
           </p:nvPr>
@@ -14433,6 +14433,17 @@
             <a:pPr algn="ctr" indent="0" marL="0">
               <a:buNone/>
             </a:pPr>
+            <a:r>
+              <a:rPr lang="en-US" sz="1100" b="1" dirty="0">
+                <a:solidFill>
+                  <a:srgbClr val="0F0F0F"/>
+                </a:solidFill>
+                <a:latin typeface="Inter" pitchFamily="34" charset="0"/>
+                <a:ea typeface="Inter" pitchFamily="34" charset="-122"/>
+                <a:cs typeface="Inter" pitchFamily="34" charset="-120"/>
+              </a:rPr>
+              <a:t>Tennisclub Wurmlingen</a:t>
+            </a:r>
             <a:endParaRPr lang="en-US" sz="1100" dirty="0"/>
           </a:p>
         </p:txBody>
@@ -14553,7 +14564,7 @@
       </p:sp>
       <p:pic>
         <p:nvPicPr>
-          <p:cNvPr id="3" name="Image 0" descr="/var/folders/hm/sgq6d80d0vq133k7n8dc9bnw0000gn/T/maiershirts-R3q5bi/ph-foto-1056x840.png">    </p:cNvPr>
+          <p:cNvPr id="3" name="Image 0" descr="/var/folders/hm/sgq6d80d0vq133k7n8dc9bnw0000gn/T/maiershirts-3efGbV/ph-foto-1056x840.png">    </p:cNvPr>
           <p:cNvPicPr>
             <a:picLocks noChangeAspect="1"/>
           </p:cNvPicPr>
@@ -15365,7 +15376,7 @@
       </p:sp>
       <p:pic>
         <p:nvPicPr>
-          <p:cNvPr id="4" name="Image 0" descr="/var/folders/hm/sgq6d80d0vq133k7n8dc9bnw0000gn/T/maiershirts-R3q5bi/ph-portrait-252x252.png">    </p:cNvPr>
+          <p:cNvPr id="4" name="Image 0" descr="/var/folders/hm/sgq6d80d0vq133k7n8dc9bnw0000gn/T/maiershirts-3efGbV/ph-portrait-252x252.png">    </p:cNvPr>
           <p:cNvPicPr>
             <a:picLocks noChangeAspect="1"/>
           </p:cNvPicPr>
@@ -15574,7 +15585,7 @@
       </p:sp>
       <p:pic>
         <p:nvPicPr>
-          <p:cNvPr id="9" name="Image 1" descr="/var/folders/hm/sgq6d80d0vq133k7n8dc9bnw0000gn/T/maiershirts-R3q5bi/ph-qr-240x240.png">    </p:cNvPr>
+          <p:cNvPr id="9" name="Image 1" descr="/var/folders/hm/sgq6d80d0vq133k7n8dc9bnw0000gn/T/maiershirts-3efGbV/ph-qr-240x240.png">    </p:cNvPr>
           <p:cNvPicPr>
             <a:picLocks noChangeAspect="1"/>
           </p:cNvPicPr>
@@ -16990,7 +17001,7 @@
       </p:grpSpPr>
       <p:pic>
         <p:nvPicPr>
-          <p:cNvPr id="2" name="Image 0" descr="/var/folders/hm/sgq6d80d0vq133k7n8dc9bnw0000gn/T/maiershirts-R3q5bi/ph-foto-2400x1008.png">    </p:cNvPr>
+          <p:cNvPr id="2" name="Image 0" descr="/var/folders/hm/sgq6d80d0vq133k7n8dc9bnw0000gn/T/maiershirts-3efGbV/ph-foto-2400x1008.png">    </p:cNvPr>
           <p:cNvPicPr>
             <a:picLocks noChangeAspect="1"/>
           </p:cNvPicPr>
@@ -18148,7 +18159,7 @@
       </p:sp>
       <p:pic>
         <p:nvPicPr>
-          <p:cNvPr id="3" name="Image 0" descr="/var/folders/hm/sgq6d80d0vq133k7n8dc9bnw0000gn/T/maiershirts-R3q5bi/ph-foto-696x456.png">    </p:cNvPr>
+          <p:cNvPr id="3" name="Image 0" descr="/var/folders/hm/sgq6d80d0vq133k7n8dc9bnw0000gn/T/maiershirts-3efGbV/ph-foto-696x456.png">    </p:cNvPr>
           <p:cNvPicPr>
             <a:picLocks noChangeAspect="1"/>
           </p:cNvPicPr>
@@ -18318,7 +18329,7 @@
       </p:sp>
       <p:pic>
         <p:nvPicPr>
-          <p:cNvPr id="7" name="Image 1" descr="/var/folders/hm/sgq6d80d0vq133k7n8dc9bnw0000gn/T/maiershirts-R3q5bi/ph-foto-696x456.png">    </p:cNvPr>
+          <p:cNvPr id="7" name="Image 1" descr="/var/folders/hm/sgq6d80d0vq133k7n8dc9bnw0000gn/T/maiershirts-3efGbV/ph-foto-696x456.png">    </p:cNvPr>
           <p:cNvPicPr>
             <a:picLocks noChangeAspect="1"/>
           </p:cNvPicPr>
@@ -18488,7 +18499,7 @@
       </p:sp>
       <p:pic>
         <p:nvPicPr>
-          <p:cNvPr id="11" name="Image 2" descr="/var/folders/hm/sgq6d80d0vq133k7n8dc9bnw0000gn/T/maiershirts-R3q5bi/ph-foto-696x456.png">    </p:cNvPr>
+          <p:cNvPr id="11" name="Image 2" descr="/var/folders/hm/sgq6d80d0vq133k7n8dc9bnw0000gn/T/maiershirts-3efGbV/ph-foto-696x456.png">    </p:cNvPr>
           <p:cNvPicPr>
             <a:picLocks noChangeAspect="1"/>
           </p:cNvPicPr>

--- a/presentation/dist/Maiershirts_Master.pptx
+++ b/presentation/dist/Maiershirts_Master.pptx
@@ -941,7 +941,7 @@
           <a:p>
             <a:r>
               <a:rPr lang="en-US" dirty="0"/>
-              <a:t>Layout MS_REFERENZEN: 12 Logo-Felder. 10 Logo(s) aus assets/referenzen/unternehmen eingesetzt. Logo per Klick auf das Platzhalterbild einsetzen; bei Beschnitt: Bildformat → Zuschneiden → Anpassen.</a:t>
+              <a:t>Layout MS_REFERENZEN: 12 Logo-Felder. 12 Logo(s) aus assets/referenzen/unternehmen eingesetzt. Logo per Klick auf das Platzhalterbild einsetzen; bei Beschnitt: Bildformat → Zuschneiden → Anpassen.</a:t>
             </a:r>
             <a:endParaRPr lang="en-US" dirty="0"/>
           </a:p>
@@ -13488,7 +13488,7 @@
       </p:sp>
       <p:pic>
         <p:nvPicPr>
-          <p:cNvPr id="3" name="Image 0" descr="/var/folders/hm/sgq6d80d0vq133k7n8dc9bnw0000gn/T/maiershirts-3efGbV/ref-unternehmen-0.png">    </p:cNvPr>
+          <p:cNvPr id="3" name="Image 0" descr="/var/folders/hm/sgq6d80d0vq133k7n8dc9bnw0000gn/T/maiershirts-2HUvCI/ref-unternehmen-0.png">    </p:cNvPr>
           <p:cNvPicPr>
             <a:picLocks noChangeAspect="1"/>
           </p:cNvPicPr>
@@ -13514,7 +13514,7 @@
       </p:pic>
       <p:pic>
         <p:nvPicPr>
-          <p:cNvPr id="4" name="Image 1" descr="/var/folders/hm/sgq6d80d0vq133k7n8dc9bnw0000gn/T/maiershirts-3efGbV/ref-unternehmen-1.png">    </p:cNvPr>
+          <p:cNvPr id="4" name="Image 1" descr="/var/folders/hm/sgq6d80d0vq133k7n8dc9bnw0000gn/T/maiershirts-2HUvCI/ref-unternehmen-1.png">    </p:cNvPr>
           <p:cNvPicPr>
             <a:picLocks noChangeAspect="1"/>
           </p:cNvPicPr>
@@ -13540,7 +13540,7 @@
       </p:pic>
       <p:pic>
         <p:nvPicPr>
-          <p:cNvPr id="5" name="Image 2" descr="/var/folders/hm/sgq6d80d0vq133k7n8dc9bnw0000gn/T/maiershirts-3efGbV/ref-unternehmen-2.png">    </p:cNvPr>
+          <p:cNvPr id="5" name="Image 2" descr="/var/folders/hm/sgq6d80d0vq133k7n8dc9bnw0000gn/T/maiershirts-2HUvCI/ref-unternehmen-2.png">    </p:cNvPr>
           <p:cNvPicPr>
             <a:picLocks noChangeAspect="1"/>
           </p:cNvPicPr>
@@ -13566,7 +13566,7 @@
       </p:pic>
       <p:pic>
         <p:nvPicPr>
-          <p:cNvPr id="6" name="Image 3" descr="/var/folders/hm/sgq6d80d0vq133k7n8dc9bnw0000gn/T/maiershirts-3efGbV/ref-unternehmen-3.png">    </p:cNvPr>
+          <p:cNvPr id="6" name="Image 3" descr="/var/folders/hm/sgq6d80d0vq133k7n8dc9bnw0000gn/T/maiershirts-2HUvCI/ref-unternehmen-3.png">    </p:cNvPr>
           <p:cNvPicPr>
             <a:picLocks noChangeAspect="1"/>
           </p:cNvPicPr>
@@ -13592,7 +13592,7 @@
       </p:pic>
       <p:pic>
         <p:nvPicPr>
-          <p:cNvPr id="7" name="Image 4" descr="/var/folders/hm/sgq6d80d0vq133k7n8dc9bnw0000gn/T/maiershirts-3efGbV/ref-unternehmen-4.png">    </p:cNvPr>
+          <p:cNvPr id="7" name="Image 4" descr="/var/folders/hm/sgq6d80d0vq133k7n8dc9bnw0000gn/T/maiershirts-2HUvCI/ref-unternehmen-4.png">    </p:cNvPr>
           <p:cNvPicPr>
             <a:picLocks noChangeAspect="1"/>
           </p:cNvPicPr>
@@ -13618,7 +13618,7 @@
       </p:pic>
       <p:pic>
         <p:nvPicPr>
-          <p:cNvPr id="8" name="Image 5" descr="/var/folders/hm/sgq6d80d0vq133k7n8dc9bnw0000gn/T/maiershirts-3efGbV/ref-unternehmen-5.png">    </p:cNvPr>
+          <p:cNvPr id="8" name="Image 5" descr="/var/folders/hm/sgq6d80d0vq133k7n8dc9bnw0000gn/T/maiershirts-2HUvCI/ref-unternehmen-5.png">    </p:cNvPr>
           <p:cNvPicPr>
             <a:picLocks noChangeAspect="1"/>
           </p:cNvPicPr>
@@ -13644,7 +13644,7 @@
       </p:pic>
       <p:pic>
         <p:nvPicPr>
-          <p:cNvPr id="9" name="Image 6" descr="/var/folders/hm/sgq6d80d0vq133k7n8dc9bnw0000gn/T/maiershirts-3efGbV/ref-unternehmen-6.png">    </p:cNvPr>
+          <p:cNvPr id="9" name="Image 6" descr="/var/folders/hm/sgq6d80d0vq133k7n8dc9bnw0000gn/T/maiershirts-2HUvCI/ref-unternehmen-6.png">    </p:cNvPr>
           <p:cNvPicPr>
             <a:picLocks noChangeAspect="1"/>
           </p:cNvPicPr>
@@ -13670,7 +13670,7 @@
       </p:pic>
       <p:pic>
         <p:nvPicPr>
-          <p:cNvPr id="10" name="Image 7" descr="/var/folders/hm/sgq6d80d0vq133k7n8dc9bnw0000gn/T/maiershirts-3efGbV/ref-unternehmen-7.png">    </p:cNvPr>
+          <p:cNvPr id="10" name="Image 7" descr="/var/folders/hm/sgq6d80d0vq133k7n8dc9bnw0000gn/T/maiershirts-2HUvCI/ref-unternehmen-7.png">    </p:cNvPr>
           <p:cNvPicPr>
             <a:picLocks noChangeAspect="1"/>
           </p:cNvPicPr>
@@ -13696,7 +13696,7 @@
       </p:pic>
       <p:pic>
         <p:nvPicPr>
-          <p:cNvPr id="11" name="Image 8" descr="/var/folders/hm/sgq6d80d0vq133k7n8dc9bnw0000gn/T/maiershirts-3efGbV/ref-unternehmen-8.png">    </p:cNvPr>
+          <p:cNvPr id="11" name="Image 8" descr="/var/folders/hm/sgq6d80d0vq133k7n8dc9bnw0000gn/T/maiershirts-2HUvCI/ref-unternehmen-8.png">    </p:cNvPr>
           <p:cNvPicPr>
             <a:picLocks noChangeAspect="1"/>
           </p:cNvPicPr>
@@ -13722,7 +13722,7 @@
       </p:pic>
       <p:pic>
         <p:nvPicPr>
-          <p:cNvPr id="12" name="Image 9" descr="/var/folders/hm/sgq6d80d0vq133k7n8dc9bnw0000gn/T/maiershirts-3efGbV/ref-unternehmen-9.png">    </p:cNvPr>
+          <p:cNvPr id="12" name="Image 9" descr="/var/folders/hm/sgq6d80d0vq133k7n8dc9bnw0000gn/T/maiershirts-2HUvCI/ref-unternehmen-9.png">    </p:cNvPr>
           <p:cNvPicPr>
             <a:picLocks noChangeAspect="1"/>
           </p:cNvPicPr>
@@ -13748,7 +13748,7 @@
       </p:pic>
       <p:pic>
         <p:nvPicPr>
-          <p:cNvPr id="13" name="Image 10" descr="/var/folders/hm/sgq6d80d0vq133k7n8dc9bnw0000gn/T/maiershirts-3efGbV/ph-logo-446x194.png">    </p:cNvPr>
+          <p:cNvPr id="13" name="Image 10" descr="/var/folders/hm/sgq6d80d0vq133k7n8dc9bnw0000gn/T/maiershirts-2HUvCI/ref-unternehmen-10.png">    </p:cNvPr>
           <p:cNvPicPr>
             <a:picLocks noChangeAspect="1"/>
           </p:cNvPicPr>
@@ -13764,8 +13764,8 @@
         </p:blipFill>
         <p:spPr>
           <a:xfrm>
-            <a:off x="4773168" y="3538728"/>
-            <a:ext cx="1700784" cy="740664"/>
+            <a:off x="5398727" y="3685032"/>
+            <a:ext cx="449666" cy="448056"/>
           </a:xfrm>
           <a:prstGeom prst="rect">
             <a:avLst/>
@@ -13774,7 +13774,7 @@
       </p:pic>
       <p:pic>
         <p:nvPicPr>
-          <p:cNvPr id="14" name="Image 11" descr="/var/folders/hm/sgq6d80d0vq133k7n8dc9bnw0000gn/T/maiershirts-3efGbV/ph-logo-446x194.png">    </p:cNvPr>
+          <p:cNvPr id="14" name="Image 11" descr="/var/folders/hm/sgq6d80d0vq133k7n8dc9bnw0000gn/T/maiershirts-2HUvCI/ref-unternehmen-11.png">    </p:cNvPr>
           <p:cNvPicPr>
             <a:picLocks noChangeAspect="1"/>
           </p:cNvPicPr>
@@ -13790,8 +13790,8 @@
         </p:blipFill>
         <p:spPr>
           <a:xfrm>
-            <a:off x="6876288" y="3538728"/>
-            <a:ext cx="1700784" cy="740664"/>
+            <a:off x="7022592" y="3765694"/>
+            <a:ext cx="1408176" cy="286733"/>
           </a:xfrm>
           <a:prstGeom prst="rect">
             <a:avLst/>
@@ -13914,7 +13914,7 @@
       </p:sp>
       <p:pic>
         <p:nvPicPr>
-          <p:cNvPr id="3" name="Image 0" descr="/var/folders/hm/sgq6d80d0vq133k7n8dc9bnw0000gn/T/maiershirts-3efGbV/ref-vereine-0.png">    </p:cNvPr>
+          <p:cNvPr id="3" name="Image 0" descr="/var/folders/hm/sgq6d80d0vq133k7n8dc9bnw0000gn/T/maiershirts-2HUvCI/ref-vereine-0.png">    </p:cNvPr>
           <p:cNvPicPr>
             <a:picLocks noChangeAspect="1"/>
           </p:cNvPicPr>
@@ -13981,7 +13981,7 @@
       </p:sp>
       <p:pic>
         <p:nvPicPr>
-          <p:cNvPr id="5" name="Image 1" descr="/var/folders/hm/sgq6d80d0vq133k7n8dc9bnw0000gn/T/maiershirts-3efGbV/ref-vereine-1.png">    </p:cNvPr>
+          <p:cNvPr id="5" name="Image 1" descr="/var/folders/hm/sgq6d80d0vq133k7n8dc9bnw0000gn/T/maiershirts-2HUvCI/ref-vereine-1.png">    </p:cNvPr>
           <p:cNvPicPr>
             <a:picLocks noChangeAspect="1"/>
           </p:cNvPicPr>
@@ -14048,7 +14048,7 @@
       </p:sp>
       <p:pic>
         <p:nvPicPr>
-          <p:cNvPr id="7" name="Image 2" descr="/var/folders/hm/sgq6d80d0vq133k7n8dc9bnw0000gn/T/maiershirts-3efGbV/ref-vereine-2.png">    </p:cNvPr>
+          <p:cNvPr id="7" name="Image 2" descr="/var/folders/hm/sgq6d80d0vq133k7n8dc9bnw0000gn/T/maiershirts-2HUvCI/ref-vereine-2.png">    </p:cNvPr>
           <p:cNvPicPr>
             <a:picLocks noChangeAspect="1"/>
           </p:cNvPicPr>
@@ -14115,7 +14115,7 @@
       </p:sp>
       <p:pic>
         <p:nvPicPr>
-          <p:cNvPr id="9" name="Image 3" descr="/var/folders/hm/sgq6d80d0vq133k7n8dc9bnw0000gn/T/maiershirts-3efGbV/ref-vereine-3.png">    </p:cNvPr>
+          <p:cNvPr id="9" name="Image 3" descr="/var/folders/hm/sgq6d80d0vq133k7n8dc9bnw0000gn/T/maiershirts-2HUvCI/ref-vereine-3.png">    </p:cNvPr>
           <p:cNvPicPr>
             <a:picLocks noChangeAspect="1"/>
           </p:cNvPicPr>
@@ -14182,7 +14182,7 @@
       </p:sp>
       <p:pic>
         <p:nvPicPr>
-          <p:cNvPr id="11" name="Image 4" descr="/var/folders/hm/sgq6d80d0vq133k7n8dc9bnw0000gn/T/maiershirts-3efGbV/ref-vereine-4.png">    </p:cNvPr>
+          <p:cNvPr id="11" name="Image 4" descr="/var/folders/hm/sgq6d80d0vq133k7n8dc9bnw0000gn/T/maiershirts-2HUvCI/ref-vereine-4.png">    </p:cNvPr>
           <p:cNvPicPr>
             <a:picLocks noChangeAspect="1"/>
           </p:cNvPicPr>
@@ -14249,7 +14249,7 @@
       </p:sp>
       <p:pic>
         <p:nvPicPr>
-          <p:cNvPr id="13" name="Image 5" descr="/var/folders/hm/sgq6d80d0vq133k7n8dc9bnw0000gn/T/maiershirts-3efGbV/ref-vereine-5.png">    </p:cNvPr>
+          <p:cNvPr id="13" name="Image 5" descr="/var/folders/hm/sgq6d80d0vq133k7n8dc9bnw0000gn/T/maiershirts-2HUvCI/ref-vereine-5.png">    </p:cNvPr>
           <p:cNvPicPr>
             <a:picLocks noChangeAspect="1"/>
           </p:cNvPicPr>
@@ -14316,7 +14316,7 @@
       </p:sp>
       <p:pic>
         <p:nvPicPr>
-          <p:cNvPr id="15" name="Image 6" descr="/var/folders/hm/sgq6d80d0vq133k7n8dc9bnw0000gn/T/maiershirts-3efGbV/ref-vereine-6.png">    </p:cNvPr>
+          <p:cNvPr id="15" name="Image 6" descr="/var/folders/hm/sgq6d80d0vq133k7n8dc9bnw0000gn/T/maiershirts-2HUvCI/ref-vereine-6.png">    </p:cNvPr>
           <p:cNvPicPr>
             <a:picLocks noChangeAspect="1"/>
           </p:cNvPicPr>
@@ -14383,7 +14383,7 @@
       </p:sp>
       <p:pic>
         <p:nvPicPr>
-          <p:cNvPr id="17" name="Image 7" descr="/var/folders/hm/sgq6d80d0vq133k7n8dc9bnw0000gn/T/maiershirts-3efGbV/ref-vereine-7.png">    </p:cNvPr>
+          <p:cNvPr id="17" name="Image 7" descr="/var/folders/hm/sgq6d80d0vq133k7n8dc9bnw0000gn/T/maiershirts-2HUvCI/ref-vereine-7.png">    </p:cNvPr>
           <p:cNvPicPr>
             <a:picLocks noChangeAspect="1"/>
           </p:cNvPicPr>
@@ -14564,7 +14564,7 @@
       </p:sp>
       <p:pic>
         <p:nvPicPr>
-          <p:cNvPr id="3" name="Image 0" descr="/var/folders/hm/sgq6d80d0vq133k7n8dc9bnw0000gn/T/maiershirts-3efGbV/ph-foto-1056x840.png">    </p:cNvPr>
+          <p:cNvPr id="3" name="Image 0" descr="/var/folders/hm/sgq6d80d0vq133k7n8dc9bnw0000gn/T/maiershirts-2HUvCI/ph-foto-1056x840.png">    </p:cNvPr>
           <p:cNvPicPr>
             <a:picLocks noChangeAspect="1"/>
           </p:cNvPicPr>
@@ -15376,7 +15376,7 @@
       </p:sp>
       <p:pic>
         <p:nvPicPr>
-          <p:cNvPr id="4" name="Image 0" descr="/var/folders/hm/sgq6d80d0vq133k7n8dc9bnw0000gn/T/maiershirts-3efGbV/ph-portrait-252x252.png">    </p:cNvPr>
+          <p:cNvPr id="4" name="Image 0" descr="/var/folders/hm/sgq6d80d0vq133k7n8dc9bnw0000gn/T/maiershirts-2HUvCI/ph-portrait-252x252.png">    </p:cNvPr>
           <p:cNvPicPr>
             <a:picLocks noChangeAspect="1"/>
           </p:cNvPicPr>
@@ -15585,7 +15585,7 @@
       </p:sp>
       <p:pic>
         <p:nvPicPr>
-          <p:cNvPr id="9" name="Image 1" descr="/var/folders/hm/sgq6d80d0vq133k7n8dc9bnw0000gn/T/maiershirts-3efGbV/ph-qr-240x240.png">    </p:cNvPr>
+          <p:cNvPr id="9" name="Image 1" descr="/var/folders/hm/sgq6d80d0vq133k7n8dc9bnw0000gn/T/maiershirts-2HUvCI/ph-qr-240x240.png">    </p:cNvPr>
           <p:cNvPicPr>
             <a:picLocks noChangeAspect="1"/>
           </p:cNvPicPr>
@@ -17001,7 +17001,7 @@
       </p:grpSpPr>
       <p:pic>
         <p:nvPicPr>
-          <p:cNvPr id="2" name="Image 0" descr="/var/folders/hm/sgq6d80d0vq133k7n8dc9bnw0000gn/T/maiershirts-3efGbV/ph-foto-2400x1008.png">    </p:cNvPr>
+          <p:cNvPr id="2" name="Image 0" descr="/var/folders/hm/sgq6d80d0vq133k7n8dc9bnw0000gn/T/maiershirts-2HUvCI/ph-foto-2400x1008.png">    </p:cNvPr>
           <p:cNvPicPr>
             <a:picLocks noChangeAspect="1"/>
           </p:cNvPicPr>
@@ -18159,7 +18159,7 @@
       </p:sp>
       <p:pic>
         <p:nvPicPr>
-          <p:cNvPr id="3" name="Image 0" descr="/var/folders/hm/sgq6d80d0vq133k7n8dc9bnw0000gn/T/maiershirts-3efGbV/ph-foto-696x456.png">    </p:cNvPr>
+          <p:cNvPr id="3" name="Image 0" descr="/var/folders/hm/sgq6d80d0vq133k7n8dc9bnw0000gn/T/maiershirts-2HUvCI/ph-foto-696x456.png">    </p:cNvPr>
           <p:cNvPicPr>
             <a:picLocks noChangeAspect="1"/>
           </p:cNvPicPr>
@@ -18329,7 +18329,7 @@
       </p:sp>
       <p:pic>
         <p:nvPicPr>
-          <p:cNvPr id="7" name="Image 1" descr="/var/folders/hm/sgq6d80d0vq133k7n8dc9bnw0000gn/T/maiershirts-3efGbV/ph-foto-696x456.png">    </p:cNvPr>
+          <p:cNvPr id="7" name="Image 1" descr="/var/folders/hm/sgq6d80d0vq133k7n8dc9bnw0000gn/T/maiershirts-2HUvCI/ph-foto-696x456.png">    </p:cNvPr>
           <p:cNvPicPr>
             <a:picLocks noChangeAspect="1"/>
           </p:cNvPicPr>
@@ -18499,7 +18499,7 @@
       </p:sp>
       <p:pic>
         <p:nvPicPr>
-          <p:cNvPr id="11" name="Image 2" descr="/var/folders/hm/sgq6d80d0vq133k7n8dc9bnw0000gn/T/maiershirts-3efGbV/ph-foto-696x456.png">    </p:cNvPr>
+          <p:cNvPr id="11" name="Image 2" descr="/var/folders/hm/sgq6d80d0vq133k7n8dc9bnw0000gn/T/maiershirts-2HUvCI/ph-foto-696x456.png">    </p:cNvPr>
           <p:cNvPicPr>
             <a:picLocks noChangeAspect="1"/>
           </p:cNvPicPr>

--- a/presentation/dist/Maiershirts_Master.pptx
+++ b/presentation/dist/Maiershirts_Master.pptx
@@ -21,9 +21,10 @@
     <p:sldId id="269" r:id="rId15"/>
     <p:sldId id="270" r:id="rId16"/>
     <p:sldId id="271" r:id="rId17"/>
+    <p:sldId id="272" r:id="rId18"/>
   </p:sldIdLst>
   <p:notesMasterIdLst>
-    <p:notesMasterId r:id="rId18"/>
+    <p:notesMasterId r:id="rId19"/>
   </p:notesMasterIdLst>
   <p:sldSz cx="9144000" cy="5143500"/>
   <p:notesSz cx="5143500" cy="9144000"/>
@@ -941,7 +942,7 @@
           <a:p>
             <a:r>
               <a:rPr lang="en-US" dirty="0"/>
-              <a:t>Layout MS_REFERENZEN: 12 Logo-Felder. 12 Logo(s) aus assets/referenzen/unternehmen eingesetzt. Logo per Klick auf das Platzhalterbild einsetzen; bei Beschnitt: Bildformat → Zuschneiden → Anpassen.</a:t>
+              <a:t>Layout MS_REFERENZEN: 12 Logo-Felder. 12 Logo(s) aus assets/referenzen/unternehmen eingesetzt (Folie 1 von 2). Logo per Klick auf das Platzhalterbild einsetzen; bei Beschnitt: Bildformat → Zuschneiden → Anpassen.</a:t>
             </a:r>
             <a:endParaRPr lang="en-US" dirty="0"/>
           </a:p>
@@ -1029,7 +1030,7 @@
           <a:p>
             <a:r>
               <a:rPr lang="en-US" dirty="0"/>
-              <a:t>Layout MS_REFERENZEN_WAPPEN: 8 Logo-Felder. 8 Logo(s) aus assets/referenzen/vereine eingesetzt. Logo per Klick auf das Platzhalterbild einsetzen; bei Beschnitt: Bildformat → Zuschneiden → Anpassen.</a:t>
+              <a:t>Layout MS_REFERENZEN: 12 Logo-Felder. 1 Logo(s) aus assets/referenzen/unternehmen eingesetzt (Folie 2 von 2). Logo per Klick auf das Platzhalterbild einsetzen; bei Beschnitt: Bildformat → Zuschneiden → Anpassen.</a:t>
             </a:r>
             <a:endParaRPr lang="en-US" dirty="0"/>
           </a:p>
@@ -1117,7 +1118,7 @@
           <a:p>
             <a:r>
               <a:rPr lang="en-US" dirty="0"/>
-              <a:t>Layout MS_BILD: Foto links, Textkörper rechts.</a:t>
+              <a:t>Layout MS_REFERENZEN_WAPPEN: 8 Logo-Felder. 8 Logo(s) aus assets/referenzen/vereine eingesetzt (Folie 1 von 1). Logo per Klick auf das Platzhalterbild einsetzen; bei Beschnitt: Bildformat → Zuschneiden → Anpassen.</a:t>
             </a:r>
             <a:endParaRPr lang="en-US" dirty="0"/>
           </a:p>
@@ -1205,7 +1206,7 @@
           <a:p>
             <a:r>
               <a:rPr lang="en-US" dirty="0"/>
-              <a:t>Layout MS_FREI mit nativem Säulendiagramm links und Kernaussage rechts.</a:t>
+              <a:t>Layout MS_BILD: Foto links, Textkörper rechts.</a:t>
             </a:r>
             <a:endParaRPr lang="en-US" dirty="0"/>
           </a:p>
@@ -1293,7 +1294,7 @@
           <a:p>
             <a:r>
               <a:rPr lang="en-US" dirty="0"/>
-              <a:t>Layout MS_INHALT: Titel und Textkörper mit Aufzählung.</a:t>
+              <a:t>Layout MS_FREI mit nativem Säulendiagramm links und Kernaussage rechts.</a:t>
             </a:r>
             <a:endParaRPr lang="en-US" dirty="0"/>
           </a:p>
@@ -1381,7 +1382,7 @@
           <a:p>
             <a:r>
               <a:rPr lang="en-US" dirty="0"/>
-              <a:t>Layout MS_ABSCHLUSS: Handlungsaufforderung, Ansprechpartner mit Foto, nächster Schritt mit Termin, QR-Code. Kontaktdaten sind Platzhalter.</a:t>
+              <a:t>Layout MS_INHALT: Titel und Textkörper mit Aufzählung.</a:t>
             </a:r>
             <a:endParaRPr lang="en-US" dirty="0"/>
           </a:p>
@@ -1405,6 +1406,94 @@
             <a:fld id="{F7021451-1387-4CA6-816F-3879F97B5CBC}" type="slidenum">
               <a:rPr lang="en-US"/>
               <a:t>16</a:t>
+            </a:fld>
+            <a:endParaRPr lang="en-US"/>
+          </a:p>
+        </p:txBody>
+      </p:sp>
+    </p:spTree>
+    <p:extLst>
+      <p:ext uri="{BB962C8B-B14F-4D97-AF65-F5344CB8AC3E}">
+        <p14:creationId xmlns:p14="http://schemas.microsoft.com/office/powerpoint/2010/main" val="1024086991"/>
+      </p:ext>
+    </p:extLst>
+  </p:cSld>
+  <p:clrMapOvr>
+    <a:masterClrMapping/>
+  </p:clrMapOvr>
+</p:notes>
+</file>
+
+<file path=ppt/notesSlides/notesSlide17.xml><?xml version="1.0" encoding="utf-8"?>
+<p:notes xmlns:a="http://schemas.openxmlformats.org/drawingml/2006/main" xmlns:r="http://schemas.openxmlformats.org/officeDocument/2006/relationships" xmlns:p="http://schemas.openxmlformats.org/presentationml/2006/main">
+  <p:cSld>
+    <p:spTree>
+      <p:nvGrpSpPr>
+        <p:cNvPr id="1" name=""/>
+        <p:cNvGrpSpPr/>
+        <p:nvPr/>
+      </p:nvGrpSpPr>
+      <p:grpSpPr>
+        <a:xfrm>
+          <a:off x="0" y="0"/>
+          <a:ext cx="0" cy="0"/>
+          <a:chOff x="0" y="0"/>
+          <a:chExt cx="0" cy="0"/>
+        </a:xfrm>
+      </p:grpSpPr>
+      <p:sp>
+        <p:nvSpPr>
+          <p:cNvPr id="2" name="Slide Image Placeholder 1"/>
+          <p:cNvSpPr>
+            <a:spLocks noGrp="1" noRot="1" noChangeAspect="1"/>
+          </p:cNvSpPr>
+          <p:nvPr>
+            <p:ph type="sldImg"/>
+          </p:nvPr>
+        </p:nvSpPr>
+        <p:spPr/>
+      </p:sp>
+      <p:sp>
+        <p:nvSpPr>
+          <p:cNvPr id="3" name="Notes Placeholder 2"/>
+          <p:cNvSpPr>
+            <a:spLocks noGrp="1"/>
+          </p:cNvSpPr>
+          <p:nvPr>
+            <p:ph type="body" idx="1"/>
+          </p:nvPr>
+        </p:nvSpPr>
+        <p:spPr/>
+        <p:txBody>
+          <a:bodyPr/>
+          <a:lstStyle/>
+          <a:p>
+            <a:r>
+              <a:rPr lang="en-US" dirty="0"/>
+              <a:t>Layout MS_ABSCHLUSS: Handlungsaufforderung, Ansprechpartner mit Foto, nächster Schritt mit Termin, QR-Code. Kontaktdaten sind Platzhalter.</a:t>
+            </a:r>
+            <a:endParaRPr lang="en-US" dirty="0"/>
+          </a:p>
+        </p:txBody>
+      </p:sp>
+      <p:sp>
+        <p:nvSpPr>
+          <p:cNvPr id="4" name="Slide Number Placeholder 3"/>
+          <p:cNvSpPr>
+            <a:spLocks noGrp="1"/>
+          </p:cNvSpPr>
+          <p:nvPr>
+            <p:ph type="sldNum" sz="quarter" idx="10"/>
+          </p:nvPr>
+        </p:nvSpPr>
+        <p:spPr/>
+        <p:txBody>
+          <a:bodyPr/>
+          <a:lstStyle/>
+          <a:p>
+            <a:fld id="{F7021451-1387-4CA6-816F-3879F97B5CBC}" type="slidenum">
+              <a:rPr lang="en-US"/>
+              <a:t>17</a:t>
             </a:fld>
             <a:endParaRPr lang="en-US"/>
           </a:p>
@@ -13480,7 +13569,7 @@
                 <a:ea typeface="Inter" pitchFamily="34" charset="-122"/>
                 <a:cs typeface="Inter" pitchFamily="34" charset="-120"/>
               </a:rPr>
-              <a:t>Unternehmen, die uns vertrauen</a:t>
+              <a:t>Unternehmen, die uns vertrauen (1/2)</a:t>
             </a:r>
             <a:endParaRPr lang="en-US" sz="2800" dirty="0"/>
           </a:p>
@@ -13488,7 +13577,7 @@
       </p:sp>
       <p:pic>
         <p:nvPicPr>
-          <p:cNvPr id="3" name="Image 0" descr="/var/folders/hm/sgq6d80d0vq133k7n8dc9bnw0000gn/T/maiershirts-2HUvCI/ref-unternehmen-0.png">    </p:cNvPr>
+          <p:cNvPr id="3" name="Image 0" descr="/var/folders/hm/sgq6d80d0vq133k7n8dc9bnw0000gn/T/maiershirts-Os5V18/ref-unternehmen-0-0.png">    </p:cNvPr>
           <p:cNvPicPr>
             <a:picLocks noChangeAspect="1"/>
           </p:cNvPicPr>
@@ -13514,7 +13603,7 @@
       </p:pic>
       <p:pic>
         <p:nvPicPr>
-          <p:cNvPr id="4" name="Image 1" descr="/var/folders/hm/sgq6d80d0vq133k7n8dc9bnw0000gn/T/maiershirts-2HUvCI/ref-unternehmen-1.png">    </p:cNvPr>
+          <p:cNvPr id="4" name="Image 1" descr="/var/folders/hm/sgq6d80d0vq133k7n8dc9bnw0000gn/T/maiershirts-Os5V18/ref-unternehmen-0-1.png">    </p:cNvPr>
           <p:cNvPicPr>
             <a:picLocks noChangeAspect="1"/>
           </p:cNvPicPr>
@@ -13540,7 +13629,7 @@
       </p:pic>
       <p:pic>
         <p:nvPicPr>
-          <p:cNvPr id="5" name="Image 2" descr="/var/folders/hm/sgq6d80d0vq133k7n8dc9bnw0000gn/T/maiershirts-2HUvCI/ref-unternehmen-2.png">    </p:cNvPr>
+          <p:cNvPr id="5" name="Image 2" descr="/var/folders/hm/sgq6d80d0vq133k7n8dc9bnw0000gn/T/maiershirts-Os5V18/ref-unternehmen-0-2.png">    </p:cNvPr>
           <p:cNvPicPr>
             <a:picLocks noChangeAspect="1"/>
           </p:cNvPicPr>
@@ -13566,7 +13655,7 @@
       </p:pic>
       <p:pic>
         <p:nvPicPr>
-          <p:cNvPr id="6" name="Image 3" descr="/var/folders/hm/sgq6d80d0vq133k7n8dc9bnw0000gn/T/maiershirts-2HUvCI/ref-unternehmen-3.png">    </p:cNvPr>
+          <p:cNvPr id="6" name="Image 3" descr="/var/folders/hm/sgq6d80d0vq133k7n8dc9bnw0000gn/T/maiershirts-Os5V18/ref-unternehmen-0-3.png">    </p:cNvPr>
           <p:cNvPicPr>
             <a:picLocks noChangeAspect="1"/>
           </p:cNvPicPr>
@@ -13592,7 +13681,7 @@
       </p:pic>
       <p:pic>
         <p:nvPicPr>
-          <p:cNvPr id="7" name="Image 4" descr="/var/folders/hm/sgq6d80d0vq133k7n8dc9bnw0000gn/T/maiershirts-2HUvCI/ref-unternehmen-4.png">    </p:cNvPr>
+          <p:cNvPr id="7" name="Image 4" descr="/var/folders/hm/sgq6d80d0vq133k7n8dc9bnw0000gn/T/maiershirts-Os5V18/ref-unternehmen-0-4.png">    </p:cNvPr>
           <p:cNvPicPr>
             <a:picLocks noChangeAspect="1"/>
           </p:cNvPicPr>
@@ -13618,7 +13707,7 @@
       </p:pic>
       <p:pic>
         <p:nvPicPr>
-          <p:cNvPr id="8" name="Image 5" descr="/var/folders/hm/sgq6d80d0vq133k7n8dc9bnw0000gn/T/maiershirts-2HUvCI/ref-unternehmen-5.png">    </p:cNvPr>
+          <p:cNvPr id="8" name="Image 5" descr="/var/folders/hm/sgq6d80d0vq133k7n8dc9bnw0000gn/T/maiershirts-Os5V18/ref-unternehmen-0-5.png">    </p:cNvPr>
           <p:cNvPicPr>
             <a:picLocks noChangeAspect="1"/>
           </p:cNvPicPr>
@@ -13644,7 +13733,7 @@
       </p:pic>
       <p:pic>
         <p:nvPicPr>
-          <p:cNvPr id="9" name="Image 6" descr="/var/folders/hm/sgq6d80d0vq133k7n8dc9bnw0000gn/T/maiershirts-2HUvCI/ref-unternehmen-6.png">    </p:cNvPr>
+          <p:cNvPr id="9" name="Image 6" descr="/var/folders/hm/sgq6d80d0vq133k7n8dc9bnw0000gn/T/maiershirts-Os5V18/ref-unternehmen-0-6.png">    </p:cNvPr>
           <p:cNvPicPr>
             <a:picLocks noChangeAspect="1"/>
           </p:cNvPicPr>
@@ -13670,7 +13759,7 @@
       </p:pic>
       <p:pic>
         <p:nvPicPr>
-          <p:cNvPr id="10" name="Image 7" descr="/var/folders/hm/sgq6d80d0vq133k7n8dc9bnw0000gn/T/maiershirts-2HUvCI/ref-unternehmen-7.png">    </p:cNvPr>
+          <p:cNvPr id="10" name="Image 7" descr="/var/folders/hm/sgq6d80d0vq133k7n8dc9bnw0000gn/T/maiershirts-Os5V18/ref-unternehmen-0-7.png">    </p:cNvPr>
           <p:cNvPicPr>
             <a:picLocks noChangeAspect="1"/>
           </p:cNvPicPr>
@@ -13696,7 +13785,7 @@
       </p:pic>
       <p:pic>
         <p:nvPicPr>
-          <p:cNvPr id="11" name="Image 8" descr="/var/folders/hm/sgq6d80d0vq133k7n8dc9bnw0000gn/T/maiershirts-2HUvCI/ref-unternehmen-8.png">    </p:cNvPr>
+          <p:cNvPr id="11" name="Image 8" descr="/var/folders/hm/sgq6d80d0vq133k7n8dc9bnw0000gn/T/maiershirts-Os5V18/ref-unternehmen-0-8.png">    </p:cNvPr>
           <p:cNvPicPr>
             <a:picLocks noChangeAspect="1"/>
           </p:cNvPicPr>
@@ -13722,7 +13811,7 @@
       </p:pic>
       <p:pic>
         <p:nvPicPr>
-          <p:cNvPr id="12" name="Image 9" descr="/var/folders/hm/sgq6d80d0vq133k7n8dc9bnw0000gn/T/maiershirts-2HUvCI/ref-unternehmen-9.png">    </p:cNvPr>
+          <p:cNvPr id="12" name="Image 9" descr="/var/folders/hm/sgq6d80d0vq133k7n8dc9bnw0000gn/T/maiershirts-Os5V18/ref-unternehmen-0-9.png">    </p:cNvPr>
           <p:cNvPicPr>
             <a:picLocks noChangeAspect="1"/>
           </p:cNvPicPr>
@@ -13748,7 +13837,7 @@
       </p:pic>
       <p:pic>
         <p:nvPicPr>
-          <p:cNvPr id="13" name="Image 10" descr="/var/folders/hm/sgq6d80d0vq133k7n8dc9bnw0000gn/T/maiershirts-2HUvCI/ref-unternehmen-10.png">    </p:cNvPr>
+          <p:cNvPr id="13" name="Image 10" descr="/var/folders/hm/sgq6d80d0vq133k7n8dc9bnw0000gn/T/maiershirts-Os5V18/ref-unternehmen-0-10.png">    </p:cNvPr>
           <p:cNvPicPr>
             <a:picLocks noChangeAspect="1"/>
           </p:cNvPicPr>
@@ -13774,7 +13863,7 @@
       </p:pic>
       <p:pic>
         <p:nvPicPr>
-          <p:cNvPr id="14" name="Image 11" descr="/var/folders/hm/sgq6d80d0vq133k7n8dc9bnw0000gn/T/maiershirts-2HUvCI/ref-unternehmen-11.png">    </p:cNvPr>
+          <p:cNvPr id="14" name="Image 11" descr="/var/folders/hm/sgq6d80d0vq133k7n8dc9bnw0000gn/T/maiershirts-Os5V18/ref-unternehmen-0-11.png">    </p:cNvPr>
           <p:cNvPicPr>
             <a:picLocks noChangeAspect="1"/>
           </p:cNvPicPr>
@@ -13906,7 +13995,7 @@
                 <a:ea typeface="Inter" pitchFamily="34" charset="-122"/>
                 <a:cs typeface="Inter" pitchFamily="34" charset="-120"/>
               </a:rPr>
-              <a:t>Vereine, die uns vertrauen</a:t>
+              <a:t>Unternehmen, die uns vertrauen (2/2)</a:t>
             </a:r>
             <a:endParaRPr lang="en-US" sz="2800" dirty="0"/>
           </a:p>
@@ -13914,7 +14003,7 @@
       </p:sp>
       <p:pic>
         <p:nvPicPr>
-          <p:cNvPr id="3" name="Image 0" descr="/var/folders/hm/sgq6d80d0vq133k7n8dc9bnw0000gn/T/maiershirts-2HUvCI/ref-vereine-0.png">    </p:cNvPr>
+          <p:cNvPr id="3" name="Image 0" descr="/var/folders/hm/sgq6d80d0vq133k7n8dc9bnw0000gn/T/maiershirts-Os5V18/ref-unternehmen-1-0.png">    </p:cNvPr>
           <p:cNvPicPr>
             <a:picLocks noChangeAspect="1"/>
           </p:cNvPicPr>
@@ -13930,63 +14019,22 @@
         </p:blipFill>
         <p:spPr>
           <a:xfrm>
-            <a:off x="843422" y="1490472"/>
-            <a:ext cx="1147795" cy="667512"/>
+            <a:off x="1169090" y="1490472"/>
+            <a:ext cx="496461" cy="448056"/>
           </a:xfrm>
           <a:prstGeom prst="rect">
             <a:avLst/>
           </a:prstGeom>
         </p:spPr>
       </p:pic>
-      <p:sp>
-        <p:nvSpPr>
-          <p:cNvPr id="4" name="Text 0"/>
-          <p:cNvSpPr txBox="1"/>
-          <p:nvPr>
-            <p:ph idx="103" type="body" hasCustomPrompt="1"/>
-          </p:nvPr>
-        </p:nvSpPr>
-        <p:spPr>
-          <a:xfrm>
-            <a:off x="566928" y="2414016"/>
-            <a:ext cx="1700784" cy="274320"/>
-          </a:xfrm>
-          <a:prstGeom prst="rect">
-            <a:avLst/>
-          </a:prstGeom>
-          <a:noFill/>
-          <a:ln/>
-        </p:spPr>
-        <p:txBody>
-          <a:bodyPr wrap="square" lIns="0" tIns="0" rIns="0" bIns="0" rtlCol="0" anchor="ctr"/>
-          <a:lstStyle/>
-          <a:p>
-            <a:pPr algn="ctr" indent="0" marL="0">
-              <a:buNone/>
-            </a:pPr>
-            <a:r>
-              <a:rPr lang="en-US" sz="1100" b="1" dirty="0">
-                <a:solidFill>
-                  <a:srgbClr val="0F0F0F"/>
-                </a:solidFill>
-                <a:latin typeface="Inter" pitchFamily="34" charset="0"/>
-                <a:ea typeface="Inter" pitchFamily="34" charset="-122"/>
-                <a:cs typeface="Inter" pitchFamily="34" charset="-120"/>
-              </a:rPr>
-              <a:t>DAV Sektion Tübingen</a:t>
-            </a:r>
-            <a:endParaRPr lang="en-US" sz="1100" dirty="0"/>
-          </a:p>
-        </p:txBody>
-      </p:sp>
       <p:pic>
         <p:nvPicPr>
-          <p:cNvPr id="5" name="Image 1" descr="/var/folders/hm/sgq6d80d0vq133k7n8dc9bnw0000gn/T/maiershirts-2HUvCI/ref-vereine-1.png">    </p:cNvPr>
+          <p:cNvPr id="4" name="Image 1" descr="/var/folders/hm/sgq6d80d0vq133k7n8dc9bnw0000gn/T/maiershirts-Os5V18/ph-logo-446x194.png">    </p:cNvPr>
           <p:cNvPicPr>
             <a:picLocks noChangeAspect="1"/>
           </p:cNvPicPr>
           <p:nvPr>
-            <p:ph idx="104" type="pic" hasCustomPrompt="1"/>
+            <p:ph idx="103" type="pic" hasCustomPrompt="1"/>
           </p:nvPr>
         </p:nvPicPr>
         <p:blipFill>
@@ -13997,63 +14045,22 @@
         </p:blipFill>
         <p:spPr>
           <a:xfrm>
-            <a:off x="2858236" y="1490472"/>
-            <a:ext cx="1324409" cy="667512"/>
+            <a:off x="2670048" y="1344168"/>
+            <a:ext cx="1700784" cy="740664"/>
           </a:xfrm>
           <a:prstGeom prst="rect">
             <a:avLst/>
           </a:prstGeom>
         </p:spPr>
       </p:pic>
-      <p:sp>
-        <p:nvSpPr>
-          <p:cNvPr id="6" name="Text 0"/>
-          <p:cNvSpPr txBox="1"/>
-          <p:nvPr>
-            <p:ph idx="105" type="body" hasCustomPrompt="1"/>
-          </p:nvPr>
-        </p:nvSpPr>
-        <p:spPr>
-          <a:xfrm>
-            <a:off x="2670048" y="2414016"/>
-            <a:ext cx="1700784" cy="274320"/>
-          </a:xfrm>
-          <a:prstGeom prst="rect">
-            <a:avLst/>
-          </a:prstGeom>
-          <a:noFill/>
-          <a:ln/>
-        </p:spPr>
-        <p:txBody>
-          <a:bodyPr wrap="square" lIns="0" tIns="0" rIns="0" bIns="0" rtlCol="0" anchor="ctr"/>
-          <a:lstStyle/>
-          <a:p>
-            <a:pPr algn="ctr" indent="0" marL="0">
-              <a:buNone/>
-            </a:pPr>
-            <a:r>
-              <a:rPr lang="en-US" sz="1100" b="1" dirty="0">
-                <a:solidFill>
-                  <a:srgbClr val="0F0F0F"/>
-                </a:solidFill>
-                <a:latin typeface="Inter" pitchFamily="34" charset="0"/>
-                <a:ea typeface="Inter" pitchFamily="34" charset="-122"/>
-                <a:cs typeface="Inter" pitchFamily="34" charset="-120"/>
-              </a:rPr>
-              <a:t>Tennisclub Ammerbuch</a:t>
-            </a:r>
-            <a:endParaRPr lang="en-US" sz="1100" dirty="0"/>
-          </a:p>
-        </p:txBody>
-      </p:sp>
       <p:pic>
         <p:nvPicPr>
-          <p:cNvPr id="7" name="Image 2" descr="/var/folders/hm/sgq6d80d0vq133k7n8dc9bnw0000gn/T/maiershirts-2HUvCI/ref-vereine-2.png">    </p:cNvPr>
+          <p:cNvPr id="5" name="Image 2" descr="/var/folders/hm/sgq6d80d0vq133k7n8dc9bnw0000gn/T/maiershirts-Os5V18/ph-logo-446x194.png">    </p:cNvPr>
           <p:cNvPicPr>
             <a:picLocks noChangeAspect="1"/>
           </p:cNvPicPr>
           <p:nvPr>
-            <p:ph idx="106" type="pic" hasCustomPrompt="1"/>
+            <p:ph idx="104" type="pic" hasCustomPrompt="1"/>
           </p:nvPr>
         </p:nvPicPr>
         <p:blipFill>
@@ -14064,63 +14071,22 @@
         </p:blipFill>
         <p:spPr>
           <a:xfrm>
-            <a:off x="5369071" y="1490472"/>
-            <a:ext cx="508978" cy="667512"/>
+            <a:off x="4773168" y="1344168"/>
+            <a:ext cx="1700784" cy="740664"/>
           </a:xfrm>
           <a:prstGeom prst="rect">
             <a:avLst/>
           </a:prstGeom>
         </p:spPr>
       </p:pic>
-      <p:sp>
-        <p:nvSpPr>
-          <p:cNvPr id="8" name="Text 0"/>
-          <p:cNvSpPr txBox="1"/>
-          <p:nvPr>
-            <p:ph idx="107" type="body" hasCustomPrompt="1"/>
-          </p:nvPr>
-        </p:nvSpPr>
-        <p:spPr>
-          <a:xfrm>
-            <a:off x="4773168" y="2414016"/>
-            <a:ext cx="1700784" cy="274320"/>
-          </a:xfrm>
-          <a:prstGeom prst="rect">
-            <a:avLst/>
-          </a:prstGeom>
-          <a:noFill/>
-          <a:ln/>
-        </p:spPr>
-        <p:txBody>
-          <a:bodyPr wrap="square" lIns="0" tIns="0" rIns="0" bIns="0" rtlCol="0" anchor="ctr"/>
-          <a:lstStyle/>
-          <a:p>
-            <a:pPr algn="ctr" indent="0" marL="0">
-              <a:buNone/>
-            </a:pPr>
-            <a:r>
-              <a:rPr lang="en-US" sz="1100" b="1" dirty="0">
-                <a:solidFill>
-                  <a:srgbClr val="0F0F0F"/>
-                </a:solidFill>
-                <a:latin typeface="Inter" pitchFamily="34" charset="0"/>
-                <a:ea typeface="Inter" pitchFamily="34" charset="-122"/>
-                <a:cs typeface="Inter" pitchFamily="34" charset="-120"/>
-              </a:rPr>
-              <a:t>TGV Entringen</a:t>
-            </a:r>
-            <a:endParaRPr lang="en-US" sz="1100" dirty="0"/>
-          </a:p>
-        </p:txBody>
-      </p:sp>
       <p:pic>
         <p:nvPicPr>
-          <p:cNvPr id="9" name="Image 3" descr="/var/folders/hm/sgq6d80d0vq133k7n8dc9bnw0000gn/T/maiershirts-2HUvCI/ref-vereine-3.png">    </p:cNvPr>
+          <p:cNvPr id="6" name="Image 3" descr="/var/folders/hm/sgq6d80d0vq133k7n8dc9bnw0000gn/T/maiershirts-Os5V18/ph-logo-446x194.png">    </p:cNvPr>
           <p:cNvPicPr>
             <a:picLocks noChangeAspect="1"/>
           </p:cNvPicPr>
           <p:nvPr>
-            <p:ph idx="108" type="pic" hasCustomPrompt="1"/>
+            <p:ph idx="105" type="pic" hasCustomPrompt="1"/>
           </p:nvPr>
         </p:nvPicPr>
         <p:blipFill>
@@ -14131,63 +14097,22 @@
         </p:blipFill>
         <p:spPr>
           <a:xfrm>
-            <a:off x="7392924" y="1490472"/>
-            <a:ext cx="667512" cy="667512"/>
+            <a:off x="6876288" y="1344168"/>
+            <a:ext cx="1700784" cy="740664"/>
           </a:xfrm>
           <a:prstGeom prst="rect">
             <a:avLst/>
           </a:prstGeom>
         </p:spPr>
       </p:pic>
-      <p:sp>
-        <p:nvSpPr>
-          <p:cNvPr id="10" name="Text 0"/>
-          <p:cNvSpPr txBox="1"/>
-          <p:nvPr>
-            <p:ph idx="109" type="body" hasCustomPrompt="1"/>
-          </p:nvPr>
-        </p:nvSpPr>
-        <p:spPr>
-          <a:xfrm>
-            <a:off x="6876288" y="2414016"/>
-            <a:ext cx="1700784" cy="274320"/>
-          </a:xfrm>
-          <a:prstGeom prst="rect">
-            <a:avLst/>
-          </a:prstGeom>
-          <a:noFill/>
-          <a:ln/>
-        </p:spPr>
-        <p:txBody>
-          <a:bodyPr wrap="square" lIns="0" tIns="0" rIns="0" bIns="0" rtlCol="0" anchor="ctr"/>
-          <a:lstStyle/>
-          <a:p>
-            <a:pPr algn="ctr" indent="0" marL="0">
-              <a:buNone/>
-            </a:pPr>
-            <a:r>
-              <a:rPr lang="en-US" sz="1100" b="1" dirty="0">
-                <a:solidFill>
-                  <a:srgbClr val="0F0F0F"/>
-                </a:solidFill>
-                <a:latin typeface="Inter" pitchFamily="34" charset="0"/>
-                <a:ea typeface="Inter" pitchFamily="34" charset="-122"/>
-                <a:cs typeface="Inter" pitchFamily="34" charset="-120"/>
-              </a:rPr>
-              <a:t>Hooriger Hund Sulzbach</a:t>
-            </a:r>
-            <a:endParaRPr lang="en-US" sz="1100" dirty="0"/>
-          </a:p>
-        </p:txBody>
-      </p:sp>
       <p:pic>
         <p:nvPicPr>
-          <p:cNvPr id="11" name="Image 4" descr="/var/folders/hm/sgq6d80d0vq133k7n8dc9bnw0000gn/T/maiershirts-2HUvCI/ref-vereine-4.png">    </p:cNvPr>
+          <p:cNvPr id="7" name="Image 4" descr="/var/folders/hm/sgq6d80d0vq133k7n8dc9bnw0000gn/T/maiershirts-Os5V18/ph-logo-446x194.png">    </p:cNvPr>
           <p:cNvPicPr>
             <a:picLocks noChangeAspect="1"/>
           </p:cNvPicPr>
           <p:nvPr>
-            <p:ph idx="110" type="pic" hasCustomPrompt="1"/>
+            <p:ph idx="106" type="pic" hasCustomPrompt="1"/>
           </p:nvPr>
         </p:nvPicPr>
         <p:blipFill>
@@ -14198,63 +14123,22 @@
         </p:blipFill>
         <p:spPr>
           <a:xfrm>
-            <a:off x="1073295" y="3090672"/>
-            <a:ext cx="688051" cy="667512"/>
+            <a:off x="566928" y="2441448"/>
+            <a:ext cx="1700784" cy="740664"/>
           </a:xfrm>
           <a:prstGeom prst="rect">
             <a:avLst/>
           </a:prstGeom>
         </p:spPr>
       </p:pic>
-      <p:sp>
-        <p:nvSpPr>
-          <p:cNvPr id="12" name="Text 0"/>
-          <p:cNvSpPr txBox="1"/>
-          <p:nvPr>
-            <p:ph idx="111" type="body" hasCustomPrompt="1"/>
-          </p:nvPr>
-        </p:nvSpPr>
-        <p:spPr>
-          <a:xfrm>
-            <a:off x="566928" y="4014216"/>
-            <a:ext cx="1700784" cy="274320"/>
-          </a:xfrm>
-          <a:prstGeom prst="rect">
-            <a:avLst/>
-          </a:prstGeom>
-          <a:noFill/>
-          <a:ln/>
-        </p:spPr>
-        <p:txBody>
-          <a:bodyPr wrap="square" lIns="0" tIns="0" rIns="0" bIns="0" rtlCol="0" anchor="ctr"/>
-          <a:lstStyle/>
-          <a:p>
-            <a:pPr algn="ctr" indent="0" marL="0">
-              <a:buNone/>
-            </a:pPr>
-            <a:r>
-              <a:rPr lang="en-US" sz="1100" b="1" dirty="0">
-                <a:solidFill>
-                  <a:srgbClr val="0F0F0F"/>
-                </a:solidFill>
-                <a:latin typeface="Inter" pitchFamily="34" charset="0"/>
-                <a:ea typeface="Inter" pitchFamily="34" charset="-122"/>
-                <a:cs typeface="Inter" pitchFamily="34" charset="-120"/>
-              </a:rPr>
-              <a:t>Sportfreunde Dußlingen</a:t>
-            </a:r>
-            <a:endParaRPr lang="en-US" sz="1100" dirty="0"/>
-          </a:p>
-        </p:txBody>
-      </p:sp>
       <p:pic>
         <p:nvPicPr>
-          <p:cNvPr id="13" name="Image 5" descr="/var/folders/hm/sgq6d80d0vq133k7n8dc9bnw0000gn/T/maiershirts-2HUvCI/ref-vereine-5.png">    </p:cNvPr>
+          <p:cNvPr id="8" name="Image 5" descr="/var/folders/hm/sgq6d80d0vq133k7n8dc9bnw0000gn/T/maiershirts-Os5V18/ph-logo-446x194.png">    </p:cNvPr>
           <p:cNvPicPr>
             <a:picLocks noChangeAspect="1"/>
           </p:cNvPicPr>
           <p:nvPr>
-            <p:ph idx="112" type="pic" hasCustomPrompt="1"/>
+            <p:ph idx="107" type="pic" hasCustomPrompt="1"/>
           </p:nvPr>
         </p:nvPicPr>
         <p:blipFill>
@@ -14265,63 +14149,22 @@
         </p:blipFill>
         <p:spPr>
           <a:xfrm>
-            <a:off x="3186684" y="3090672"/>
-            <a:ext cx="667512" cy="667512"/>
+            <a:off x="2670048" y="2441448"/>
+            <a:ext cx="1700784" cy="740664"/>
           </a:xfrm>
           <a:prstGeom prst="rect">
             <a:avLst/>
           </a:prstGeom>
         </p:spPr>
       </p:pic>
-      <p:sp>
-        <p:nvSpPr>
-          <p:cNvPr id="14" name="Text 0"/>
-          <p:cNvSpPr txBox="1"/>
-          <p:nvPr>
-            <p:ph idx="113" type="body" hasCustomPrompt="1"/>
-          </p:nvPr>
-        </p:nvSpPr>
-        <p:spPr>
-          <a:xfrm>
-            <a:off x="2670048" y="4014216"/>
-            <a:ext cx="1700784" cy="274320"/>
-          </a:xfrm>
-          <a:prstGeom prst="rect">
-            <a:avLst/>
-          </a:prstGeom>
-          <a:noFill/>
-          <a:ln/>
-        </p:spPr>
-        <p:txBody>
-          <a:bodyPr wrap="square" lIns="0" tIns="0" rIns="0" bIns="0" rtlCol="0" anchor="ctr"/>
-          <a:lstStyle/>
-          <a:p>
-            <a:pPr algn="ctr" indent="0" marL="0">
-              <a:buNone/>
-            </a:pPr>
-            <a:r>
-              <a:rPr lang="en-US" sz="1100" b="1" dirty="0">
-                <a:solidFill>
-                  <a:srgbClr val="0F0F0F"/>
-                </a:solidFill>
-                <a:latin typeface="Inter" pitchFamily="34" charset="0"/>
-                <a:ea typeface="Inter" pitchFamily="34" charset="-122"/>
-                <a:cs typeface="Inter" pitchFamily="34" charset="-120"/>
-              </a:rPr>
-              <a:t>SV Germania Bietigheim</a:t>
-            </a:r>
-            <a:endParaRPr lang="en-US" sz="1100" dirty="0"/>
-          </a:p>
-        </p:txBody>
-      </p:sp>
       <p:pic>
         <p:nvPicPr>
-          <p:cNvPr id="15" name="Image 6" descr="/var/folders/hm/sgq6d80d0vq133k7n8dc9bnw0000gn/T/maiershirts-2HUvCI/ref-vereine-6.png">    </p:cNvPr>
+          <p:cNvPr id="9" name="Image 6" descr="/var/folders/hm/sgq6d80d0vq133k7n8dc9bnw0000gn/T/maiershirts-Os5V18/ph-logo-446x194.png">    </p:cNvPr>
           <p:cNvPicPr>
             <a:picLocks noChangeAspect="1"/>
           </p:cNvPicPr>
           <p:nvPr>
-            <p:ph idx="114" type="pic" hasCustomPrompt="1"/>
+            <p:ph idx="108" type="pic" hasCustomPrompt="1"/>
           </p:nvPr>
         </p:nvPicPr>
         <p:blipFill>
@@ -14332,63 +14175,22 @@
         </p:blipFill>
         <p:spPr>
           <a:xfrm>
-            <a:off x="5288359" y="3090672"/>
-            <a:ext cx="670402" cy="667512"/>
+            <a:off x="4773168" y="2441448"/>
+            <a:ext cx="1700784" cy="740664"/>
           </a:xfrm>
           <a:prstGeom prst="rect">
             <a:avLst/>
           </a:prstGeom>
         </p:spPr>
       </p:pic>
-      <p:sp>
-        <p:nvSpPr>
-          <p:cNvPr id="16" name="Text 0"/>
-          <p:cNvSpPr txBox="1"/>
-          <p:nvPr>
-            <p:ph idx="115" type="body" hasCustomPrompt="1"/>
-          </p:nvPr>
-        </p:nvSpPr>
-        <p:spPr>
-          <a:xfrm>
-            <a:off x="4773168" y="4014216"/>
-            <a:ext cx="1700784" cy="274320"/>
-          </a:xfrm>
-          <a:prstGeom prst="rect">
-            <a:avLst/>
-          </a:prstGeom>
-          <a:noFill/>
-          <a:ln/>
-        </p:spPr>
-        <p:txBody>
-          <a:bodyPr wrap="square" lIns="0" tIns="0" rIns="0" bIns="0" rtlCol="0" anchor="ctr"/>
-          <a:lstStyle/>
-          <a:p>
-            <a:pPr algn="ctr" indent="0" marL="0">
-              <a:buNone/>
-            </a:pPr>
-            <a:r>
-              <a:rPr lang="en-US" sz="1100" b="1" dirty="0">
-                <a:solidFill>
-                  <a:srgbClr val="0F0F0F"/>
-                </a:solidFill>
-                <a:latin typeface="Inter" pitchFamily="34" charset="0"/>
-                <a:ea typeface="Inter" pitchFamily="34" charset="-122"/>
-                <a:cs typeface="Inter" pitchFamily="34" charset="-120"/>
-              </a:rPr>
-              <a:t>TV Mühlacker</a:t>
-            </a:r>
-            <a:endParaRPr lang="en-US" sz="1100" dirty="0"/>
-          </a:p>
-        </p:txBody>
-      </p:sp>
       <p:pic>
         <p:nvPicPr>
-          <p:cNvPr id="17" name="Image 7" descr="/var/folders/hm/sgq6d80d0vq133k7n8dc9bnw0000gn/T/maiershirts-2HUvCI/ref-vereine-7.png">    </p:cNvPr>
+          <p:cNvPr id="10" name="Image 7" descr="/var/folders/hm/sgq6d80d0vq133k7n8dc9bnw0000gn/T/maiershirts-Os5V18/ph-logo-446x194.png">    </p:cNvPr>
           <p:cNvPicPr>
             <a:picLocks noChangeAspect="1"/>
           </p:cNvPicPr>
           <p:nvPr>
-            <p:ph idx="116" type="pic" hasCustomPrompt="1"/>
+            <p:ph idx="109" type="pic" hasCustomPrompt="1"/>
           </p:nvPr>
         </p:nvPicPr>
         <p:blipFill>
@@ -14399,55 +14201,118 @@
         </p:blipFill>
         <p:spPr>
           <a:xfrm>
-            <a:off x="7022592" y="3098331"/>
-            <a:ext cx="1408176" cy="652193"/>
+            <a:off x="6876288" y="2441448"/>
+            <a:ext cx="1700784" cy="740664"/>
           </a:xfrm>
           <a:prstGeom prst="rect">
             <a:avLst/>
           </a:prstGeom>
         </p:spPr>
       </p:pic>
-      <p:sp>
-        <p:nvSpPr>
-          <p:cNvPr id="18" name="Text 0"/>
-          <p:cNvSpPr txBox="1"/>
-          <p:nvPr>
-            <p:ph idx="117" type="body" hasCustomPrompt="1"/>
-          </p:nvPr>
-        </p:nvSpPr>
-        <p:spPr>
-          <a:xfrm>
-            <a:off x="6876288" y="4014216"/>
-            <a:ext cx="1700784" cy="274320"/>
-          </a:xfrm>
-          <a:prstGeom prst="rect">
-            <a:avLst/>
-          </a:prstGeom>
-          <a:noFill/>
-          <a:ln/>
-        </p:spPr>
-        <p:txBody>
-          <a:bodyPr wrap="square" lIns="0" tIns="0" rIns="0" bIns="0" rtlCol="0" anchor="ctr"/>
-          <a:lstStyle/>
-          <a:p>
-            <a:pPr algn="ctr" indent="0" marL="0">
-              <a:buNone/>
-            </a:pPr>
-            <a:r>
-              <a:rPr lang="en-US" sz="1100" b="1" dirty="0">
-                <a:solidFill>
-                  <a:srgbClr val="0F0F0F"/>
-                </a:solidFill>
-                <a:latin typeface="Inter" pitchFamily="34" charset="0"/>
-                <a:ea typeface="Inter" pitchFamily="34" charset="-122"/>
-                <a:cs typeface="Inter" pitchFamily="34" charset="-120"/>
-              </a:rPr>
-              <a:t>Tennisclub Wurmlingen</a:t>
-            </a:r>
-            <a:endParaRPr lang="en-US" sz="1100" dirty="0"/>
-          </a:p>
-        </p:txBody>
-      </p:sp>
+      <p:pic>
+        <p:nvPicPr>
+          <p:cNvPr id="11" name="Image 8" descr="/var/folders/hm/sgq6d80d0vq133k7n8dc9bnw0000gn/T/maiershirts-Os5V18/ph-logo-446x194.png">    </p:cNvPr>
+          <p:cNvPicPr>
+            <a:picLocks noChangeAspect="1"/>
+          </p:cNvPicPr>
+          <p:nvPr>
+            <p:ph idx="110" type="pic" hasCustomPrompt="1"/>
+          </p:nvPr>
+        </p:nvPicPr>
+        <p:blipFill>
+          <a:blip r:embed="rId9"/>
+          <a:stretch>
+            <a:fillRect/>
+          </a:stretch>
+        </p:blipFill>
+        <p:spPr>
+          <a:xfrm>
+            <a:off x="566928" y="3538728"/>
+            <a:ext cx="1700784" cy="740664"/>
+          </a:xfrm>
+          <a:prstGeom prst="rect">
+            <a:avLst/>
+          </a:prstGeom>
+        </p:spPr>
+      </p:pic>
+      <p:pic>
+        <p:nvPicPr>
+          <p:cNvPr id="12" name="Image 9" descr="/var/folders/hm/sgq6d80d0vq133k7n8dc9bnw0000gn/T/maiershirts-Os5V18/ph-logo-446x194.png">    </p:cNvPr>
+          <p:cNvPicPr>
+            <a:picLocks noChangeAspect="1"/>
+          </p:cNvPicPr>
+          <p:nvPr>
+            <p:ph idx="111" type="pic" hasCustomPrompt="1"/>
+          </p:nvPr>
+        </p:nvPicPr>
+        <p:blipFill>
+          <a:blip r:embed="rId10"/>
+          <a:stretch>
+            <a:fillRect/>
+          </a:stretch>
+        </p:blipFill>
+        <p:spPr>
+          <a:xfrm>
+            <a:off x="2670048" y="3538728"/>
+            <a:ext cx="1700784" cy="740664"/>
+          </a:xfrm>
+          <a:prstGeom prst="rect">
+            <a:avLst/>
+          </a:prstGeom>
+        </p:spPr>
+      </p:pic>
+      <p:pic>
+        <p:nvPicPr>
+          <p:cNvPr id="13" name="Image 10" descr="/var/folders/hm/sgq6d80d0vq133k7n8dc9bnw0000gn/T/maiershirts-Os5V18/ph-logo-446x194.png">    </p:cNvPr>
+          <p:cNvPicPr>
+            <a:picLocks noChangeAspect="1"/>
+          </p:cNvPicPr>
+          <p:nvPr>
+            <p:ph idx="112" type="pic" hasCustomPrompt="1"/>
+          </p:nvPr>
+        </p:nvPicPr>
+        <p:blipFill>
+          <a:blip r:embed="rId11"/>
+          <a:stretch>
+            <a:fillRect/>
+          </a:stretch>
+        </p:blipFill>
+        <p:spPr>
+          <a:xfrm>
+            <a:off x="4773168" y="3538728"/>
+            <a:ext cx="1700784" cy="740664"/>
+          </a:xfrm>
+          <a:prstGeom prst="rect">
+            <a:avLst/>
+          </a:prstGeom>
+        </p:spPr>
+      </p:pic>
+      <p:pic>
+        <p:nvPicPr>
+          <p:cNvPr id="14" name="Image 11" descr="/var/folders/hm/sgq6d80d0vq133k7n8dc9bnw0000gn/T/maiershirts-Os5V18/ph-logo-446x194.png">    </p:cNvPr>
+          <p:cNvPicPr>
+            <a:picLocks noChangeAspect="1"/>
+          </p:cNvPicPr>
+          <p:nvPr>
+            <p:ph idx="113" type="pic" hasCustomPrompt="1"/>
+          </p:nvPr>
+        </p:nvPicPr>
+        <p:blipFill>
+          <a:blip r:embed="rId12"/>
+          <a:stretch>
+            <a:fillRect/>
+          </a:stretch>
+        </p:blipFill>
+        <p:spPr>
+          <a:xfrm>
+            <a:off x="6876288" y="3538728"/>
+            <a:ext cx="1700784" cy="740664"/>
+          </a:xfrm>
+          <a:prstGeom prst="rect">
+            <a:avLst/>
+          </a:prstGeom>
+        </p:spPr>
+      </p:pic>
       <p:sp>
         <p:nvSpPr>
           <p:cNvPr id="25" name="Slide Number Placeholder 0"/>
@@ -14556,7 +14421,7 @@
                 <a:ea typeface="Inter" pitchFamily="34" charset="-122"/>
                 <a:cs typeface="Inter" pitchFamily="34" charset="-120"/>
               </a:rPr>
-              <a:t>Stickerei im Detail</a:t>
+              <a:t>Vereine, die uns vertrauen</a:t>
             </a:r>
             <a:endParaRPr lang="en-US" sz="2800" dirty="0"/>
           </a:p>
@@ -14564,7 +14429,7 @@
       </p:sp>
       <p:pic>
         <p:nvPicPr>
-          <p:cNvPr id="3" name="Image 0" descr="/var/folders/hm/sgq6d80d0vq133k7n8dc9bnw0000gn/T/maiershirts-2HUvCI/ph-foto-1056x840.png">    </p:cNvPr>
+          <p:cNvPr id="3" name="Image 0" descr="/var/folders/hm/sgq6d80d0vq133k7n8dc9bnw0000gn/T/maiershirts-Os5V18/ref-vereine-0-0.png">    </p:cNvPr>
           <p:cNvPicPr>
             <a:picLocks noChangeAspect="1"/>
           </p:cNvPicPr>
@@ -14580,8 +14445,8 @@
         </p:blipFill>
         <p:spPr>
           <a:xfrm>
-            <a:off x="457200" y="1234440"/>
-            <a:ext cx="4023360" cy="3200400"/>
+            <a:off x="843422" y="1490472"/>
+            <a:ext cx="1147795" cy="667512"/>
           </a:xfrm>
           <a:prstGeom prst="rect">
             <a:avLst/>
@@ -14598,28 +14463,24 @@
         </p:nvSpPr>
         <p:spPr>
           <a:xfrm>
-            <a:off x="4846320" y="1234440"/>
-            <a:ext cx="3840480" cy="3200400"/>
-          </a:xfrm>
-          <a:prstGeom prst="rect">
-            <a:avLst/>
-          </a:prstGeom>
-          <a:noFill/>
-          <a:ln/>
-        </p:spPr>
-        <p:txBody>
-          <a:bodyPr wrap="square" lIns="0" tIns="0" rIns="0" bIns="0" rtlCol="0" anchor="t"/>
+            <a:off x="566928" y="2414016"/>
+            <a:ext cx="1700784" cy="274320"/>
+          </a:xfrm>
+          <a:prstGeom prst="rect">
+            <a:avLst/>
+          </a:prstGeom>
+          <a:noFill/>
+          <a:ln/>
+        </p:spPr>
+        <p:txBody>
+          <a:bodyPr wrap="square" lIns="0" tIns="0" rIns="0" bIns="0" rtlCol="0" anchor="ctr"/>
           <a:lstStyle/>
           <a:p>
-            <a:pPr algn="l" marL="342900" indent="-342900">
-              <a:spcAft>
-                <a:spcPts val="800"/>
-              </a:spcAft>
-              <a:buSzPct val="100000"/>
-              <a:buChar char="•"/>
-            </a:pPr>
-            <a:r>
-              <a:rPr lang="en-US" sz="1600" dirty="0">
+            <a:pPr algn="ctr" indent="0" marL="0">
+              <a:buNone/>
+            </a:pPr>
+            <a:r>
+              <a:rPr lang="en-US" sz="1100" b="1" dirty="0">
                 <a:solidFill>
                   <a:srgbClr val="0F0F0F"/>
                 </a:solidFill>
@@ -14627,20 +14488,66 @@
                 <a:ea typeface="Inter" pitchFamily="34" charset="-122"/>
                 <a:cs typeface="Inter" pitchFamily="34" charset="-120"/>
               </a:rPr>
-              <a:t>Bis zu 12 Garnfarben pro Motiv</a:t>
-            </a:r>
-            <a:endParaRPr lang="en-US" sz="1600" dirty="0"/>
-          </a:p>
-          <a:p>
-            <a:pPr algn="l" marL="342900" indent="-342900">
-              <a:spcAft>
-                <a:spcPts val="800"/>
-              </a:spcAft>
-              <a:buSzPct val="100000"/>
-              <a:buChar char="•"/>
-            </a:pPr>
-            <a:r>
-              <a:rPr lang="en-US" sz="1600" dirty="0">
+              <a:t>DAV Sektion Tübingen</a:t>
+            </a:r>
+            <a:endParaRPr lang="en-US" sz="1100" dirty="0"/>
+          </a:p>
+        </p:txBody>
+      </p:sp>
+      <p:pic>
+        <p:nvPicPr>
+          <p:cNvPr id="5" name="Image 1" descr="/var/folders/hm/sgq6d80d0vq133k7n8dc9bnw0000gn/T/maiershirts-Os5V18/ref-vereine-0-1.png">    </p:cNvPr>
+          <p:cNvPicPr>
+            <a:picLocks noChangeAspect="1"/>
+          </p:cNvPicPr>
+          <p:nvPr>
+            <p:ph idx="104" type="pic" hasCustomPrompt="1"/>
+          </p:nvPr>
+        </p:nvPicPr>
+        <p:blipFill>
+          <a:blip r:embed="rId2"/>
+          <a:stretch>
+            <a:fillRect/>
+          </a:stretch>
+        </p:blipFill>
+        <p:spPr>
+          <a:xfrm>
+            <a:off x="2858236" y="1490472"/>
+            <a:ext cx="1324409" cy="667512"/>
+          </a:xfrm>
+          <a:prstGeom prst="rect">
+            <a:avLst/>
+          </a:prstGeom>
+        </p:spPr>
+      </p:pic>
+      <p:sp>
+        <p:nvSpPr>
+          <p:cNvPr id="6" name="Text 0"/>
+          <p:cNvSpPr txBox="1"/>
+          <p:nvPr>
+            <p:ph idx="105" type="body" hasCustomPrompt="1"/>
+          </p:nvPr>
+        </p:nvSpPr>
+        <p:spPr>
+          <a:xfrm>
+            <a:off x="2670048" y="2414016"/>
+            <a:ext cx="1700784" cy="274320"/>
+          </a:xfrm>
+          <a:prstGeom prst="rect">
+            <a:avLst/>
+          </a:prstGeom>
+          <a:noFill/>
+          <a:ln/>
+        </p:spPr>
+        <p:txBody>
+          <a:bodyPr wrap="square" lIns="0" tIns="0" rIns="0" bIns="0" rtlCol="0" anchor="ctr"/>
+          <a:lstStyle/>
+          <a:p>
+            <a:pPr algn="ctr" indent="0" marL="0">
+              <a:buNone/>
+            </a:pPr>
+            <a:r>
+              <a:rPr lang="en-US" sz="1100" b="1" dirty="0">
                 <a:solidFill>
                   <a:srgbClr val="0F0F0F"/>
                 </a:solidFill>
@@ -14648,20 +14555,66 @@
                 <a:ea typeface="Inter" pitchFamily="34" charset="-122"/>
                 <a:cs typeface="Inter" pitchFamily="34" charset="-120"/>
               </a:rPr>
-              <a:t>Waschbeständig bis 60 °C</a:t>
-            </a:r>
-            <a:endParaRPr lang="en-US" sz="1600" dirty="0"/>
-          </a:p>
-          <a:p>
-            <a:pPr algn="l" marL="342900" indent="-342900">
-              <a:spcAft>
-                <a:spcPts val="800"/>
-              </a:spcAft>
-              <a:buSzPct val="100000"/>
-              <a:buChar char="•"/>
-            </a:pPr>
-            <a:r>
-              <a:rPr lang="en-US" sz="1600" dirty="0">
+              <a:t>Tennisclub Ammerbuch</a:t>
+            </a:r>
+            <a:endParaRPr lang="en-US" sz="1100" dirty="0"/>
+          </a:p>
+        </p:txBody>
+      </p:sp>
+      <p:pic>
+        <p:nvPicPr>
+          <p:cNvPr id="7" name="Image 2" descr="/var/folders/hm/sgq6d80d0vq133k7n8dc9bnw0000gn/T/maiershirts-Os5V18/ref-vereine-0-2.png">    </p:cNvPr>
+          <p:cNvPicPr>
+            <a:picLocks noChangeAspect="1"/>
+          </p:cNvPicPr>
+          <p:nvPr>
+            <p:ph idx="106" type="pic" hasCustomPrompt="1"/>
+          </p:nvPr>
+        </p:nvPicPr>
+        <p:blipFill>
+          <a:blip r:embed="rId3"/>
+          <a:stretch>
+            <a:fillRect/>
+          </a:stretch>
+        </p:blipFill>
+        <p:spPr>
+          <a:xfrm>
+            <a:off x="5369071" y="1490472"/>
+            <a:ext cx="508978" cy="667512"/>
+          </a:xfrm>
+          <a:prstGeom prst="rect">
+            <a:avLst/>
+          </a:prstGeom>
+        </p:spPr>
+      </p:pic>
+      <p:sp>
+        <p:nvSpPr>
+          <p:cNvPr id="8" name="Text 0"/>
+          <p:cNvSpPr txBox="1"/>
+          <p:nvPr>
+            <p:ph idx="107" type="body" hasCustomPrompt="1"/>
+          </p:nvPr>
+        </p:nvSpPr>
+        <p:spPr>
+          <a:xfrm>
+            <a:off x="4773168" y="2414016"/>
+            <a:ext cx="1700784" cy="274320"/>
+          </a:xfrm>
+          <a:prstGeom prst="rect">
+            <a:avLst/>
+          </a:prstGeom>
+          <a:noFill/>
+          <a:ln/>
+        </p:spPr>
+        <p:txBody>
+          <a:bodyPr wrap="square" lIns="0" tIns="0" rIns="0" bIns="0" rtlCol="0" anchor="ctr"/>
+          <a:lstStyle/>
+          <a:p>
+            <a:pPr algn="ctr" indent="0" marL="0">
+              <a:buNone/>
+            </a:pPr>
+            <a:r>
+              <a:rPr lang="en-US" sz="1100" b="1" dirty="0">
                 <a:solidFill>
                   <a:srgbClr val="0F0F0F"/>
                 </a:solidFill>
@@ -14669,20 +14622,66 @@
                 <a:ea typeface="Inter" pitchFamily="34" charset="-122"/>
                 <a:cs typeface="Inter" pitchFamily="34" charset="-120"/>
               </a:rPr>
-              <a:t>Ideal für Polos, Jacken und Caps</a:t>
-            </a:r>
-            <a:endParaRPr lang="en-US" sz="1600" dirty="0"/>
-          </a:p>
-          <a:p>
-            <a:pPr algn="l" marL="342900" indent="-342900">
-              <a:spcAft>
-                <a:spcPts val="800"/>
-              </a:spcAft>
-              <a:buSzPct val="100000"/>
-              <a:buChar char="•"/>
-            </a:pPr>
-            <a:r>
-              <a:rPr lang="en-US" sz="1600" dirty="0">
+              <a:t>TGV Entringen</a:t>
+            </a:r>
+            <a:endParaRPr lang="en-US" sz="1100" dirty="0"/>
+          </a:p>
+        </p:txBody>
+      </p:sp>
+      <p:pic>
+        <p:nvPicPr>
+          <p:cNvPr id="9" name="Image 3" descr="/var/folders/hm/sgq6d80d0vq133k7n8dc9bnw0000gn/T/maiershirts-Os5V18/ref-vereine-0-3.png">    </p:cNvPr>
+          <p:cNvPicPr>
+            <a:picLocks noChangeAspect="1"/>
+          </p:cNvPicPr>
+          <p:nvPr>
+            <p:ph idx="108" type="pic" hasCustomPrompt="1"/>
+          </p:nvPr>
+        </p:nvPicPr>
+        <p:blipFill>
+          <a:blip r:embed="rId4"/>
+          <a:stretch>
+            <a:fillRect/>
+          </a:stretch>
+        </p:blipFill>
+        <p:spPr>
+          <a:xfrm>
+            <a:off x="7392924" y="1490472"/>
+            <a:ext cx="667512" cy="667512"/>
+          </a:xfrm>
+          <a:prstGeom prst="rect">
+            <a:avLst/>
+          </a:prstGeom>
+        </p:spPr>
+      </p:pic>
+      <p:sp>
+        <p:nvSpPr>
+          <p:cNvPr id="10" name="Text 0"/>
+          <p:cNvSpPr txBox="1"/>
+          <p:nvPr>
+            <p:ph idx="109" type="body" hasCustomPrompt="1"/>
+          </p:nvPr>
+        </p:nvSpPr>
+        <p:spPr>
+          <a:xfrm>
+            <a:off x="6876288" y="2414016"/>
+            <a:ext cx="1700784" cy="274320"/>
+          </a:xfrm>
+          <a:prstGeom prst="rect">
+            <a:avLst/>
+          </a:prstGeom>
+          <a:noFill/>
+          <a:ln/>
+        </p:spPr>
+        <p:txBody>
+          <a:bodyPr wrap="square" lIns="0" tIns="0" rIns="0" bIns="0" rtlCol="0" anchor="ctr"/>
+          <a:lstStyle/>
+          <a:p>
+            <a:pPr algn="ctr" indent="0" marL="0">
+              <a:buNone/>
+            </a:pPr>
+            <a:r>
+              <a:rPr lang="en-US" sz="1100" b="1" dirty="0">
                 <a:solidFill>
                   <a:srgbClr val="0F0F0F"/>
                 </a:solidFill>
@@ -14690,9 +14689,277 @@
                 <a:ea typeface="Inter" pitchFamily="34" charset="-122"/>
                 <a:cs typeface="Inter" pitchFamily="34" charset="-120"/>
               </a:rPr>
-              <a:t>Motivdigitalisierung im Haus</a:t>
-            </a:r>
-            <a:endParaRPr lang="en-US" sz="1600" dirty="0"/>
+              <a:t>Hooriger Hund Sulzbach</a:t>
+            </a:r>
+            <a:endParaRPr lang="en-US" sz="1100" dirty="0"/>
+          </a:p>
+        </p:txBody>
+      </p:sp>
+      <p:pic>
+        <p:nvPicPr>
+          <p:cNvPr id="11" name="Image 4" descr="/var/folders/hm/sgq6d80d0vq133k7n8dc9bnw0000gn/T/maiershirts-Os5V18/ref-vereine-0-4.png">    </p:cNvPr>
+          <p:cNvPicPr>
+            <a:picLocks noChangeAspect="1"/>
+          </p:cNvPicPr>
+          <p:nvPr>
+            <p:ph idx="110" type="pic" hasCustomPrompt="1"/>
+          </p:nvPr>
+        </p:nvPicPr>
+        <p:blipFill>
+          <a:blip r:embed="rId5"/>
+          <a:stretch>
+            <a:fillRect/>
+          </a:stretch>
+        </p:blipFill>
+        <p:spPr>
+          <a:xfrm>
+            <a:off x="1073295" y="3090672"/>
+            <a:ext cx="688051" cy="667512"/>
+          </a:xfrm>
+          <a:prstGeom prst="rect">
+            <a:avLst/>
+          </a:prstGeom>
+        </p:spPr>
+      </p:pic>
+      <p:sp>
+        <p:nvSpPr>
+          <p:cNvPr id="12" name="Text 0"/>
+          <p:cNvSpPr txBox="1"/>
+          <p:nvPr>
+            <p:ph idx="111" type="body" hasCustomPrompt="1"/>
+          </p:nvPr>
+        </p:nvSpPr>
+        <p:spPr>
+          <a:xfrm>
+            <a:off x="566928" y="4014216"/>
+            <a:ext cx="1700784" cy="274320"/>
+          </a:xfrm>
+          <a:prstGeom prst="rect">
+            <a:avLst/>
+          </a:prstGeom>
+          <a:noFill/>
+          <a:ln/>
+        </p:spPr>
+        <p:txBody>
+          <a:bodyPr wrap="square" lIns="0" tIns="0" rIns="0" bIns="0" rtlCol="0" anchor="ctr"/>
+          <a:lstStyle/>
+          <a:p>
+            <a:pPr algn="ctr" indent="0" marL="0">
+              <a:buNone/>
+            </a:pPr>
+            <a:r>
+              <a:rPr lang="en-US" sz="1100" b="1" dirty="0">
+                <a:solidFill>
+                  <a:srgbClr val="0F0F0F"/>
+                </a:solidFill>
+                <a:latin typeface="Inter" pitchFamily="34" charset="0"/>
+                <a:ea typeface="Inter" pitchFamily="34" charset="-122"/>
+                <a:cs typeface="Inter" pitchFamily="34" charset="-120"/>
+              </a:rPr>
+              <a:t>Sportfreunde Dußlingen</a:t>
+            </a:r>
+            <a:endParaRPr lang="en-US" sz="1100" dirty="0"/>
+          </a:p>
+        </p:txBody>
+      </p:sp>
+      <p:pic>
+        <p:nvPicPr>
+          <p:cNvPr id="13" name="Image 5" descr="/var/folders/hm/sgq6d80d0vq133k7n8dc9bnw0000gn/T/maiershirts-Os5V18/ref-vereine-0-5.png">    </p:cNvPr>
+          <p:cNvPicPr>
+            <a:picLocks noChangeAspect="1"/>
+          </p:cNvPicPr>
+          <p:nvPr>
+            <p:ph idx="112" type="pic" hasCustomPrompt="1"/>
+          </p:nvPr>
+        </p:nvPicPr>
+        <p:blipFill>
+          <a:blip r:embed="rId6"/>
+          <a:stretch>
+            <a:fillRect/>
+          </a:stretch>
+        </p:blipFill>
+        <p:spPr>
+          <a:xfrm>
+            <a:off x="3186684" y="3090672"/>
+            <a:ext cx="667512" cy="667512"/>
+          </a:xfrm>
+          <a:prstGeom prst="rect">
+            <a:avLst/>
+          </a:prstGeom>
+        </p:spPr>
+      </p:pic>
+      <p:sp>
+        <p:nvSpPr>
+          <p:cNvPr id="14" name="Text 0"/>
+          <p:cNvSpPr txBox="1"/>
+          <p:nvPr>
+            <p:ph idx="113" type="body" hasCustomPrompt="1"/>
+          </p:nvPr>
+        </p:nvSpPr>
+        <p:spPr>
+          <a:xfrm>
+            <a:off x="2670048" y="4014216"/>
+            <a:ext cx="1700784" cy="274320"/>
+          </a:xfrm>
+          <a:prstGeom prst="rect">
+            <a:avLst/>
+          </a:prstGeom>
+          <a:noFill/>
+          <a:ln/>
+        </p:spPr>
+        <p:txBody>
+          <a:bodyPr wrap="square" lIns="0" tIns="0" rIns="0" bIns="0" rtlCol="0" anchor="ctr"/>
+          <a:lstStyle/>
+          <a:p>
+            <a:pPr algn="ctr" indent="0" marL="0">
+              <a:buNone/>
+            </a:pPr>
+            <a:r>
+              <a:rPr lang="en-US" sz="1100" b="1" dirty="0">
+                <a:solidFill>
+                  <a:srgbClr val="0F0F0F"/>
+                </a:solidFill>
+                <a:latin typeface="Inter" pitchFamily="34" charset="0"/>
+                <a:ea typeface="Inter" pitchFamily="34" charset="-122"/>
+                <a:cs typeface="Inter" pitchFamily="34" charset="-120"/>
+              </a:rPr>
+              <a:t>SV Germania Bietigheim</a:t>
+            </a:r>
+            <a:endParaRPr lang="en-US" sz="1100" dirty="0"/>
+          </a:p>
+        </p:txBody>
+      </p:sp>
+      <p:pic>
+        <p:nvPicPr>
+          <p:cNvPr id="15" name="Image 6" descr="/var/folders/hm/sgq6d80d0vq133k7n8dc9bnw0000gn/T/maiershirts-Os5V18/ref-vereine-0-6.png">    </p:cNvPr>
+          <p:cNvPicPr>
+            <a:picLocks noChangeAspect="1"/>
+          </p:cNvPicPr>
+          <p:nvPr>
+            <p:ph idx="114" type="pic" hasCustomPrompt="1"/>
+          </p:nvPr>
+        </p:nvPicPr>
+        <p:blipFill>
+          <a:blip r:embed="rId7"/>
+          <a:stretch>
+            <a:fillRect/>
+          </a:stretch>
+        </p:blipFill>
+        <p:spPr>
+          <a:xfrm>
+            <a:off x="5288359" y="3090672"/>
+            <a:ext cx="670402" cy="667512"/>
+          </a:xfrm>
+          <a:prstGeom prst="rect">
+            <a:avLst/>
+          </a:prstGeom>
+        </p:spPr>
+      </p:pic>
+      <p:sp>
+        <p:nvSpPr>
+          <p:cNvPr id="16" name="Text 0"/>
+          <p:cNvSpPr txBox="1"/>
+          <p:nvPr>
+            <p:ph idx="115" type="body" hasCustomPrompt="1"/>
+          </p:nvPr>
+        </p:nvSpPr>
+        <p:spPr>
+          <a:xfrm>
+            <a:off x="4773168" y="4014216"/>
+            <a:ext cx="1700784" cy="274320"/>
+          </a:xfrm>
+          <a:prstGeom prst="rect">
+            <a:avLst/>
+          </a:prstGeom>
+          <a:noFill/>
+          <a:ln/>
+        </p:spPr>
+        <p:txBody>
+          <a:bodyPr wrap="square" lIns="0" tIns="0" rIns="0" bIns="0" rtlCol="0" anchor="ctr"/>
+          <a:lstStyle/>
+          <a:p>
+            <a:pPr algn="ctr" indent="0" marL="0">
+              <a:buNone/>
+            </a:pPr>
+            <a:r>
+              <a:rPr lang="en-US" sz="1100" b="1" dirty="0">
+                <a:solidFill>
+                  <a:srgbClr val="0F0F0F"/>
+                </a:solidFill>
+                <a:latin typeface="Inter" pitchFamily="34" charset="0"/>
+                <a:ea typeface="Inter" pitchFamily="34" charset="-122"/>
+                <a:cs typeface="Inter" pitchFamily="34" charset="-120"/>
+              </a:rPr>
+              <a:t>TV Mühlacker</a:t>
+            </a:r>
+            <a:endParaRPr lang="en-US" sz="1100" dirty="0"/>
+          </a:p>
+        </p:txBody>
+      </p:sp>
+      <p:pic>
+        <p:nvPicPr>
+          <p:cNvPr id="17" name="Image 7" descr="/var/folders/hm/sgq6d80d0vq133k7n8dc9bnw0000gn/T/maiershirts-Os5V18/ref-vereine-0-7.png">    </p:cNvPr>
+          <p:cNvPicPr>
+            <a:picLocks noChangeAspect="1"/>
+          </p:cNvPicPr>
+          <p:nvPr>
+            <p:ph idx="116" type="pic" hasCustomPrompt="1"/>
+          </p:nvPr>
+        </p:nvPicPr>
+        <p:blipFill>
+          <a:blip r:embed="rId8"/>
+          <a:stretch>
+            <a:fillRect/>
+          </a:stretch>
+        </p:blipFill>
+        <p:spPr>
+          <a:xfrm>
+            <a:off x="7022592" y="3098331"/>
+            <a:ext cx="1408176" cy="652193"/>
+          </a:xfrm>
+          <a:prstGeom prst="rect">
+            <a:avLst/>
+          </a:prstGeom>
+        </p:spPr>
+      </p:pic>
+      <p:sp>
+        <p:nvSpPr>
+          <p:cNvPr id="18" name="Text 0"/>
+          <p:cNvSpPr txBox="1"/>
+          <p:nvPr>
+            <p:ph idx="117" type="body" hasCustomPrompt="1"/>
+          </p:nvPr>
+        </p:nvSpPr>
+        <p:spPr>
+          <a:xfrm>
+            <a:off x="6876288" y="4014216"/>
+            <a:ext cx="1700784" cy="274320"/>
+          </a:xfrm>
+          <a:prstGeom prst="rect">
+            <a:avLst/>
+          </a:prstGeom>
+          <a:noFill/>
+          <a:ln/>
+        </p:spPr>
+        <p:txBody>
+          <a:bodyPr wrap="square" lIns="0" tIns="0" rIns="0" bIns="0" rtlCol="0" anchor="ctr"/>
+          <a:lstStyle/>
+          <a:p>
+            <a:pPr algn="ctr" indent="0" marL="0">
+              <a:buNone/>
+            </a:pPr>
+            <a:r>
+              <a:rPr lang="en-US" sz="1100" b="1" dirty="0">
+                <a:solidFill>
+                  <a:srgbClr val="0F0F0F"/>
+                </a:solidFill>
+                <a:latin typeface="Inter" pitchFamily="34" charset="0"/>
+                <a:ea typeface="Inter" pitchFamily="34" charset="-122"/>
+                <a:cs typeface="Inter" pitchFamily="34" charset="-120"/>
+              </a:rPr>
+              <a:t>Tennisclub Wurmlingen</a:t>
+            </a:r>
+            <a:endParaRPr lang="en-US" sz="1100" dirty="0"/>
           </a:p>
         </p:txBody>
       </p:sp>
@@ -14804,145 +15071,50 @@
                 <a:ea typeface="Inter" pitchFamily="34" charset="-122"/>
                 <a:cs typeface="Inter" pitchFamily="34" charset="-120"/>
               </a:rPr>
-              <a:t>Auftragsvolumen nach Produktgruppe</a:t>
+              <a:t>Stickerei im Detail</a:t>
             </a:r>
             <a:endParaRPr lang="en-US" sz="2800" dirty="0"/>
           </a:p>
         </p:txBody>
       </p:sp>
-      <p:graphicFrame>
-        <p:nvGraphicFramePr>
-          <p:cNvPr id="3" name="Chart 0" descr=""/>
-          <p:cNvGraphicFramePr/>
-          <p:nvPr/>
-        </p:nvGraphicFramePr>
-        <p:xfrm>
-          <a:off x="457200" y="1188720"/>
-          <a:ext cx="5303520" cy="3291840"/>
-        </p:xfrm>
-        <a:graphic xmlns:a="http://schemas.openxmlformats.org/drawingml/2006/main">
-          <a:graphicData uri="http://schemas.openxmlformats.org/drawingml/2006/chart">
-            <c:chart xmlns:c="http://schemas.openxmlformats.org/drawingml/2006/chart" r:id="rId1"/>
-          </a:graphicData>
-        </a:graphic>
-      </p:graphicFrame>
-      <p:sp>
-        <p:nvSpPr>
-          <p:cNvPr id="4" name="Shape 1"/>
-          <p:cNvSpPr/>
-          <p:nvPr/>
-        </p:nvSpPr>
-        <p:spPr>
-          <a:xfrm>
-            <a:off x="6035040" y="1188720"/>
-            <a:ext cx="2651760" cy="3291840"/>
-          </a:xfrm>
-          <a:prstGeom prst="roundRect">
-            <a:avLst>
-              <a:gd name="adj" fmla="val 4138"/>
-            </a:avLst>
-          </a:prstGeom>
-          <a:solidFill>
-            <a:srgbClr val="E8DFD0"/>
-          </a:solidFill>
-          <a:ln w="12700">
-            <a:solidFill>
-              <a:srgbClr val="E8DFD0"/>
-            </a:solidFill>
-            <a:prstDash val="solid"/>
-          </a:ln>
-        </p:spPr>
-      </p:sp>
-      <p:sp>
-        <p:nvSpPr>
-          <p:cNvPr id="5" name="Text 2"/>
+      <p:pic>
+        <p:nvPicPr>
+          <p:cNvPr id="3" name="Image 0" descr="/var/folders/hm/sgq6d80d0vq133k7n8dc9bnw0000gn/T/maiershirts-Os5V18/ph-foto-1056x840.png">    </p:cNvPr>
+          <p:cNvPicPr>
+            <a:picLocks noChangeAspect="1"/>
+          </p:cNvPicPr>
+          <p:nvPr>
+            <p:ph idx="102" type="pic" hasCustomPrompt="1"/>
+          </p:nvPr>
+        </p:nvPicPr>
+        <p:blipFill>
+          <a:blip r:embed="rId1"/>
+          <a:stretch>
+            <a:fillRect/>
+          </a:stretch>
+        </p:blipFill>
+        <p:spPr>
+          <a:xfrm>
+            <a:off x="457200" y="1234440"/>
+            <a:ext cx="4023360" cy="3200400"/>
+          </a:xfrm>
+          <a:prstGeom prst="rect">
+            <a:avLst/>
+          </a:prstGeom>
+        </p:spPr>
+      </p:pic>
+      <p:sp>
+        <p:nvSpPr>
+          <p:cNvPr id="4" name="Text 0"/>
           <p:cNvSpPr txBox="1"/>
-          <p:nvPr/>
-        </p:nvSpPr>
-        <p:spPr>
-          <a:xfrm>
-            <a:off x="6263640" y="1371600"/>
-            <a:ext cx="2194560" cy="274320"/>
-          </a:xfrm>
-          <a:prstGeom prst="rect">
-            <a:avLst/>
-          </a:prstGeom>
-          <a:noFill/>
-          <a:ln/>
-        </p:spPr>
-        <p:txBody>
-          <a:bodyPr wrap="square" lIns="0" tIns="0" rIns="0" bIns="0" rtlCol="0" anchor="ctr"/>
-          <a:lstStyle/>
-          <a:p>
-            <a:pPr indent="0" marL="0">
-              <a:buNone/>
-            </a:pPr>
-            <a:r>
-              <a:rPr lang="en-US" sz="1200" dirty="0">
-                <a:solidFill>
-                  <a:srgbClr val="0F0F0F">
-                    <a:alpha val="60000"/>
-                  </a:srgbClr>
-                </a:solidFill>
-                <a:latin typeface="Inter" pitchFamily="34" charset="0"/>
-                <a:ea typeface="Inter" pitchFamily="34" charset="-122"/>
-                <a:cs typeface="Inter" pitchFamily="34" charset="-120"/>
-              </a:rPr>
-              <a:t>Beispieldaten</a:t>
-            </a:r>
-            <a:endParaRPr lang="en-US" sz="1200" dirty="0"/>
-          </a:p>
-        </p:txBody>
-      </p:sp>
-      <p:sp>
-        <p:nvSpPr>
-          <p:cNvPr id="6" name="Text 3"/>
-          <p:cNvSpPr txBox="1"/>
-          <p:nvPr/>
-        </p:nvSpPr>
-        <p:spPr>
-          <a:xfrm>
-            <a:off x="6263640" y="1691640"/>
-            <a:ext cx="2194560" cy="640080"/>
-          </a:xfrm>
-          <a:prstGeom prst="rect">
-            <a:avLst/>
-          </a:prstGeom>
-          <a:noFill/>
-          <a:ln/>
-        </p:spPr>
-        <p:txBody>
-          <a:bodyPr wrap="square" lIns="0" tIns="0" rIns="0" bIns="0" rtlCol="0" anchor="ctr"/>
-          <a:lstStyle/>
-          <a:p>
-            <a:pPr indent="0" marL="0">
-              <a:buNone/>
-            </a:pPr>
-            <a:r>
-              <a:rPr lang="en-US" sz="1600" b="1" dirty="0">
-                <a:solidFill>
-                  <a:srgbClr val="0F0F0F"/>
-                </a:solidFill>
-                <a:latin typeface="Inter" pitchFamily="34" charset="0"/>
-                <a:ea typeface="Inter" pitchFamily="34" charset="-122"/>
-                <a:cs typeface="Inter" pitchFamily="34" charset="-120"/>
-              </a:rPr>
-              <a:t>T-Shirts machen den größten Anteil aus</a:t>
-            </a:r>
-            <a:endParaRPr lang="en-US" sz="1600" dirty="0"/>
-          </a:p>
-        </p:txBody>
-      </p:sp>
-      <p:sp>
-        <p:nvSpPr>
-          <p:cNvPr id="7" name="Text 4"/>
-          <p:cNvSpPr txBox="1"/>
-          <p:nvPr/>
-        </p:nvSpPr>
-        <p:spPr>
-          <a:xfrm>
-            <a:off x="6263640" y="2423160"/>
-            <a:ext cx="2194560" cy="1097280"/>
+          <p:nvPr>
+            <p:ph idx="103" type="body" hasCustomPrompt="1"/>
+          </p:nvPr>
+        </p:nvSpPr>
+        <p:spPr>
+          <a:xfrm>
+            <a:off x="4846320" y="1234440"/>
+            <a:ext cx="3840480" cy="3200400"/>
           </a:xfrm>
           <a:prstGeom prst="rect">
             <a:avLst/>
@@ -14954,23 +15126,88 @@
           <a:bodyPr wrap="square" lIns="0" tIns="0" rIns="0" bIns="0" rtlCol="0" anchor="t"/>
           <a:lstStyle/>
           <a:p>
-            <a:pPr indent="0" marL="0">
-              <a:buNone/>
-            </a:pPr>
-            <a:r>
-              <a:rPr lang="en-US" sz="1200" dirty="0">
-                <a:solidFill>
-                  <a:srgbClr val="0F0F0F">
-                    <a:alpha val="60000"/>
-                  </a:srgbClr>
-                </a:solidFill>
-                <a:latin typeface="Inter" pitchFamily="34" charset="0"/>
-                <a:ea typeface="Inter" pitchFamily="34" charset="-122"/>
-                <a:cs typeface="Inter" pitchFamily="34" charset="-120"/>
-              </a:rPr>
-              <a:t>Natives Diagramm: Werte per Rechtsklick → „Daten bearbeiten“ ändern.</a:t>
-            </a:r>
-            <a:endParaRPr lang="en-US" sz="1200" dirty="0"/>
+            <a:pPr algn="l" marL="342900" indent="-342900">
+              <a:spcAft>
+                <a:spcPts val="800"/>
+              </a:spcAft>
+              <a:buSzPct val="100000"/>
+              <a:buChar char="•"/>
+            </a:pPr>
+            <a:r>
+              <a:rPr lang="en-US" sz="1600" dirty="0">
+                <a:solidFill>
+                  <a:srgbClr val="0F0F0F"/>
+                </a:solidFill>
+                <a:latin typeface="Inter" pitchFamily="34" charset="0"/>
+                <a:ea typeface="Inter" pitchFamily="34" charset="-122"/>
+                <a:cs typeface="Inter" pitchFamily="34" charset="-120"/>
+              </a:rPr>
+              <a:t>Bis zu 12 Garnfarben pro Motiv</a:t>
+            </a:r>
+            <a:endParaRPr lang="en-US" sz="1600" dirty="0"/>
+          </a:p>
+          <a:p>
+            <a:pPr algn="l" marL="342900" indent="-342900">
+              <a:spcAft>
+                <a:spcPts val="800"/>
+              </a:spcAft>
+              <a:buSzPct val="100000"/>
+              <a:buChar char="•"/>
+            </a:pPr>
+            <a:r>
+              <a:rPr lang="en-US" sz="1600" dirty="0">
+                <a:solidFill>
+                  <a:srgbClr val="0F0F0F"/>
+                </a:solidFill>
+                <a:latin typeface="Inter" pitchFamily="34" charset="0"/>
+                <a:ea typeface="Inter" pitchFamily="34" charset="-122"/>
+                <a:cs typeface="Inter" pitchFamily="34" charset="-120"/>
+              </a:rPr>
+              <a:t>Waschbeständig bis 60 °C</a:t>
+            </a:r>
+            <a:endParaRPr lang="en-US" sz="1600" dirty="0"/>
+          </a:p>
+          <a:p>
+            <a:pPr algn="l" marL="342900" indent="-342900">
+              <a:spcAft>
+                <a:spcPts val="800"/>
+              </a:spcAft>
+              <a:buSzPct val="100000"/>
+              <a:buChar char="•"/>
+            </a:pPr>
+            <a:r>
+              <a:rPr lang="en-US" sz="1600" dirty="0">
+                <a:solidFill>
+                  <a:srgbClr val="0F0F0F"/>
+                </a:solidFill>
+                <a:latin typeface="Inter" pitchFamily="34" charset="0"/>
+                <a:ea typeface="Inter" pitchFamily="34" charset="-122"/>
+                <a:cs typeface="Inter" pitchFamily="34" charset="-120"/>
+              </a:rPr>
+              <a:t>Ideal für Polos, Jacken und Caps</a:t>
+            </a:r>
+            <a:endParaRPr lang="en-US" sz="1600" dirty="0"/>
+          </a:p>
+          <a:p>
+            <a:pPr algn="l" marL="342900" indent="-342900">
+              <a:spcAft>
+                <a:spcPts val="800"/>
+              </a:spcAft>
+              <a:buSzPct val="100000"/>
+              <a:buChar char="•"/>
+            </a:pPr>
+            <a:r>
+              <a:rPr lang="en-US" sz="1600" dirty="0">
+                <a:solidFill>
+                  <a:srgbClr val="0F0F0F"/>
+                </a:solidFill>
+                <a:latin typeface="Inter" pitchFamily="34" charset="0"/>
+                <a:ea typeface="Inter" pitchFamily="34" charset="-122"/>
+                <a:cs typeface="Inter" pitchFamily="34" charset="-120"/>
+              </a:rPr>
+              <a:t>Motivdigitalisierung im Haus</a:t>
+            </a:r>
+            <a:endParaRPr lang="en-US" sz="1600" dirty="0"/>
           </a:p>
         </p:txBody>
       </p:sp>
@@ -15082,24 +15319,145 @@
                 <a:ea typeface="Inter" pitchFamily="34" charset="-122"/>
                 <a:cs typeface="Inter" pitchFamily="34" charset="-120"/>
               </a:rPr>
-              <a:t>Folientitel</a:t>
+              <a:t>Auftragsvolumen nach Produktgruppe</a:t>
             </a:r>
             <a:endParaRPr lang="en-US" sz="2800" dirty="0"/>
           </a:p>
         </p:txBody>
       </p:sp>
-      <p:sp>
-        <p:nvSpPr>
-          <p:cNvPr id="3" name="Text 0"/>
+      <p:graphicFrame>
+        <p:nvGraphicFramePr>
+          <p:cNvPr id="3" name="Chart 0" descr=""/>
+          <p:cNvGraphicFramePr/>
+          <p:nvPr/>
+        </p:nvGraphicFramePr>
+        <p:xfrm>
+          <a:off x="457200" y="1188720"/>
+          <a:ext cx="5303520" cy="3291840"/>
+        </p:xfrm>
+        <a:graphic xmlns:a="http://schemas.openxmlformats.org/drawingml/2006/main">
+          <a:graphicData uri="http://schemas.openxmlformats.org/drawingml/2006/chart">
+            <c:chart xmlns:c="http://schemas.openxmlformats.org/drawingml/2006/chart" r:id="rId1"/>
+          </a:graphicData>
+        </a:graphic>
+      </p:graphicFrame>
+      <p:sp>
+        <p:nvSpPr>
+          <p:cNvPr id="4" name="Shape 1"/>
+          <p:cNvSpPr/>
+          <p:nvPr/>
+        </p:nvSpPr>
+        <p:spPr>
+          <a:xfrm>
+            <a:off x="6035040" y="1188720"/>
+            <a:ext cx="2651760" cy="3291840"/>
+          </a:xfrm>
+          <a:prstGeom prst="roundRect">
+            <a:avLst>
+              <a:gd name="adj" fmla="val 4138"/>
+            </a:avLst>
+          </a:prstGeom>
+          <a:solidFill>
+            <a:srgbClr val="E8DFD0"/>
+          </a:solidFill>
+          <a:ln w="12700">
+            <a:solidFill>
+              <a:srgbClr val="E8DFD0"/>
+            </a:solidFill>
+            <a:prstDash val="solid"/>
+          </a:ln>
+        </p:spPr>
+      </p:sp>
+      <p:sp>
+        <p:nvSpPr>
+          <p:cNvPr id="5" name="Text 2"/>
           <p:cNvSpPr txBox="1"/>
-          <p:nvPr>
-            <p:ph idx="102" type="body" hasCustomPrompt="1"/>
-          </p:nvPr>
-        </p:nvSpPr>
-        <p:spPr>
-          <a:xfrm>
-            <a:off x="457200" y="1234440"/>
-            <a:ext cx="8229600" cy="3200400"/>
+          <p:nvPr/>
+        </p:nvSpPr>
+        <p:spPr>
+          <a:xfrm>
+            <a:off x="6263640" y="1371600"/>
+            <a:ext cx="2194560" cy="274320"/>
+          </a:xfrm>
+          <a:prstGeom prst="rect">
+            <a:avLst/>
+          </a:prstGeom>
+          <a:noFill/>
+          <a:ln/>
+        </p:spPr>
+        <p:txBody>
+          <a:bodyPr wrap="square" lIns="0" tIns="0" rIns="0" bIns="0" rtlCol="0" anchor="ctr"/>
+          <a:lstStyle/>
+          <a:p>
+            <a:pPr indent="0" marL="0">
+              <a:buNone/>
+            </a:pPr>
+            <a:r>
+              <a:rPr lang="en-US" sz="1200" dirty="0">
+                <a:solidFill>
+                  <a:srgbClr val="0F0F0F">
+                    <a:alpha val="60000"/>
+                  </a:srgbClr>
+                </a:solidFill>
+                <a:latin typeface="Inter" pitchFamily="34" charset="0"/>
+                <a:ea typeface="Inter" pitchFamily="34" charset="-122"/>
+                <a:cs typeface="Inter" pitchFamily="34" charset="-120"/>
+              </a:rPr>
+              <a:t>Beispieldaten</a:t>
+            </a:r>
+            <a:endParaRPr lang="en-US" sz="1200" dirty="0"/>
+          </a:p>
+        </p:txBody>
+      </p:sp>
+      <p:sp>
+        <p:nvSpPr>
+          <p:cNvPr id="6" name="Text 3"/>
+          <p:cNvSpPr txBox="1"/>
+          <p:nvPr/>
+        </p:nvSpPr>
+        <p:spPr>
+          <a:xfrm>
+            <a:off x="6263640" y="1691640"/>
+            <a:ext cx="2194560" cy="640080"/>
+          </a:xfrm>
+          <a:prstGeom prst="rect">
+            <a:avLst/>
+          </a:prstGeom>
+          <a:noFill/>
+          <a:ln/>
+        </p:spPr>
+        <p:txBody>
+          <a:bodyPr wrap="square" lIns="0" tIns="0" rIns="0" bIns="0" rtlCol="0" anchor="ctr"/>
+          <a:lstStyle/>
+          <a:p>
+            <a:pPr indent="0" marL="0">
+              <a:buNone/>
+            </a:pPr>
+            <a:r>
+              <a:rPr lang="en-US" sz="1600" b="1" dirty="0">
+                <a:solidFill>
+                  <a:srgbClr val="0F0F0F"/>
+                </a:solidFill>
+                <a:latin typeface="Inter" pitchFamily="34" charset="0"/>
+                <a:ea typeface="Inter" pitchFamily="34" charset="-122"/>
+                <a:cs typeface="Inter" pitchFamily="34" charset="-120"/>
+              </a:rPr>
+              <a:t>T-Shirts machen den größten Anteil aus</a:t>
+            </a:r>
+            <a:endParaRPr lang="en-US" sz="1600" dirty="0"/>
+          </a:p>
+        </p:txBody>
+      </p:sp>
+      <p:sp>
+        <p:nvSpPr>
+          <p:cNvPr id="7" name="Text 4"/>
+          <p:cNvSpPr txBox="1"/>
+          <p:nvPr/>
+        </p:nvSpPr>
+        <p:spPr>
+          <a:xfrm>
+            <a:off x="6263640" y="2423160"/>
+            <a:ext cx="2194560" cy="1097280"/>
           </a:xfrm>
           <a:prstGeom prst="rect">
             <a:avLst/>
@@ -15111,109 +15469,23 @@
           <a:bodyPr wrap="square" lIns="0" tIns="0" rIns="0" bIns="0" rtlCol="0" anchor="t"/>
           <a:lstStyle/>
           <a:p>
-            <a:pPr algn="l" marL="342900" indent="-342900">
-              <a:spcAft>
-                <a:spcPts val="800"/>
-              </a:spcAft>
-              <a:buSzPct val="100000"/>
-              <a:buChar char="•"/>
-            </a:pPr>
-            <a:r>
-              <a:rPr lang="en-US" sz="1600" dirty="0">
-                <a:solidFill>
-                  <a:srgbClr val="0F0F0F"/>
-                </a:solidFill>
-                <a:latin typeface="Inter" pitchFamily="34" charset="0"/>
-                <a:ea typeface="Inter" pitchFamily="34" charset="-122"/>
-                <a:cs typeface="Inter" pitchFamily="34" charset="-120"/>
-              </a:rPr>
-              <a:t>Erste Aussage der Folie</a:t>
-            </a:r>
-            <a:endParaRPr lang="en-US" sz="1600" dirty="0"/>
-          </a:p>
-          <a:p>
-            <a:pPr algn="l" marL="342900" indent="-342900">
-              <a:spcAft>
-                <a:spcPts val="800"/>
-              </a:spcAft>
-              <a:buSzPct val="100000"/>
-              <a:buChar char="•"/>
-            </a:pPr>
-            <a:r>
-              <a:rPr lang="en-US" sz="1600" dirty="0">
-                <a:solidFill>
-                  <a:srgbClr val="0F0F0F"/>
-                </a:solidFill>
-                <a:latin typeface="Inter" pitchFamily="34" charset="0"/>
-                <a:ea typeface="Inter" pitchFamily="34" charset="-122"/>
-                <a:cs typeface="Inter" pitchFamily="34" charset="-120"/>
-              </a:rPr>
-              <a:t>Zweite Aussage mit einer kurzen Erläuterung</a:t>
-            </a:r>
-            <a:endParaRPr lang="en-US" sz="1600" dirty="0"/>
-          </a:p>
-          <a:p>
-            <a:pPr algn="l" marL="342900" indent="-342900">
-              <a:spcAft>
-                <a:spcPts val="800"/>
-              </a:spcAft>
-              <a:buSzPct val="100000"/>
-              <a:buChar char="•"/>
-            </a:pPr>
-            <a:r>
-              <a:rPr lang="en-US" sz="1600" dirty="0">
-                <a:solidFill>
-                  <a:srgbClr val="0F0F0F"/>
-                </a:solidFill>
-                <a:latin typeface="Inter" pitchFamily="34" charset="0"/>
-                <a:ea typeface="Inter" pitchFamily="34" charset="-122"/>
-                <a:cs typeface="Inter" pitchFamily="34" charset="-120"/>
-              </a:rPr>
-              <a:t>Dritte Aussage</a:t>
-            </a:r>
-            <a:endParaRPr lang="en-US" sz="1600" dirty="0"/>
-          </a:p>
-          <a:p>
-            <a:pPr algn="l" lvl="1" marL="685800" indent="-342900">
-              <a:spcAft>
-                <a:spcPts val="800"/>
-              </a:spcAft>
-              <a:buSzPct val="100000"/>
-              <a:buChar char="•"/>
-            </a:pPr>
-            <a:r>
-              <a:rPr lang="en-US" sz="1600" dirty="0">
-                <a:solidFill>
-                  <a:srgbClr val="0F0F0F"/>
-                </a:solidFill>
-                <a:latin typeface="Inter" pitchFamily="34" charset="0"/>
-                <a:ea typeface="Inter" pitchFamily="34" charset="-122"/>
-                <a:cs typeface="Inter" pitchFamily="34" charset="-120"/>
-              </a:rPr>
-              <a:t>Unterpunkt zur dritten Aussage</a:t>
-            </a:r>
-            <a:endParaRPr lang="en-US" sz="1600" dirty="0"/>
-          </a:p>
-          <a:p>
-            <a:pPr algn="l" lvl="1" marL="685800" indent="-342900">
-              <a:spcAft>
-                <a:spcPts val="800"/>
-              </a:spcAft>
-              <a:buSzPct val="100000"/>
-              <a:buChar char="•"/>
-            </a:pPr>
-            <a:r>
-              <a:rPr lang="en-US" sz="1600" dirty="0">
-                <a:solidFill>
-                  <a:srgbClr val="0F0F0F"/>
-                </a:solidFill>
-                <a:latin typeface="Inter" pitchFamily="34" charset="0"/>
-                <a:ea typeface="Inter" pitchFamily="34" charset="-122"/>
-                <a:cs typeface="Inter" pitchFamily="34" charset="-120"/>
-              </a:rPr>
-              <a:t>Weiterer Unterpunkt</a:t>
-            </a:r>
-            <a:endParaRPr lang="en-US" sz="1600" dirty="0"/>
+            <a:pPr indent="0" marL="0">
+              <a:buNone/>
+            </a:pPr>
+            <a:r>
+              <a:rPr lang="en-US" sz="1200" dirty="0">
+                <a:solidFill>
+                  <a:srgbClr val="0F0F0F">
+                    <a:alpha val="60000"/>
+                  </a:srgbClr>
+                </a:solidFill>
+                <a:latin typeface="Inter" pitchFamily="34" charset="0"/>
+                <a:ea typeface="Inter" pitchFamily="34" charset="-122"/>
+                <a:cs typeface="Inter" pitchFamily="34" charset="-120"/>
+              </a:rPr>
+              <a:t>Natives Diagramm: Werte per Rechtsklick → „Daten bearbeiten“ ändern.</a:t>
+            </a:r>
+            <a:endParaRPr lang="en-US" sz="1200" dirty="0"/>
           </a:p>
         </p:txBody>
       </p:sp>
@@ -15300,6 +15572,249 @@
         </p:nvSpPr>
         <p:spPr>
           <a:xfrm>
+            <a:off x="457200" y="320040"/>
+            <a:ext cx="7132320" cy="640080"/>
+          </a:xfrm>
+          <a:prstGeom prst="rect">
+            <a:avLst/>
+          </a:prstGeom>
+          <a:noFill/>
+          <a:ln/>
+        </p:spPr>
+        <p:txBody>
+          <a:bodyPr wrap="square" lIns="0" tIns="0" rIns="0" bIns="0" rtlCol="0" anchor="ctr"/>
+          <a:lstStyle/>
+          <a:p>
+            <a:pPr algn="l" indent="0" marL="0">
+              <a:buNone/>
+            </a:pPr>
+            <a:r>
+              <a:rPr lang="en-US" sz="2800" b="1" dirty="0">
+                <a:solidFill>
+                  <a:srgbClr val="0F0F0F"/>
+                </a:solidFill>
+                <a:latin typeface="Inter" pitchFamily="34" charset="0"/>
+                <a:ea typeface="Inter" pitchFamily="34" charset="-122"/>
+                <a:cs typeface="Inter" pitchFamily="34" charset="-120"/>
+              </a:rPr>
+              <a:t>Folientitel</a:t>
+            </a:r>
+            <a:endParaRPr lang="en-US" sz="2800" dirty="0"/>
+          </a:p>
+        </p:txBody>
+      </p:sp>
+      <p:sp>
+        <p:nvSpPr>
+          <p:cNvPr id="3" name="Text 0"/>
+          <p:cNvSpPr txBox="1"/>
+          <p:nvPr>
+            <p:ph idx="102" type="body" hasCustomPrompt="1"/>
+          </p:nvPr>
+        </p:nvSpPr>
+        <p:spPr>
+          <a:xfrm>
+            <a:off x="457200" y="1234440"/>
+            <a:ext cx="8229600" cy="3200400"/>
+          </a:xfrm>
+          <a:prstGeom prst="rect">
+            <a:avLst/>
+          </a:prstGeom>
+          <a:noFill/>
+          <a:ln/>
+        </p:spPr>
+        <p:txBody>
+          <a:bodyPr wrap="square" lIns="0" tIns="0" rIns="0" bIns="0" rtlCol="0" anchor="t"/>
+          <a:lstStyle/>
+          <a:p>
+            <a:pPr algn="l" marL="342900" indent="-342900">
+              <a:spcAft>
+                <a:spcPts val="800"/>
+              </a:spcAft>
+              <a:buSzPct val="100000"/>
+              <a:buChar char="•"/>
+            </a:pPr>
+            <a:r>
+              <a:rPr lang="en-US" sz="1600" dirty="0">
+                <a:solidFill>
+                  <a:srgbClr val="0F0F0F"/>
+                </a:solidFill>
+                <a:latin typeface="Inter" pitchFamily="34" charset="0"/>
+                <a:ea typeface="Inter" pitchFamily="34" charset="-122"/>
+                <a:cs typeface="Inter" pitchFamily="34" charset="-120"/>
+              </a:rPr>
+              <a:t>Erste Aussage der Folie</a:t>
+            </a:r>
+            <a:endParaRPr lang="en-US" sz="1600" dirty="0"/>
+          </a:p>
+          <a:p>
+            <a:pPr algn="l" marL="342900" indent="-342900">
+              <a:spcAft>
+                <a:spcPts val="800"/>
+              </a:spcAft>
+              <a:buSzPct val="100000"/>
+              <a:buChar char="•"/>
+            </a:pPr>
+            <a:r>
+              <a:rPr lang="en-US" sz="1600" dirty="0">
+                <a:solidFill>
+                  <a:srgbClr val="0F0F0F"/>
+                </a:solidFill>
+                <a:latin typeface="Inter" pitchFamily="34" charset="0"/>
+                <a:ea typeface="Inter" pitchFamily="34" charset="-122"/>
+                <a:cs typeface="Inter" pitchFamily="34" charset="-120"/>
+              </a:rPr>
+              <a:t>Zweite Aussage mit einer kurzen Erläuterung</a:t>
+            </a:r>
+            <a:endParaRPr lang="en-US" sz="1600" dirty="0"/>
+          </a:p>
+          <a:p>
+            <a:pPr algn="l" marL="342900" indent="-342900">
+              <a:spcAft>
+                <a:spcPts val="800"/>
+              </a:spcAft>
+              <a:buSzPct val="100000"/>
+              <a:buChar char="•"/>
+            </a:pPr>
+            <a:r>
+              <a:rPr lang="en-US" sz="1600" dirty="0">
+                <a:solidFill>
+                  <a:srgbClr val="0F0F0F"/>
+                </a:solidFill>
+                <a:latin typeface="Inter" pitchFamily="34" charset="0"/>
+                <a:ea typeface="Inter" pitchFamily="34" charset="-122"/>
+                <a:cs typeface="Inter" pitchFamily="34" charset="-120"/>
+              </a:rPr>
+              <a:t>Dritte Aussage</a:t>
+            </a:r>
+            <a:endParaRPr lang="en-US" sz="1600" dirty="0"/>
+          </a:p>
+          <a:p>
+            <a:pPr algn="l" lvl="1" marL="685800" indent="-342900">
+              <a:spcAft>
+                <a:spcPts val="800"/>
+              </a:spcAft>
+              <a:buSzPct val="100000"/>
+              <a:buChar char="•"/>
+            </a:pPr>
+            <a:r>
+              <a:rPr lang="en-US" sz="1600" dirty="0">
+                <a:solidFill>
+                  <a:srgbClr val="0F0F0F"/>
+                </a:solidFill>
+                <a:latin typeface="Inter" pitchFamily="34" charset="0"/>
+                <a:ea typeface="Inter" pitchFamily="34" charset="-122"/>
+                <a:cs typeface="Inter" pitchFamily="34" charset="-120"/>
+              </a:rPr>
+              <a:t>Unterpunkt zur dritten Aussage</a:t>
+            </a:r>
+            <a:endParaRPr lang="en-US" sz="1600" dirty="0"/>
+          </a:p>
+          <a:p>
+            <a:pPr algn="l" lvl="1" marL="685800" indent="-342900">
+              <a:spcAft>
+                <a:spcPts val="800"/>
+              </a:spcAft>
+              <a:buSzPct val="100000"/>
+              <a:buChar char="•"/>
+            </a:pPr>
+            <a:r>
+              <a:rPr lang="en-US" sz="1600" dirty="0">
+                <a:solidFill>
+                  <a:srgbClr val="0F0F0F"/>
+                </a:solidFill>
+                <a:latin typeface="Inter" pitchFamily="34" charset="0"/>
+                <a:ea typeface="Inter" pitchFamily="34" charset="-122"/>
+                <a:cs typeface="Inter" pitchFamily="34" charset="-120"/>
+              </a:rPr>
+              <a:t>Weiterer Unterpunkt</a:t>
+            </a:r>
+            <a:endParaRPr lang="en-US" sz="1600" dirty="0"/>
+          </a:p>
+        </p:txBody>
+      </p:sp>
+      <p:sp>
+        <p:nvSpPr>
+          <p:cNvPr id="25" name="Slide Number Placeholder 0"/>
+          <p:cNvSpPr>
+            <a:spLocks noGrp="1"/>
+          </p:cNvSpPr>
+          <p:nvPr>
+            <p:ph type="sldNum" sz="quarter" idx="4294967295"/>
+          </p:nvPr>
+        </p:nvSpPr>
+        <p:spPr>
+          <a:xfrm>
+            <a:off x="8229600" y="4709160"/>
+            <a:ext cx="457200" cy="274320"/>
+          </a:xfrm>
+          <a:prstGeom prst="rect">
+            <a:avLst/>
+          </a:prstGeom>
+          <a:extLst>
+            <a:ext uri="{C572A759-6A51-4108-AA02-DFA0A04FC94B}">
+              <ma14:wrappingTextBoxFlag xmlns:ma14="http://schemas.microsoft.com/office/mac/drawingml/2011/main" val="0"/>
+            </a:ext>
+          </a:extLst>
+        </p:spPr>
+        <p:txBody>
+          <a:bodyPr lIns="0" tIns="0" rIns="0" bIns="0"/>
+          <a:lstStyle>
+            <a:lvl1pPr>
+              <a:defRPr sz="1000">
+                <a:solidFill>
+                  <a:srgbClr val="0F0F0F"/>
+                </a:solidFill>
+                <a:latin typeface="Inter"/>
+                <a:ea typeface="Inter"/>
+                <a:cs typeface="Inter"/>
+              </a:defRPr>
+            </a:lvl1pPr>
+          </a:lstStyle>
+          <a:p>
+            <a:pPr algn="r"/>
+            <a:fld id="{F7021451-1387-4CA6-816F-3879F97B5CBC}" type="slidenum">
+              <a:rPr b="0" lang="en-US"/>
+              <a:t>16</a:t>
+            </a:fld>
+            <a:endParaRPr lang="en-US"/>
+          </a:p>
+        </p:txBody>
+      </p:sp>
+    </p:spTree>
+  </p:cSld>
+  <p:clrMapOvr>
+    <a:masterClrMapping/>
+  </p:clrMapOvr>
+</p:sld>
+</file>
+
+<file path=ppt/slides/slide17.xml><?xml version="1.0" encoding="utf-8"?>
+<p:sld xmlns:a="http://schemas.openxmlformats.org/drawingml/2006/main" xmlns:r="http://schemas.openxmlformats.org/officeDocument/2006/relationships" xmlns:p="http://schemas.openxmlformats.org/presentationml/2006/main">
+  <p:cSld name="Slide 17">
+    <p:spTree>
+      <p:nvGrpSpPr>
+        <p:cNvPr id="1" name=""/>
+        <p:cNvGrpSpPr/>
+        <p:nvPr/>
+      </p:nvGrpSpPr>
+      <p:grpSpPr>
+        <a:xfrm>
+          <a:off x="0" y="0"/>
+          <a:ext cx="0" cy="0"/>
+          <a:chOff x="0" y="0"/>
+          <a:chExt cx="0" cy="0"/>
+        </a:xfrm>
+      </p:grpSpPr>
+      <p:sp>
+        <p:nvSpPr>
+          <p:cNvPr id="2" name="Text 0"/>
+          <p:cNvSpPr txBox="1"/>
+          <p:nvPr>
+            <p:ph idx="101" type="title" hasCustomPrompt="1"/>
+          </p:nvPr>
+        </p:nvSpPr>
+        <p:spPr>
+          <a:xfrm>
             <a:off x="548640" y="1371600"/>
             <a:ext cx="4846320" cy="1005840"/>
           </a:xfrm>
@@ -15376,7 +15891,7 @@
       </p:sp>
       <p:pic>
         <p:nvPicPr>
-          <p:cNvPr id="4" name="Image 0" descr="/var/folders/hm/sgq6d80d0vq133k7n8dc9bnw0000gn/T/maiershirts-2HUvCI/ph-portrait-252x252.png">    </p:cNvPr>
+          <p:cNvPr id="4" name="Image 0" descr="/var/folders/hm/sgq6d80d0vq133k7n8dc9bnw0000gn/T/maiershirts-Os5V18/ph-portrait-252x252.png">    </p:cNvPr>
           <p:cNvPicPr>
             <a:picLocks noChangeAspect="1"/>
           </p:cNvPicPr>
@@ -15585,7 +16100,7 @@
       </p:sp>
       <p:pic>
         <p:nvPicPr>
-          <p:cNvPr id="9" name="Image 1" descr="/var/folders/hm/sgq6d80d0vq133k7n8dc9bnw0000gn/T/maiershirts-2HUvCI/ph-qr-240x240.png">    </p:cNvPr>
+          <p:cNvPr id="9" name="Image 1" descr="/var/folders/hm/sgq6d80d0vq133k7n8dc9bnw0000gn/T/maiershirts-Os5V18/ph-qr-240x240.png">    </p:cNvPr>
           <p:cNvPicPr>
             <a:picLocks noChangeAspect="1"/>
           </p:cNvPicPr>
@@ -17001,7 +17516,7 @@
       </p:grpSpPr>
       <p:pic>
         <p:nvPicPr>
-          <p:cNvPr id="2" name="Image 0" descr="/var/folders/hm/sgq6d80d0vq133k7n8dc9bnw0000gn/T/maiershirts-2HUvCI/ph-foto-2400x1008.png">    </p:cNvPr>
+          <p:cNvPr id="2" name="Image 0" descr="/var/folders/hm/sgq6d80d0vq133k7n8dc9bnw0000gn/T/maiershirts-Os5V18/ph-foto-2400x1008.png">    </p:cNvPr>
           <p:cNvPicPr>
             <a:picLocks noChangeAspect="1"/>
           </p:cNvPicPr>
@@ -18159,7 +18674,7 @@
       </p:sp>
       <p:pic>
         <p:nvPicPr>
-          <p:cNvPr id="3" name="Image 0" descr="/var/folders/hm/sgq6d80d0vq133k7n8dc9bnw0000gn/T/maiershirts-2HUvCI/ph-foto-696x456.png">    </p:cNvPr>
+          <p:cNvPr id="3" name="Image 0" descr="/var/folders/hm/sgq6d80d0vq133k7n8dc9bnw0000gn/T/maiershirts-Os5V18/ph-foto-696x456.png">    </p:cNvPr>
           <p:cNvPicPr>
             <a:picLocks noChangeAspect="1"/>
           </p:cNvPicPr>
@@ -18329,7 +18844,7 @@
       </p:sp>
       <p:pic>
         <p:nvPicPr>
-          <p:cNvPr id="7" name="Image 1" descr="/var/folders/hm/sgq6d80d0vq133k7n8dc9bnw0000gn/T/maiershirts-2HUvCI/ph-foto-696x456.png">    </p:cNvPr>
+          <p:cNvPr id="7" name="Image 1" descr="/var/folders/hm/sgq6d80d0vq133k7n8dc9bnw0000gn/T/maiershirts-Os5V18/ph-foto-696x456.png">    </p:cNvPr>
           <p:cNvPicPr>
             <a:picLocks noChangeAspect="1"/>
           </p:cNvPicPr>
@@ -18499,7 +19014,7 @@
       </p:sp>
       <p:pic>
         <p:nvPicPr>
-          <p:cNvPr id="11" name="Image 2" descr="/var/folders/hm/sgq6d80d0vq133k7n8dc9bnw0000gn/T/maiershirts-2HUvCI/ph-foto-696x456.png">    </p:cNvPr>
+          <p:cNvPr id="11" name="Image 2" descr="/var/folders/hm/sgq6d80d0vq133k7n8dc9bnw0000gn/T/maiershirts-Os5V18/ph-foto-696x456.png">    </p:cNvPr>
           <p:cNvPicPr>
             <a:picLocks noChangeAspect="1"/>
           </p:cNvPicPr>

--- a/presentation/dist/Maiershirts_Master.pptx
+++ b/presentation/dist/Maiershirts_Master.pptx
@@ -6215,7 +6215,64 @@
           <p:cNvPr id="4" name="Text 0"/>
           <p:cNvSpPr/>
           <p:nvPr>
-            <p:ph idx="102" type="pic" hasCustomPrompt="1"/>
+            <p:ph idx="102" type="body" hasCustomPrompt="1"/>
+          </p:nvPr>
+        </p:nvSpPr>
+        <p:spPr>
+          <a:xfrm>
+            <a:off x="457200" y="914400"/>
+            <a:ext cx="7132320" cy="274320"/>
+          </a:xfrm>
+          <a:prstGeom prst="rect">
+            <a:avLst/>
+          </a:prstGeom>
+          <a:noFill/>
+          <a:ln/>
+        </p:spPr>
+        <p:txBody>
+          <a:bodyPr wrap="square" rtlCol="0"/>
+          <a:lstStyle>
+            <a:lvl1pPr algn="l" indent="0" marL="0">
+              <a:buNone/>
+              <a:defRPr lang="en-US" sz="1200" dirty="0">
+                <a:solidFill>
+                  <a:srgbClr val="0F0F0F">
+                    <a:alpha val="60000"/>
+                  </a:srgbClr>
+                </a:solidFill>
+                <a:latin typeface="Inter" pitchFamily="34" charset="0"/>
+                <a:ea typeface="Inter" pitchFamily="34" charset="-122"/>
+                <a:cs typeface="Inter" pitchFamily="34" charset="-120"/>
+              </a:defRPr>
+            </a:lvl1pPr>
+          </a:lstStyle>
+          <a:p>
+            <a:pPr algn="l" indent="0" marL="0">
+              <a:buNone/>
+            </a:pPr>
+            <a:r>
+              <a:rPr lang="en-US" sz="1200" dirty="0">
+                <a:solidFill>
+                  <a:srgbClr val="0F0F0F">
+                    <a:alpha val="60000"/>
+                  </a:srgbClr>
+                </a:solidFill>
+                <a:latin typeface="Inter" pitchFamily="34" charset="0"/>
+                <a:ea typeface="Inter" pitchFamily="34" charset="-122"/>
+                <a:cs typeface="Inter" pitchFamily="34" charset="-120"/>
+              </a:rPr>
+              <a:t>Eine Auswahl unserer Kunden</a:t>
+            </a:r>
+            <a:endParaRPr lang="en-US" sz="1200" dirty="0"/>
+          </a:p>
+        </p:txBody>
+      </p:sp>
+      <p:sp>
+        <p:nvSpPr>
+          <p:cNvPr id="5" name="Text 0"/>
+          <p:cNvSpPr/>
+          <p:nvPr>
+            <p:ph idx="103" type="pic" hasCustomPrompt="1"/>
           </p:nvPr>
         </p:nvSpPr>
         <p:spPr>
@@ -6269,10 +6326,10 @@
       </p:sp>
       <p:sp>
         <p:nvSpPr>
-          <p:cNvPr id="5" name="Text 0"/>
+          <p:cNvPr id="6" name="Text 0"/>
           <p:cNvSpPr/>
           <p:nvPr>
-            <p:ph idx="103" type="pic" hasCustomPrompt="1"/>
+            <p:ph idx="104" type="pic" hasCustomPrompt="1"/>
           </p:nvPr>
         </p:nvSpPr>
         <p:spPr>
@@ -6326,10 +6383,10 @@
       </p:sp>
       <p:sp>
         <p:nvSpPr>
-          <p:cNvPr id="6" name="Text 0"/>
+          <p:cNvPr id="7" name="Text 0"/>
           <p:cNvSpPr/>
           <p:nvPr>
-            <p:ph idx="104" type="pic" hasCustomPrompt="1"/>
+            <p:ph idx="105" type="pic" hasCustomPrompt="1"/>
           </p:nvPr>
         </p:nvSpPr>
         <p:spPr>
@@ -6383,10 +6440,10 @@
       </p:sp>
       <p:sp>
         <p:nvSpPr>
-          <p:cNvPr id="7" name="Text 0"/>
+          <p:cNvPr id="8" name="Text 0"/>
           <p:cNvSpPr/>
           <p:nvPr>
-            <p:ph idx="105" type="pic" hasCustomPrompt="1"/>
+            <p:ph idx="106" type="pic" hasCustomPrompt="1"/>
           </p:nvPr>
         </p:nvSpPr>
         <p:spPr>
@@ -6440,10 +6497,10 @@
       </p:sp>
       <p:sp>
         <p:nvSpPr>
-          <p:cNvPr id="8" name="Text 0"/>
+          <p:cNvPr id="9" name="Text 0"/>
           <p:cNvSpPr/>
           <p:nvPr>
-            <p:ph idx="106" type="pic" hasCustomPrompt="1"/>
+            <p:ph idx="107" type="pic" hasCustomPrompt="1"/>
           </p:nvPr>
         </p:nvSpPr>
         <p:spPr>
@@ -6497,10 +6554,10 @@
       </p:sp>
       <p:sp>
         <p:nvSpPr>
-          <p:cNvPr id="9" name="Text 0"/>
+          <p:cNvPr id="10" name="Text 0"/>
           <p:cNvSpPr/>
           <p:nvPr>
-            <p:ph idx="107" type="pic" hasCustomPrompt="1"/>
+            <p:ph idx="108" type="pic" hasCustomPrompt="1"/>
           </p:nvPr>
         </p:nvSpPr>
         <p:spPr>
@@ -6554,10 +6611,10 @@
       </p:sp>
       <p:sp>
         <p:nvSpPr>
-          <p:cNvPr id="10" name="Text 0"/>
+          <p:cNvPr id="11" name="Text 0"/>
           <p:cNvSpPr/>
           <p:nvPr>
-            <p:ph idx="108" type="pic" hasCustomPrompt="1"/>
+            <p:ph idx="109" type="pic" hasCustomPrompt="1"/>
           </p:nvPr>
         </p:nvSpPr>
         <p:spPr>
@@ -6611,10 +6668,10 @@
       </p:sp>
       <p:sp>
         <p:nvSpPr>
-          <p:cNvPr id="11" name="Text 0"/>
+          <p:cNvPr id="12" name="Text 0"/>
           <p:cNvSpPr/>
           <p:nvPr>
-            <p:ph idx="109" type="pic" hasCustomPrompt="1"/>
+            <p:ph idx="110" type="pic" hasCustomPrompt="1"/>
           </p:nvPr>
         </p:nvSpPr>
         <p:spPr>
@@ -6668,10 +6725,10 @@
       </p:sp>
       <p:sp>
         <p:nvSpPr>
-          <p:cNvPr id="12" name="Text 0"/>
+          <p:cNvPr id="13" name="Text 0"/>
           <p:cNvSpPr/>
           <p:nvPr>
-            <p:ph idx="110" type="pic" hasCustomPrompt="1"/>
+            <p:ph idx="111" type="pic" hasCustomPrompt="1"/>
           </p:nvPr>
         </p:nvSpPr>
         <p:spPr>
@@ -6725,10 +6782,10 @@
       </p:sp>
       <p:sp>
         <p:nvSpPr>
-          <p:cNvPr id="13" name="Text 0"/>
+          <p:cNvPr id="14" name="Text 0"/>
           <p:cNvSpPr/>
           <p:nvPr>
-            <p:ph idx="111" type="pic" hasCustomPrompt="1"/>
+            <p:ph idx="112" type="pic" hasCustomPrompt="1"/>
           </p:nvPr>
         </p:nvSpPr>
         <p:spPr>
@@ -6782,10 +6839,10 @@
       </p:sp>
       <p:sp>
         <p:nvSpPr>
-          <p:cNvPr id="14" name="Text 0"/>
+          <p:cNvPr id="15" name="Text 0"/>
           <p:cNvSpPr/>
           <p:nvPr>
-            <p:ph idx="112" type="pic" hasCustomPrompt="1"/>
+            <p:ph idx="113" type="pic" hasCustomPrompt="1"/>
           </p:nvPr>
         </p:nvSpPr>
         <p:spPr>
@@ -6839,10 +6896,10 @@
       </p:sp>
       <p:sp>
         <p:nvSpPr>
-          <p:cNvPr id="15" name="Text 0"/>
+          <p:cNvPr id="16" name="Text 0"/>
           <p:cNvSpPr/>
           <p:nvPr>
-            <p:ph idx="113" type="pic" hasCustomPrompt="1"/>
+            <p:ph idx="114" type="pic" hasCustomPrompt="1"/>
           </p:nvPr>
         </p:nvSpPr>
         <p:spPr>
@@ -6896,7 +6953,7 @@
       </p:sp>
       <p:sp>
         <p:nvSpPr>
-          <p:cNvPr id="16" name="Text 0"/>
+          <p:cNvPr id="17" name="Text 0"/>
           <p:cNvSpPr/>
           <p:nvPr/>
         </p:nvSpPr>
@@ -7103,7 +7160,64 @@
           <p:cNvPr id="4" name="Text 0"/>
           <p:cNvSpPr/>
           <p:nvPr>
-            <p:ph idx="102" type="pic" hasCustomPrompt="1"/>
+            <p:ph idx="102" type="body" hasCustomPrompt="1"/>
+          </p:nvPr>
+        </p:nvSpPr>
+        <p:spPr>
+          <a:xfrm>
+            <a:off x="457200" y="914400"/>
+            <a:ext cx="7132320" cy="274320"/>
+          </a:xfrm>
+          <a:prstGeom prst="rect">
+            <a:avLst/>
+          </a:prstGeom>
+          <a:noFill/>
+          <a:ln/>
+        </p:spPr>
+        <p:txBody>
+          <a:bodyPr wrap="square" rtlCol="0"/>
+          <a:lstStyle>
+            <a:lvl1pPr algn="l" indent="0" marL="0">
+              <a:buNone/>
+              <a:defRPr lang="en-US" sz="1200" dirty="0">
+                <a:solidFill>
+                  <a:srgbClr val="0F0F0F">
+                    <a:alpha val="60000"/>
+                  </a:srgbClr>
+                </a:solidFill>
+                <a:latin typeface="Inter" pitchFamily="34" charset="0"/>
+                <a:ea typeface="Inter" pitchFamily="34" charset="-122"/>
+                <a:cs typeface="Inter" pitchFamily="34" charset="-120"/>
+              </a:defRPr>
+            </a:lvl1pPr>
+          </a:lstStyle>
+          <a:p>
+            <a:pPr algn="l" indent="0" marL="0">
+              <a:buNone/>
+            </a:pPr>
+            <a:r>
+              <a:rPr lang="en-US" sz="1200" dirty="0">
+                <a:solidFill>
+                  <a:srgbClr val="0F0F0F">
+                    <a:alpha val="60000"/>
+                  </a:srgbClr>
+                </a:solidFill>
+                <a:latin typeface="Inter" pitchFamily="34" charset="0"/>
+                <a:ea typeface="Inter" pitchFamily="34" charset="-122"/>
+                <a:cs typeface="Inter" pitchFamily="34" charset="-120"/>
+              </a:rPr>
+              <a:t>Eine Auswahl unserer Kunden</a:t>
+            </a:r>
+            <a:endParaRPr lang="en-US" sz="1200" dirty="0"/>
+          </a:p>
+        </p:txBody>
+      </p:sp>
+      <p:sp>
+        <p:nvSpPr>
+          <p:cNvPr id="5" name="Text 0"/>
+          <p:cNvSpPr/>
+          <p:nvPr>
+            <p:ph idx="103" type="pic" hasCustomPrompt="1"/>
           </p:nvPr>
         </p:nvSpPr>
         <p:spPr>
@@ -7157,10 +7271,10 @@
       </p:sp>
       <p:sp>
         <p:nvSpPr>
-          <p:cNvPr id="5" name="Text 0"/>
+          <p:cNvPr id="6" name="Text 0"/>
           <p:cNvSpPr/>
           <p:nvPr>
-            <p:ph idx="103" type="body" hasCustomPrompt="1"/>
+            <p:ph idx="104" type="body" hasCustomPrompt="1"/>
           </p:nvPr>
         </p:nvSpPr>
         <p:spPr>
@@ -7210,10 +7324,10 @@
       </p:sp>
       <p:sp>
         <p:nvSpPr>
-          <p:cNvPr id="6" name="Text 0"/>
+          <p:cNvPr id="7" name="Text 0"/>
           <p:cNvSpPr/>
           <p:nvPr>
-            <p:ph idx="104" type="pic" hasCustomPrompt="1"/>
+            <p:ph idx="105" type="pic" hasCustomPrompt="1"/>
           </p:nvPr>
         </p:nvSpPr>
         <p:spPr>
@@ -7267,10 +7381,10 @@
       </p:sp>
       <p:sp>
         <p:nvSpPr>
-          <p:cNvPr id="7" name="Text 0"/>
+          <p:cNvPr id="8" name="Text 0"/>
           <p:cNvSpPr/>
           <p:nvPr>
-            <p:ph idx="105" type="body" hasCustomPrompt="1"/>
+            <p:ph idx="106" type="body" hasCustomPrompt="1"/>
           </p:nvPr>
         </p:nvSpPr>
         <p:spPr>
@@ -7320,10 +7434,10 @@
       </p:sp>
       <p:sp>
         <p:nvSpPr>
-          <p:cNvPr id="8" name="Text 0"/>
+          <p:cNvPr id="9" name="Text 0"/>
           <p:cNvSpPr/>
           <p:nvPr>
-            <p:ph idx="106" type="pic" hasCustomPrompt="1"/>
+            <p:ph idx="107" type="pic" hasCustomPrompt="1"/>
           </p:nvPr>
         </p:nvSpPr>
         <p:spPr>
@@ -7377,10 +7491,10 @@
       </p:sp>
       <p:sp>
         <p:nvSpPr>
-          <p:cNvPr id="9" name="Text 0"/>
+          <p:cNvPr id="10" name="Text 0"/>
           <p:cNvSpPr/>
           <p:nvPr>
-            <p:ph idx="107" type="body" hasCustomPrompt="1"/>
+            <p:ph idx="108" type="body" hasCustomPrompt="1"/>
           </p:nvPr>
         </p:nvSpPr>
         <p:spPr>
@@ -7430,10 +7544,10 @@
       </p:sp>
       <p:sp>
         <p:nvSpPr>
-          <p:cNvPr id="10" name="Text 0"/>
+          <p:cNvPr id="11" name="Text 0"/>
           <p:cNvSpPr/>
           <p:nvPr>
-            <p:ph idx="108" type="pic" hasCustomPrompt="1"/>
+            <p:ph idx="109" type="pic" hasCustomPrompt="1"/>
           </p:nvPr>
         </p:nvSpPr>
         <p:spPr>
@@ -7487,10 +7601,10 @@
       </p:sp>
       <p:sp>
         <p:nvSpPr>
-          <p:cNvPr id="11" name="Text 0"/>
+          <p:cNvPr id="12" name="Text 0"/>
           <p:cNvSpPr/>
           <p:nvPr>
-            <p:ph idx="109" type="body" hasCustomPrompt="1"/>
+            <p:ph idx="110" type="body" hasCustomPrompt="1"/>
           </p:nvPr>
         </p:nvSpPr>
         <p:spPr>
@@ -7540,10 +7654,10 @@
       </p:sp>
       <p:sp>
         <p:nvSpPr>
-          <p:cNvPr id="12" name="Text 0"/>
+          <p:cNvPr id="13" name="Text 0"/>
           <p:cNvSpPr/>
           <p:nvPr>
-            <p:ph idx="110" type="pic" hasCustomPrompt="1"/>
+            <p:ph idx="111" type="pic" hasCustomPrompt="1"/>
           </p:nvPr>
         </p:nvSpPr>
         <p:spPr>
@@ -7597,10 +7711,10 @@
       </p:sp>
       <p:sp>
         <p:nvSpPr>
-          <p:cNvPr id="13" name="Text 0"/>
+          <p:cNvPr id="14" name="Text 0"/>
           <p:cNvSpPr/>
           <p:nvPr>
-            <p:ph idx="111" type="body" hasCustomPrompt="1"/>
+            <p:ph idx="112" type="body" hasCustomPrompt="1"/>
           </p:nvPr>
         </p:nvSpPr>
         <p:spPr>
@@ -7650,10 +7764,10 @@
       </p:sp>
       <p:sp>
         <p:nvSpPr>
-          <p:cNvPr id="14" name="Text 0"/>
+          <p:cNvPr id="15" name="Text 0"/>
           <p:cNvSpPr/>
           <p:nvPr>
-            <p:ph idx="112" type="pic" hasCustomPrompt="1"/>
+            <p:ph idx="113" type="pic" hasCustomPrompt="1"/>
           </p:nvPr>
         </p:nvSpPr>
         <p:spPr>
@@ -7707,10 +7821,10 @@
       </p:sp>
       <p:sp>
         <p:nvSpPr>
-          <p:cNvPr id="15" name="Text 0"/>
+          <p:cNvPr id="16" name="Text 0"/>
           <p:cNvSpPr/>
           <p:nvPr>
-            <p:ph idx="113" type="body" hasCustomPrompt="1"/>
+            <p:ph idx="114" type="body" hasCustomPrompt="1"/>
           </p:nvPr>
         </p:nvSpPr>
         <p:spPr>
@@ -7760,10 +7874,10 @@
       </p:sp>
       <p:sp>
         <p:nvSpPr>
-          <p:cNvPr id="16" name="Text 0"/>
+          <p:cNvPr id="17" name="Text 0"/>
           <p:cNvSpPr/>
           <p:nvPr>
-            <p:ph idx="114" type="pic" hasCustomPrompt="1"/>
+            <p:ph idx="115" type="pic" hasCustomPrompt="1"/>
           </p:nvPr>
         </p:nvSpPr>
         <p:spPr>
@@ -7817,10 +7931,10 @@
       </p:sp>
       <p:sp>
         <p:nvSpPr>
-          <p:cNvPr id="17" name="Text 0"/>
+          <p:cNvPr id="18" name="Text 0"/>
           <p:cNvSpPr/>
           <p:nvPr>
-            <p:ph idx="115" type="body" hasCustomPrompt="1"/>
+            <p:ph idx="116" type="body" hasCustomPrompt="1"/>
           </p:nvPr>
         </p:nvSpPr>
         <p:spPr>
@@ -7870,10 +7984,10 @@
       </p:sp>
       <p:sp>
         <p:nvSpPr>
-          <p:cNvPr id="18" name="Text 0"/>
+          <p:cNvPr id="19" name="Text 0"/>
           <p:cNvSpPr/>
           <p:nvPr>
-            <p:ph idx="116" type="pic" hasCustomPrompt="1"/>
+            <p:ph idx="117" type="pic" hasCustomPrompt="1"/>
           </p:nvPr>
         </p:nvSpPr>
         <p:spPr>
@@ -7927,10 +8041,10 @@
       </p:sp>
       <p:sp>
         <p:nvSpPr>
-          <p:cNvPr id="19" name="Text 0"/>
+          <p:cNvPr id="20" name="Text 0"/>
           <p:cNvSpPr/>
           <p:nvPr>
-            <p:ph idx="117" type="body" hasCustomPrompt="1"/>
+            <p:ph idx="118" type="body" hasCustomPrompt="1"/>
           </p:nvPr>
         </p:nvSpPr>
         <p:spPr>
@@ -7980,7 +8094,7 @@
       </p:sp>
       <p:sp>
         <p:nvSpPr>
-          <p:cNvPr id="20" name="Text 0"/>
+          <p:cNvPr id="21" name="Text 0"/>
           <p:cNvSpPr/>
           <p:nvPr/>
         </p:nvSpPr>
@@ -13575,14 +13689,57 @@
           </a:p>
         </p:txBody>
       </p:sp>
+      <p:sp>
+        <p:nvSpPr>
+          <p:cNvPr id="3" name="Text 0"/>
+          <p:cNvSpPr txBox="1"/>
+          <p:nvPr>
+            <p:ph idx="102" type="body" hasCustomPrompt="1"/>
+          </p:nvPr>
+        </p:nvSpPr>
+        <p:spPr>
+          <a:xfrm>
+            <a:off x="457200" y="914400"/>
+            <a:ext cx="7132320" cy="274320"/>
+          </a:xfrm>
+          <a:prstGeom prst="rect">
+            <a:avLst/>
+          </a:prstGeom>
+          <a:noFill/>
+          <a:ln/>
+        </p:spPr>
+        <p:txBody>
+          <a:bodyPr wrap="square" lIns="0" tIns="0" rIns="0" bIns="0" rtlCol="0" anchor="ctr"/>
+          <a:lstStyle/>
+          <a:p>
+            <a:pPr algn="l" indent="0" marL="0">
+              <a:buNone/>
+            </a:pPr>
+            <a:r>
+              <a:rPr lang="en-US" sz="1200" dirty="0">
+                <a:solidFill>
+                  <a:srgbClr val="0F0F0F">
+                    <a:alpha val="60000"/>
+                  </a:srgbClr>
+                </a:solidFill>
+                <a:latin typeface="Inter" pitchFamily="34" charset="0"/>
+                <a:ea typeface="Inter" pitchFamily="34" charset="-122"/>
+                <a:cs typeface="Inter" pitchFamily="34" charset="-120"/>
+              </a:rPr>
+              <a:t>Eine Auswahl. Viele weitere Unternehmen und Teams aus der Region lassen bei uns veredeln.</a:t>
+            </a:r>
+            <a:endParaRPr lang="en-US" sz="1200" dirty="0"/>
+          </a:p>
+        </p:txBody>
+      </p:sp>
       <p:pic>
         <p:nvPicPr>
-          <p:cNvPr id="3" name="Image 0" descr="/var/folders/hm/sgq6d80d0vq133k7n8dc9bnw0000gn/T/maiershirts-Os5V18/ref-unternehmen-0-0.png">    </p:cNvPr>
+          <p:cNvPr id="4" name="Image 0" descr="/var/folders/hm/sgq6d80d0vq133k7n8dc9bnw0000gn/T/maiershirts-fAJE9f/ref-unternehmen-0-0.png">    </p:cNvPr>
           <p:cNvPicPr>
             <a:picLocks noChangeAspect="1"/>
           </p:cNvPicPr>
           <p:nvPr>
-            <p:ph idx="102" type="pic" hasCustomPrompt="1"/>
+            <p:ph idx="103" type="pic" hasCustomPrompt="1"/>
           </p:nvPr>
         </p:nvPicPr>
         <p:blipFill>
@@ -13603,12 +13760,12 @@
       </p:pic>
       <p:pic>
         <p:nvPicPr>
-          <p:cNvPr id="4" name="Image 1" descr="/var/folders/hm/sgq6d80d0vq133k7n8dc9bnw0000gn/T/maiershirts-Os5V18/ref-unternehmen-0-1.png">    </p:cNvPr>
+          <p:cNvPr id="5" name="Image 1" descr="/var/folders/hm/sgq6d80d0vq133k7n8dc9bnw0000gn/T/maiershirts-fAJE9f/ref-unternehmen-0-1.png">    </p:cNvPr>
           <p:cNvPicPr>
             <a:picLocks noChangeAspect="1"/>
           </p:cNvPicPr>
           <p:nvPr>
-            <p:ph idx="103" type="pic" hasCustomPrompt="1"/>
+            <p:ph idx="104" type="pic" hasCustomPrompt="1"/>
           </p:nvPr>
         </p:nvPicPr>
         <p:blipFill>
@@ -13629,12 +13786,12 @@
       </p:pic>
       <p:pic>
         <p:nvPicPr>
-          <p:cNvPr id="5" name="Image 2" descr="/var/folders/hm/sgq6d80d0vq133k7n8dc9bnw0000gn/T/maiershirts-Os5V18/ref-unternehmen-0-2.png">    </p:cNvPr>
+          <p:cNvPr id="6" name="Image 2" descr="/var/folders/hm/sgq6d80d0vq133k7n8dc9bnw0000gn/T/maiershirts-fAJE9f/ref-unternehmen-0-2.png">    </p:cNvPr>
           <p:cNvPicPr>
             <a:picLocks noChangeAspect="1"/>
           </p:cNvPicPr>
           <p:nvPr>
-            <p:ph idx="104" type="pic" hasCustomPrompt="1"/>
+            <p:ph idx="105" type="pic" hasCustomPrompt="1"/>
           </p:nvPr>
         </p:nvPicPr>
         <p:blipFill>
@@ -13655,12 +13812,12 @@
       </p:pic>
       <p:pic>
         <p:nvPicPr>
-          <p:cNvPr id="6" name="Image 3" descr="/var/folders/hm/sgq6d80d0vq133k7n8dc9bnw0000gn/T/maiershirts-Os5V18/ref-unternehmen-0-3.png">    </p:cNvPr>
+          <p:cNvPr id="7" name="Image 3" descr="/var/folders/hm/sgq6d80d0vq133k7n8dc9bnw0000gn/T/maiershirts-fAJE9f/ref-unternehmen-0-3.png">    </p:cNvPr>
           <p:cNvPicPr>
             <a:picLocks noChangeAspect="1"/>
           </p:cNvPicPr>
           <p:nvPr>
-            <p:ph idx="105" type="pic" hasCustomPrompt="1"/>
+            <p:ph idx="106" type="pic" hasCustomPrompt="1"/>
           </p:nvPr>
         </p:nvPicPr>
         <p:blipFill>
@@ -13681,12 +13838,12 @@
       </p:pic>
       <p:pic>
         <p:nvPicPr>
-          <p:cNvPr id="7" name="Image 4" descr="/var/folders/hm/sgq6d80d0vq133k7n8dc9bnw0000gn/T/maiershirts-Os5V18/ref-unternehmen-0-4.png">    </p:cNvPr>
+          <p:cNvPr id="8" name="Image 4" descr="/var/folders/hm/sgq6d80d0vq133k7n8dc9bnw0000gn/T/maiershirts-fAJE9f/ref-unternehmen-0-4.png">    </p:cNvPr>
           <p:cNvPicPr>
             <a:picLocks noChangeAspect="1"/>
           </p:cNvPicPr>
           <p:nvPr>
-            <p:ph idx="106" type="pic" hasCustomPrompt="1"/>
+            <p:ph idx="107" type="pic" hasCustomPrompt="1"/>
           </p:nvPr>
         </p:nvPicPr>
         <p:blipFill>
@@ -13707,12 +13864,12 @@
       </p:pic>
       <p:pic>
         <p:nvPicPr>
-          <p:cNvPr id="8" name="Image 5" descr="/var/folders/hm/sgq6d80d0vq133k7n8dc9bnw0000gn/T/maiershirts-Os5V18/ref-unternehmen-0-5.png">    </p:cNvPr>
+          <p:cNvPr id="9" name="Image 5" descr="/var/folders/hm/sgq6d80d0vq133k7n8dc9bnw0000gn/T/maiershirts-fAJE9f/ref-unternehmen-0-5.png">    </p:cNvPr>
           <p:cNvPicPr>
             <a:picLocks noChangeAspect="1"/>
           </p:cNvPicPr>
           <p:nvPr>
-            <p:ph idx="107" type="pic" hasCustomPrompt="1"/>
+            <p:ph idx="108" type="pic" hasCustomPrompt="1"/>
           </p:nvPr>
         </p:nvPicPr>
         <p:blipFill>
@@ -13733,12 +13890,12 @@
       </p:pic>
       <p:pic>
         <p:nvPicPr>
-          <p:cNvPr id="9" name="Image 6" descr="/var/folders/hm/sgq6d80d0vq133k7n8dc9bnw0000gn/T/maiershirts-Os5V18/ref-unternehmen-0-6.png">    </p:cNvPr>
+          <p:cNvPr id="10" name="Image 6" descr="/var/folders/hm/sgq6d80d0vq133k7n8dc9bnw0000gn/T/maiershirts-fAJE9f/ref-unternehmen-0-6.png">    </p:cNvPr>
           <p:cNvPicPr>
             <a:picLocks noChangeAspect="1"/>
           </p:cNvPicPr>
           <p:nvPr>
-            <p:ph idx="108" type="pic" hasCustomPrompt="1"/>
+            <p:ph idx="109" type="pic" hasCustomPrompt="1"/>
           </p:nvPr>
         </p:nvPicPr>
         <p:blipFill>
@@ -13759,12 +13916,12 @@
       </p:pic>
       <p:pic>
         <p:nvPicPr>
-          <p:cNvPr id="10" name="Image 7" descr="/var/folders/hm/sgq6d80d0vq133k7n8dc9bnw0000gn/T/maiershirts-Os5V18/ref-unternehmen-0-7.png">    </p:cNvPr>
+          <p:cNvPr id="11" name="Image 7" descr="/var/folders/hm/sgq6d80d0vq133k7n8dc9bnw0000gn/T/maiershirts-fAJE9f/ref-unternehmen-0-7.png">    </p:cNvPr>
           <p:cNvPicPr>
             <a:picLocks noChangeAspect="1"/>
           </p:cNvPicPr>
           <p:nvPr>
-            <p:ph idx="109" type="pic" hasCustomPrompt="1"/>
+            <p:ph idx="110" type="pic" hasCustomPrompt="1"/>
           </p:nvPr>
         </p:nvPicPr>
         <p:blipFill>
@@ -13785,12 +13942,12 @@
       </p:pic>
       <p:pic>
         <p:nvPicPr>
-          <p:cNvPr id="11" name="Image 8" descr="/var/folders/hm/sgq6d80d0vq133k7n8dc9bnw0000gn/T/maiershirts-Os5V18/ref-unternehmen-0-8.png">    </p:cNvPr>
+          <p:cNvPr id="12" name="Image 8" descr="/var/folders/hm/sgq6d80d0vq133k7n8dc9bnw0000gn/T/maiershirts-fAJE9f/ref-unternehmen-0-8.png">    </p:cNvPr>
           <p:cNvPicPr>
             <a:picLocks noChangeAspect="1"/>
           </p:cNvPicPr>
           <p:nvPr>
-            <p:ph idx="110" type="pic" hasCustomPrompt="1"/>
+            <p:ph idx="111" type="pic" hasCustomPrompt="1"/>
           </p:nvPr>
         </p:nvPicPr>
         <p:blipFill>
@@ -13811,12 +13968,12 @@
       </p:pic>
       <p:pic>
         <p:nvPicPr>
-          <p:cNvPr id="12" name="Image 9" descr="/var/folders/hm/sgq6d80d0vq133k7n8dc9bnw0000gn/T/maiershirts-Os5V18/ref-unternehmen-0-9.png">    </p:cNvPr>
+          <p:cNvPr id="13" name="Image 9" descr="/var/folders/hm/sgq6d80d0vq133k7n8dc9bnw0000gn/T/maiershirts-fAJE9f/ref-unternehmen-0-9.png">    </p:cNvPr>
           <p:cNvPicPr>
             <a:picLocks noChangeAspect="1"/>
           </p:cNvPicPr>
           <p:nvPr>
-            <p:ph idx="111" type="pic" hasCustomPrompt="1"/>
+            <p:ph idx="112" type="pic" hasCustomPrompt="1"/>
           </p:nvPr>
         </p:nvPicPr>
         <p:blipFill>
@@ -13837,12 +13994,12 @@
       </p:pic>
       <p:pic>
         <p:nvPicPr>
-          <p:cNvPr id="13" name="Image 10" descr="/var/folders/hm/sgq6d80d0vq133k7n8dc9bnw0000gn/T/maiershirts-Os5V18/ref-unternehmen-0-10.png">    </p:cNvPr>
+          <p:cNvPr id="14" name="Image 10" descr="/var/folders/hm/sgq6d80d0vq133k7n8dc9bnw0000gn/T/maiershirts-fAJE9f/ref-unternehmen-0-10.png">    </p:cNvPr>
           <p:cNvPicPr>
             <a:picLocks noChangeAspect="1"/>
           </p:cNvPicPr>
           <p:nvPr>
-            <p:ph idx="112" type="pic" hasCustomPrompt="1"/>
+            <p:ph idx="113" type="pic" hasCustomPrompt="1"/>
           </p:nvPr>
         </p:nvPicPr>
         <p:blipFill>
@@ -13863,12 +14020,12 @@
       </p:pic>
       <p:pic>
         <p:nvPicPr>
-          <p:cNvPr id="14" name="Image 11" descr="/var/folders/hm/sgq6d80d0vq133k7n8dc9bnw0000gn/T/maiershirts-Os5V18/ref-unternehmen-0-11.png">    </p:cNvPr>
+          <p:cNvPr id="15" name="Image 11" descr="/var/folders/hm/sgq6d80d0vq133k7n8dc9bnw0000gn/T/maiershirts-fAJE9f/ref-unternehmen-0-11.png">    </p:cNvPr>
           <p:cNvPicPr>
             <a:picLocks noChangeAspect="1"/>
           </p:cNvPicPr>
           <p:nvPr>
-            <p:ph idx="113" type="pic" hasCustomPrompt="1"/>
+            <p:ph idx="114" type="pic" hasCustomPrompt="1"/>
           </p:nvPr>
         </p:nvPicPr>
         <p:blipFill>
@@ -14001,14 +14158,57 @@
           </a:p>
         </p:txBody>
       </p:sp>
+      <p:sp>
+        <p:nvSpPr>
+          <p:cNvPr id="3" name="Text 0"/>
+          <p:cNvSpPr txBox="1"/>
+          <p:nvPr>
+            <p:ph idx="102" type="body" hasCustomPrompt="1"/>
+          </p:nvPr>
+        </p:nvSpPr>
+        <p:spPr>
+          <a:xfrm>
+            <a:off x="457200" y="914400"/>
+            <a:ext cx="7132320" cy="274320"/>
+          </a:xfrm>
+          <a:prstGeom prst="rect">
+            <a:avLst/>
+          </a:prstGeom>
+          <a:noFill/>
+          <a:ln/>
+        </p:spPr>
+        <p:txBody>
+          <a:bodyPr wrap="square" lIns="0" tIns="0" rIns="0" bIns="0" rtlCol="0" anchor="ctr"/>
+          <a:lstStyle/>
+          <a:p>
+            <a:pPr algn="l" indent="0" marL="0">
+              <a:buNone/>
+            </a:pPr>
+            <a:r>
+              <a:rPr lang="en-US" sz="1200" dirty="0">
+                <a:solidFill>
+                  <a:srgbClr val="0F0F0F">
+                    <a:alpha val="60000"/>
+                  </a:srgbClr>
+                </a:solidFill>
+                <a:latin typeface="Inter" pitchFamily="34" charset="0"/>
+                <a:ea typeface="Inter" pitchFamily="34" charset="-122"/>
+                <a:cs typeface="Inter" pitchFamily="34" charset="-120"/>
+              </a:rPr>
+              <a:t>Eine Auswahl. Viele weitere Unternehmen und Teams aus der Region lassen bei uns veredeln.</a:t>
+            </a:r>
+            <a:endParaRPr lang="en-US" sz="1200" dirty="0"/>
+          </a:p>
+        </p:txBody>
+      </p:sp>
       <p:pic>
         <p:nvPicPr>
-          <p:cNvPr id="3" name="Image 0" descr="/var/folders/hm/sgq6d80d0vq133k7n8dc9bnw0000gn/T/maiershirts-Os5V18/ref-unternehmen-1-0.png">    </p:cNvPr>
+          <p:cNvPr id="4" name="Image 0" descr="/var/folders/hm/sgq6d80d0vq133k7n8dc9bnw0000gn/T/maiershirts-fAJE9f/ref-unternehmen-1-0.png">    </p:cNvPr>
           <p:cNvPicPr>
             <a:picLocks noChangeAspect="1"/>
           </p:cNvPicPr>
           <p:nvPr>
-            <p:ph idx="102" type="pic" hasCustomPrompt="1"/>
+            <p:ph idx="103" type="pic" hasCustomPrompt="1"/>
           </p:nvPr>
         </p:nvPicPr>
         <p:blipFill>
@@ -14029,12 +14229,12 @@
       </p:pic>
       <p:pic>
         <p:nvPicPr>
-          <p:cNvPr id="4" name="Image 1" descr="/var/folders/hm/sgq6d80d0vq133k7n8dc9bnw0000gn/T/maiershirts-Os5V18/ph-logo-446x194.png">    </p:cNvPr>
+          <p:cNvPr id="5" name="Image 1" descr="/var/folders/hm/sgq6d80d0vq133k7n8dc9bnw0000gn/T/maiershirts-fAJE9f/ph-logo-446x194.png">    </p:cNvPr>
           <p:cNvPicPr>
             <a:picLocks noChangeAspect="1"/>
           </p:cNvPicPr>
           <p:nvPr>
-            <p:ph idx="103" type="pic" hasCustomPrompt="1"/>
+            <p:ph idx="104" type="pic" hasCustomPrompt="1"/>
           </p:nvPr>
         </p:nvPicPr>
         <p:blipFill>
@@ -14055,12 +14255,12 @@
       </p:pic>
       <p:pic>
         <p:nvPicPr>
-          <p:cNvPr id="5" name="Image 2" descr="/var/folders/hm/sgq6d80d0vq133k7n8dc9bnw0000gn/T/maiershirts-Os5V18/ph-logo-446x194.png">    </p:cNvPr>
+          <p:cNvPr id="6" name="Image 2" descr="/var/folders/hm/sgq6d80d0vq133k7n8dc9bnw0000gn/T/maiershirts-fAJE9f/ph-logo-446x194.png">    </p:cNvPr>
           <p:cNvPicPr>
             <a:picLocks noChangeAspect="1"/>
           </p:cNvPicPr>
           <p:nvPr>
-            <p:ph idx="104" type="pic" hasCustomPrompt="1"/>
+            <p:ph idx="105" type="pic" hasCustomPrompt="1"/>
           </p:nvPr>
         </p:nvPicPr>
         <p:blipFill>
@@ -14081,12 +14281,12 @@
       </p:pic>
       <p:pic>
         <p:nvPicPr>
-          <p:cNvPr id="6" name="Image 3" descr="/var/folders/hm/sgq6d80d0vq133k7n8dc9bnw0000gn/T/maiershirts-Os5V18/ph-logo-446x194.png">    </p:cNvPr>
+          <p:cNvPr id="7" name="Image 3" descr="/var/folders/hm/sgq6d80d0vq133k7n8dc9bnw0000gn/T/maiershirts-fAJE9f/ph-logo-446x194.png">    </p:cNvPr>
           <p:cNvPicPr>
             <a:picLocks noChangeAspect="1"/>
           </p:cNvPicPr>
           <p:nvPr>
-            <p:ph idx="105" type="pic" hasCustomPrompt="1"/>
+            <p:ph idx="106" type="pic" hasCustomPrompt="1"/>
           </p:nvPr>
         </p:nvPicPr>
         <p:blipFill>
@@ -14107,12 +14307,12 @@
       </p:pic>
       <p:pic>
         <p:nvPicPr>
-          <p:cNvPr id="7" name="Image 4" descr="/var/folders/hm/sgq6d80d0vq133k7n8dc9bnw0000gn/T/maiershirts-Os5V18/ph-logo-446x194.png">    </p:cNvPr>
+          <p:cNvPr id="8" name="Image 4" descr="/var/folders/hm/sgq6d80d0vq133k7n8dc9bnw0000gn/T/maiershirts-fAJE9f/ph-logo-446x194.png">    </p:cNvPr>
           <p:cNvPicPr>
             <a:picLocks noChangeAspect="1"/>
           </p:cNvPicPr>
           <p:nvPr>
-            <p:ph idx="106" type="pic" hasCustomPrompt="1"/>
+            <p:ph idx="107" type="pic" hasCustomPrompt="1"/>
           </p:nvPr>
         </p:nvPicPr>
         <p:blipFill>
@@ -14133,12 +14333,12 @@
       </p:pic>
       <p:pic>
         <p:nvPicPr>
-          <p:cNvPr id="8" name="Image 5" descr="/var/folders/hm/sgq6d80d0vq133k7n8dc9bnw0000gn/T/maiershirts-Os5V18/ph-logo-446x194.png">    </p:cNvPr>
+          <p:cNvPr id="9" name="Image 5" descr="/var/folders/hm/sgq6d80d0vq133k7n8dc9bnw0000gn/T/maiershirts-fAJE9f/ph-logo-446x194.png">    </p:cNvPr>
           <p:cNvPicPr>
             <a:picLocks noChangeAspect="1"/>
           </p:cNvPicPr>
           <p:nvPr>
-            <p:ph idx="107" type="pic" hasCustomPrompt="1"/>
+            <p:ph idx="108" type="pic" hasCustomPrompt="1"/>
           </p:nvPr>
         </p:nvPicPr>
         <p:blipFill>
@@ -14159,12 +14359,12 @@
       </p:pic>
       <p:pic>
         <p:nvPicPr>
-          <p:cNvPr id="9" name="Image 6" descr="/var/folders/hm/sgq6d80d0vq133k7n8dc9bnw0000gn/T/maiershirts-Os5V18/ph-logo-446x194.png">    </p:cNvPr>
+          <p:cNvPr id="10" name="Image 6" descr="/var/folders/hm/sgq6d80d0vq133k7n8dc9bnw0000gn/T/maiershirts-fAJE9f/ph-logo-446x194.png">    </p:cNvPr>
           <p:cNvPicPr>
             <a:picLocks noChangeAspect="1"/>
           </p:cNvPicPr>
           <p:nvPr>
-            <p:ph idx="108" type="pic" hasCustomPrompt="1"/>
+            <p:ph idx="109" type="pic" hasCustomPrompt="1"/>
           </p:nvPr>
         </p:nvPicPr>
         <p:blipFill>
@@ -14185,12 +14385,12 @@
       </p:pic>
       <p:pic>
         <p:nvPicPr>
-          <p:cNvPr id="10" name="Image 7" descr="/var/folders/hm/sgq6d80d0vq133k7n8dc9bnw0000gn/T/maiershirts-Os5V18/ph-logo-446x194.png">    </p:cNvPr>
+          <p:cNvPr id="11" name="Image 7" descr="/var/folders/hm/sgq6d80d0vq133k7n8dc9bnw0000gn/T/maiershirts-fAJE9f/ph-logo-446x194.png">    </p:cNvPr>
           <p:cNvPicPr>
             <a:picLocks noChangeAspect="1"/>
           </p:cNvPicPr>
           <p:nvPr>
-            <p:ph idx="109" type="pic" hasCustomPrompt="1"/>
+            <p:ph idx="110" type="pic" hasCustomPrompt="1"/>
           </p:nvPr>
         </p:nvPicPr>
         <p:blipFill>
@@ -14211,12 +14411,12 @@
       </p:pic>
       <p:pic>
         <p:nvPicPr>
-          <p:cNvPr id="11" name="Image 8" descr="/var/folders/hm/sgq6d80d0vq133k7n8dc9bnw0000gn/T/maiershirts-Os5V18/ph-logo-446x194.png">    </p:cNvPr>
+          <p:cNvPr id="12" name="Image 8" descr="/var/folders/hm/sgq6d80d0vq133k7n8dc9bnw0000gn/T/maiershirts-fAJE9f/ph-logo-446x194.png">    </p:cNvPr>
           <p:cNvPicPr>
             <a:picLocks noChangeAspect="1"/>
           </p:cNvPicPr>
           <p:nvPr>
-            <p:ph idx="110" type="pic" hasCustomPrompt="1"/>
+            <p:ph idx="111" type="pic" hasCustomPrompt="1"/>
           </p:nvPr>
         </p:nvPicPr>
         <p:blipFill>
@@ -14237,12 +14437,12 @@
       </p:pic>
       <p:pic>
         <p:nvPicPr>
-          <p:cNvPr id="12" name="Image 9" descr="/var/folders/hm/sgq6d80d0vq133k7n8dc9bnw0000gn/T/maiershirts-Os5V18/ph-logo-446x194.png">    </p:cNvPr>
+          <p:cNvPr id="13" name="Image 9" descr="/var/folders/hm/sgq6d80d0vq133k7n8dc9bnw0000gn/T/maiershirts-fAJE9f/ph-logo-446x194.png">    </p:cNvPr>
           <p:cNvPicPr>
             <a:picLocks noChangeAspect="1"/>
           </p:cNvPicPr>
           <p:nvPr>
-            <p:ph idx="111" type="pic" hasCustomPrompt="1"/>
+            <p:ph idx="112" type="pic" hasCustomPrompt="1"/>
           </p:nvPr>
         </p:nvPicPr>
         <p:blipFill>
@@ -14263,12 +14463,12 @@
       </p:pic>
       <p:pic>
         <p:nvPicPr>
-          <p:cNvPr id="13" name="Image 10" descr="/var/folders/hm/sgq6d80d0vq133k7n8dc9bnw0000gn/T/maiershirts-Os5V18/ph-logo-446x194.png">    </p:cNvPr>
+          <p:cNvPr id="14" name="Image 10" descr="/var/folders/hm/sgq6d80d0vq133k7n8dc9bnw0000gn/T/maiershirts-fAJE9f/ph-logo-446x194.png">    </p:cNvPr>
           <p:cNvPicPr>
             <a:picLocks noChangeAspect="1"/>
           </p:cNvPicPr>
           <p:nvPr>
-            <p:ph idx="112" type="pic" hasCustomPrompt="1"/>
+            <p:ph idx="113" type="pic" hasCustomPrompt="1"/>
           </p:nvPr>
         </p:nvPicPr>
         <p:blipFill>
@@ -14289,12 +14489,12 @@
       </p:pic>
       <p:pic>
         <p:nvPicPr>
-          <p:cNvPr id="14" name="Image 11" descr="/var/folders/hm/sgq6d80d0vq133k7n8dc9bnw0000gn/T/maiershirts-Os5V18/ph-logo-446x194.png">    </p:cNvPr>
+          <p:cNvPr id="15" name="Image 11" descr="/var/folders/hm/sgq6d80d0vq133k7n8dc9bnw0000gn/T/maiershirts-fAJE9f/ph-logo-446x194.png">    </p:cNvPr>
           <p:cNvPicPr>
             <a:picLocks noChangeAspect="1"/>
           </p:cNvPicPr>
           <p:nvPr>
-            <p:ph idx="113" type="pic" hasCustomPrompt="1"/>
+            <p:ph idx="114" type="pic" hasCustomPrompt="1"/>
           </p:nvPr>
         </p:nvPicPr>
         <p:blipFill>
@@ -14427,14 +14627,57 @@
           </a:p>
         </p:txBody>
       </p:sp>
+      <p:sp>
+        <p:nvSpPr>
+          <p:cNvPr id="3" name="Text 0"/>
+          <p:cNvSpPr txBox="1"/>
+          <p:nvPr>
+            <p:ph idx="102" type="body" hasCustomPrompt="1"/>
+          </p:nvPr>
+        </p:nvSpPr>
+        <p:spPr>
+          <a:xfrm>
+            <a:off x="457200" y="914400"/>
+            <a:ext cx="7132320" cy="274320"/>
+          </a:xfrm>
+          <a:prstGeom prst="rect">
+            <a:avLst/>
+          </a:prstGeom>
+          <a:noFill/>
+          <a:ln/>
+        </p:spPr>
+        <p:txBody>
+          <a:bodyPr wrap="square" lIns="0" tIns="0" rIns="0" bIns="0" rtlCol="0" anchor="ctr"/>
+          <a:lstStyle/>
+          <a:p>
+            <a:pPr algn="l" indent="0" marL="0">
+              <a:buNone/>
+            </a:pPr>
+            <a:r>
+              <a:rPr lang="en-US" sz="1200" dirty="0">
+                <a:solidFill>
+                  <a:srgbClr val="0F0F0F">
+                    <a:alpha val="60000"/>
+                  </a:srgbClr>
+                </a:solidFill>
+                <a:latin typeface="Inter" pitchFamily="34" charset="0"/>
+                <a:ea typeface="Inter" pitchFamily="34" charset="-122"/>
+                <a:cs typeface="Inter" pitchFamily="34" charset="-120"/>
+              </a:rPr>
+              <a:t>Eine Auswahl. Vom Trikotsatz bis zur Fanausstattung, für Vereine aus der ganzen Region.</a:t>
+            </a:r>
+            <a:endParaRPr lang="en-US" sz="1200" dirty="0"/>
+          </a:p>
+        </p:txBody>
+      </p:sp>
       <p:pic>
         <p:nvPicPr>
-          <p:cNvPr id="3" name="Image 0" descr="/var/folders/hm/sgq6d80d0vq133k7n8dc9bnw0000gn/T/maiershirts-Os5V18/ref-vereine-0-0.png">    </p:cNvPr>
+          <p:cNvPr id="4" name="Image 0" descr="/var/folders/hm/sgq6d80d0vq133k7n8dc9bnw0000gn/T/maiershirts-fAJE9f/ref-vereine-0-0.png">    </p:cNvPr>
           <p:cNvPicPr>
             <a:picLocks noChangeAspect="1"/>
           </p:cNvPicPr>
           <p:nvPr>
-            <p:ph idx="102" type="pic" hasCustomPrompt="1"/>
+            <p:ph idx="103" type="pic" hasCustomPrompt="1"/>
           </p:nvPr>
         </p:nvPicPr>
         <p:blipFill>
@@ -14455,10 +14698,10 @@
       </p:pic>
       <p:sp>
         <p:nvSpPr>
-          <p:cNvPr id="4" name="Text 0"/>
+          <p:cNvPr id="5" name="Text 0"/>
           <p:cNvSpPr txBox="1"/>
           <p:nvPr>
-            <p:ph idx="103" type="body" hasCustomPrompt="1"/>
+            <p:ph idx="104" type="body" hasCustomPrompt="1"/>
           </p:nvPr>
         </p:nvSpPr>
         <p:spPr>
@@ -14496,12 +14739,12 @@
       </p:sp>
       <p:pic>
         <p:nvPicPr>
-          <p:cNvPr id="5" name="Image 1" descr="/var/folders/hm/sgq6d80d0vq133k7n8dc9bnw0000gn/T/maiershirts-Os5V18/ref-vereine-0-1.png">    </p:cNvPr>
+          <p:cNvPr id="6" name="Image 1" descr="/var/folders/hm/sgq6d80d0vq133k7n8dc9bnw0000gn/T/maiershirts-fAJE9f/ref-vereine-0-1.png">    </p:cNvPr>
           <p:cNvPicPr>
             <a:picLocks noChangeAspect="1"/>
           </p:cNvPicPr>
           <p:nvPr>
-            <p:ph idx="104" type="pic" hasCustomPrompt="1"/>
+            <p:ph idx="105" type="pic" hasCustomPrompt="1"/>
           </p:nvPr>
         </p:nvPicPr>
         <p:blipFill>
@@ -14522,10 +14765,10 @@
       </p:pic>
       <p:sp>
         <p:nvSpPr>
-          <p:cNvPr id="6" name="Text 0"/>
+          <p:cNvPr id="7" name="Text 0"/>
           <p:cNvSpPr txBox="1"/>
           <p:nvPr>
-            <p:ph idx="105" type="body" hasCustomPrompt="1"/>
+            <p:ph idx="106" type="body" hasCustomPrompt="1"/>
           </p:nvPr>
         </p:nvSpPr>
         <p:spPr>
@@ -14563,12 +14806,12 @@
       </p:sp>
       <p:pic>
         <p:nvPicPr>
-          <p:cNvPr id="7" name="Image 2" descr="/var/folders/hm/sgq6d80d0vq133k7n8dc9bnw0000gn/T/maiershirts-Os5V18/ref-vereine-0-2.png">    </p:cNvPr>
+          <p:cNvPr id="8" name="Image 2" descr="/var/folders/hm/sgq6d80d0vq133k7n8dc9bnw0000gn/T/maiershirts-fAJE9f/ref-vereine-0-2.png">    </p:cNvPr>
           <p:cNvPicPr>
             <a:picLocks noChangeAspect="1"/>
           </p:cNvPicPr>
           <p:nvPr>
-            <p:ph idx="106" type="pic" hasCustomPrompt="1"/>
+            <p:ph idx="107" type="pic" hasCustomPrompt="1"/>
           </p:nvPr>
         </p:nvPicPr>
         <p:blipFill>
@@ -14589,10 +14832,10 @@
       </p:pic>
       <p:sp>
         <p:nvSpPr>
-          <p:cNvPr id="8" name="Text 0"/>
+          <p:cNvPr id="9" name="Text 0"/>
           <p:cNvSpPr txBox="1"/>
           <p:nvPr>
-            <p:ph idx="107" type="body" hasCustomPrompt="1"/>
+            <p:ph idx="108" type="body" hasCustomPrompt="1"/>
           </p:nvPr>
         </p:nvSpPr>
         <p:spPr>
@@ -14630,12 +14873,12 @@
       </p:sp>
       <p:pic>
         <p:nvPicPr>
-          <p:cNvPr id="9" name="Image 3" descr="/var/folders/hm/sgq6d80d0vq133k7n8dc9bnw0000gn/T/maiershirts-Os5V18/ref-vereine-0-3.png">    </p:cNvPr>
+          <p:cNvPr id="10" name="Image 3" descr="/var/folders/hm/sgq6d80d0vq133k7n8dc9bnw0000gn/T/maiershirts-fAJE9f/ref-vereine-0-3.png">    </p:cNvPr>
           <p:cNvPicPr>
             <a:picLocks noChangeAspect="1"/>
           </p:cNvPicPr>
           <p:nvPr>
-            <p:ph idx="108" type="pic" hasCustomPrompt="1"/>
+            <p:ph idx="109" type="pic" hasCustomPrompt="1"/>
           </p:nvPr>
         </p:nvPicPr>
         <p:blipFill>
@@ -14656,10 +14899,10 @@
       </p:pic>
       <p:sp>
         <p:nvSpPr>
-          <p:cNvPr id="10" name="Text 0"/>
+          <p:cNvPr id="11" name="Text 0"/>
           <p:cNvSpPr txBox="1"/>
           <p:nvPr>
-            <p:ph idx="109" type="body" hasCustomPrompt="1"/>
+            <p:ph idx="110" type="body" hasCustomPrompt="1"/>
           </p:nvPr>
         </p:nvSpPr>
         <p:spPr>
@@ -14697,12 +14940,12 @@
       </p:sp>
       <p:pic>
         <p:nvPicPr>
-          <p:cNvPr id="11" name="Image 4" descr="/var/folders/hm/sgq6d80d0vq133k7n8dc9bnw0000gn/T/maiershirts-Os5V18/ref-vereine-0-4.png">    </p:cNvPr>
+          <p:cNvPr id="12" name="Image 4" descr="/var/folders/hm/sgq6d80d0vq133k7n8dc9bnw0000gn/T/maiershirts-fAJE9f/ref-vereine-0-4.png">    </p:cNvPr>
           <p:cNvPicPr>
             <a:picLocks noChangeAspect="1"/>
           </p:cNvPicPr>
           <p:nvPr>
-            <p:ph idx="110" type="pic" hasCustomPrompt="1"/>
+            <p:ph idx="111" type="pic" hasCustomPrompt="1"/>
           </p:nvPr>
         </p:nvPicPr>
         <p:blipFill>
@@ -14723,10 +14966,10 @@
       </p:pic>
       <p:sp>
         <p:nvSpPr>
-          <p:cNvPr id="12" name="Text 0"/>
+          <p:cNvPr id="13" name="Text 0"/>
           <p:cNvSpPr txBox="1"/>
           <p:nvPr>
-            <p:ph idx="111" type="body" hasCustomPrompt="1"/>
+            <p:ph idx="112" type="body" hasCustomPrompt="1"/>
           </p:nvPr>
         </p:nvSpPr>
         <p:spPr>
@@ -14764,12 +15007,12 @@
       </p:sp>
       <p:pic>
         <p:nvPicPr>
-          <p:cNvPr id="13" name="Image 5" descr="/var/folders/hm/sgq6d80d0vq133k7n8dc9bnw0000gn/T/maiershirts-Os5V18/ref-vereine-0-5.png">    </p:cNvPr>
+          <p:cNvPr id="14" name="Image 5" descr="/var/folders/hm/sgq6d80d0vq133k7n8dc9bnw0000gn/T/maiershirts-fAJE9f/ref-vereine-0-5.png">    </p:cNvPr>
           <p:cNvPicPr>
             <a:picLocks noChangeAspect="1"/>
           </p:cNvPicPr>
           <p:nvPr>
-            <p:ph idx="112" type="pic" hasCustomPrompt="1"/>
+            <p:ph idx="113" type="pic" hasCustomPrompt="1"/>
           </p:nvPr>
         </p:nvPicPr>
         <p:blipFill>
@@ -14790,10 +15033,10 @@
       </p:pic>
       <p:sp>
         <p:nvSpPr>
-          <p:cNvPr id="14" name="Text 0"/>
+          <p:cNvPr id="15" name="Text 0"/>
           <p:cNvSpPr txBox="1"/>
           <p:nvPr>
-            <p:ph idx="113" type="body" hasCustomPrompt="1"/>
+            <p:ph idx="114" type="body" hasCustomPrompt="1"/>
           </p:nvPr>
         </p:nvSpPr>
         <p:spPr>
@@ -14831,12 +15074,12 @@
       </p:sp>
       <p:pic>
         <p:nvPicPr>
-          <p:cNvPr id="15" name="Image 6" descr="/var/folders/hm/sgq6d80d0vq133k7n8dc9bnw0000gn/T/maiershirts-Os5V18/ref-vereine-0-6.png">    </p:cNvPr>
+          <p:cNvPr id="16" name="Image 6" descr="/var/folders/hm/sgq6d80d0vq133k7n8dc9bnw0000gn/T/maiershirts-fAJE9f/ref-vereine-0-6.png">    </p:cNvPr>
           <p:cNvPicPr>
             <a:picLocks noChangeAspect="1"/>
           </p:cNvPicPr>
           <p:nvPr>
-            <p:ph idx="114" type="pic" hasCustomPrompt="1"/>
+            <p:ph idx="115" type="pic" hasCustomPrompt="1"/>
           </p:nvPr>
         </p:nvPicPr>
         <p:blipFill>
@@ -14857,10 +15100,10 @@
       </p:pic>
       <p:sp>
         <p:nvSpPr>
-          <p:cNvPr id="16" name="Text 0"/>
+          <p:cNvPr id="17" name="Text 0"/>
           <p:cNvSpPr txBox="1"/>
           <p:nvPr>
-            <p:ph idx="115" type="body" hasCustomPrompt="1"/>
+            <p:ph idx="116" type="body" hasCustomPrompt="1"/>
           </p:nvPr>
         </p:nvSpPr>
         <p:spPr>
@@ -14898,12 +15141,12 @@
       </p:sp>
       <p:pic>
         <p:nvPicPr>
-          <p:cNvPr id="17" name="Image 7" descr="/var/folders/hm/sgq6d80d0vq133k7n8dc9bnw0000gn/T/maiershirts-Os5V18/ref-vereine-0-7.png">    </p:cNvPr>
+          <p:cNvPr id="18" name="Image 7" descr="/var/folders/hm/sgq6d80d0vq133k7n8dc9bnw0000gn/T/maiershirts-fAJE9f/ref-vereine-0-7.png">    </p:cNvPr>
           <p:cNvPicPr>
             <a:picLocks noChangeAspect="1"/>
           </p:cNvPicPr>
           <p:nvPr>
-            <p:ph idx="116" type="pic" hasCustomPrompt="1"/>
+            <p:ph idx="117" type="pic" hasCustomPrompt="1"/>
           </p:nvPr>
         </p:nvPicPr>
         <p:blipFill>
@@ -14924,10 +15167,10 @@
       </p:pic>
       <p:sp>
         <p:nvSpPr>
-          <p:cNvPr id="18" name="Text 0"/>
+          <p:cNvPr id="19" name="Text 0"/>
           <p:cNvSpPr txBox="1"/>
           <p:nvPr>
-            <p:ph idx="117" type="body" hasCustomPrompt="1"/>
+            <p:ph idx="118" type="body" hasCustomPrompt="1"/>
           </p:nvPr>
         </p:nvSpPr>
         <p:spPr>
@@ -15079,7 +15322,7 @@
       </p:sp>
       <p:pic>
         <p:nvPicPr>
-          <p:cNvPr id="3" name="Image 0" descr="/var/folders/hm/sgq6d80d0vq133k7n8dc9bnw0000gn/T/maiershirts-Os5V18/ph-foto-1056x840.png">    </p:cNvPr>
+          <p:cNvPr id="3" name="Image 0" descr="/var/folders/hm/sgq6d80d0vq133k7n8dc9bnw0000gn/T/maiershirts-fAJE9f/ph-foto-1056x840.png">    </p:cNvPr>
           <p:cNvPicPr>
             <a:picLocks noChangeAspect="1"/>
           </p:cNvPicPr>
@@ -15891,7 +16134,7 @@
       </p:sp>
       <p:pic>
         <p:nvPicPr>
-          <p:cNvPr id="4" name="Image 0" descr="/var/folders/hm/sgq6d80d0vq133k7n8dc9bnw0000gn/T/maiershirts-Os5V18/ph-portrait-252x252.png">    </p:cNvPr>
+          <p:cNvPr id="4" name="Image 0" descr="/var/folders/hm/sgq6d80d0vq133k7n8dc9bnw0000gn/T/maiershirts-fAJE9f/ph-portrait-252x252.png">    </p:cNvPr>
           <p:cNvPicPr>
             <a:picLocks noChangeAspect="1"/>
           </p:cNvPicPr>
@@ -16100,7 +16343,7 @@
       </p:sp>
       <p:pic>
         <p:nvPicPr>
-          <p:cNvPr id="9" name="Image 1" descr="/var/folders/hm/sgq6d80d0vq133k7n8dc9bnw0000gn/T/maiershirts-Os5V18/ph-qr-240x240.png">    </p:cNvPr>
+          <p:cNvPr id="9" name="Image 1" descr="/var/folders/hm/sgq6d80d0vq133k7n8dc9bnw0000gn/T/maiershirts-fAJE9f/ph-qr-240x240.png">    </p:cNvPr>
           <p:cNvPicPr>
             <a:picLocks noChangeAspect="1"/>
           </p:cNvPicPr>
@@ -17516,7 +17759,7 @@
       </p:grpSpPr>
       <p:pic>
         <p:nvPicPr>
-          <p:cNvPr id="2" name="Image 0" descr="/var/folders/hm/sgq6d80d0vq133k7n8dc9bnw0000gn/T/maiershirts-Os5V18/ph-foto-2400x1008.png">    </p:cNvPr>
+          <p:cNvPr id="2" name="Image 0" descr="/var/folders/hm/sgq6d80d0vq133k7n8dc9bnw0000gn/T/maiershirts-fAJE9f/ph-foto-2400x1008.png">    </p:cNvPr>
           <p:cNvPicPr>
             <a:picLocks noChangeAspect="1"/>
           </p:cNvPicPr>
@@ -18674,7 +18917,7 @@
       </p:sp>
       <p:pic>
         <p:nvPicPr>
-          <p:cNvPr id="3" name="Image 0" descr="/var/folders/hm/sgq6d80d0vq133k7n8dc9bnw0000gn/T/maiershirts-Os5V18/ph-foto-696x456.png">    </p:cNvPr>
+          <p:cNvPr id="3" name="Image 0" descr="/var/folders/hm/sgq6d80d0vq133k7n8dc9bnw0000gn/T/maiershirts-fAJE9f/ph-foto-696x456.png">    </p:cNvPr>
           <p:cNvPicPr>
             <a:picLocks noChangeAspect="1"/>
           </p:cNvPicPr>
@@ -18844,7 +19087,7 @@
       </p:sp>
       <p:pic>
         <p:nvPicPr>
-          <p:cNvPr id="7" name="Image 1" descr="/var/folders/hm/sgq6d80d0vq133k7n8dc9bnw0000gn/T/maiershirts-Os5V18/ph-foto-696x456.png">    </p:cNvPr>
+          <p:cNvPr id="7" name="Image 1" descr="/var/folders/hm/sgq6d80d0vq133k7n8dc9bnw0000gn/T/maiershirts-fAJE9f/ph-foto-696x456.png">    </p:cNvPr>
           <p:cNvPicPr>
             <a:picLocks noChangeAspect="1"/>
           </p:cNvPicPr>
@@ -19014,7 +19257,7 @@
       </p:sp>
       <p:pic>
         <p:nvPicPr>
-          <p:cNvPr id="11" name="Image 2" descr="/var/folders/hm/sgq6d80d0vq133k7n8dc9bnw0000gn/T/maiershirts-Os5V18/ph-foto-696x456.png">    </p:cNvPr>
+          <p:cNvPr id="11" name="Image 2" descr="/var/folders/hm/sgq6d80d0vq133k7n8dc9bnw0000gn/T/maiershirts-fAJE9f/ph-foto-696x456.png">    </p:cNvPr>
           <p:cNvPicPr>
             <a:picLocks noChangeAspect="1"/>
           </p:cNvPicPr>

--- a/presentation/dist/Maiershirts_Master.pptx
+++ b/presentation/dist/Maiershirts_Master.pptx
@@ -22,9 +22,10 @@
     <p:sldId id="270" r:id="rId16"/>
     <p:sldId id="271" r:id="rId17"/>
     <p:sldId id="272" r:id="rId18"/>
+    <p:sldId id="273" r:id="rId19"/>
   </p:sldIdLst>
   <p:notesMasterIdLst>
-    <p:notesMasterId r:id="rId19"/>
+    <p:notesMasterId r:id="rId20"/>
   </p:notesMasterIdLst>
   <p:sldSz cx="9144000" cy="5143500"/>
   <p:notesSz cx="5143500" cy="9144000"/>
@@ -854,7 +855,7 @@
           <a:p>
             <a:r>
               <a:rPr lang="en-US" dirty="0"/>
-              <a:t>Layout MS_ANGEBOT: Tabelle als Zusammenfassung (nativ, in PowerPoint editierbar), Konditionen als Platzhalter. Das verbindliche Angebot kommt aus Lexware.</a:t>
+              <a:t>Layout MS_PREISSTAFFEL: vier Stufen Menge gegen Stückpreis, darunter Hinweise.</a:t>
             </a:r>
             <a:endParaRPr lang="en-US" dirty="0"/>
           </a:p>
@@ -942,7 +943,7 @@
           <a:p>
             <a:r>
               <a:rPr lang="en-US" dirty="0"/>
-              <a:t>Layout MS_REFERENZEN: 12 Logo-Felder. 12 Logo(s) aus assets/referenzen/unternehmen eingesetzt (Folie 1 von 2). Logo per Klick auf das Platzhalterbild einsetzen; bei Beschnitt: Bildformat → Zuschneiden → Anpassen.</a:t>
+              <a:t>Layout MS_ANGEBOT: Tabelle als Zusammenfassung (nativ, in PowerPoint editierbar), Konditionen als Platzhalter. Das verbindliche Angebot kommt aus Lexware.</a:t>
             </a:r>
             <a:endParaRPr lang="en-US" dirty="0"/>
           </a:p>
@@ -1030,7 +1031,7 @@
           <a:p>
             <a:r>
               <a:rPr lang="en-US" dirty="0"/>
-              <a:t>Layout MS_REFERENZEN: 12 Logo-Felder. 1 Logo(s) aus assets/referenzen/unternehmen eingesetzt (Folie 2 von 2). Logo per Klick auf das Platzhalterbild einsetzen; bei Beschnitt: Bildformat → Zuschneiden → Anpassen.</a:t>
+              <a:t>Layout MS_REFERENZEN: 12 Logo-Felder. 12 Logo(s) aus assets/referenzen/unternehmen eingesetzt (Folie 1 von 2). Logo per Klick auf das Platzhalterbild einsetzen; bei Beschnitt: Bildformat → Zuschneiden → Anpassen.</a:t>
             </a:r>
             <a:endParaRPr lang="en-US" dirty="0"/>
           </a:p>
@@ -1118,7 +1119,7 @@
           <a:p>
             <a:r>
               <a:rPr lang="en-US" dirty="0"/>
-              <a:t>Layout MS_REFERENZEN_WAPPEN: 8 Logo-Felder. 8 Logo(s) aus assets/referenzen/vereine eingesetzt (Folie 1 von 1). Logo per Klick auf das Platzhalterbild einsetzen; bei Beschnitt: Bildformat → Zuschneiden → Anpassen.</a:t>
+              <a:t>Layout MS_REFERENZEN: 12 Logo-Felder. 1 Logo(s) aus assets/referenzen/unternehmen eingesetzt (Folie 2 von 2). Logo per Klick auf das Platzhalterbild einsetzen; bei Beschnitt: Bildformat → Zuschneiden → Anpassen.</a:t>
             </a:r>
             <a:endParaRPr lang="en-US" dirty="0"/>
           </a:p>
@@ -1206,7 +1207,7 @@
           <a:p>
             <a:r>
               <a:rPr lang="en-US" dirty="0"/>
-              <a:t>Layout MS_BILD: Foto links, Textkörper rechts.</a:t>
+              <a:t>Layout MS_REFERENZEN_WAPPEN: 8 Logo-Felder. 8 Logo(s) aus assets/referenzen/vereine eingesetzt (Folie 1 von 1). Logo per Klick auf das Platzhalterbild einsetzen; bei Beschnitt: Bildformat → Zuschneiden → Anpassen.</a:t>
             </a:r>
             <a:endParaRPr lang="en-US" dirty="0"/>
           </a:p>
@@ -1294,7 +1295,7 @@
           <a:p>
             <a:r>
               <a:rPr lang="en-US" dirty="0"/>
-              <a:t>Layout MS_FREI mit nativem Säulendiagramm links und Kernaussage rechts.</a:t>
+              <a:t>Layout MS_BILD: Foto links, Textkörper rechts.</a:t>
             </a:r>
             <a:endParaRPr lang="en-US" dirty="0"/>
           </a:p>
@@ -1382,7 +1383,7 @@
           <a:p>
             <a:r>
               <a:rPr lang="en-US" dirty="0"/>
-              <a:t>Layout MS_INHALT: Titel und Textkörper mit Aufzählung.</a:t>
+              <a:t>Layout MS_FREI mit nativem Säulendiagramm links und Kernaussage rechts.</a:t>
             </a:r>
             <a:endParaRPr lang="en-US" dirty="0"/>
           </a:p>
@@ -1470,7 +1471,7 @@
           <a:p>
             <a:r>
               <a:rPr lang="en-US" dirty="0"/>
-              <a:t>Layout MS_ABSCHLUSS: Handlungsaufforderung, Ansprechpartner mit Foto, nächster Schritt mit Termin, QR-Code. Kontaktdaten sind Platzhalter.</a:t>
+              <a:t>Layout MS_INHALT: Titel und Textkörper mit Aufzählung.</a:t>
             </a:r>
             <a:endParaRPr lang="en-US" dirty="0"/>
           </a:p>
@@ -1494,6 +1495,94 @@
             <a:fld id="{F7021451-1387-4CA6-816F-3879F97B5CBC}" type="slidenum">
               <a:rPr lang="en-US"/>
               <a:t>17</a:t>
+            </a:fld>
+            <a:endParaRPr lang="en-US"/>
+          </a:p>
+        </p:txBody>
+      </p:sp>
+    </p:spTree>
+    <p:extLst>
+      <p:ext uri="{BB962C8B-B14F-4D97-AF65-F5344CB8AC3E}">
+        <p14:creationId xmlns:p14="http://schemas.microsoft.com/office/powerpoint/2010/main" val="1024086991"/>
+      </p:ext>
+    </p:extLst>
+  </p:cSld>
+  <p:clrMapOvr>
+    <a:masterClrMapping/>
+  </p:clrMapOvr>
+</p:notes>
+</file>
+
+<file path=ppt/notesSlides/notesSlide18.xml><?xml version="1.0" encoding="utf-8"?>
+<p:notes xmlns:a="http://schemas.openxmlformats.org/drawingml/2006/main" xmlns:r="http://schemas.openxmlformats.org/officeDocument/2006/relationships" xmlns:p="http://schemas.openxmlformats.org/presentationml/2006/main">
+  <p:cSld>
+    <p:spTree>
+      <p:nvGrpSpPr>
+        <p:cNvPr id="1" name=""/>
+        <p:cNvGrpSpPr/>
+        <p:nvPr/>
+      </p:nvGrpSpPr>
+      <p:grpSpPr>
+        <a:xfrm>
+          <a:off x="0" y="0"/>
+          <a:ext cx="0" cy="0"/>
+          <a:chOff x="0" y="0"/>
+          <a:chExt cx="0" cy="0"/>
+        </a:xfrm>
+      </p:grpSpPr>
+      <p:sp>
+        <p:nvSpPr>
+          <p:cNvPr id="2" name="Slide Image Placeholder 1"/>
+          <p:cNvSpPr>
+            <a:spLocks noGrp="1" noRot="1" noChangeAspect="1"/>
+          </p:cNvSpPr>
+          <p:nvPr>
+            <p:ph type="sldImg"/>
+          </p:nvPr>
+        </p:nvSpPr>
+        <p:spPr/>
+      </p:sp>
+      <p:sp>
+        <p:nvSpPr>
+          <p:cNvPr id="3" name="Notes Placeholder 2"/>
+          <p:cNvSpPr>
+            <a:spLocks noGrp="1"/>
+          </p:cNvSpPr>
+          <p:nvPr>
+            <p:ph type="body" idx="1"/>
+          </p:nvPr>
+        </p:nvSpPr>
+        <p:spPr/>
+        <p:txBody>
+          <a:bodyPr/>
+          <a:lstStyle/>
+          <a:p>
+            <a:r>
+              <a:rPr lang="en-US" dirty="0"/>
+              <a:t>Layout MS_ABSCHLUSS: Handlungsaufforderung, Ansprechpartner mit Foto, nächster Schritt mit Termin, QR-Code. Kontaktdaten sind Platzhalter.</a:t>
+            </a:r>
+            <a:endParaRPr lang="en-US" dirty="0"/>
+          </a:p>
+        </p:txBody>
+      </p:sp>
+      <p:sp>
+        <p:nvSpPr>
+          <p:cNvPr id="4" name="Slide Number Placeholder 3"/>
+          <p:cNvSpPr>
+            <a:spLocks noGrp="1"/>
+          </p:cNvSpPr>
+          <p:nvPr>
+            <p:ph type="sldNum" sz="quarter" idx="10"/>
+          </p:nvPr>
+        </p:nvSpPr>
+        <p:spPr/>
+        <p:txBody>
+          <a:bodyPr/>
+          <a:lstStyle/>
+          <a:p>
+            <a:fld id="{F7021451-1387-4CA6-816F-3879F97B5CBC}" type="slidenum">
+              <a:rPr lang="en-US"/>
+              <a:t>18</a:t>
             </a:fld>
             <a:endParaRPr lang="en-US"/>
           </a:p>
@@ -2086,7 +2175,7 @@
           <a:p>
             <a:r>
               <a:rPr lang="en-US" dirty="0"/>
-              <a:t>Layout MS_TEXTIL: drei Rohlinge mit Foto, Name, Details und Preis ab. Beispielwerte.</a:t>
+              <a:t>Layout MS_VERFAHREN: vier Verfahren mit Einsatzgebiet und drei Kennwerten, darunter die Entscheidungshilfe. Inhalte aus dem Veredelungs-Leitfaden (maiershirts-veredelung-leitfaden/leitfaden.html). Handmuster-Karte „Fühl den Unterschied“ zum Termin mitnehmen.</a:t>
             </a:r>
             <a:endParaRPr lang="en-US" dirty="0"/>
           </a:p>
@@ -2174,7 +2263,7 @@
           <a:p>
             <a:r>
               <a:rPr lang="en-US" dirty="0"/>
-              <a:t>Layout MS_PREISSTAFFEL: vier Stufen Menge gegen Stückpreis, darunter Hinweise.</a:t>
+              <a:t>Layout MS_TEXTIL: drei Rohlinge mit Foto, Name, Details und Preis ab. Beispielwerte.</a:t>
             </a:r>
             <a:endParaRPr lang="en-US" dirty="0"/>
           </a:p>
@@ -3798,6 +3887,2028 @@
 
 <file path=ppt/slideLayouts/slideLayout12.xml><?xml version="1.0" encoding="utf-8"?>
 <p:sldLayout xmlns:a="http://schemas.openxmlformats.org/drawingml/2006/main" xmlns:r="http://schemas.openxmlformats.org/officeDocument/2006/relationships" xmlns:p="http://schemas.openxmlformats.org/presentationml/2006/main" preserve="1">
+  <p:cSld name="MS_VERFAHREN">
+    <p:bg>
+      <p:bgPr>
+        <a:blipFill dpi="0" rotWithShape="1">
+          <a:blip r:embed="rId2">
+            <a:lum/>
+          </a:blip>
+          <a:srcRect/>
+          <a:stretch>
+            <a:fillRect/>
+          </a:stretch>
+        </a:blipFill>
+        <a:effectLst/>
+      </p:bgPr>
+    </p:bg>
+    <p:spTree>
+      <p:nvGrpSpPr>
+        <p:cNvPr id="1" name=""/>
+        <p:cNvGrpSpPr/>
+        <p:nvPr/>
+      </p:nvGrpSpPr>
+      <p:grpSpPr>
+        <a:xfrm>
+          <a:off x="0" y="0"/>
+          <a:ext cx="0" cy="0"/>
+          <a:chOff x="0" y="0"/>
+          <a:chExt cx="0" cy="0"/>
+        </a:xfrm>
+      </p:grpSpPr>
+      <p:pic>
+        <p:nvPicPr>
+          <p:cNvPr id="2" name="Image 0" descr="/Users/stefanmaier/Documents/GitHub/lexware-angebot-tool/presentation/assets/logo-dark.png">    </p:cNvPr>
+          <p:cNvPicPr>
+            <a:picLocks noChangeAspect="1"/>
+          </p:cNvPicPr>
+          <p:nvPr/>
+        </p:nvPicPr>
+        <p:blipFill>
+          <a:blip r:embed="rId1"/>
+          <a:srcRect l="0" r="0" t="0" b="0"/>
+          <a:stretch/>
+        </p:blipFill>
+        <p:spPr>
+          <a:xfrm>
+            <a:off x="7818120" y="365760"/>
+            <a:ext cx="868680" cy="457200"/>
+          </a:xfrm>
+          <a:prstGeom prst="rect">
+            <a:avLst/>
+          </a:prstGeom>
+        </p:spPr>
+      </p:pic>
+      <p:sp>
+        <p:nvSpPr>
+          <p:cNvPr id="3" name="Text 0"/>
+          <p:cNvSpPr/>
+          <p:nvPr>
+            <p:ph idx="101" type="title" hasCustomPrompt="1"/>
+          </p:nvPr>
+        </p:nvSpPr>
+        <p:spPr>
+          <a:xfrm>
+            <a:off x="457200" y="320040"/>
+            <a:ext cx="7132320" cy="640080"/>
+          </a:xfrm>
+          <a:prstGeom prst="rect">
+            <a:avLst/>
+          </a:prstGeom>
+          <a:noFill/>
+          <a:ln/>
+        </p:spPr>
+        <p:txBody>
+          <a:bodyPr wrap="square" rtlCol="0"/>
+          <a:lstStyle>
+            <a:lvl1pPr algn="l" indent="0" marL="0">
+              <a:buNone/>
+              <a:defRPr lang="en-US" sz="2800" b="1" dirty="0">
+                <a:solidFill>
+                  <a:srgbClr val="0F0F0F"/>
+                </a:solidFill>
+                <a:latin typeface="Inter" pitchFamily="34" charset="0"/>
+                <a:ea typeface="Inter" pitchFamily="34" charset="-122"/>
+                <a:cs typeface="Inter" pitchFamily="34" charset="-120"/>
+              </a:defRPr>
+            </a:lvl1pPr>
+          </a:lstStyle>
+          <a:p>
+            <a:pPr algn="l" indent="0" marL="0">
+              <a:buNone/>
+            </a:pPr>
+            <a:r>
+              <a:rPr lang="en-US" sz="2800" b="1" dirty="0">
+                <a:solidFill>
+                  <a:srgbClr val="0F0F0F"/>
+                </a:solidFill>
+                <a:latin typeface="Inter" pitchFamily="34" charset="0"/>
+                <a:ea typeface="Inter" pitchFamily="34" charset="-122"/>
+                <a:cs typeface="Inter" pitchFamily="34" charset="-120"/>
+              </a:rPr>
+              <a:t>Folientitel</a:t>
+            </a:r>
+            <a:endParaRPr lang="en-US" sz="2800" dirty="0"/>
+          </a:p>
+        </p:txBody>
+      </p:sp>
+      <p:sp>
+        <p:nvSpPr>
+          <p:cNvPr id="4" name="Text 0"/>
+          <p:cNvSpPr/>
+          <p:nvPr>
+            <p:ph idx="102" type="body" hasCustomPrompt="1"/>
+          </p:nvPr>
+        </p:nvSpPr>
+        <p:spPr>
+          <a:xfrm>
+            <a:off x="457200" y="914400"/>
+            <a:ext cx="7132320" cy="274320"/>
+          </a:xfrm>
+          <a:prstGeom prst="rect">
+            <a:avLst/>
+          </a:prstGeom>
+          <a:noFill/>
+          <a:ln/>
+        </p:spPr>
+        <p:txBody>
+          <a:bodyPr wrap="square" rtlCol="0"/>
+          <a:lstStyle>
+            <a:lvl1pPr algn="l" indent="0" marL="0">
+              <a:buNone/>
+              <a:defRPr lang="en-US" sz="1200" dirty="0">
+                <a:solidFill>
+                  <a:srgbClr val="0F0F0F">
+                    <a:alpha val="60000"/>
+                  </a:srgbClr>
+                </a:solidFill>
+                <a:latin typeface="Inter" pitchFamily="34" charset="0"/>
+                <a:ea typeface="Inter" pitchFamily="34" charset="-122"/>
+                <a:cs typeface="Inter" pitchFamily="34" charset="-120"/>
+              </a:defRPr>
+            </a:lvl1pPr>
+          </a:lstStyle>
+          <a:p>
+            <a:pPr algn="l" indent="0" marL="0">
+              <a:buNone/>
+            </a:pPr>
+            <a:r>
+              <a:rPr lang="en-US" sz="1200" dirty="0">
+                <a:solidFill>
+                  <a:srgbClr val="0F0F0F">
+                    <a:alpha val="60000"/>
+                  </a:srgbClr>
+                </a:solidFill>
+                <a:latin typeface="Inter" pitchFamily="34" charset="0"/>
+                <a:ea typeface="Inter" pitchFamily="34" charset="-122"/>
+                <a:cs typeface="Inter" pitchFamily="34" charset="-120"/>
+              </a:rPr>
+              <a:t>Welche Technik zu welchem Projekt passt</a:t>
+            </a:r>
+            <a:endParaRPr lang="en-US" sz="1200" dirty="0"/>
+          </a:p>
+        </p:txBody>
+      </p:sp>
+      <p:sp>
+        <p:nvSpPr>
+          <p:cNvPr id="5" name="Text 0"/>
+          <p:cNvSpPr/>
+          <p:nvPr/>
+        </p:nvSpPr>
+        <p:spPr>
+          <a:xfrm>
+            <a:off x="621792" y="1371600"/>
+            <a:ext cx="1645920" cy="228600"/>
+          </a:xfrm>
+          <a:prstGeom prst="rect">
+            <a:avLst/>
+          </a:prstGeom>
+          <a:noFill/>
+          <a:ln/>
+        </p:spPr>
+        <p:txBody>
+          <a:bodyPr wrap="square" lIns="0" tIns="0" rIns="0" bIns="0" rtlCol="0" anchor="ctr"/>
+          <a:lstStyle/>
+          <a:p>
+            <a:pPr indent="0" marL="0">
+              <a:buNone/>
+            </a:pPr>
+            <a:r>
+              <a:rPr lang="en-US" sz="1000" b="1" spc="100" kern="0" dirty="0">
+                <a:solidFill>
+                  <a:srgbClr val="677E5B"/>
+                </a:solidFill>
+                <a:latin typeface="Inter" pitchFamily="34" charset="0"/>
+                <a:ea typeface="Inter" pitchFamily="34" charset="-122"/>
+                <a:cs typeface="Inter" pitchFamily="34" charset="-120"/>
+              </a:rPr>
+              <a:t>01</a:t>
+            </a:r>
+            <a:endParaRPr lang="en-US" sz="1000" dirty="0"/>
+          </a:p>
+        </p:txBody>
+      </p:sp>
+      <p:sp>
+        <p:nvSpPr>
+          <p:cNvPr id="6" name="Text 1"/>
+          <p:cNvSpPr/>
+          <p:nvPr>
+            <p:ph idx="104" type="body" hasCustomPrompt="1"/>
+          </p:nvPr>
+        </p:nvSpPr>
+        <p:spPr>
+          <a:xfrm>
+            <a:off x="621792" y="1600200"/>
+            <a:ext cx="1645920" cy="320040"/>
+          </a:xfrm>
+          <a:prstGeom prst="rect">
+            <a:avLst/>
+          </a:prstGeom>
+          <a:noFill/>
+          <a:ln/>
+        </p:spPr>
+        <p:txBody>
+          <a:bodyPr wrap="square" rtlCol="0"/>
+          <a:lstStyle>
+            <a:lvl1pPr algn="l" indent="0" marL="0">
+              <a:buNone/>
+              <a:defRPr lang="en-US" sz="1600" b="1" dirty="0">
+                <a:solidFill>
+                  <a:srgbClr val="0F0F0F"/>
+                </a:solidFill>
+                <a:latin typeface="Inter" pitchFamily="34" charset="0"/>
+                <a:ea typeface="Inter" pitchFamily="34" charset="-122"/>
+                <a:cs typeface="Inter" pitchFamily="34" charset="-120"/>
+              </a:defRPr>
+            </a:lvl1pPr>
+          </a:lstStyle>
+          <a:p>
+            <a:pPr algn="l" indent="0" marL="0">
+              <a:buNone/>
+            </a:pPr>
+            <a:r>
+              <a:rPr lang="en-US" sz="1600" b="1" dirty="0">
+                <a:solidFill>
+                  <a:srgbClr val="0F0F0F"/>
+                </a:solidFill>
+                <a:latin typeface="Inter" pitchFamily="34" charset="0"/>
+                <a:ea typeface="Inter" pitchFamily="34" charset="-122"/>
+                <a:cs typeface="Inter" pitchFamily="34" charset="-120"/>
+              </a:rPr>
+              <a:t>Verfahren</a:t>
+            </a:r>
+            <a:endParaRPr lang="en-US" sz="1600" dirty="0"/>
+          </a:p>
+        </p:txBody>
+      </p:sp>
+      <p:sp>
+        <p:nvSpPr>
+          <p:cNvPr id="7" name="Text 1"/>
+          <p:cNvSpPr/>
+          <p:nvPr>
+            <p:ph idx="105" type="body" hasCustomPrompt="1"/>
+          </p:nvPr>
+        </p:nvSpPr>
+        <p:spPr>
+          <a:xfrm>
+            <a:off x="621792" y="1938528"/>
+            <a:ext cx="1645920" cy="1097280"/>
+          </a:xfrm>
+          <a:prstGeom prst="rect">
+            <a:avLst/>
+          </a:prstGeom>
+          <a:noFill/>
+          <a:ln/>
+        </p:spPr>
+        <p:txBody>
+          <a:bodyPr wrap="square" rtlCol="0"/>
+          <a:lstStyle>
+            <a:lvl1pPr algn="l" indent="0" marL="0">
+              <a:buNone/>
+              <a:defRPr lang="en-US" sz="1200" dirty="0">
+                <a:solidFill>
+                  <a:srgbClr val="0F0F0F"/>
+                </a:solidFill>
+                <a:latin typeface="Inter" pitchFamily="34" charset="0"/>
+                <a:ea typeface="Inter" pitchFamily="34" charset="-122"/>
+                <a:cs typeface="Inter" pitchFamily="34" charset="-120"/>
+              </a:defRPr>
+            </a:lvl1pPr>
+          </a:lstStyle>
+          <a:p>
+            <a:pPr algn="l" indent="0" marL="0">
+              <a:buNone/>
+            </a:pPr>
+            <a:r>
+              <a:rPr lang="en-US" sz="1200" dirty="0">
+                <a:solidFill>
+                  <a:srgbClr val="0F0F0F"/>
+                </a:solidFill>
+                <a:latin typeface="Inter" pitchFamily="34" charset="0"/>
+                <a:ea typeface="Inter" pitchFamily="34" charset="-122"/>
+                <a:cs typeface="Inter" pitchFamily="34" charset="-120"/>
+              </a:rPr>
+              <a:t>Ideal für …</a:t>
+            </a:r>
+            <a:endParaRPr lang="en-US" sz="1200" dirty="0"/>
+          </a:p>
+        </p:txBody>
+      </p:sp>
+      <p:sp>
+        <p:nvSpPr>
+          <p:cNvPr id="8" name="Text 1"/>
+          <p:cNvSpPr/>
+          <p:nvPr/>
+        </p:nvSpPr>
+        <p:spPr>
+          <a:xfrm>
+            <a:off x="621792" y="3090672"/>
+            <a:ext cx="640080" cy="310896"/>
+          </a:xfrm>
+          <a:prstGeom prst="rect">
+            <a:avLst/>
+          </a:prstGeom>
+          <a:noFill/>
+          <a:ln/>
+        </p:spPr>
+        <p:txBody>
+          <a:bodyPr wrap="square" lIns="0" tIns="0" rIns="0" bIns="0" rtlCol="0" anchor="ctr"/>
+          <a:lstStyle/>
+          <a:p>
+            <a:pPr indent="0" marL="0">
+              <a:buNone/>
+            </a:pPr>
+            <a:r>
+              <a:rPr lang="en-US" sz="1000" dirty="0">
+                <a:solidFill>
+                  <a:srgbClr val="0F0F0F">
+                    <a:alpha val="60000"/>
+                  </a:srgbClr>
+                </a:solidFill>
+                <a:latin typeface="Inter" pitchFamily="34" charset="0"/>
+                <a:ea typeface="Inter" pitchFamily="34" charset="-122"/>
+                <a:cs typeface="Inter" pitchFamily="34" charset="-120"/>
+              </a:rPr>
+              <a:t>Wäsche</a:t>
+            </a:r>
+            <a:endParaRPr lang="en-US" sz="1000" dirty="0"/>
+          </a:p>
+        </p:txBody>
+      </p:sp>
+      <p:sp>
+        <p:nvSpPr>
+          <p:cNvPr id="9" name="Text 2"/>
+          <p:cNvSpPr/>
+          <p:nvPr>
+            <p:ph idx="107" type="body" hasCustomPrompt="1"/>
+          </p:nvPr>
+        </p:nvSpPr>
+        <p:spPr>
+          <a:xfrm>
+            <a:off x="1261872" y="3090672"/>
+            <a:ext cx="1005840" cy="310896"/>
+          </a:xfrm>
+          <a:prstGeom prst="rect">
+            <a:avLst/>
+          </a:prstGeom>
+          <a:noFill/>
+          <a:ln/>
+        </p:spPr>
+        <p:txBody>
+          <a:bodyPr wrap="square" rtlCol="0"/>
+          <a:lstStyle>
+            <a:lvl1pPr algn="l" indent="0" marL="0">
+              <a:buNone/>
+              <a:defRPr lang="en-US" sz="1200" b="1" dirty="0">
+                <a:solidFill>
+                  <a:srgbClr val="0F0F0F"/>
+                </a:solidFill>
+                <a:latin typeface="Inter" pitchFamily="34" charset="0"/>
+                <a:ea typeface="Inter" pitchFamily="34" charset="-122"/>
+                <a:cs typeface="Inter" pitchFamily="34" charset="-120"/>
+              </a:defRPr>
+            </a:lvl1pPr>
+          </a:lstStyle>
+          <a:p>
+            <a:pPr algn="l" indent="0" marL="0">
+              <a:buNone/>
+            </a:pPr>
+            <a:r>
+              <a:rPr lang="en-US" sz="1200" b="1" dirty="0">
+                <a:solidFill>
+                  <a:srgbClr val="0F0F0F"/>
+                </a:solidFill>
+                <a:latin typeface="Inter" pitchFamily="34" charset="0"/>
+                <a:ea typeface="Inter" pitchFamily="34" charset="-122"/>
+                <a:cs typeface="Inter" pitchFamily="34" charset="-120"/>
+              </a:rPr>
+              <a:t>…</a:t>
+            </a:r>
+            <a:endParaRPr lang="en-US" sz="1200" dirty="0"/>
+          </a:p>
+        </p:txBody>
+      </p:sp>
+      <p:sp>
+        <p:nvSpPr>
+          <p:cNvPr id="10" name="Text 2"/>
+          <p:cNvSpPr/>
+          <p:nvPr/>
+        </p:nvSpPr>
+        <p:spPr>
+          <a:xfrm>
+            <a:off x="621792" y="3419856"/>
+            <a:ext cx="640080" cy="310896"/>
+          </a:xfrm>
+          <a:prstGeom prst="rect">
+            <a:avLst/>
+          </a:prstGeom>
+          <a:noFill/>
+          <a:ln/>
+        </p:spPr>
+        <p:txBody>
+          <a:bodyPr wrap="square" lIns="0" tIns="0" rIns="0" bIns="0" rtlCol="0" anchor="ctr"/>
+          <a:lstStyle/>
+          <a:p>
+            <a:pPr indent="0" marL="0">
+              <a:buNone/>
+            </a:pPr>
+            <a:r>
+              <a:rPr lang="en-US" sz="1000" dirty="0">
+                <a:solidFill>
+                  <a:srgbClr val="0F0F0F">
+                    <a:alpha val="60000"/>
+                  </a:srgbClr>
+                </a:solidFill>
+                <a:latin typeface="Inter" pitchFamily="34" charset="0"/>
+                <a:ea typeface="Inter" pitchFamily="34" charset="-122"/>
+                <a:cs typeface="Inter" pitchFamily="34" charset="-120"/>
+              </a:rPr>
+              <a:t>Auflage</a:t>
+            </a:r>
+            <a:endParaRPr lang="en-US" sz="1000" dirty="0"/>
+          </a:p>
+        </p:txBody>
+      </p:sp>
+      <p:sp>
+        <p:nvSpPr>
+          <p:cNvPr id="11" name="Text 3"/>
+          <p:cNvSpPr/>
+          <p:nvPr>
+            <p:ph idx="109" type="body" hasCustomPrompt="1"/>
+          </p:nvPr>
+        </p:nvSpPr>
+        <p:spPr>
+          <a:xfrm>
+            <a:off x="1261872" y="3419856"/>
+            <a:ext cx="1005840" cy="310896"/>
+          </a:xfrm>
+          <a:prstGeom prst="rect">
+            <a:avLst/>
+          </a:prstGeom>
+          <a:noFill/>
+          <a:ln/>
+        </p:spPr>
+        <p:txBody>
+          <a:bodyPr wrap="square" rtlCol="0"/>
+          <a:lstStyle>
+            <a:lvl1pPr algn="l" indent="0" marL="0">
+              <a:buNone/>
+              <a:defRPr lang="en-US" sz="1200" b="1" dirty="0">
+                <a:solidFill>
+                  <a:srgbClr val="0F0F0F"/>
+                </a:solidFill>
+                <a:latin typeface="Inter" pitchFamily="34" charset="0"/>
+                <a:ea typeface="Inter" pitchFamily="34" charset="-122"/>
+                <a:cs typeface="Inter" pitchFamily="34" charset="-120"/>
+              </a:defRPr>
+            </a:lvl1pPr>
+          </a:lstStyle>
+          <a:p>
+            <a:pPr algn="l" indent="0" marL="0">
+              <a:buNone/>
+            </a:pPr>
+            <a:r>
+              <a:rPr lang="en-US" sz="1200" b="1" dirty="0">
+                <a:solidFill>
+                  <a:srgbClr val="0F0F0F"/>
+                </a:solidFill>
+                <a:latin typeface="Inter" pitchFamily="34" charset="0"/>
+                <a:ea typeface="Inter" pitchFamily="34" charset="-122"/>
+                <a:cs typeface="Inter" pitchFamily="34" charset="-120"/>
+              </a:rPr>
+              <a:t>…</a:t>
+            </a:r>
+            <a:endParaRPr lang="en-US" sz="1200" dirty="0"/>
+          </a:p>
+        </p:txBody>
+      </p:sp>
+      <p:sp>
+        <p:nvSpPr>
+          <p:cNvPr id="12" name="Text 3"/>
+          <p:cNvSpPr/>
+          <p:nvPr/>
+        </p:nvSpPr>
+        <p:spPr>
+          <a:xfrm>
+            <a:off x="621792" y="3749040"/>
+            <a:ext cx="640080" cy="310896"/>
+          </a:xfrm>
+          <a:prstGeom prst="rect">
+            <a:avLst/>
+          </a:prstGeom>
+          <a:noFill/>
+          <a:ln/>
+        </p:spPr>
+        <p:txBody>
+          <a:bodyPr wrap="square" lIns="0" tIns="0" rIns="0" bIns="0" rtlCol="0" anchor="ctr"/>
+          <a:lstStyle/>
+          <a:p>
+            <a:pPr indent="0" marL="0">
+              <a:buNone/>
+            </a:pPr>
+            <a:r>
+              <a:rPr lang="en-US" sz="1000" dirty="0">
+                <a:solidFill>
+                  <a:srgbClr val="0F0F0F">
+                    <a:alpha val="60000"/>
+                  </a:srgbClr>
+                </a:solidFill>
+                <a:latin typeface="Inter" pitchFamily="34" charset="0"/>
+                <a:ea typeface="Inter" pitchFamily="34" charset="-122"/>
+                <a:cs typeface="Inter" pitchFamily="34" charset="-120"/>
+              </a:rPr>
+              <a:t>Farbe</a:t>
+            </a:r>
+            <a:endParaRPr lang="en-US" sz="1000" dirty="0"/>
+          </a:p>
+        </p:txBody>
+      </p:sp>
+      <p:sp>
+        <p:nvSpPr>
+          <p:cNvPr id="13" name="Text 4"/>
+          <p:cNvSpPr/>
+          <p:nvPr>
+            <p:ph idx="111" type="body" hasCustomPrompt="1"/>
+          </p:nvPr>
+        </p:nvSpPr>
+        <p:spPr>
+          <a:xfrm>
+            <a:off x="1261872" y="3749040"/>
+            <a:ext cx="1005840" cy="310896"/>
+          </a:xfrm>
+          <a:prstGeom prst="rect">
+            <a:avLst/>
+          </a:prstGeom>
+          <a:noFill/>
+          <a:ln/>
+        </p:spPr>
+        <p:txBody>
+          <a:bodyPr wrap="square" rtlCol="0"/>
+          <a:lstStyle>
+            <a:lvl1pPr algn="l" indent="0" marL="0">
+              <a:buNone/>
+              <a:defRPr lang="en-US" sz="1200" b="1" dirty="0">
+                <a:solidFill>
+                  <a:srgbClr val="0F0F0F"/>
+                </a:solidFill>
+                <a:latin typeface="Inter" pitchFamily="34" charset="0"/>
+                <a:ea typeface="Inter" pitchFamily="34" charset="-122"/>
+                <a:cs typeface="Inter" pitchFamily="34" charset="-120"/>
+              </a:defRPr>
+            </a:lvl1pPr>
+          </a:lstStyle>
+          <a:p>
+            <a:pPr algn="l" indent="0" marL="0">
+              <a:buNone/>
+            </a:pPr>
+            <a:r>
+              <a:rPr lang="en-US" sz="1200" b="1" dirty="0">
+                <a:solidFill>
+                  <a:srgbClr val="0F0F0F"/>
+                </a:solidFill>
+                <a:latin typeface="Inter" pitchFamily="34" charset="0"/>
+                <a:ea typeface="Inter" pitchFamily="34" charset="-122"/>
+                <a:cs typeface="Inter" pitchFamily="34" charset="-120"/>
+              </a:rPr>
+              <a:t>…</a:t>
+            </a:r>
+            <a:endParaRPr lang="en-US" sz="1200" dirty="0"/>
+          </a:p>
+        </p:txBody>
+      </p:sp>
+      <p:sp>
+        <p:nvSpPr>
+          <p:cNvPr id="14" name="Text 4"/>
+          <p:cNvSpPr/>
+          <p:nvPr/>
+        </p:nvSpPr>
+        <p:spPr>
+          <a:xfrm>
+            <a:off x="2724912" y="1371600"/>
+            <a:ext cx="1645920" cy="228600"/>
+          </a:xfrm>
+          <a:prstGeom prst="rect">
+            <a:avLst/>
+          </a:prstGeom>
+          <a:noFill/>
+          <a:ln/>
+        </p:spPr>
+        <p:txBody>
+          <a:bodyPr wrap="square" lIns="0" tIns="0" rIns="0" bIns="0" rtlCol="0" anchor="ctr"/>
+          <a:lstStyle/>
+          <a:p>
+            <a:pPr indent="0" marL="0">
+              <a:buNone/>
+            </a:pPr>
+            <a:r>
+              <a:rPr lang="en-US" sz="1000" b="1" spc="100" kern="0" dirty="0">
+                <a:solidFill>
+                  <a:srgbClr val="677E5B"/>
+                </a:solidFill>
+                <a:latin typeface="Inter" pitchFamily="34" charset="0"/>
+                <a:ea typeface="Inter" pitchFamily="34" charset="-122"/>
+                <a:cs typeface="Inter" pitchFamily="34" charset="-120"/>
+              </a:rPr>
+              <a:t>02</a:t>
+            </a:r>
+            <a:endParaRPr lang="en-US" sz="1000" dirty="0"/>
+          </a:p>
+        </p:txBody>
+      </p:sp>
+      <p:sp>
+        <p:nvSpPr>
+          <p:cNvPr id="15" name="Text 5"/>
+          <p:cNvSpPr/>
+          <p:nvPr>
+            <p:ph idx="113" type="body" hasCustomPrompt="1"/>
+          </p:nvPr>
+        </p:nvSpPr>
+        <p:spPr>
+          <a:xfrm>
+            <a:off x="2724912" y="1600200"/>
+            <a:ext cx="1645920" cy="320040"/>
+          </a:xfrm>
+          <a:prstGeom prst="rect">
+            <a:avLst/>
+          </a:prstGeom>
+          <a:noFill/>
+          <a:ln/>
+        </p:spPr>
+        <p:txBody>
+          <a:bodyPr wrap="square" rtlCol="0"/>
+          <a:lstStyle>
+            <a:lvl1pPr algn="l" indent="0" marL="0">
+              <a:buNone/>
+              <a:defRPr lang="en-US" sz="1600" b="1" dirty="0">
+                <a:solidFill>
+                  <a:srgbClr val="0F0F0F"/>
+                </a:solidFill>
+                <a:latin typeface="Inter" pitchFamily="34" charset="0"/>
+                <a:ea typeface="Inter" pitchFamily="34" charset="-122"/>
+                <a:cs typeface="Inter" pitchFamily="34" charset="-120"/>
+              </a:defRPr>
+            </a:lvl1pPr>
+          </a:lstStyle>
+          <a:p>
+            <a:pPr algn="l" indent="0" marL="0">
+              <a:buNone/>
+            </a:pPr>
+            <a:r>
+              <a:rPr lang="en-US" sz="1600" b="1" dirty="0">
+                <a:solidFill>
+                  <a:srgbClr val="0F0F0F"/>
+                </a:solidFill>
+                <a:latin typeface="Inter" pitchFamily="34" charset="0"/>
+                <a:ea typeface="Inter" pitchFamily="34" charset="-122"/>
+                <a:cs typeface="Inter" pitchFamily="34" charset="-120"/>
+              </a:rPr>
+              <a:t>Verfahren</a:t>
+            </a:r>
+            <a:endParaRPr lang="en-US" sz="1600" dirty="0"/>
+          </a:p>
+        </p:txBody>
+      </p:sp>
+      <p:sp>
+        <p:nvSpPr>
+          <p:cNvPr id="16" name="Text 5"/>
+          <p:cNvSpPr/>
+          <p:nvPr>
+            <p:ph idx="114" type="body" hasCustomPrompt="1"/>
+          </p:nvPr>
+        </p:nvSpPr>
+        <p:spPr>
+          <a:xfrm>
+            <a:off x="2724912" y="1938528"/>
+            <a:ext cx="1645920" cy="1097280"/>
+          </a:xfrm>
+          <a:prstGeom prst="rect">
+            <a:avLst/>
+          </a:prstGeom>
+          <a:noFill/>
+          <a:ln/>
+        </p:spPr>
+        <p:txBody>
+          <a:bodyPr wrap="square" rtlCol="0"/>
+          <a:lstStyle>
+            <a:lvl1pPr algn="l" indent="0" marL="0">
+              <a:buNone/>
+              <a:defRPr lang="en-US" sz="1200" dirty="0">
+                <a:solidFill>
+                  <a:srgbClr val="0F0F0F"/>
+                </a:solidFill>
+                <a:latin typeface="Inter" pitchFamily="34" charset="0"/>
+                <a:ea typeface="Inter" pitchFamily="34" charset="-122"/>
+                <a:cs typeface="Inter" pitchFamily="34" charset="-120"/>
+              </a:defRPr>
+            </a:lvl1pPr>
+          </a:lstStyle>
+          <a:p>
+            <a:pPr algn="l" indent="0" marL="0">
+              <a:buNone/>
+            </a:pPr>
+            <a:r>
+              <a:rPr lang="en-US" sz="1200" dirty="0">
+                <a:solidFill>
+                  <a:srgbClr val="0F0F0F"/>
+                </a:solidFill>
+                <a:latin typeface="Inter" pitchFamily="34" charset="0"/>
+                <a:ea typeface="Inter" pitchFamily="34" charset="-122"/>
+                <a:cs typeface="Inter" pitchFamily="34" charset="-120"/>
+              </a:rPr>
+              <a:t>Ideal für …</a:t>
+            </a:r>
+            <a:endParaRPr lang="en-US" sz="1200" dirty="0"/>
+          </a:p>
+        </p:txBody>
+      </p:sp>
+      <p:sp>
+        <p:nvSpPr>
+          <p:cNvPr id="17" name="Text 5"/>
+          <p:cNvSpPr/>
+          <p:nvPr/>
+        </p:nvSpPr>
+        <p:spPr>
+          <a:xfrm>
+            <a:off x="2724912" y="3090672"/>
+            <a:ext cx="640080" cy="310896"/>
+          </a:xfrm>
+          <a:prstGeom prst="rect">
+            <a:avLst/>
+          </a:prstGeom>
+          <a:noFill/>
+          <a:ln/>
+        </p:spPr>
+        <p:txBody>
+          <a:bodyPr wrap="square" lIns="0" tIns="0" rIns="0" bIns="0" rtlCol="0" anchor="ctr"/>
+          <a:lstStyle/>
+          <a:p>
+            <a:pPr indent="0" marL="0">
+              <a:buNone/>
+            </a:pPr>
+            <a:r>
+              <a:rPr lang="en-US" sz="1000" dirty="0">
+                <a:solidFill>
+                  <a:srgbClr val="0F0F0F">
+                    <a:alpha val="60000"/>
+                  </a:srgbClr>
+                </a:solidFill>
+                <a:latin typeface="Inter" pitchFamily="34" charset="0"/>
+                <a:ea typeface="Inter" pitchFamily="34" charset="-122"/>
+                <a:cs typeface="Inter" pitchFamily="34" charset="-120"/>
+              </a:rPr>
+              <a:t>Wäsche</a:t>
+            </a:r>
+            <a:endParaRPr lang="en-US" sz="1000" dirty="0"/>
+          </a:p>
+        </p:txBody>
+      </p:sp>
+      <p:sp>
+        <p:nvSpPr>
+          <p:cNvPr id="18" name="Text 6"/>
+          <p:cNvSpPr/>
+          <p:nvPr>
+            <p:ph idx="116" type="body" hasCustomPrompt="1"/>
+          </p:nvPr>
+        </p:nvSpPr>
+        <p:spPr>
+          <a:xfrm>
+            <a:off x="3364992" y="3090672"/>
+            <a:ext cx="1005840" cy="310896"/>
+          </a:xfrm>
+          <a:prstGeom prst="rect">
+            <a:avLst/>
+          </a:prstGeom>
+          <a:noFill/>
+          <a:ln/>
+        </p:spPr>
+        <p:txBody>
+          <a:bodyPr wrap="square" rtlCol="0"/>
+          <a:lstStyle>
+            <a:lvl1pPr algn="l" indent="0" marL="0">
+              <a:buNone/>
+              <a:defRPr lang="en-US" sz="1200" b="1" dirty="0">
+                <a:solidFill>
+                  <a:srgbClr val="0F0F0F"/>
+                </a:solidFill>
+                <a:latin typeface="Inter" pitchFamily="34" charset="0"/>
+                <a:ea typeface="Inter" pitchFamily="34" charset="-122"/>
+                <a:cs typeface="Inter" pitchFamily="34" charset="-120"/>
+              </a:defRPr>
+            </a:lvl1pPr>
+          </a:lstStyle>
+          <a:p>
+            <a:pPr algn="l" indent="0" marL="0">
+              <a:buNone/>
+            </a:pPr>
+            <a:r>
+              <a:rPr lang="en-US" sz="1200" b="1" dirty="0">
+                <a:solidFill>
+                  <a:srgbClr val="0F0F0F"/>
+                </a:solidFill>
+                <a:latin typeface="Inter" pitchFamily="34" charset="0"/>
+                <a:ea typeface="Inter" pitchFamily="34" charset="-122"/>
+                <a:cs typeface="Inter" pitchFamily="34" charset="-120"/>
+              </a:rPr>
+              <a:t>…</a:t>
+            </a:r>
+            <a:endParaRPr lang="en-US" sz="1200" dirty="0"/>
+          </a:p>
+        </p:txBody>
+      </p:sp>
+      <p:sp>
+        <p:nvSpPr>
+          <p:cNvPr id="19" name="Text 6"/>
+          <p:cNvSpPr/>
+          <p:nvPr/>
+        </p:nvSpPr>
+        <p:spPr>
+          <a:xfrm>
+            <a:off x="2724912" y="3419856"/>
+            <a:ext cx="640080" cy="310896"/>
+          </a:xfrm>
+          <a:prstGeom prst="rect">
+            <a:avLst/>
+          </a:prstGeom>
+          <a:noFill/>
+          <a:ln/>
+        </p:spPr>
+        <p:txBody>
+          <a:bodyPr wrap="square" lIns="0" tIns="0" rIns="0" bIns="0" rtlCol="0" anchor="ctr"/>
+          <a:lstStyle/>
+          <a:p>
+            <a:pPr indent="0" marL="0">
+              <a:buNone/>
+            </a:pPr>
+            <a:r>
+              <a:rPr lang="en-US" sz="1000" dirty="0">
+                <a:solidFill>
+                  <a:srgbClr val="0F0F0F">
+                    <a:alpha val="60000"/>
+                  </a:srgbClr>
+                </a:solidFill>
+                <a:latin typeface="Inter" pitchFamily="34" charset="0"/>
+                <a:ea typeface="Inter" pitchFamily="34" charset="-122"/>
+                <a:cs typeface="Inter" pitchFamily="34" charset="-120"/>
+              </a:rPr>
+              <a:t>Auflage</a:t>
+            </a:r>
+            <a:endParaRPr lang="en-US" sz="1000" dirty="0"/>
+          </a:p>
+        </p:txBody>
+      </p:sp>
+      <p:sp>
+        <p:nvSpPr>
+          <p:cNvPr id="20" name="Text 7"/>
+          <p:cNvSpPr/>
+          <p:nvPr>
+            <p:ph idx="118" type="body" hasCustomPrompt="1"/>
+          </p:nvPr>
+        </p:nvSpPr>
+        <p:spPr>
+          <a:xfrm>
+            <a:off x="3364992" y="3419856"/>
+            <a:ext cx="1005840" cy="310896"/>
+          </a:xfrm>
+          <a:prstGeom prst="rect">
+            <a:avLst/>
+          </a:prstGeom>
+          <a:noFill/>
+          <a:ln/>
+        </p:spPr>
+        <p:txBody>
+          <a:bodyPr wrap="square" rtlCol="0"/>
+          <a:lstStyle>
+            <a:lvl1pPr algn="l" indent="0" marL="0">
+              <a:buNone/>
+              <a:defRPr lang="en-US" sz="1200" b="1" dirty="0">
+                <a:solidFill>
+                  <a:srgbClr val="0F0F0F"/>
+                </a:solidFill>
+                <a:latin typeface="Inter" pitchFamily="34" charset="0"/>
+                <a:ea typeface="Inter" pitchFamily="34" charset="-122"/>
+                <a:cs typeface="Inter" pitchFamily="34" charset="-120"/>
+              </a:defRPr>
+            </a:lvl1pPr>
+          </a:lstStyle>
+          <a:p>
+            <a:pPr algn="l" indent="0" marL="0">
+              <a:buNone/>
+            </a:pPr>
+            <a:r>
+              <a:rPr lang="en-US" sz="1200" b="1" dirty="0">
+                <a:solidFill>
+                  <a:srgbClr val="0F0F0F"/>
+                </a:solidFill>
+                <a:latin typeface="Inter" pitchFamily="34" charset="0"/>
+                <a:ea typeface="Inter" pitchFamily="34" charset="-122"/>
+                <a:cs typeface="Inter" pitchFamily="34" charset="-120"/>
+              </a:rPr>
+              <a:t>…</a:t>
+            </a:r>
+            <a:endParaRPr lang="en-US" sz="1200" dirty="0"/>
+          </a:p>
+        </p:txBody>
+      </p:sp>
+      <p:sp>
+        <p:nvSpPr>
+          <p:cNvPr id="21" name="Text 7"/>
+          <p:cNvSpPr/>
+          <p:nvPr/>
+        </p:nvSpPr>
+        <p:spPr>
+          <a:xfrm>
+            <a:off x="2724912" y="3749040"/>
+            <a:ext cx="640080" cy="310896"/>
+          </a:xfrm>
+          <a:prstGeom prst="rect">
+            <a:avLst/>
+          </a:prstGeom>
+          <a:noFill/>
+          <a:ln/>
+        </p:spPr>
+        <p:txBody>
+          <a:bodyPr wrap="square" lIns="0" tIns="0" rIns="0" bIns="0" rtlCol="0" anchor="ctr"/>
+          <a:lstStyle/>
+          <a:p>
+            <a:pPr indent="0" marL="0">
+              <a:buNone/>
+            </a:pPr>
+            <a:r>
+              <a:rPr lang="en-US" sz="1000" dirty="0">
+                <a:solidFill>
+                  <a:srgbClr val="0F0F0F">
+                    <a:alpha val="60000"/>
+                  </a:srgbClr>
+                </a:solidFill>
+                <a:latin typeface="Inter" pitchFamily="34" charset="0"/>
+                <a:ea typeface="Inter" pitchFamily="34" charset="-122"/>
+                <a:cs typeface="Inter" pitchFamily="34" charset="-120"/>
+              </a:rPr>
+              <a:t>Farbe</a:t>
+            </a:r>
+            <a:endParaRPr lang="en-US" sz="1000" dirty="0"/>
+          </a:p>
+        </p:txBody>
+      </p:sp>
+      <p:sp>
+        <p:nvSpPr>
+          <p:cNvPr id="22" name="Text 8"/>
+          <p:cNvSpPr/>
+          <p:nvPr>
+            <p:ph idx="120" type="body" hasCustomPrompt="1"/>
+          </p:nvPr>
+        </p:nvSpPr>
+        <p:spPr>
+          <a:xfrm>
+            <a:off x="3364992" y="3749040"/>
+            <a:ext cx="1005840" cy="310896"/>
+          </a:xfrm>
+          <a:prstGeom prst="rect">
+            <a:avLst/>
+          </a:prstGeom>
+          <a:noFill/>
+          <a:ln/>
+        </p:spPr>
+        <p:txBody>
+          <a:bodyPr wrap="square" rtlCol="0"/>
+          <a:lstStyle>
+            <a:lvl1pPr algn="l" indent="0" marL="0">
+              <a:buNone/>
+              <a:defRPr lang="en-US" sz="1200" b="1" dirty="0">
+                <a:solidFill>
+                  <a:srgbClr val="0F0F0F"/>
+                </a:solidFill>
+                <a:latin typeface="Inter" pitchFamily="34" charset="0"/>
+                <a:ea typeface="Inter" pitchFamily="34" charset="-122"/>
+                <a:cs typeface="Inter" pitchFamily="34" charset="-120"/>
+              </a:defRPr>
+            </a:lvl1pPr>
+          </a:lstStyle>
+          <a:p>
+            <a:pPr algn="l" indent="0" marL="0">
+              <a:buNone/>
+            </a:pPr>
+            <a:r>
+              <a:rPr lang="en-US" sz="1200" b="1" dirty="0">
+                <a:solidFill>
+                  <a:srgbClr val="0F0F0F"/>
+                </a:solidFill>
+                <a:latin typeface="Inter" pitchFamily="34" charset="0"/>
+                <a:ea typeface="Inter" pitchFamily="34" charset="-122"/>
+                <a:cs typeface="Inter" pitchFamily="34" charset="-120"/>
+              </a:rPr>
+              <a:t>…</a:t>
+            </a:r>
+            <a:endParaRPr lang="en-US" sz="1200" dirty="0"/>
+          </a:p>
+        </p:txBody>
+      </p:sp>
+      <p:sp>
+        <p:nvSpPr>
+          <p:cNvPr id="23" name="Text 8"/>
+          <p:cNvSpPr/>
+          <p:nvPr/>
+        </p:nvSpPr>
+        <p:spPr>
+          <a:xfrm>
+            <a:off x="4828032" y="1371600"/>
+            <a:ext cx="1645920" cy="228600"/>
+          </a:xfrm>
+          <a:prstGeom prst="rect">
+            <a:avLst/>
+          </a:prstGeom>
+          <a:noFill/>
+          <a:ln/>
+        </p:spPr>
+        <p:txBody>
+          <a:bodyPr wrap="square" lIns="0" tIns="0" rIns="0" bIns="0" rtlCol="0" anchor="ctr"/>
+          <a:lstStyle/>
+          <a:p>
+            <a:pPr indent="0" marL="0">
+              <a:buNone/>
+            </a:pPr>
+            <a:r>
+              <a:rPr lang="en-US" sz="1000" b="1" spc="100" kern="0" dirty="0">
+                <a:solidFill>
+                  <a:srgbClr val="677E5B"/>
+                </a:solidFill>
+                <a:latin typeface="Inter" pitchFamily="34" charset="0"/>
+                <a:ea typeface="Inter" pitchFamily="34" charset="-122"/>
+                <a:cs typeface="Inter" pitchFamily="34" charset="-120"/>
+              </a:rPr>
+              <a:t>03</a:t>
+            </a:r>
+            <a:endParaRPr lang="en-US" sz="1000" dirty="0"/>
+          </a:p>
+        </p:txBody>
+      </p:sp>
+      <p:sp>
+        <p:nvSpPr>
+          <p:cNvPr id="24" name="Text 9"/>
+          <p:cNvSpPr/>
+          <p:nvPr>
+            <p:ph idx="122" type="body" hasCustomPrompt="1"/>
+          </p:nvPr>
+        </p:nvSpPr>
+        <p:spPr>
+          <a:xfrm>
+            <a:off x="4828032" y="1600200"/>
+            <a:ext cx="1645920" cy="320040"/>
+          </a:xfrm>
+          <a:prstGeom prst="rect">
+            <a:avLst/>
+          </a:prstGeom>
+          <a:noFill/>
+          <a:ln/>
+        </p:spPr>
+        <p:txBody>
+          <a:bodyPr wrap="square" rtlCol="0"/>
+          <a:lstStyle>
+            <a:lvl1pPr algn="l" indent="0" marL="0">
+              <a:buNone/>
+              <a:defRPr lang="en-US" sz="1600" b="1" dirty="0">
+                <a:solidFill>
+                  <a:srgbClr val="0F0F0F"/>
+                </a:solidFill>
+                <a:latin typeface="Inter" pitchFamily="34" charset="0"/>
+                <a:ea typeface="Inter" pitchFamily="34" charset="-122"/>
+                <a:cs typeface="Inter" pitchFamily="34" charset="-120"/>
+              </a:defRPr>
+            </a:lvl1pPr>
+          </a:lstStyle>
+          <a:p>
+            <a:pPr algn="l" indent="0" marL="0">
+              <a:buNone/>
+            </a:pPr>
+            <a:r>
+              <a:rPr lang="en-US" sz="1600" b="1" dirty="0">
+                <a:solidFill>
+                  <a:srgbClr val="0F0F0F"/>
+                </a:solidFill>
+                <a:latin typeface="Inter" pitchFamily="34" charset="0"/>
+                <a:ea typeface="Inter" pitchFamily="34" charset="-122"/>
+                <a:cs typeface="Inter" pitchFamily="34" charset="-120"/>
+              </a:rPr>
+              <a:t>Verfahren</a:t>
+            </a:r>
+            <a:endParaRPr lang="en-US" sz="1600" dirty="0"/>
+          </a:p>
+        </p:txBody>
+      </p:sp>
+      <p:sp>
+        <p:nvSpPr>
+          <p:cNvPr id="25" name="Text 9"/>
+          <p:cNvSpPr/>
+          <p:nvPr>
+            <p:ph idx="123" type="body" hasCustomPrompt="1"/>
+          </p:nvPr>
+        </p:nvSpPr>
+        <p:spPr>
+          <a:xfrm>
+            <a:off x="4828032" y="1938528"/>
+            <a:ext cx="1645920" cy="1097280"/>
+          </a:xfrm>
+          <a:prstGeom prst="rect">
+            <a:avLst/>
+          </a:prstGeom>
+          <a:noFill/>
+          <a:ln/>
+        </p:spPr>
+        <p:txBody>
+          <a:bodyPr wrap="square" rtlCol="0"/>
+          <a:lstStyle>
+            <a:lvl1pPr algn="l" indent="0" marL="0">
+              <a:buNone/>
+              <a:defRPr lang="en-US" sz="1200" dirty="0">
+                <a:solidFill>
+                  <a:srgbClr val="0F0F0F"/>
+                </a:solidFill>
+                <a:latin typeface="Inter" pitchFamily="34" charset="0"/>
+                <a:ea typeface="Inter" pitchFamily="34" charset="-122"/>
+                <a:cs typeface="Inter" pitchFamily="34" charset="-120"/>
+              </a:defRPr>
+            </a:lvl1pPr>
+          </a:lstStyle>
+          <a:p>
+            <a:pPr algn="l" indent="0" marL="0">
+              <a:buNone/>
+            </a:pPr>
+            <a:r>
+              <a:rPr lang="en-US" sz="1200" dirty="0">
+                <a:solidFill>
+                  <a:srgbClr val="0F0F0F"/>
+                </a:solidFill>
+                <a:latin typeface="Inter" pitchFamily="34" charset="0"/>
+                <a:ea typeface="Inter" pitchFamily="34" charset="-122"/>
+                <a:cs typeface="Inter" pitchFamily="34" charset="-120"/>
+              </a:rPr>
+              <a:t>Ideal für …</a:t>
+            </a:r>
+            <a:endParaRPr lang="en-US" sz="1200" dirty="0"/>
+          </a:p>
+        </p:txBody>
+      </p:sp>
+      <p:sp>
+        <p:nvSpPr>
+          <p:cNvPr id="26" name="Text 9"/>
+          <p:cNvSpPr/>
+          <p:nvPr/>
+        </p:nvSpPr>
+        <p:spPr>
+          <a:xfrm>
+            <a:off x="4828032" y="3090672"/>
+            <a:ext cx="640080" cy="310896"/>
+          </a:xfrm>
+          <a:prstGeom prst="rect">
+            <a:avLst/>
+          </a:prstGeom>
+          <a:noFill/>
+          <a:ln/>
+        </p:spPr>
+        <p:txBody>
+          <a:bodyPr wrap="square" lIns="0" tIns="0" rIns="0" bIns="0" rtlCol="0" anchor="ctr"/>
+          <a:lstStyle/>
+          <a:p>
+            <a:pPr indent="0" marL="0">
+              <a:buNone/>
+            </a:pPr>
+            <a:r>
+              <a:rPr lang="en-US" sz="1000" dirty="0">
+                <a:solidFill>
+                  <a:srgbClr val="0F0F0F">
+                    <a:alpha val="60000"/>
+                  </a:srgbClr>
+                </a:solidFill>
+                <a:latin typeface="Inter" pitchFamily="34" charset="0"/>
+                <a:ea typeface="Inter" pitchFamily="34" charset="-122"/>
+                <a:cs typeface="Inter" pitchFamily="34" charset="-120"/>
+              </a:rPr>
+              <a:t>Wäsche</a:t>
+            </a:r>
+            <a:endParaRPr lang="en-US" sz="1000" dirty="0"/>
+          </a:p>
+        </p:txBody>
+      </p:sp>
+      <p:sp>
+        <p:nvSpPr>
+          <p:cNvPr id="27" name="Text 10"/>
+          <p:cNvSpPr/>
+          <p:nvPr>
+            <p:ph idx="125" type="body" hasCustomPrompt="1"/>
+          </p:nvPr>
+        </p:nvSpPr>
+        <p:spPr>
+          <a:xfrm>
+            <a:off x="5468112" y="3090672"/>
+            <a:ext cx="1005840" cy="310896"/>
+          </a:xfrm>
+          <a:prstGeom prst="rect">
+            <a:avLst/>
+          </a:prstGeom>
+          <a:noFill/>
+          <a:ln/>
+        </p:spPr>
+        <p:txBody>
+          <a:bodyPr wrap="square" rtlCol="0"/>
+          <a:lstStyle>
+            <a:lvl1pPr algn="l" indent="0" marL="0">
+              <a:buNone/>
+              <a:defRPr lang="en-US" sz="1200" b="1" dirty="0">
+                <a:solidFill>
+                  <a:srgbClr val="0F0F0F"/>
+                </a:solidFill>
+                <a:latin typeface="Inter" pitchFamily="34" charset="0"/>
+                <a:ea typeface="Inter" pitchFamily="34" charset="-122"/>
+                <a:cs typeface="Inter" pitchFamily="34" charset="-120"/>
+              </a:defRPr>
+            </a:lvl1pPr>
+          </a:lstStyle>
+          <a:p>
+            <a:pPr algn="l" indent="0" marL="0">
+              <a:buNone/>
+            </a:pPr>
+            <a:r>
+              <a:rPr lang="en-US" sz="1200" b="1" dirty="0">
+                <a:solidFill>
+                  <a:srgbClr val="0F0F0F"/>
+                </a:solidFill>
+                <a:latin typeface="Inter" pitchFamily="34" charset="0"/>
+                <a:ea typeface="Inter" pitchFamily="34" charset="-122"/>
+                <a:cs typeface="Inter" pitchFamily="34" charset="-120"/>
+              </a:rPr>
+              <a:t>…</a:t>
+            </a:r>
+            <a:endParaRPr lang="en-US" sz="1200" dirty="0"/>
+          </a:p>
+        </p:txBody>
+      </p:sp>
+      <p:sp>
+        <p:nvSpPr>
+          <p:cNvPr id="28" name="Text 10"/>
+          <p:cNvSpPr/>
+          <p:nvPr/>
+        </p:nvSpPr>
+        <p:spPr>
+          <a:xfrm>
+            <a:off x="4828032" y="3419856"/>
+            <a:ext cx="640080" cy="310896"/>
+          </a:xfrm>
+          <a:prstGeom prst="rect">
+            <a:avLst/>
+          </a:prstGeom>
+          <a:noFill/>
+          <a:ln/>
+        </p:spPr>
+        <p:txBody>
+          <a:bodyPr wrap="square" lIns="0" tIns="0" rIns="0" bIns="0" rtlCol="0" anchor="ctr"/>
+          <a:lstStyle/>
+          <a:p>
+            <a:pPr indent="0" marL="0">
+              <a:buNone/>
+            </a:pPr>
+            <a:r>
+              <a:rPr lang="en-US" sz="1000" dirty="0">
+                <a:solidFill>
+                  <a:srgbClr val="0F0F0F">
+                    <a:alpha val="60000"/>
+                  </a:srgbClr>
+                </a:solidFill>
+                <a:latin typeface="Inter" pitchFamily="34" charset="0"/>
+                <a:ea typeface="Inter" pitchFamily="34" charset="-122"/>
+                <a:cs typeface="Inter" pitchFamily="34" charset="-120"/>
+              </a:rPr>
+              <a:t>Auflage</a:t>
+            </a:r>
+            <a:endParaRPr lang="en-US" sz="1000" dirty="0"/>
+          </a:p>
+        </p:txBody>
+      </p:sp>
+      <p:sp>
+        <p:nvSpPr>
+          <p:cNvPr id="29" name="Text 11"/>
+          <p:cNvSpPr/>
+          <p:nvPr>
+            <p:ph idx="127" type="body" hasCustomPrompt="1"/>
+          </p:nvPr>
+        </p:nvSpPr>
+        <p:spPr>
+          <a:xfrm>
+            <a:off x="5468112" y="3419856"/>
+            <a:ext cx="1005840" cy="310896"/>
+          </a:xfrm>
+          <a:prstGeom prst="rect">
+            <a:avLst/>
+          </a:prstGeom>
+          <a:noFill/>
+          <a:ln/>
+        </p:spPr>
+        <p:txBody>
+          <a:bodyPr wrap="square" rtlCol="0"/>
+          <a:lstStyle>
+            <a:lvl1pPr algn="l" indent="0" marL="0">
+              <a:buNone/>
+              <a:defRPr lang="en-US" sz="1200" b="1" dirty="0">
+                <a:solidFill>
+                  <a:srgbClr val="0F0F0F"/>
+                </a:solidFill>
+                <a:latin typeface="Inter" pitchFamily="34" charset="0"/>
+                <a:ea typeface="Inter" pitchFamily="34" charset="-122"/>
+                <a:cs typeface="Inter" pitchFamily="34" charset="-120"/>
+              </a:defRPr>
+            </a:lvl1pPr>
+          </a:lstStyle>
+          <a:p>
+            <a:pPr algn="l" indent="0" marL="0">
+              <a:buNone/>
+            </a:pPr>
+            <a:r>
+              <a:rPr lang="en-US" sz="1200" b="1" dirty="0">
+                <a:solidFill>
+                  <a:srgbClr val="0F0F0F"/>
+                </a:solidFill>
+                <a:latin typeface="Inter" pitchFamily="34" charset="0"/>
+                <a:ea typeface="Inter" pitchFamily="34" charset="-122"/>
+                <a:cs typeface="Inter" pitchFamily="34" charset="-120"/>
+              </a:rPr>
+              <a:t>…</a:t>
+            </a:r>
+            <a:endParaRPr lang="en-US" sz="1200" dirty="0"/>
+          </a:p>
+        </p:txBody>
+      </p:sp>
+      <p:sp>
+        <p:nvSpPr>
+          <p:cNvPr id="30" name="Text 11"/>
+          <p:cNvSpPr/>
+          <p:nvPr/>
+        </p:nvSpPr>
+        <p:spPr>
+          <a:xfrm>
+            <a:off x="4828032" y="3749040"/>
+            <a:ext cx="640080" cy="310896"/>
+          </a:xfrm>
+          <a:prstGeom prst="rect">
+            <a:avLst/>
+          </a:prstGeom>
+          <a:noFill/>
+          <a:ln/>
+        </p:spPr>
+        <p:txBody>
+          <a:bodyPr wrap="square" lIns="0" tIns="0" rIns="0" bIns="0" rtlCol="0" anchor="ctr"/>
+          <a:lstStyle/>
+          <a:p>
+            <a:pPr indent="0" marL="0">
+              <a:buNone/>
+            </a:pPr>
+            <a:r>
+              <a:rPr lang="en-US" sz="1000" dirty="0">
+                <a:solidFill>
+                  <a:srgbClr val="0F0F0F">
+                    <a:alpha val="60000"/>
+                  </a:srgbClr>
+                </a:solidFill>
+                <a:latin typeface="Inter" pitchFamily="34" charset="0"/>
+                <a:ea typeface="Inter" pitchFamily="34" charset="-122"/>
+                <a:cs typeface="Inter" pitchFamily="34" charset="-120"/>
+              </a:rPr>
+              <a:t>Farbe</a:t>
+            </a:r>
+            <a:endParaRPr lang="en-US" sz="1000" dirty="0"/>
+          </a:p>
+        </p:txBody>
+      </p:sp>
+      <p:sp>
+        <p:nvSpPr>
+          <p:cNvPr id="31" name="Text 12"/>
+          <p:cNvSpPr/>
+          <p:nvPr>
+            <p:ph idx="129" type="body" hasCustomPrompt="1"/>
+          </p:nvPr>
+        </p:nvSpPr>
+        <p:spPr>
+          <a:xfrm>
+            <a:off x="5468112" y="3749040"/>
+            <a:ext cx="1005840" cy="310896"/>
+          </a:xfrm>
+          <a:prstGeom prst="rect">
+            <a:avLst/>
+          </a:prstGeom>
+          <a:noFill/>
+          <a:ln/>
+        </p:spPr>
+        <p:txBody>
+          <a:bodyPr wrap="square" rtlCol="0"/>
+          <a:lstStyle>
+            <a:lvl1pPr algn="l" indent="0" marL="0">
+              <a:buNone/>
+              <a:defRPr lang="en-US" sz="1200" b="1" dirty="0">
+                <a:solidFill>
+                  <a:srgbClr val="0F0F0F"/>
+                </a:solidFill>
+                <a:latin typeface="Inter" pitchFamily="34" charset="0"/>
+                <a:ea typeface="Inter" pitchFamily="34" charset="-122"/>
+                <a:cs typeface="Inter" pitchFamily="34" charset="-120"/>
+              </a:defRPr>
+            </a:lvl1pPr>
+          </a:lstStyle>
+          <a:p>
+            <a:pPr algn="l" indent="0" marL="0">
+              <a:buNone/>
+            </a:pPr>
+            <a:r>
+              <a:rPr lang="en-US" sz="1200" b="1" dirty="0">
+                <a:solidFill>
+                  <a:srgbClr val="0F0F0F"/>
+                </a:solidFill>
+                <a:latin typeface="Inter" pitchFamily="34" charset="0"/>
+                <a:ea typeface="Inter" pitchFamily="34" charset="-122"/>
+                <a:cs typeface="Inter" pitchFamily="34" charset="-120"/>
+              </a:rPr>
+              <a:t>…</a:t>
+            </a:r>
+            <a:endParaRPr lang="en-US" sz="1200" dirty="0"/>
+          </a:p>
+        </p:txBody>
+      </p:sp>
+      <p:sp>
+        <p:nvSpPr>
+          <p:cNvPr id="32" name="Text 12"/>
+          <p:cNvSpPr/>
+          <p:nvPr/>
+        </p:nvSpPr>
+        <p:spPr>
+          <a:xfrm>
+            <a:off x="6931152" y="1371600"/>
+            <a:ext cx="1645920" cy="228600"/>
+          </a:xfrm>
+          <a:prstGeom prst="rect">
+            <a:avLst/>
+          </a:prstGeom>
+          <a:noFill/>
+          <a:ln/>
+        </p:spPr>
+        <p:txBody>
+          <a:bodyPr wrap="square" lIns="0" tIns="0" rIns="0" bIns="0" rtlCol="0" anchor="ctr"/>
+          <a:lstStyle/>
+          <a:p>
+            <a:pPr indent="0" marL="0">
+              <a:buNone/>
+            </a:pPr>
+            <a:r>
+              <a:rPr lang="en-US" sz="1000" b="1" spc="100" kern="0" dirty="0">
+                <a:solidFill>
+                  <a:srgbClr val="677E5B"/>
+                </a:solidFill>
+                <a:latin typeface="Inter" pitchFamily="34" charset="0"/>
+                <a:ea typeface="Inter" pitchFamily="34" charset="-122"/>
+                <a:cs typeface="Inter" pitchFamily="34" charset="-120"/>
+              </a:rPr>
+              <a:t>04</a:t>
+            </a:r>
+            <a:endParaRPr lang="en-US" sz="1000" dirty="0"/>
+          </a:p>
+        </p:txBody>
+      </p:sp>
+      <p:sp>
+        <p:nvSpPr>
+          <p:cNvPr id="33" name="Text 13"/>
+          <p:cNvSpPr/>
+          <p:nvPr>
+            <p:ph idx="131" type="body" hasCustomPrompt="1"/>
+          </p:nvPr>
+        </p:nvSpPr>
+        <p:spPr>
+          <a:xfrm>
+            <a:off x="6931152" y="1600200"/>
+            <a:ext cx="1645920" cy="320040"/>
+          </a:xfrm>
+          <a:prstGeom prst="rect">
+            <a:avLst/>
+          </a:prstGeom>
+          <a:noFill/>
+          <a:ln/>
+        </p:spPr>
+        <p:txBody>
+          <a:bodyPr wrap="square" rtlCol="0"/>
+          <a:lstStyle>
+            <a:lvl1pPr algn="l" indent="0" marL="0">
+              <a:buNone/>
+              <a:defRPr lang="en-US" sz="1600" b="1" dirty="0">
+                <a:solidFill>
+                  <a:srgbClr val="0F0F0F"/>
+                </a:solidFill>
+                <a:latin typeface="Inter" pitchFamily="34" charset="0"/>
+                <a:ea typeface="Inter" pitchFamily="34" charset="-122"/>
+                <a:cs typeface="Inter" pitchFamily="34" charset="-120"/>
+              </a:defRPr>
+            </a:lvl1pPr>
+          </a:lstStyle>
+          <a:p>
+            <a:pPr algn="l" indent="0" marL="0">
+              <a:buNone/>
+            </a:pPr>
+            <a:r>
+              <a:rPr lang="en-US" sz="1600" b="1" dirty="0">
+                <a:solidFill>
+                  <a:srgbClr val="0F0F0F"/>
+                </a:solidFill>
+                <a:latin typeface="Inter" pitchFamily="34" charset="0"/>
+                <a:ea typeface="Inter" pitchFamily="34" charset="-122"/>
+                <a:cs typeface="Inter" pitchFamily="34" charset="-120"/>
+              </a:rPr>
+              <a:t>Verfahren</a:t>
+            </a:r>
+            <a:endParaRPr lang="en-US" sz="1600" dirty="0"/>
+          </a:p>
+        </p:txBody>
+      </p:sp>
+      <p:sp>
+        <p:nvSpPr>
+          <p:cNvPr id="34" name="Text 13"/>
+          <p:cNvSpPr/>
+          <p:nvPr>
+            <p:ph idx="132" type="body" hasCustomPrompt="1"/>
+          </p:nvPr>
+        </p:nvSpPr>
+        <p:spPr>
+          <a:xfrm>
+            <a:off x="6931152" y="1938528"/>
+            <a:ext cx="1645920" cy="1097280"/>
+          </a:xfrm>
+          <a:prstGeom prst="rect">
+            <a:avLst/>
+          </a:prstGeom>
+          <a:noFill/>
+          <a:ln/>
+        </p:spPr>
+        <p:txBody>
+          <a:bodyPr wrap="square" rtlCol="0"/>
+          <a:lstStyle>
+            <a:lvl1pPr algn="l" indent="0" marL="0">
+              <a:buNone/>
+              <a:defRPr lang="en-US" sz="1200" dirty="0">
+                <a:solidFill>
+                  <a:srgbClr val="0F0F0F"/>
+                </a:solidFill>
+                <a:latin typeface="Inter" pitchFamily="34" charset="0"/>
+                <a:ea typeface="Inter" pitchFamily="34" charset="-122"/>
+                <a:cs typeface="Inter" pitchFamily="34" charset="-120"/>
+              </a:defRPr>
+            </a:lvl1pPr>
+          </a:lstStyle>
+          <a:p>
+            <a:pPr algn="l" indent="0" marL="0">
+              <a:buNone/>
+            </a:pPr>
+            <a:r>
+              <a:rPr lang="en-US" sz="1200" dirty="0">
+                <a:solidFill>
+                  <a:srgbClr val="0F0F0F"/>
+                </a:solidFill>
+                <a:latin typeface="Inter" pitchFamily="34" charset="0"/>
+                <a:ea typeface="Inter" pitchFamily="34" charset="-122"/>
+                <a:cs typeface="Inter" pitchFamily="34" charset="-120"/>
+              </a:rPr>
+              <a:t>Ideal für …</a:t>
+            </a:r>
+            <a:endParaRPr lang="en-US" sz="1200" dirty="0"/>
+          </a:p>
+        </p:txBody>
+      </p:sp>
+      <p:sp>
+        <p:nvSpPr>
+          <p:cNvPr id="35" name="Text 13"/>
+          <p:cNvSpPr/>
+          <p:nvPr/>
+        </p:nvSpPr>
+        <p:spPr>
+          <a:xfrm>
+            <a:off x="6931152" y="3090672"/>
+            <a:ext cx="640080" cy="310896"/>
+          </a:xfrm>
+          <a:prstGeom prst="rect">
+            <a:avLst/>
+          </a:prstGeom>
+          <a:noFill/>
+          <a:ln/>
+        </p:spPr>
+        <p:txBody>
+          <a:bodyPr wrap="square" lIns="0" tIns="0" rIns="0" bIns="0" rtlCol="0" anchor="ctr"/>
+          <a:lstStyle/>
+          <a:p>
+            <a:pPr indent="0" marL="0">
+              <a:buNone/>
+            </a:pPr>
+            <a:r>
+              <a:rPr lang="en-US" sz="1000" dirty="0">
+                <a:solidFill>
+                  <a:srgbClr val="0F0F0F">
+                    <a:alpha val="60000"/>
+                  </a:srgbClr>
+                </a:solidFill>
+                <a:latin typeface="Inter" pitchFamily="34" charset="0"/>
+                <a:ea typeface="Inter" pitchFamily="34" charset="-122"/>
+                <a:cs typeface="Inter" pitchFamily="34" charset="-120"/>
+              </a:rPr>
+              <a:t>Wäsche</a:t>
+            </a:r>
+            <a:endParaRPr lang="en-US" sz="1000" dirty="0"/>
+          </a:p>
+        </p:txBody>
+      </p:sp>
+      <p:sp>
+        <p:nvSpPr>
+          <p:cNvPr id="36" name="Text 14"/>
+          <p:cNvSpPr/>
+          <p:nvPr>
+            <p:ph idx="134" type="body" hasCustomPrompt="1"/>
+          </p:nvPr>
+        </p:nvSpPr>
+        <p:spPr>
+          <a:xfrm>
+            <a:off x="7571232" y="3090672"/>
+            <a:ext cx="1005840" cy="310896"/>
+          </a:xfrm>
+          <a:prstGeom prst="rect">
+            <a:avLst/>
+          </a:prstGeom>
+          <a:noFill/>
+          <a:ln/>
+        </p:spPr>
+        <p:txBody>
+          <a:bodyPr wrap="square" rtlCol="0"/>
+          <a:lstStyle>
+            <a:lvl1pPr algn="l" indent="0" marL="0">
+              <a:buNone/>
+              <a:defRPr lang="en-US" sz="1200" b="1" dirty="0">
+                <a:solidFill>
+                  <a:srgbClr val="0F0F0F"/>
+                </a:solidFill>
+                <a:latin typeface="Inter" pitchFamily="34" charset="0"/>
+                <a:ea typeface="Inter" pitchFamily="34" charset="-122"/>
+                <a:cs typeface="Inter" pitchFamily="34" charset="-120"/>
+              </a:defRPr>
+            </a:lvl1pPr>
+          </a:lstStyle>
+          <a:p>
+            <a:pPr algn="l" indent="0" marL="0">
+              <a:buNone/>
+            </a:pPr>
+            <a:r>
+              <a:rPr lang="en-US" sz="1200" b="1" dirty="0">
+                <a:solidFill>
+                  <a:srgbClr val="0F0F0F"/>
+                </a:solidFill>
+                <a:latin typeface="Inter" pitchFamily="34" charset="0"/>
+                <a:ea typeface="Inter" pitchFamily="34" charset="-122"/>
+                <a:cs typeface="Inter" pitchFamily="34" charset="-120"/>
+              </a:rPr>
+              <a:t>…</a:t>
+            </a:r>
+            <a:endParaRPr lang="en-US" sz="1200" dirty="0"/>
+          </a:p>
+        </p:txBody>
+      </p:sp>
+      <p:sp>
+        <p:nvSpPr>
+          <p:cNvPr id="37" name="Text 14"/>
+          <p:cNvSpPr/>
+          <p:nvPr/>
+        </p:nvSpPr>
+        <p:spPr>
+          <a:xfrm>
+            <a:off x="6931152" y="3419856"/>
+            <a:ext cx="640080" cy="310896"/>
+          </a:xfrm>
+          <a:prstGeom prst="rect">
+            <a:avLst/>
+          </a:prstGeom>
+          <a:noFill/>
+          <a:ln/>
+        </p:spPr>
+        <p:txBody>
+          <a:bodyPr wrap="square" lIns="0" tIns="0" rIns="0" bIns="0" rtlCol="0" anchor="ctr"/>
+          <a:lstStyle/>
+          <a:p>
+            <a:pPr indent="0" marL="0">
+              <a:buNone/>
+            </a:pPr>
+            <a:r>
+              <a:rPr lang="en-US" sz="1000" dirty="0">
+                <a:solidFill>
+                  <a:srgbClr val="0F0F0F">
+                    <a:alpha val="60000"/>
+                  </a:srgbClr>
+                </a:solidFill>
+                <a:latin typeface="Inter" pitchFamily="34" charset="0"/>
+                <a:ea typeface="Inter" pitchFamily="34" charset="-122"/>
+                <a:cs typeface="Inter" pitchFamily="34" charset="-120"/>
+              </a:rPr>
+              <a:t>Auflage</a:t>
+            </a:r>
+            <a:endParaRPr lang="en-US" sz="1000" dirty="0"/>
+          </a:p>
+        </p:txBody>
+      </p:sp>
+      <p:sp>
+        <p:nvSpPr>
+          <p:cNvPr id="38" name="Text 15"/>
+          <p:cNvSpPr/>
+          <p:nvPr>
+            <p:ph idx="136" type="body" hasCustomPrompt="1"/>
+          </p:nvPr>
+        </p:nvSpPr>
+        <p:spPr>
+          <a:xfrm>
+            <a:off x="7571232" y="3419856"/>
+            <a:ext cx="1005840" cy="310896"/>
+          </a:xfrm>
+          <a:prstGeom prst="rect">
+            <a:avLst/>
+          </a:prstGeom>
+          <a:noFill/>
+          <a:ln/>
+        </p:spPr>
+        <p:txBody>
+          <a:bodyPr wrap="square" rtlCol="0"/>
+          <a:lstStyle>
+            <a:lvl1pPr algn="l" indent="0" marL="0">
+              <a:buNone/>
+              <a:defRPr lang="en-US" sz="1200" b="1" dirty="0">
+                <a:solidFill>
+                  <a:srgbClr val="0F0F0F"/>
+                </a:solidFill>
+                <a:latin typeface="Inter" pitchFamily="34" charset="0"/>
+                <a:ea typeface="Inter" pitchFamily="34" charset="-122"/>
+                <a:cs typeface="Inter" pitchFamily="34" charset="-120"/>
+              </a:defRPr>
+            </a:lvl1pPr>
+          </a:lstStyle>
+          <a:p>
+            <a:pPr algn="l" indent="0" marL="0">
+              <a:buNone/>
+            </a:pPr>
+            <a:r>
+              <a:rPr lang="en-US" sz="1200" b="1" dirty="0">
+                <a:solidFill>
+                  <a:srgbClr val="0F0F0F"/>
+                </a:solidFill>
+                <a:latin typeface="Inter" pitchFamily="34" charset="0"/>
+                <a:ea typeface="Inter" pitchFamily="34" charset="-122"/>
+                <a:cs typeface="Inter" pitchFamily="34" charset="-120"/>
+              </a:rPr>
+              <a:t>…</a:t>
+            </a:r>
+            <a:endParaRPr lang="en-US" sz="1200" dirty="0"/>
+          </a:p>
+        </p:txBody>
+      </p:sp>
+      <p:sp>
+        <p:nvSpPr>
+          <p:cNvPr id="39" name="Text 15"/>
+          <p:cNvSpPr/>
+          <p:nvPr/>
+        </p:nvSpPr>
+        <p:spPr>
+          <a:xfrm>
+            <a:off x="6931152" y="3749040"/>
+            <a:ext cx="640080" cy="310896"/>
+          </a:xfrm>
+          <a:prstGeom prst="rect">
+            <a:avLst/>
+          </a:prstGeom>
+          <a:noFill/>
+          <a:ln/>
+        </p:spPr>
+        <p:txBody>
+          <a:bodyPr wrap="square" lIns="0" tIns="0" rIns="0" bIns="0" rtlCol="0" anchor="ctr"/>
+          <a:lstStyle/>
+          <a:p>
+            <a:pPr indent="0" marL="0">
+              <a:buNone/>
+            </a:pPr>
+            <a:r>
+              <a:rPr lang="en-US" sz="1000" dirty="0">
+                <a:solidFill>
+                  <a:srgbClr val="0F0F0F">
+                    <a:alpha val="60000"/>
+                  </a:srgbClr>
+                </a:solidFill>
+                <a:latin typeface="Inter" pitchFamily="34" charset="0"/>
+                <a:ea typeface="Inter" pitchFamily="34" charset="-122"/>
+                <a:cs typeface="Inter" pitchFamily="34" charset="-120"/>
+              </a:rPr>
+              <a:t>Farbe</a:t>
+            </a:r>
+            <a:endParaRPr lang="en-US" sz="1000" dirty="0"/>
+          </a:p>
+        </p:txBody>
+      </p:sp>
+      <p:sp>
+        <p:nvSpPr>
+          <p:cNvPr id="40" name="Text 16"/>
+          <p:cNvSpPr/>
+          <p:nvPr>
+            <p:ph idx="138" type="body" hasCustomPrompt="1"/>
+          </p:nvPr>
+        </p:nvSpPr>
+        <p:spPr>
+          <a:xfrm>
+            <a:off x="7571232" y="3749040"/>
+            <a:ext cx="1005840" cy="310896"/>
+          </a:xfrm>
+          <a:prstGeom prst="rect">
+            <a:avLst/>
+          </a:prstGeom>
+          <a:noFill/>
+          <a:ln/>
+        </p:spPr>
+        <p:txBody>
+          <a:bodyPr wrap="square" rtlCol="0"/>
+          <a:lstStyle>
+            <a:lvl1pPr algn="l" indent="0" marL="0">
+              <a:buNone/>
+              <a:defRPr lang="en-US" sz="1200" b="1" dirty="0">
+                <a:solidFill>
+                  <a:srgbClr val="0F0F0F"/>
+                </a:solidFill>
+                <a:latin typeface="Inter" pitchFamily="34" charset="0"/>
+                <a:ea typeface="Inter" pitchFamily="34" charset="-122"/>
+                <a:cs typeface="Inter" pitchFamily="34" charset="-120"/>
+              </a:defRPr>
+            </a:lvl1pPr>
+          </a:lstStyle>
+          <a:p>
+            <a:pPr algn="l" indent="0" marL="0">
+              <a:buNone/>
+            </a:pPr>
+            <a:r>
+              <a:rPr lang="en-US" sz="1200" b="1" dirty="0">
+                <a:solidFill>
+                  <a:srgbClr val="0F0F0F"/>
+                </a:solidFill>
+                <a:latin typeface="Inter" pitchFamily="34" charset="0"/>
+                <a:ea typeface="Inter" pitchFamily="34" charset="-122"/>
+                <a:cs typeface="Inter" pitchFamily="34" charset="-120"/>
+              </a:rPr>
+              <a:t>…</a:t>
+            </a:r>
+            <a:endParaRPr lang="en-US" sz="1200" dirty="0"/>
+          </a:p>
+        </p:txBody>
+      </p:sp>
+      <p:sp>
+        <p:nvSpPr>
+          <p:cNvPr id="41" name="Text 16"/>
+          <p:cNvSpPr/>
+          <p:nvPr>
+            <p:ph idx="139" type="body" hasCustomPrompt="1"/>
+          </p:nvPr>
+        </p:nvSpPr>
+        <p:spPr>
+          <a:xfrm>
+            <a:off x="457200" y="4251960"/>
+            <a:ext cx="8229600" cy="411480"/>
+          </a:xfrm>
+          <a:prstGeom prst="rect">
+            <a:avLst/>
+          </a:prstGeom>
+          <a:noFill/>
+          <a:ln/>
+        </p:spPr>
+        <p:txBody>
+          <a:bodyPr wrap="square" rtlCol="0"/>
+          <a:lstStyle>
+            <a:lvl1pPr algn="l" indent="0" marL="0">
+              <a:buNone/>
+              <a:defRPr lang="en-US" sz="1200" dirty="0">
+                <a:solidFill>
+                  <a:srgbClr val="0F0F0F"/>
+                </a:solidFill>
+                <a:latin typeface="Inter" pitchFamily="34" charset="0"/>
+                <a:ea typeface="Inter" pitchFamily="34" charset="-122"/>
+                <a:cs typeface="Inter" pitchFamily="34" charset="-120"/>
+              </a:defRPr>
+            </a:lvl1pPr>
+          </a:lstStyle>
+          <a:p>
+            <a:pPr algn="l" indent="0" marL="0">
+              <a:buNone/>
+            </a:pPr>
+            <a:r>
+              <a:rPr lang="en-US" sz="1200" dirty="0">
+                <a:solidFill>
+                  <a:srgbClr val="0F0F0F"/>
+                </a:solidFill>
+                <a:latin typeface="Inter" pitchFamily="34" charset="0"/>
+                <a:ea typeface="Inter" pitchFamily="34" charset="-122"/>
+                <a:cs typeface="Inter" pitchFamily="34" charset="-120"/>
+              </a:rPr>
+              <a:t>Kurz entschieden: …</a:t>
+            </a:r>
+            <a:endParaRPr lang="en-US" sz="1200" dirty="0"/>
+          </a:p>
+        </p:txBody>
+      </p:sp>
+      <p:sp>
+        <p:nvSpPr>
+          <p:cNvPr id="42" name="Text 16"/>
+          <p:cNvSpPr/>
+          <p:nvPr/>
+        </p:nvSpPr>
+        <p:spPr>
+          <a:xfrm>
+            <a:off x="457200" y="4709160"/>
+            <a:ext cx="2743200" cy="274320"/>
+          </a:xfrm>
+          <a:prstGeom prst="rect">
+            <a:avLst/>
+          </a:prstGeom>
+          <a:noFill/>
+          <a:ln/>
+        </p:spPr>
+        <p:txBody>
+          <a:bodyPr wrap="square" lIns="0" tIns="0" rIns="0" bIns="0" rtlCol="0" anchor="ctr"/>
+          <a:lstStyle/>
+          <a:p>
+            <a:pPr indent="0" marL="0">
+              <a:buNone/>
+            </a:pPr>
+            <a:r>
+              <a:rPr lang="en-US" sz="1000" dirty="0">
+                <a:solidFill>
+                  <a:srgbClr val="0F0F0F">
+                    <a:alpha val="60000"/>
+                  </a:srgbClr>
+                </a:solidFill>
+                <a:latin typeface="Inter" pitchFamily="34" charset="0"/>
+                <a:ea typeface="Inter" pitchFamily="34" charset="-122"/>
+                <a:cs typeface="Inter" pitchFamily="34" charset="-120"/>
+              </a:rPr>
+              <a:t>maiershirts.de</a:t>
+            </a:r>
+            <a:endParaRPr lang="en-US" sz="1000" dirty="0"/>
+          </a:p>
+        </p:txBody>
+      </p:sp>
+      <p:sp>
+        <p:nvSpPr>
+          <p:cNvPr id="25" name="Slide Number Placeholder 0"/>
+          <p:cNvSpPr>
+            <a:spLocks noGrp="1"/>
+          </p:cNvSpPr>
+          <p:nvPr>
+            <p:ph type="sldNum" sz="quarter" idx="4294967295"/>
+          </p:nvPr>
+        </p:nvSpPr>
+        <p:spPr>
+          <a:xfrm>
+            <a:off x="8229600" y="4709160"/>
+            <a:ext cx="457200" cy="274320"/>
+          </a:xfrm>
+          <a:prstGeom prst="rect">
+            <a:avLst/>
+          </a:prstGeom>
+          <a:extLst>
+            <a:ext uri="{C572A759-6A51-4108-AA02-DFA0A04FC94B}">
+              <ma14:wrappingTextBoxFlag xmlns:ma14="http://schemas.microsoft.com/office/mac/drawingml/2011/main" val="0"/>
+            </a:ext>
+          </a:extLst>
+        </p:spPr>
+        <p:txBody>
+          <a:bodyPr lIns="0" tIns="0" rIns="0" bIns="0"/>
+          <a:lstStyle>
+            <a:lvl1pPr>
+              <a:defRPr sz="1000">
+                <a:solidFill>
+                  <a:srgbClr val="0F0F0F"/>
+                </a:solidFill>
+                <a:latin typeface="Inter"/>
+                <a:ea typeface="Inter"/>
+                <a:cs typeface="Inter"/>
+              </a:defRPr>
+            </a:lvl1pPr>
+          </a:lstStyle>
+          <a:p>
+            <a:pPr algn="r"/>
+            <a:fld id="{F7021451-1387-4CA6-816F-3879F97B5CBC}" type="slidenum">
+              <a:rPr b="0" lang="en-US"/>
+              <a:t>1012</a:t>
+            </a:fld>
+            <a:endParaRPr lang="en-US"/>
+          </a:p>
+        </p:txBody>
+      </p:sp>
+    </p:spTree>
+  </p:cSld>
+  <p:clrMapOvr>
+    <a:masterClrMapping/>
+  </p:clrMapOvr>
+</p:sldLayout>
+</file>
+
+<file path=ppt/slideLayouts/slideLayout13.xml><?xml version="1.0" encoding="utf-8"?>
+<p:sldLayout xmlns:a="http://schemas.openxmlformats.org/drawingml/2006/main" xmlns:r="http://schemas.openxmlformats.org/officeDocument/2006/relationships" xmlns:p="http://schemas.openxmlformats.org/presentationml/2006/main" preserve="1">
   <p:cSld name="MS_TEXTIL">
     <p:bg>
       <p:bgPr>
@@ -4639,7 +6750,7 @@
             <a:pPr algn="r"/>
             <a:fld id="{F7021451-1387-4CA6-816F-3879F97B5CBC}" type="slidenum">
               <a:rPr b="0" lang="en-US"/>
-              <a:t>1012</a:t>
+              <a:t>1013</a:t>
             </a:fld>
             <a:endParaRPr lang="en-US"/>
           </a:p>
@@ -4653,7 +6764,7 @@
 </p:sldLayout>
 </file>
 
-<file path=ppt/slideLayouts/slideLayout13.xml><?xml version="1.0" encoding="utf-8"?>
+<file path=ppt/slideLayouts/slideLayout14.xml><?xml version="1.0" encoding="utf-8"?>
 <p:sldLayout xmlns:a="http://schemas.openxmlformats.org/drawingml/2006/main" xmlns:r="http://schemas.openxmlformats.org/officeDocument/2006/relationships" xmlns:p="http://schemas.openxmlformats.org/presentationml/2006/main" preserve="1">
   <p:cSld name="MS_PREISSTAFFEL">
     <p:bg>
@@ -5552,7 +7663,7 @@
             <a:pPr algn="r"/>
             <a:fld id="{F7021451-1387-4CA6-816F-3879F97B5CBC}" type="slidenum">
               <a:rPr b="0" lang="en-US"/>
-              <a:t>1013</a:t>
+              <a:t>1014</a:t>
             </a:fld>
             <a:endParaRPr lang="en-US"/>
           </a:p>
@@ -5566,7 +7677,7 @@
 </p:sldLayout>
 </file>
 
-<file path=ppt/slideLayouts/slideLayout14.xml><?xml version="1.0" encoding="utf-8"?>
+<file path=ppt/slideLayouts/slideLayout15.xml><?xml version="1.0" encoding="utf-8"?>
 <p:sldLayout xmlns:a="http://schemas.openxmlformats.org/drawingml/2006/main" xmlns:r="http://schemas.openxmlformats.org/officeDocument/2006/relationships" xmlns:p="http://schemas.openxmlformats.org/presentationml/2006/main" preserve="1">
   <p:cSld name="MS_ANGEBOT">
     <p:bg>
@@ -6089,7 +8200,7 @@
             <a:pPr algn="r"/>
             <a:fld id="{F7021451-1387-4CA6-816F-3879F97B5CBC}" type="slidenum">
               <a:rPr b="0" lang="en-US"/>
-              <a:t>1014</a:t>
+              <a:t>1015</a:t>
             </a:fld>
             <a:endParaRPr lang="en-US"/>
           </a:p>
@@ -6103,7 +8214,7 @@
 </p:sldLayout>
 </file>
 
-<file path=ppt/slideLayouts/slideLayout15.xml><?xml version="1.0" encoding="utf-8"?>
+<file path=ppt/slideLayouts/slideLayout16.xml><?xml version="1.0" encoding="utf-8"?>
 <p:sldLayout xmlns:a="http://schemas.openxmlformats.org/drawingml/2006/main" xmlns:r="http://schemas.openxmlformats.org/officeDocument/2006/relationships" xmlns:p="http://schemas.openxmlformats.org/presentationml/2006/main" preserve="1">
   <p:cSld name="MS_REFERENZEN">
     <p:bg>
@@ -7034,7 +9145,7 @@
             <a:pPr algn="r"/>
             <a:fld id="{F7021451-1387-4CA6-816F-3879F97B5CBC}" type="slidenum">
               <a:rPr b="0" lang="en-US"/>
-              <a:t>1015</a:t>
+              <a:t>1016</a:t>
             </a:fld>
             <a:endParaRPr lang="en-US"/>
           </a:p>
@@ -7048,7 +9159,7 @@
 </p:sldLayout>
 </file>
 
-<file path=ppt/slideLayouts/slideLayout16.xml><?xml version="1.0" encoding="utf-8"?>
+<file path=ppt/slideLayouts/slideLayout17.xml><?xml version="1.0" encoding="utf-8"?>
 <p:sldLayout xmlns:a="http://schemas.openxmlformats.org/drawingml/2006/main" xmlns:r="http://schemas.openxmlformats.org/officeDocument/2006/relationships" xmlns:p="http://schemas.openxmlformats.org/presentationml/2006/main" preserve="1">
   <p:cSld name="MS_REFERENZEN_WAPPEN">
     <p:bg>
@@ -8175,7 +10286,7 @@
             <a:pPr algn="r"/>
             <a:fld id="{F7021451-1387-4CA6-816F-3879F97B5CBC}" type="slidenum">
               <a:rPr b="0" lang="en-US"/>
-              <a:t>1016</a:t>
+              <a:t>1017</a:t>
             </a:fld>
             <a:endParaRPr lang="en-US"/>
           </a:p>
@@ -8189,7 +10300,7 @@
 </p:sldLayout>
 </file>
 
-<file path=ppt/slideLayouts/slideLayout17.xml><?xml version="1.0" encoding="utf-8"?>
+<file path=ppt/slideLayouts/slideLayout18.xml><?xml version="1.0" encoding="utf-8"?>
 <p:sldLayout xmlns:a="http://schemas.openxmlformats.org/drawingml/2006/main" xmlns:r="http://schemas.openxmlformats.org/officeDocument/2006/relationships" xmlns:p="http://schemas.openxmlformats.org/presentationml/2006/main" preserve="1">
   <p:cSld name="MS_ABSCHLUSS">
     <p:bg>
@@ -10851,6 +12962,7 @@
     <p:sldLayoutId id="2147483663" r:id="rId15"/>
     <p:sldLayoutId id="2147483664" r:id="rId16"/>
     <p:sldLayoutId id="2147483665" r:id="rId17"/>
+    <p:sldLayoutId id="2147483666" r:id="rId18"/>
   </p:sldLayoutIdLst>
   <p:hf sldNum="0" hdr="0" ftr="0" dt="0"/>
   <p:txStyles>
@@ -11351,6 +13463,739 @@
                 <a:ea typeface="Inter" pitchFamily="34" charset="-122"/>
                 <a:cs typeface="Inter" pitchFamily="34" charset="-120"/>
               </a:rPr>
+              <a:t>Preisstaffel T-Shirt, Brustdruck 1-farbig</a:t>
+            </a:r>
+            <a:endParaRPr lang="en-US" sz="2800" dirty="0"/>
+          </a:p>
+        </p:txBody>
+      </p:sp>
+      <p:sp>
+        <p:nvSpPr>
+          <p:cNvPr id="3" name="Text 0"/>
+          <p:cNvSpPr txBox="1"/>
+          <p:nvPr>
+            <p:ph idx="102" type="body" hasCustomPrompt="1"/>
+          </p:nvPr>
+        </p:nvSpPr>
+        <p:spPr>
+          <a:xfrm>
+            <a:off x="640080" y="1554480"/>
+            <a:ext cx="1600200" cy="365760"/>
+          </a:xfrm>
+          <a:prstGeom prst="rect">
+            <a:avLst/>
+          </a:prstGeom>
+          <a:noFill/>
+          <a:ln/>
+        </p:spPr>
+        <p:txBody>
+          <a:bodyPr wrap="square" lIns="0" tIns="0" rIns="0" bIns="0" rtlCol="0" anchor="ctr"/>
+          <a:lstStyle/>
+          <a:p>
+            <a:pPr algn="l" indent="0" marL="0">
+              <a:buNone/>
+            </a:pPr>
+            <a:r>
+              <a:rPr lang="en-US" sz="1400" b="1" dirty="0">
+                <a:solidFill>
+                  <a:srgbClr val="0F0F0F"/>
+                </a:solidFill>
+                <a:latin typeface="Inter" pitchFamily="34" charset="0"/>
+                <a:ea typeface="Inter" pitchFamily="34" charset="-122"/>
+                <a:cs typeface="Inter" pitchFamily="34" charset="-120"/>
+              </a:rPr>
+              <a:t>ab 10 Stück</a:t>
+            </a:r>
+            <a:endParaRPr lang="en-US" sz="1400" dirty="0"/>
+          </a:p>
+        </p:txBody>
+      </p:sp>
+      <p:sp>
+        <p:nvSpPr>
+          <p:cNvPr id="4" name="Text 0"/>
+          <p:cNvSpPr txBox="1"/>
+          <p:nvPr>
+            <p:ph idx="103" type="body" hasCustomPrompt="1"/>
+          </p:nvPr>
+        </p:nvSpPr>
+        <p:spPr>
+          <a:xfrm>
+            <a:off x="640080" y="1965960"/>
+            <a:ext cx="1600200" cy="731520"/>
+          </a:xfrm>
+          <a:prstGeom prst="rect">
+            <a:avLst/>
+          </a:prstGeom>
+          <a:noFill/>
+          <a:ln/>
+        </p:spPr>
+        <p:txBody>
+          <a:bodyPr wrap="square" lIns="0" tIns="0" rIns="0" bIns="0" rtlCol="0" anchor="ctr"/>
+          <a:lstStyle/>
+          <a:p>
+            <a:pPr algn="l" indent="0" marL="0">
+              <a:buNone/>
+            </a:pPr>
+            <a:r>
+              <a:rPr lang="en-US" sz="3200" b="1" dirty="0">
+                <a:solidFill>
+                  <a:srgbClr val="677E5B"/>
+                </a:solidFill>
+                <a:latin typeface="Inter" pitchFamily="34" charset="0"/>
+                <a:ea typeface="Inter" pitchFamily="34" charset="-122"/>
+                <a:cs typeface="Inter" pitchFamily="34" charset="-120"/>
+              </a:rPr>
+              <a:t>14,90 €</a:t>
+            </a:r>
+            <a:endParaRPr lang="en-US" sz="3200" dirty="0"/>
+          </a:p>
+        </p:txBody>
+      </p:sp>
+      <p:sp>
+        <p:nvSpPr>
+          <p:cNvPr id="5" name="Text 0"/>
+          <p:cNvSpPr txBox="1"/>
+          <p:nvPr>
+            <p:ph idx="104" type="body" hasCustomPrompt="1"/>
+          </p:nvPr>
+        </p:nvSpPr>
+        <p:spPr>
+          <a:xfrm>
+            <a:off x="640080" y="2743200"/>
+            <a:ext cx="1600200" cy="502920"/>
+          </a:xfrm>
+          <a:prstGeom prst="rect">
+            <a:avLst/>
+          </a:prstGeom>
+          <a:noFill/>
+          <a:ln/>
+        </p:spPr>
+        <p:txBody>
+          <a:bodyPr wrap="square" lIns="0" tIns="0" rIns="0" bIns="0" rtlCol="0" anchor="t"/>
+          <a:lstStyle/>
+          <a:p>
+            <a:pPr algn="l" indent="0" marL="0">
+              <a:buNone/>
+            </a:pPr>
+            <a:r>
+              <a:rPr lang="en-US" sz="1200" dirty="0">
+                <a:solidFill>
+                  <a:srgbClr val="0F0F0F">
+                    <a:alpha val="60000"/>
+                  </a:srgbClr>
+                </a:solidFill>
+                <a:latin typeface="Inter" pitchFamily="34" charset="0"/>
+                <a:ea typeface="Inter" pitchFamily="34" charset="-122"/>
+                <a:cs typeface="Inter" pitchFamily="34" charset="-120"/>
+              </a:rPr>
+              <a:t>pro Stück, netto</a:t>
+            </a:r>
+            <a:endParaRPr lang="en-US" sz="1200" dirty="0"/>
+          </a:p>
+          <a:p>
+            <a:pPr algn="l" indent="0" marL="0">
+              <a:buNone/>
+            </a:pPr>
+            <a:r>
+              <a:rPr lang="en-US" sz="1200" dirty="0">
+                <a:solidFill>
+                  <a:srgbClr val="0F0F0F">
+                    <a:alpha val="60000"/>
+                  </a:srgbClr>
+                </a:solidFill>
+                <a:latin typeface="Inter" pitchFamily="34" charset="0"/>
+                <a:ea typeface="Inter" pitchFamily="34" charset="-122"/>
+                <a:cs typeface="Inter" pitchFamily="34" charset="-120"/>
+              </a:rPr>
+              <a:t>inkl. Textil und Druck</a:t>
+            </a:r>
+            <a:endParaRPr lang="en-US" sz="1200" dirty="0"/>
+          </a:p>
+        </p:txBody>
+      </p:sp>
+      <p:sp>
+        <p:nvSpPr>
+          <p:cNvPr id="6" name="Text 0"/>
+          <p:cNvSpPr txBox="1"/>
+          <p:nvPr>
+            <p:ph idx="105" type="body" hasCustomPrompt="1"/>
+          </p:nvPr>
+        </p:nvSpPr>
+        <p:spPr>
+          <a:xfrm>
+            <a:off x="2743200" y="1554480"/>
+            <a:ext cx="1600200" cy="365760"/>
+          </a:xfrm>
+          <a:prstGeom prst="rect">
+            <a:avLst/>
+          </a:prstGeom>
+          <a:noFill/>
+          <a:ln/>
+        </p:spPr>
+        <p:txBody>
+          <a:bodyPr wrap="square" lIns="0" tIns="0" rIns="0" bIns="0" rtlCol="0" anchor="ctr"/>
+          <a:lstStyle/>
+          <a:p>
+            <a:pPr algn="l" indent="0" marL="0">
+              <a:buNone/>
+            </a:pPr>
+            <a:r>
+              <a:rPr lang="en-US" sz="1400" b="1" dirty="0">
+                <a:solidFill>
+                  <a:srgbClr val="0F0F0F"/>
+                </a:solidFill>
+                <a:latin typeface="Inter" pitchFamily="34" charset="0"/>
+                <a:ea typeface="Inter" pitchFamily="34" charset="-122"/>
+                <a:cs typeface="Inter" pitchFamily="34" charset="-120"/>
+              </a:rPr>
+              <a:t>ab 25 Stück</a:t>
+            </a:r>
+            <a:endParaRPr lang="en-US" sz="1400" dirty="0"/>
+          </a:p>
+        </p:txBody>
+      </p:sp>
+      <p:sp>
+        <p:nvSpPr>
+          <p:cNvPr id="7" name="Text 0"/>
+          <p:cNvSpPr txBox="1"/>
+          <p:nvPr>
+            <p:ph idx="106" type="body" hasCustomPrompt="1"/>
+          </p:nvPr>
+        </p:nvSpPr>
+        <p:spPr>
+          <a:xfrm>
+            <a:off x="2743200" y="1965960"/>
+            <a:ext cx="1600200" cy="731520"/>
+          </a:xfrm>
+          <a:prstGeom prst="rect">
+            <a:avLst/>
+          </a:prstGeom>
+          <a:noFill/>
+          <a:ln/>
+        </p:spPr>
+        <p:txBody>
+          <a:bodyPr wrap="square" lIns="0" tIns="0" rIns="0" bIns="0" rtlCol="0" anchor="ctr"/>
+          <a:lstStyle/>
+          <a:p>
+            <a:pPr algn="l" indent="0" marL="0">
+              <a:buNone/>
+            </a:pPr>
+            <a:r>
+              <a:rPr lang="en-US" sz="3200" b="1" dirty="0">
+                <a:solidFill>
+                  <a:srgbClr val="677E5B"/>
+                </a:solidFill>
+                <a:latin typeface="Inter" pitchFamily="34" charset="0"/>
+                <a:ea typeface="Inter" pitchFamily="34" charset="-122"/>
+                <a:cs typeface="Inter" pitchFamily="34" charset="-120"/>
+              </a:rPr>
+              <a:t>12,90 €</a:t>
+            </a:r>
+            <a:endParaRPr lang="en-US" sz="3200" dirty="0"/>
+          </a:p>
+        </p:txBody>
+      </p:sp>
+      <p:sp>
+        <p:nvSpPr>
+          <p:cNvPr id="8" name="Text 0"/>
+          <p:cNvSpPr txBox="1"/>
+          <p:nvPr>
+            <p:ph idx="107" type="body" hasCustomPrompt="1"/>
+          </p:nvPr>
+        </p:nvSpPr>
+        <p:spPr>
+          <a:xfrm>
+            <a:off x="2743200" y="2743200"/>
+            <a:ext cx="1600200" cy="502920"/>
+          </a:xfrm>
+          <a:prstGeom prst="rect">
+            <a:avLst/>
+          </a:prstGeom>
+          <a:noFill/>
+          <a:ln/>
+        </p:spPr>
+        <p:txBody>
+          <a:bodyPr wrap="square" lIns="0" tIns="0" rIns="0" bIns="0" rtlCol="0" anchor="t"/>
+          <a:lstStyle/>
+          <a:p>
+            <a:pPr algn="l" indent="0" marL="0">
+              <a:buNone/>
+            </a:pPr>
+            <a:r>
+              <a:rPr lang="en-US" sz="1200" dirty="0">
+                <a:solidFill>
+                  <a:srgbClr val="0F0F0F">
+                    <a:alpha val="60000"/>
+                  </a:srgbClr>
+                </a:solidFill>
+                <a:latin typeface="Inter" pitchFamily="34" charset="0"/>
+                <a:ea typeface="Inter" pitchFamily="34" charset="-122"/>
+                <a:cs typeface="Inter" pitchFamily="34" charset="-120"/>
+              </a:rPr>
+              <a:t>pro Stück, netto</a:t>
+            </a:r>
+            <a:endParaRPr lang="en-US" sz="1200" dirty="0"/>
+          </a:p>
+          <a:p>
+            <a:pPr algn="l" indent="0" marL="0">
+              <a:buNone/>
+            </a:pPr>
+            <a:r>
+              <a:rPr lang="en-US" sz="1200" dirty="0">
+                <a:solidFill>
+                  <a:srgbClr val="0F0F0F">
+                    <a:alpha val="60000"/>
+                  </a:srgbClr>
+                </a:solidFill>
+                <a:latin typeface="Inter" pitchFamily="34" charset="0"/>
+                <a:ea typeface="Inter" pitchFamily="34" charset="-122"/>
+                <a:cs typeface="Inter" pitchFamily="34" charset="-120"/>
+              </a:rPr>
+              <a:t>inkl. Textil und Druck</a:t>
+            </a:r>
+            <a:endParaRPr lang="en-US" sz="1200" dirty="0"/>
+          </a:p>
+        </p:txBody>
+      </p:sp>
+      <p:sp>
+        <p:nvSpPr>
+          <p:cNvPr id="9" name="Text 0"/>
+          <p:cNvSpPr txBox="1"/>
+          <p:nvPr>
+            <p:ph idx="108" type="body" hasCustomPrompt="1"/>
+          </p:nvPr>
+        </p:nvSpPr>
+        <p:spPr>
+          <a:xfrm>
+            <a:off x="4846320" y="1554480"/>
+            <a:ext cx="1600200" cy="365760"/>
+          </a:xfrm>
+          <a:prstGeom prst="rect">
+            <a:avLst/>
+          </a:prstGeom>
+          <a:noFill/>
+          <a:ln/>
+        </p:spPr>
+        <p:txBody>
+          <a:bodyPr wrap="square" lIns="0" tIns="0" rIns="0" bIns="0" rtlCol="0" anchor="ctr"/>
+          <a:lstStyle/>
+          <a:p>
+            <a:pPr algn="l" indent="0" marL="0">
+              <a:buNone/>
+            </a:pPr>
+            <a:r>
+              <a:rPr lang="en-US" sz="1400" b="1" dirty="0">
+                <a:solidFill>
+                  <a:srgbClr val="0F0F0F"/>
+                </a:solidFill>
+                <a:latin typeface="Inter" pitchFamily="34" charset="0"/>
+                <a:ea typeface="Inter" pitchFamily="34" charset="-122"/>
+                <a:cs typeface="Inter" pitchFamily="34" charset="-120"/>
+              </a:rPr>
+              <a:t>ab 50 Stück</a:t>
+            </a:r>
+            <a:endParaRPr lang="en-US" sz="1400" dirty="0"/>
+          </a:p>
+        </p:txBody>
+      </p:sp>
+      <p:sp>
+        <p:nvSpPr>
+          <p:cNvPr id="10" name="Text 0"/>
+          <p:cNvSpPr txBox="1"/>
+          <p:nvPr>
+            <p:ph idx="109" type="body" hasCustomPrompt="1"/>
+          </p:nvPr>
+        </p:nvSpPr>
+        <p:spPr>
+          <a:xfrm>
+            <a:off x="4846320" y="1965960"/>
+            <a:ext cx="1600200" cy="731520"/>
+          </a:xfrm>
+          <a:prstGeom prst="rect">
+            <a:avLst/>
+          </a:prstGeom>
+          <a:noFill/>
+          <a:ln/>
+        </p:spPr>
+        <p:txBody>
+          <a:bodyPr wrap="square" lIns="0" tIns="0" rIns="0" bIns="0" rtlCol="0" anchor="ctr"/>
+          <a:lstStyle/>
+          <a:p>
+            <a:pPr algn="l" indent="0" marL="0">
+              <a:buNone/>
+            </a:pPr>
+            <a:r>
+              <a:rPr lang="en-US" sz="3200" b="1" dirty="0">
+                <a:solidFill>
+                  <a:srgbClr val="677E5B"/>
+                </a:solidFill>
+                <a:latin typeface="Inter" pitchFamily="34" charset="0"/>
+                <a:ea typeface="Inter" pitchFamily="34" charset="-122"/>
+                <a:cs typeface="Inter" pitchFamily="34" charset="-120"/>
+              </a:rPr>
+              <a:t>11,50 €</a:t>
+            </a:r>
+            <a:endParaRPr lang="en-US" sz="3200" dirty="0"/>
+          </a:p>
+        </p:txBody>
+      </p:sp>
+      <p:sp>
+        <p:nvSpPr>
+          <p:cNvPr id="11" name="Text 0"/>
+          <p:cNvSpPr txBox="1"/>
+          <p:nvPr>
+            <p:ph idx="110" type="body" hasCustomPrompt="1"/>
+          </p:nvPr>
+        </p:nvSpPr>
+        <p:spPr>
+          <a:xfrm>
+            <a:off x="4846320" y="2743200"/>
+            <a:ext cx="1600200" cy="502920"/>
+          </a:xfrm>
+          <a:prstGeom prst="rect">
+            <a:avLst/>
+          </a:prstGeom>
+          <a:noFill/>
+          <a:ln/>
+        </p:spPr>
+        <p:txBody>
+          <a:bodyPr wrap="square" lIns="0" tIns="0" rIns="0" bIns="0" rtlCol="0" anchor="t"/>
+          <a:lstStyle/>
+          <a:p>
+            <a:pPr algn="l" indent="0" marL="0">
+              <a:buNone/>
+            </a:pPr>
+            <a:r>
+              <a:rPr lang="en-US" sz="1200" dirty="0">
+                <a:solidFill>
+                  <a:srgbClr val="0F0F0F">
+                    <a:alpha val="60000"/>
+                  </a:srgbClr>
+                </a:solidFill>
+                <a:latin typeface="Inter" pitchFamily="34" charset="0"/>
+                <a:ea typeface="Inter" pitchFamily="34" charset="-122"/>
+                <a:cs typeface="Inter" pitchFamily="34" charset="-120"/>
+              </a:rPr>
+              <a:t>pro Stück, netto</a:t>
+            </a:r>
+            <a:endParaRPr lang="en-US" sz="1200" dirty="0"/>
+          </a:p>
+          <a:p>
+            <a:pPr algn="l" indent="0" marL="0">
+              <a:buNone/>
+            </a:pPr>
+            <a:r>
+              <a:rPr lang="en-US" sz="1200" dirty="0">
+                <a:solidFill>
+                  <a:srgbClr val="0F0F0F">
+                    <a:alpha val="60000"/>
+                  </a:srgbClr>
+                </a:solidFill>
+                <a:latin typeface="Inter" pitchFamily="34" charset="0"/>
+                <a:ea typeface="Inter" pitchFamily="34" charset="-122"/>
+                <a:cs typeface="Inter" pitchFamily="34" charset="-120"/>
+              </a:rPr>
+              <a:t>inkl. Textil und Druck</a:t>
+            </a:r>
+            <a:endParaRPr lang="en-US" sz="1200" dirty="0"/>
+          </a:p>
+        </p:txBody>
+      </p:sp>
+      <p:sp>
+        <p:nvSpPr>
+          <p:cNvPr id="12" name="Text 0"/>
+          <p:cNvSpPr txBox="1"/>
+          <p:nvPr>
+            <p:ph idx="111" type="body" hasCustomPrompt="1"/>
+          </p:nvPr>
+        </p:nvSpPr>
+        <p:spPr>
+          <a:xfrm>
+            <a:off x="6949440" y="1554480"/>
+            <a:ext cx="1600200" cy="365760"/>
+          </a:xfrm>
+          <a:prstGeom prst="rect">
+            <a:avLst/>
+          </a:prstGeom>
+          <a:noFill/>
+          <a:ln/>
+        </p:spPr>
+        <p:txBody>
+          <a:bodyPr wrap="square" lIns="0" tIns="0" rIns="0" bIns="0" rtlCol="0" anchor="ctr"/>
+          <a:lstStyle/>
+          <a:p>
+            <a:pPr algn="l" indent="0" marL="0">
+              <a:buNone/>
+            </a:pPr>
+            <a:r>
+              <a:rPr lang="en-US" sz="1400" b="1" dirty="0">
+                <a:solidFill>
+                  <a:srgbClr val="0F0F0F"/>
+                </a:solidFill>
+                <a:latin typeface="Inter" pitchFamily="34" charset="0"/>
+                <a:ea typeface="Inter" pitchFamily="34" charset="-122"/>
+                <a:cs typeface="Inter" pitchFamily="34" charset="-120"/>
+              </a:rPr>
+              <a:t>ab 100 Stück</a:t>
+            </a:r>
+            <a:endParaRPr lang="en-US" sz="1400" dirty="0"/>
+          </a:p>
+        </p:txBody>
+      </p:sp>
+      <p:sp>
+        <p:nvSpPr>
+          <p:cNvPr id="13" name="Text 0"/>
+          <p:cNvSpPr txBox="1"/>
+          <p:nvPr>
+            <p:ph idx="112" type="body" hasCustomPrompt="1"/>
+          </p:nvPr>
+        </p:nvSpPr>
+        <p:spPr>
+          <a:xfrm>
+            <a:off x="6949440" y="1965960"/>
+            <a:ext cx="1600200" cy="731520"/>
+          </a:xfrm>
+          <a:prstGeom prst="rect">
+            <a:avLst/>
+          </a:prstGeom>
+          <a:noFill/>
+          <a:ln/>
+        </p:spPr>
+        <p:txBody>
+          <a:bodyPr wrap="square" lIns="0" tIns="0" rIns="0" bIns="0" rtlCol="0" anchor="ctr"/>
+          <a:lstStyle/>
+          <a:p>
+            <a:pPr algn="l" indent="0" marL="0">
+              <a:buNone/>
+            </a:pPr>
+            <a:r>
+              <a:rPr lang="en-US" sz="3200" b="1" dirty="0">
+                <a:solidFill>
+                  <a:srgbClr val="677E5B"/>
+                </a:solidFill>
+                <a:latin typeface="Inter" pitchFamily="34" charset="0"/>
+                <a:ea typeface="Inter" pitchFamily="34" charset="-122"/>
+                <a:cs typeface="Inter" pitchFamily="34" charset="-120"/>
+              </a:rPr>
+              <a:t>9,90 €</a:t>
+            </a:r>
+            <a:endParaRPr lang="en-US" sz="3200" dirty="0"/>
+          </a:p>
+        </p:txBody>
+      </p:sp>
+      <p:sp>
+        <p:nvSpPr>
+          <p:cNvPr id="14" name="Text 0"/>
+          <p:cNvSpPr txBox="1"/>
+          <p:nvPr>
+            <p:ph idx="113" type="body" hasCustomPrompt="1"/>
+          </p:nvPr>
+        </p:nvSpPr>
+        <p:spPr>
+          <a:xfrm>
+            <a:off x="6949440" y="2743200"/>
+            <a:ext cx="1600200" cy="502920"/>
+          </a:xfrm>
+          <a:prstGeom prst="rect">
+            <a:avLst/>
+          </a:prstGeom>
+          <a:noFill/>
+          <a:ln/>
+        </p:spPr>
+        <p:txBody>
+          <a:bodyPr wrap="square" lIns="0" tIns="0" rIns="0" bIns="0" rtlCol="0" anchor="t"/>
+          <a:lstStyle/>
+          <a:p>
+            <a:pPr algn="l" indent="0" marL="0">
+              <a:buNone/>
+            </a:pPr>
+            <a:r>
+              <a:rPr lang="en-US" sz="1200" dirty="0">
+                <a:solidFill>
+                  <a:srgbClr val="0F0F0F">
+                    <a:alpha val="60000"/>
+                  </a:srgbClr>
+                </a:solidFill>
+                <a:latin typeface="Inter" pitchFamily="34" charset="0"/>
+                <a:ea typeface="Inter" pitchFamily="34" charset="-122"/>
+                <a:cs typeface="Inter" pitchFamily="34" charset="-120"/>
+              </a:rPr>
+              <a:t>pro Stück, netto</a:t>
+            </a:r>
+            <a:endParaRPr lang="en-US" sz="1200" dirty="0"/>
+          </a:p>
+          <a:p>
+            <a:pPr algn="l" indent="0" marL="0">
+              <a:buNone/>
+            </a:pPr>
+            <a:r>
+              <a:rPr lang="en-US" sz="1200" dirty="0">
+                <a:solidFill>
+                  <a:srgbClr val="0F0F0F">
+                    <a:alpha val="60000"/>
+                  </a:srgbClr>
+                </a:solidFill>
+                <a:latin typeface="Inter" pitchFamily="34" charset="0"/>
+                <a:ea typeface="Inter" pitchFamily="34" charset="-122"/>
+                <a:cs typeface="Inter" pitchFamily="34" charset="-120"/>
+              </a:rPr>
+              <a:t>inkl. Textil und Druck</a:t>
+            </a:r>
+            <a:endParaRPr lang="en-US" sz="1200" dirty="0"/>
+          </a:p>
+        </p:txBody>
+      </p:sp>
+      <p:sp>
+        <p:nvSpPr>
+          <p:cNvPr id="15" name="Text 0"/>
+          <p:cNvSpPr txBox="1"/>
+          <p:nvPr>
+            <p:ph idx="114" type="body" hasCustomPrompt="1"/>
+          </p:nvPr>
+        </p:nvSpPr>
+        <p:spPr>
+          <a:xfrm>
+            <a:off x="457200" y="3657600"/>
+            <a:ext cx="8229600" cy="731520"/>
+          </a:xfrm>
+          <a:prstGeom prst="rect">
+            <a:avLst/>
+          </a:prstGeom>
+          <a:noFill/>
+          <a:ln/>
+        </p:spPr>
+        <p:txBody>
+          <a:bodyPr wrap="square" lIns="0" tIns="0" rIns="0" bIns="0" rtlCol="0" anchor="t"/>
+          <a:lstStyle/>
+          <a:p>
+            <a:pPr algn="l" indent="0" marL="0">
+              <a:buNone/>
+            </a:pPr>
+            <a:r>
+              <a:rPr lang="en-US" sz="1200" dirty="0">
+                <a:solidFill>
+                  <a:srgbClr val="0F0F0F">
+                    <a:alpha val="60000"/>
+                  </a:srgbClr>
+                </a:solidFill>
+                <a:latin typeface="Inter" pitchFamily="34" charset="0"/>
+                <a:ea typeface="Inter" pitchFamily="34" charset="-122"/>
+                <a:cs typeface="Inter" pitchFamily="34" charset="-120"/>
+              </a:rPr>
+              <a:t>Beispielwerte. Staffelpreise gelten je Motiv und Textil; Einrichtungskosten für den Siebdruck fallen einmalig an. Verbindlich ist das Angebot aus Lexware.</a:t>
+            </a:r>
+            <a:endParaRPr lang="en-US" sz="1200" dirty="0"/>
+          </a:p>
+        </p:txBody>
+      </p:sp>
+      <p:sp>
+        <p:nvSpPr>
+          <p:cNvPr id="25" name="Slide Number Placeholder 0"/>
+          <p:cNvSpPr>
+            <a:spLocks noGrp="1"/>
+          </p:cNvSpPr>
+          <p:nvPr>
+            <p:ph type="sldNum" sz="quarter" idx="4294967295"/>
+          </p:nvPr>
+        </p:nvSpPr>
+        <p:spPr>
+          <a:xfrm>
+            <a:off x="8229600" y="4709160"/>
+            <a:ext cx="457200" cy="274320"/>
+          </a:xfrm>
+          <a:prstGeom prst="rect">
+            <a:avLst/>
+          </a:prstGeom>
+          <a:extLst>
+            <a:ext uri="{C572A759-6A51-4108-AA02-DFA0A04FC94B}">
+              <ma14:wrappingTextBoxFlag xmlns:ma14="http://schemas.microsoft.com/office/mac/drawingml/2011/main" val="0"/>
+            </a:ext>
+          </a:extLst>
+        </p:spPr>
+        <p:txBody>
+          <a:bodyPr lIns="0" tIns="0" rIns="0" bIns="0"/>
+          <a:lstStyle>
+            <a:lvl1pPr>
+              <a:defRPr sz="1000">
+                <a:solidFill>
+                  <a:srgbClr val="0F0F0F"/>
+                </a:solidFill>
+                <a:latin typeface="Inter"/>
+                <a:ea typeface="Inter"/>
+                <a:cs typeface="Inter"/>
+              </a:defRPr>
+            </a:lvl1pPr>
+          </a:lstStyle>
+          <a:p>
+            <a:pPr algn="r"/>
+            <a:fld id="{F7021451-1387-4CA6-816F-3879F97B5CBC}" type="slidenum">
+              <a:rPr b="0" lang="en-US"/>
+              <a:t>10</a:t>
+            </a:fld>
+            <a:endParaRPr lang="en-US"/>
+          </a:p>
+        </p:txBody>
+      </p:sp>
+    </p:spTree>
+  </p:cSld>
+  <p:clrMapOvr>
+    <a:masterClrMapping/>
+  </p:clrMapOvr>
+</p:sld>
+</file>
+
+<file path=ppt/slides/slide11.xml><?xml version="1.0" encoding="utf-8"?>
+<p:sld xmlns:a="http://schemas.openxmlformats.org/drawingml/2006/main" xmlns:r="http://schemas.openxmlformats.org/officeDocument/2006/relationships" xmlns:p="http://schemas.openxmlformats.org/presentationml/2006/main">
+  <p:cSld name="Slide 11">
+    <p:spTree>
+      <p:nvGrpSpPr>
+        <p:cNvPr id="1" name=""/>
+        <p:cNvGrpSpPr/>
+        <p:nvPr/>
+      </p:nvGrpSpPr>
+      <p:grpSpPr>
+        <a:xfrm>
+          <a:off x="0" y="0"/>
+          <a:ext cx="0" cy="0"/>
+          <a:chOff x="0" y="0"/>
+          <a:chExt cx="0" cy="0"/>
+        </a:xfrm>
+      </p:grpSpPr>
+      <p:sp>
+        <p:nvSpPr>
+          <p:cNvPr id="2" name="Text 0"/>
+          <p:cNvSpPr txBox="1"/>
+          <p:nvPr>
+            <p:ph idx="101" type="title" hasCustomPrompt="1"/>
+          </p:nvPr>
+        </p:nvSpPr>
+        <p:spPr>
+          <a:xfrm>
+            <a:off x="457200" y="320040"/>
+            <a:ext cx="7132320" cy="640080"/>
+          </a:xfrm>
+          <a:prstGeom prst="rect">
+            <a:avLst/>
+          </a:prstGeom>
+          <a:noFill/>
+          <a:ln/>
+        </p:spPr>
+        <p:txBody>
+          <a:bodyPr wrap="square" lIns="0" tIns="0" rIns="0" bIns="0" rtlCol="0" anchor="ctr"/>
+          <a:lstStyle/>
+          <a:p>
+            <a:pPr algn="l" indent="0" marL="0">
+              <a:buNone/>
+            </a:pPr>
+            <a:r>
+              <a:rPr lang="en-US" sz="2800" b="1" dirty="0">
+                <a:solidFill>
+                  <a:srgbClr val="0F0F0F"/>
+                </a:solidFill>
+                <a:latin typeface="Inter" pitchFamily="34" charset="0"/>
+                <a:ea typeface="Inter" pitchFamily="34" charset="-122"/>
+                <a:cs typeface="Inter" pitchFamily="34" charset="-120"/>
+              </a:rPr>
               <a:t>Ihr Angebot im Überblick</a:t>
             </a:r>
             <a:endParaRPr lang="en-US" sz="2800" dirty="0"/>
@@ -11359,7 +14204,7 @@
       </p:sp>
       <p:graphicFrame>
         <p:nvGraphicFramePr>
-          <p:cNvPr id="11" name="Table 0"/>
+          <p:cNvPr id="12" name="Table 0"/>
           <p:cNvGraphicFramePr>
             <a:graphicFrameLocks noGrp="1"/>
           </p:cNvGraphicFramePr>
@@ -13617,475 +16462,6 @@
             <a:pPr algn="r"/>
             <a:fld id="{F7021451-1387-4CA6-816F-3879F97B5CBC}" type="slidenum">
               <a:rPr b="0" lang="en-US"/>
-              <a:t>10</a:t>
-            </a:fld>
-            <a:endParaRPr lang="en-US"/>
-          </a:p>
-        </p:txBody>
-      </p:sp>
-    </p:spTree>
-  </p:cSld>
-  <p:clrMapOvr>
-    <a:masterClrMapping/>
-  </p:clrMapOvr>
-</p:sld>
-</file>
-
-<file path=ppt/slides/slide11.xml><?xml version="1.0" encoding="utf-8"?>
-<p:sld xmlns:a="http://schemas.openxmlformats.org/drawingml/2006/main" xmlns:r="http://schemas.openxmlformats.org/officeDocument/2006/relationships" xmlns:p="http://schemas.openxmlformats.org/presentationml/2006/main">
-  <p:cSld name="Slide 11">
-    <p:spTree>
-      <p:nvGrpSpPr>
-        <p:cNvPr id="1" name=""/>
-        <p:cNvGrpSpPr/>
-        <p:nvPr/>
-      </p:nvGrpSpPr>
-      <p:grpSpPr>
-        <a:xfrm>
-          <a:off x="0" y="0"/>
-          <a:ext cx="0" cy="0"/>
-          <a:chOff x="0" y="0"/>
-          <a:chExt cx="0" cy="0"/>
-        </a:xfrm>
-      </p:grpSpPr>
-      <p:sp>
-        <p:nvSpPr>
-          <p:cNvPr id="2" name="Text 0"/>
-          <p:cNvSpPr txBox="1"/>
-          <p:nvPr>
-            <p:ph idx="101" type="title" hasCustomPrompt="1"/>
-          </p:nvPr>
-        </p:nvSpPr>
-        <p:spPr>
-          <a:xfrm>
-            <a:off x="457200" y="320040"/>
-            <a:ext cx="7132320" cy="640080"/>
-          </a:xfrm>
-          <a:prstGeom prst="rect">
-            <a:avLst/>
-          </a:prstGeom>
-          <a:noFill/>
-          <a:ln/>
-        </p:spPr>
-        <p:txBody>
-          <a:bodyPr wrap="square" lIns="0" tIns="0" rIns="0" bIns="0" rtlCol="0" anchor="ctr"/>
-          <a:lstStyle/>
-          <a:p>
-            <a:pPr algn="l" indent="0" marL="0">
-              <a:buNone/>
-            </a:pPr>
-            <a:r>
-              <a:rPr lang="en-US" sz="2800" b="1" dirty="0">
-                <a:solidFill>
-                  <a:srgbClr val="0F0F0F"/>
-                </a:solidFill>
-                <a:latin typeface="Inter" pitchFamily="34" charset="0"/>
-                <a:ea typeface="Inter" pitchFamily="34" charset="-122"/>
-                <a:cs typeface="Inter" pitchFamily="34" charset="-120"/>
-              </a:rPr>
-              <a:t>Unternehmen, die uns vertrauen (1/2)</a:t>
-            </a:r>
-            <a:endParaRPr lang="en-US" sz="2800" dirty="0"/>
-          </a:p>
-        </p:txBody>
-      </p:sp>
-      <p:sp>
-        <p:nvSpPr>
-          <p:cNvPr id="3" name="Text 0"/>
-          <p:cNvSpPr txBox="1"/>
-          <p:nvPr>
-            <p:ph idx="102" type="body" hasCustomPrompt="1"/>
-          </p:nvPr>
-        </p:nvSpPr>
-        <p:spPr>
-          <a:xfrm>
-            <a:off x="457200" y="914400"/>
-            <a:ext cx="7132320" cy="274320"/>
-          </a:xfrm>
-          <a:prstGeom prst="rect">
-            <a:avLst/>
-          </a:prstGeom>
-          <a:noFill/>
-          <a:ln/>
-        </p:spPr>
-        <p:txBody>
-          <a:bodyPr wrap="square" lIns="0" tIns="0" rIns="0" bIns="0" rtlCol="0" anchor="ctr"/>
-          <a:lstStyle/>
-          <a:p>
-            <a:pPr algn="l" indent="0" marL="0">
-              <a:buNone/>
-            </a:pPr>
-            <a:r>
-              <a:rPr lang="en-US" sz="1200" dirty="0">
-                <a:solidFill>
-                  <a:srgbClr val="0F0F0F">
-                    <a:alpha val="60000"/>
-                  </a:srgbClr>
-                </a:solidFill>
-                <a:latin typeface="Inter" pitchFamily="34" charset="0"/>
-                <a:ea typeface="Inter" pitchFamily="34" charset="-122"/>
-                <a:cs typeface="Inter" pitchFamily="34" charset="-120"/>
-              </a:rPr>
-              <a:t>Eine Auswahl. Viele weitere Unternehmen und Teams aus der Region lassen bei uns veredeln.</a:t>
-            </a:r>
-            <a:endParaRPr lang="en-US" sz="1200" dirty="0"/>
-          </a:p>
-        </p:txBody>
-      </p:sp>
-      <p:pic>
-        <p:nvPicPr>
-          <p:cNvPr id="4" name="Image 0" descr="/var/folders/hm/sgq6d80d0vq133k7n8dc9bnw0000gn/T/maiershirts-fAJE9f/ref-unternehmen-0-0.png">    </p:cNvPr>
-          <p:cNvPicPr>
-            <a:picLocks noChangeAspect="1"/>
-          </p:cNvPicPr>
-          <p:nvPr>
-            <p:ph idx="103" type="pic" hasCustomPrompt="1"/>
-          </p:nvPr>
-        </p:nvPicPr>
-        <p:blipFill>
-          <a:blip r:embed="rId1"/>
-          <a:stretch>
-            <a:fillRect/>
-          </a:stretch>
-        </p:blipFill>
-        <p:spPr>
-          <a:xfrm>
-            <a:off x="713232" y="1519438"/>
-            <a:ext cx="1408176" cy="390124"/>
-          </a:xfrm>
-          <a:prstGeom prst="rect">
-            <a:avLst/>
-          </a:prstGeom>
-        </p:spPr>
-      </p:pic>
-      <p:pic>
-        <p:nvPicPr>
-          <p:cNvPr id="5" name="Image 1" descr="/var/folders/hm/sgq6d80d0vq133k7n8dc9bnw0000gn/T/maiershirts-fAJE9f/ref-unternehmen-0-1.png">    </p:cNvPr>
-          <p:cNvPicPr>
-            <a:picLocks noChangeAspect="1"/>
-          </p:cNvPicPr>
-          <p:nvPr>
-            <p:ph idx="104" type="pic" hasCustomPrompt="1"/>
-          </p:nvPr>
-        </p:nvPicPr>
-        <p:blipFill>
-          <a:blip r:embed="rId2"/>
-          <a:stretch>
-            <a:fillRect/>
-          </a:stretch>
-        </p:blipFill>
-        <p:spPr>
-          <a:xfrm>
-            <a:off x="2816352" y="1607820"/>
-            <a:ext cx="1408176" cy="213360"/>
-          </a:xfrm>
-          <a:prstGeom prst="rect">
-            <a:avLst/>
-          </a:prstGeom>
-        </p:spPr>
-      </p:pic>
-      <p:pic>
-        <p:nvPicPr>
-          <p:cNvPr id="6" name="Image 2" descr="/var/folders/hm/sgq6d80d0vq133k7n8dc9bnw0000gn/T/maiershirts-fAJE9f/ref-unternehmen-0-2.png">    </p:cNvPr>
-          <p:cNvPicPr>
-            <a:picLocks noChangeAspect="1"/>
-          </p:cNvPicPr>
-          <p:nvPr>
-            <p:ph idx="105" type="pic" hasCustomPrompt="1"/>
-          </p:nvPr>
-        </p:nvPicPr>
-        <p:blipFill>
-          <a:blip r:embed="rId3"/>
-          <a:stretch>
-            <a:fillRect/>
-          </a:stretch>
-        </p:blipFill>
-        <p:spPr>
-          <a:xfrm>
-            <a:off x="4919472" y="1562265"/>
-            <a:ext cx="1408176" cy="304470"/>
-          </a:xfrm>
-          <a:prstGeom prst="rect">
-            <a:avLst/>
-          </a:prstGeom>
-        </p:spPr>
-      </p:pic>
-      <p:pic>
-        <p:nvPicPr>
-          <p:cNvPr id="7" name="Image 3" descr="/var/folders/hm/sgq6d80d0vq133k7n8dc9bnw0000gn/T/maiershirts-fAJE9f/ref-unternehmen-0-3.png">    </p:cNvPr>
-          <p:cNvPicPr>
-            <a:picLocks noChangeAspect="1"/>
-          </p:cNvPicPr>
-          <p:nvPr>
-            <p:ph idx="106" type="pic" hasCustomPrompt="1"/>
-          </p:nvPr>
-        </p:nvPicPr>
-        <p:blipFill>
-          <a:blip r:embed="rId4"/>
-          <a:stretch>
-            <a:fillRect/>
-          </a:stretch>
-        </p:blipFill>
-        <p:spPr>
-          <a:xfrm>
-            <a:off x="7174078" y="1490472"/>
-            <a:ext cx="1105205" cy="448056"/>
-          </a:xfrm>
-          <a:prstGeom prst="rect">
-            <a:avLst/>
-          </a:prstGeom>
-        </p:spPr>
-      </p:pic>
-      <p:pic>
-        <p:nvPicPr>
-          <p:cNvPr id="8" name="Image 4" descr="/var/folders/hm/sgq6d80d0vq133k7n8dc9bnw0000gn/T/maiershirts-fAJE9f/ref-unternehmen-0-4.png">    </p:cNvPr>
-          <p:cNvPicPr>
-            <a:picLocks noChangeAspect="1"/>
-          </p:cNvPicPr>
-          <p:nvPr>
-            <p:ph idx="107" type="pic" hasCustomPrompt="1"/>
-          </p:nvPr>
-        </p:nvPicPr>
-        <p:blipFill>
-          <a:blip r:embed="rId5"/>
-          <a:stretch>
-            <a:fillRect/>
-          </a:stretch>
-        </p:blipFill>
-        <p:spPr>
-          <a:xfrm>
-            <a:off x="1090420" y="2587752"/>
-            <a:ext cx="653799" cy="448056"/>
-          </a:xfrm>
-          <a:prstGeom prst="rect">
-            <a:avLst/>
-          </a:prstGeom>
-        </p:spPr>
-      </p:pic>
-      <p:pic>
-        <p:nvPicPr>
-          <p:cNvPr id="9" name="Image 5" descr="/var/folders/hm/sgq6d80d0vq133k7n8dc9bnw0000gn/T/maiershirts-fAJE9f/ref-unternehmen-0-5.png">    </p:cNvPr>
-          <p:cNvPicPr>
-            <a:picLocks noChangeAspect="1"/>
-          </p:cNvPicPr>
-          <p:nvPr>
-            <p:ph idx="108" type="pic" hasCustomPrompt="1"/>
-          </p:nvPr>
-        </p:nvPicPr>
-        <p:blipFill>
-          <a:blip r:embed="rId6"/>
-          <a:stretch>
-            <a:fillRect/>
-          </a:stretch>
-        </p:blipFill>
-        <p:spPr>
-          <a:xfrm>
-            <a:off x="2860802" y="2587752"/>
-            <a:ext cx="1319276" cy="448056"/>
-          </a:xfrm>
-          <a:prstGeom prst="rect">
-            <a:avLst/>
-          </a:prstGeom>
-        </p:spPr>
-      </p:pic>
-      <p:pic>
-        <p:nvPicPr>
-          <p:cNvPr id="10" name="Image 6" descr="/var/folders/hm/sgq6d80d0vq133k7n8dc9bnw0000gn/T/maiershirts-fAJE9f/ref-unternehmen-0-6.png">    </p:cNvPr>
-          <p:cNvPicPr>
-            <a:picLocks noChangeAspect="1"/>
-          </p:cNvPicPr>
-          <p:nvPr>
-            <p:ph idx="109" type="pic" hasCustomPrompt="1"/>
-          </p:nvPr>
-        </p:nvPicPr>
-        <p:blipFill>
-          <a:blip r:embed="rId7"/>
-          <a:stretch>
-            <a:fillRect/>
-          </a:stretch>
-        </p:blipFill>
-        <p:spPr>
-          <a:xfrm>
-            <a:off x="5357181" y="2587752"/>
-            <a:ext cx="532758" cy="448056"/>
-          </a:xfrm>
-          <a:prstGeom prst="rect">
-            <a:avLst/>
-          </a:prstGeom>
-        </p:spPr>
-      </p:pic>
-      <p:pic>
-        <p:nvPicPr>
-          <p:cNvPr id="11" name="Image 7" descr="/var/folders/hm/sgq6d80d0vq133k7n8dc9bnw0000gn/T/maiershirts-fAJE9f/ref-unternehmen-0-7.png">    </p:cNvPr>
-          <p:cNvPicPr>
-            <a:picLocks noChangeAspect="1"/>
-          </p:cNvPicPr>
-          <p:nvPr>
-            <p:ph idx="110" type="pic" hasCustomPrompt="1"/>
-          </p:nvPr>
-        </p:nvPicPr>
-        <p:blipFill>
-          <a:blip r:embed="rId8"/>
-          <a:stretch>
-            <a:fillRect/>
-          </a:stretch>
-        </p:blipFill>
-        <p:spPr>
-          <a:xfrm>
-            <a:off x="7224177" y="2587752"/>
-            <a:ext cx="1005007" cy="448056"/>
-          </a:xfrm>
-          <a:prstGeom prst="rect">
-            <a:avLst/>
-          </a:prstGeom>
-        </p:spPr>
-      </p:pic>
-      <p:pic>
-        <p:nvPicPr>
-          <p:cNvPr id="12" name="Image 8" descr="/var/folders/hm/sgq6d80d0vq133k7n8dc9bnw0000gn/T/maiershirts-fAJE9f/ref-unternehmen-0-8.png">    </p:cNvPr>
-          <p:cNvPicPr>
-            <a:picLocks noChangeAspect="1"/>
-          </p:cNvPicPr>
-          <p:nvPr>
-            <p:ph idx="111" type="pic" hasCustomPrompt="1"/>
-          </p:nvPr>
-        </p:nvPicPr>
-        <p:blipFill>
-          <a:blip r:embed="rId9"/>
-          <a:stretch>
-            <a:fillRect/>
-          </a:stretch>
-        </p:blipFill>
-        <p:spPr>
-          <a:xfrm>
-            <a:off x="972998" y="3685032"/>
-            <a:ext cx="888644" cy="448056"/>
-          </a:xfrm>
-          <a:prstGeom prst="rect">
-            <a:avLst/>
-          </a:prstGeom>
-        </p:spPr>
-      </p:pic>
-      <p:pic>
-        <p:nvPicPr>
-          <p:cNvPr id="13" name="Image 9" descr="/var/folders/hm/sgq6d80d0vq133k7n8dc9bnw0000gn/T/maiershirts-fAJE9f/ref-unternehmen-0-9.png">    </p:cNvPr>
-          <p:cNvPicPr>
-            <a:picLocks noChangeAspect="1"/>
-          </p:cNvPicPr>
-          <p:nvPr>
-            <p:ph idx="112" type="pic" hasCustomPrompt="1"/>
-          </p:nvPr>
-        </p:nvPicPr>
-        <p:blipFill>
-          <a:blip r:embed="rId10"/>
-          <a:stretch>
-            <a:fillRect/>
-          </a:stretch>
-        </p:blipFill>
-        <p:spPr>
-          <a:xfrm>
-            <a:off x="3186157" y="3685032"/>
-            <a:ext cx="668565" cy="448056"/>
-          </a:xfrm>
-          <a:prstGeom prst="rect">
-            <a:avLst/>
-          </a:prstGeom>
-        </p:spPr>
-      </p:pic>
-      <p:pic>
-        <p:nvPicPr>
-          <p:cNvPr id="14" name="Image 10" descr="/var/folders/hm/sgq6d80d0vq133k7n8dc9bnw0000gn/T/maiershirts-fAJE9f/ref-unternehmen-0-10.png">    </p:cNvPr>
-          <p:cNvPicPr>
-            <a:picLocks noChangeAspect="1"/>
-          </p:cNvPicPr>
-          <p:nvPr>
-            <p:ph idx="113" type="pic" hasCustomPrompt="1"/>
-          </p:nvPr>
-        </p:nvPicPr>
-        <p:blipFill>
-          <a:blip r:embed="rId11"/>
-          <a:stretch>
-            <a:fillRect/>
-          </a:stretch>
-        </p:blipFill>
-        <p:spPr>
-          <a:xfrm>
-            <a:off x="5398727" y="3685032"/>
-            <a:ext cx="449666" cy="448056"/>
-          </a:xfrm>
-          <a:prstGeom prst="rect">
-            <a:avLst/>
-          </a:prstGeom>
-        </p:spPr>
-      </p:pic>
-      <p:pic>
-        <p:nvPicPr>
-          <p:cNvPr id="15" name="Image 11" descr="/var/folders/hm/sgq6d80d0vq133k7n8dc9bnw0000gn/T/maiershirts-fAJE9f/ref-unternehmen-0-11.png">    </p:cNvPr>
-          <p:cNvPicPr>
-            <a:picLocks noChangeAspect="1"/>
-          </p:cNvPicPr>
-          <p:nvPr>
-            <p:ph idx="114" type="pic" hasCustomPrompt="1"/>
-          </p:nvPr>
-        </p:nvPicPr>
-        <p:blipFill>
-          <a:blip r:embed="rId12"/>
-          <a:stretch>
-            <a:fillRect/>
-          </a:stretch>
-        </p:blipFill>
-        <p:spPr>
-          <a:xfrm>
-            <a:off x="7022592" y="3765694"/>
-            <a:ext cx="1408176" cy="286733"/>
-          </a:xfrm>
-          <a:prstGeom prst="rect">
-            <a:avLst/>
-          </a:prstGeom>
-        </p:spPr>
-      </p:pic>
-      <p:sp>
-        <p:nvSpPr>
-          <p:cNvPr id="25" name="Slide Number Placeholder 0"/>
-          <p:cNvSpPr>
-            <a:spLocks noGrp="1"/>
-          </p:cNvSpPr>
-          <p:nvPr>
-            <p:ph type="sldNum" sz="quarter" idx="4294967295"/>
-          </p:nvPr>
-        </p:nvSpPr>
-        <p:spPr>
-          <a:xfrm>
-            <a:off x="8229600" y="4709160"/>
-            <a:ext cx="457200" cy="274320"/>
-          </a:xfrm>
-          <a:prstGeom prst="rect">
-            <a:avLst/>
-          </a:prstGeom>
-          <a:extLst>
-            <a:ext uri="{C572A759-6A51-4108-AA02-DFA0A04FC94B}">
-              <ma14:wrappingTextBoxFlag xmlns:ma14="http://schemas.microsoft.com/office/mac/drawingml/2011/main" val="0"/>
-            </a:ext>
-          </a:extLst>
-        </p:spPr>
-        <p:txBody>
-          <a:bodyPr lIns="0" tIns="0" rIns="0" bIns="0"/>
-          <a:lstStyle>
-            <a:lvl1pPr>
-              <a:defRPr sz="1000">
-                <a:solidFill>
-                  <a:srgbClr val="0F0F0F"/>
-                </a:solidFill>
-                <a:latin typeface="Inter"/>
-                <a:ea typeface="Inter"/>
-                <a:cs typeface="Inter"/>
-              </a:defRPr>
-            </a:lvl1pPr>
-          </a:lstStyle>
-          <a:p>
-            <a:pPr algn="r"/>
-            <a:fld id="{F7021451-1387-4CA6-816F-3879F97B5CBC}" type="slidenum">
-              <a:rPr b="0" lang="en-US"/>
               <a:t>11</a:t>
             </a:fld>
             <a:endParaRPr lang="en-US"/>
@@ -14152,7 +16528,7 @@
                 <a:ea typeface="Inter" pitchFamily="34" charset="-122"/>
                 <a:cs typeface="Inter" pitchFamily="34" charset="-120"/>
               </a:rPr>
-              <a:t>Unternehmen, die uns vertrauen (2/2)</a:t>
+              <a:t>Unternehmen, die uns vertrauen (1/2)</a:t>
             </a:r>
             <a:endParaRPr lang="en-US" sz="2800" dirty="0"/>
           </a:p>
@@ -14203,7 +16579,7 @@
       </p:sp>
       <p:pic>
         <p:nvPicPr>
-          <p:cNvPr id="4" name="Image 0" descr="/var/folders/hm/sgq6d80d0vq133k7n8dc9bnw0000gn/T/maiershirts-fAJE9f/ref-unternehmen-1-0.png">    </p:cNvPr>
+          <p:cNvPr id="4" name="Image 0" descr="/var/folders/hm/sgq6d80d0vq133k7n8dc9bnw0000gn/T/maiershirts-H73pRN/ref-unternehmen-0-0.png">    </p:cNvPr>
           <p:cNvPicPr>
             <a:picLocks noChangeAspect="1"/>
           </p:cNvPicPr>
@@ -14219,8 +16595,8 @@
         </p:blipFill>
         <p:spPr>
           <a:xfrm>
-            <a:off x="1169090" y="1490472"/>
-            <a:ext cx="496461" cy="448056"/>
+            <a:off x="713232" y="1519438"/>
+            <a:ext cx="1408176" cy="390124"/>
           </a:xfrm>
           <a:prstGeom prst="rect">
             <a:avLst/>
@@ -14229,7 +16605,7 @@
       </p:pic>
       <p:pic>
         <p:nvPicPr>
-          <p:cNvPr id="5" name="Image 1" descr="/var/folders/hm/sgq6d80d0vq133k7n8dc9bnw0000gn/T/maiershirts-fAJE9f/ph-logo-446x194.png">    </p:cNvPr>
+          <p:cNvPr id="5" name="Image 1" descr="/var/folders/hm/sgq6d80d0vq133k7n8dc9bnw0000gn/T/maiershirts-H73pRN/ref-unternehmen-0-1.png">    </p:cNvPr>
           <p:cNvPicPr>
             <a:picLocks noChangeAspect="1"/>
           </p:cNvPicPr>
@@ -14245,8 +16621,8 @@
         </p:blipFill>
         <p:spPr>
           <a:xfrm>
-            <a:off x="2670048" y="1344168"/>
-            <a:ext cx="1700784" cy="740664"/>
+            <a:off x="2816352" y="1607820"/>
+            <a:ext cx="1408176" cy="213360"/>
           </a:xfrm>
           <a:prstGeom prst="rect">
             <a:avLst/>
@@ -14255,7 +16631,7 @@
       </p:pic>
       <p:pic>
         <p:nvPicPr>
-          <p:cNvPr id="6" name="Image 2" descr="/var/folders/hm/sgq6d80d0vq133k7n8dc9bnw0000gn/T/maiershirts-fAJE9f/ph-logo-446x194.png">    </p:cNvPr>
+          <p:cNvPr id="6" name="Image 2" descr="/var/folders/hm/sgq6d80d0vq133k7n8dc9bnw0000gn/T/maiershirts-H73pRN/ref-unternehmen-0-2.png">    </p:cNvPr>
           <p:cNvPicPr>
             <a:picLocks noChangeAspect="1"/>
           </p:cNvPicPr>
@@ -14271,8 +16647,8 @@
         </p:blipFill>
         <p:spPr>
           <a:xfrm>
-            <a:off x="4773168" y="1344168"/>
-            <a:ext cx="1700784" cy="740664"/>
+            <a:off x="4919472" y="1562265"/>
+            <a:ext cx="1408176" cy="304470"/>
           </a:xfrm>
           <a:prstGeom prst="rect">
             <a:avLst/>
@@ -14281,7 +16657,7 @@
       </p:pic>
       <p:pic>
         <p:nvPicPr>
-          <p:cNvPr id="7" name="Image 3" descr="/var/folders/hm/sgq6d80d0vq133k7n8dc9bnw0000gn/T/maiershirts-fAJE9f/ph-logo-446x194.png">    </p:cNvPr>
+          <p:cNvPr id="7" name="Image 3" descr="/var/folders/hm/sgq6d80d0vq133k7n8dc9bnw0000gn/T/maiershirts-H73pRN/ref-unternehmen-0-3.png">    </p:cNvPr>
           <p:cNvPicPr>
             <a:picLocks noChangeAspect="1"/>
           </p:cNvPicPr>
@@ -14297,8 +16673,8 @@
         </p:blipFill>
         <p:spPr>
           <a:xfrm>
-            <a:off x="6876288" y="1344168"/>
-            <a:ext cx="1700784" cy="740664"/>
+            <a:off x="7174078" y="1490472"/>
+            <a:ext cx="1105205" cy="448056"/>
           </a:xfrm>
           <a:prstGeom prst="rect">
             <a:avLst/>
@@ -14307,7 +16683,7 @@
       </p:pic>
       <p:pic>
         <p:nvPicPr>
-          <p:cNvPr id="8" name="Image 4" descr="/var/folders/hm/sgq6d80d0vq133k7n8dc9bnw0000gn/T/maiershirts-fAJE9f/ph-logo-446x194.png">    </p:cNvPr>
+          <p:cNvPr id="8" name="Image 4" descr="/var/folders/hm/sgq6d80d0vq133k7n8dc9bnw0000gn/T/maiershirts-H73pRN/ref-unternehmen-0-4.png">    </p:cNvPr>
           <p:cNvPicPr>
             <a:picLocks noChangeAspect="1"/>
           </p:cNvPicPr>
@@ -14323,8 +16699,8 @@
         </p:blipFill>
         <p:spPr>
           <a:xfrm>
-            <a:off x="566928" y="2441448"/>
-            <a:ext cx="1700784" cy="740664"/>
+            <a:off x="1090420" y="2587752"/>
+            <a:ext cx="653799" cy="448056"/>
           </a:xfrm>
           <a:prstGeom prst="rect">
             <a:avLst/>
@@ -14333,7 +16709,7 @@
       </p:pic>
       <p:pic>
         <p:nvPicPr>
-          <p:cNvPr id="9" name="Image 5" descr="/var/folders/hm/sgq6d80d0vq133k7n8dc9bnw0000gn/T/maiershirts-fAJE9f/ph-logo-446x194.png">    </p:cNvPr>
+          <p:cNvPr id="9" name="Image 5" descr="/var/folders/hm/sgq6d80d0vq133k7n8dc9bnw0000gn/T/maiershirts-H73pRN/ref-unternehmen-0-5.png">    </p:cNvPr>
           <p:cNvPicPr>
             <a:picLocks noChangeAspect="1"/>
           </p:cNvPicPr>
@@ -14349,8 +16725,8 @@
         </p:blipFill>
         <p:spPr>
           <a:xfrm>
-            <a:off x="2670048" y="2441448"/>
-            <a:ext cx="1700784" cy="740664"/>
+            <a:off x="2860802" y="2587752"/>
+            <a:ext cx="1319276" cy="448056"/>
           </a:xfrm>
           <a:prstGeom prst="rect">
             <a:avLst/>
@@ -14359,7 +16735,7 @@
       </p:pic>
       <p:pic>
         <p:nvPicPr>
-          <p:cNvPr id="10" name="Image 6" descr="/var/folders/hm/sgq6d80d0vq133k7n8dc9bnw0000gn/T/maiershirts-fAJE9f/ph-logo-446x194.png">    </p:cNvPr>
+          <p:cNvPr id="10" name="Image 6" descr="/var/folders/hm/sgq6d80d0vq133k7n8dc9bnw0000gn/T/maiershirts-H73pRN/ref-unternehmen-0-6.png">    </p:cNvPr>
           <p:cNvPicPr>
             <a:picLocks noChangeAspect="1"/>
           </p:cNvPicPr>
@@ -14375,8 +16751,8 @@
         </p:blipFill>
         <p:spPr>
           <a:xfrm>
-            <a:off x="4773168" y="2441448"/>
-            <a:ext cx="1700784" cy="740664"/>
+            <a:off x="5357181" y="2587752"/>
+            <a:ext cx="532758" cy="448056"/>
           </a:xfrm>
           <a:prstGeom prst="rect">
             <a:avLst/>
@@ -14385,7 +16761,7 @@
       </p:pic>
       <p:pic>
         <p:nvPicPr>
-          <p:cNvPr id="11" name="Image 7" descr="/var/folders/hm/sgq6d80d0vq133k7n8dc9bnw0000gn/T/maiershirts-fAJE9f/ph-logo-446x194.png">    </p:cNvPr>
+          <p:cNvPr id="11" name="Image 7" descr="/var/folders/hm/sgq6d80d0vq133k7n8dc9bnw0000gn/T/maiershirts-H73pRN/ref-unternehmen-0-7.png">    </p:cNvPr>
           <p:cNvPicPr>
             <a:picLocks noChangeAspect="1"/>
           </p:cNvPicPr>
@@ -14401,8 +16777,8 @@
         </p:blipFill>
         <p:spPr>
           <a:xfrm>
-            <a:off x="6876288" y="2441448"/>
-            <a:ext cx="1700784" cy="740664"/>
+            <a:off x="7224177" y="2587752"/>
+            <a:ext cx="1005007" cy="448056"/>
           </a:xfrm>
           <a:prstGeom prst="rect">
             <a:avLst/>
@@ -14411,7 +16787,7 @@
       </p:pic>
       <p:pic>
         <p:nvPicPr>
-          <p:cNvPr id="12" name="Image 8" descr="/var/folders/hm/sgq6d80d0vq133k7n8dc9bnw0000gn/T/maiershirts-fAJE9f/ph-logo-446x194.png">    </p:cNvPr>
+          <p:cNvPr id="12" name="Image 8" descr="/var/folders/hm/sgq6d80d0vq133k7n8dc9bnw0000gn/T/maiershirts-H73pRN/ref-unternehmen-0-8.png">    </p:cNvPr>
           <p:cNvPicPr>
             <a:picLocks noChangeAspect="1"/>
           </p:cNvPicPr>
@@ -14427,8 +16803,8 @@
         </p:blipFill>
         <p:spPr>
           <a:xfrm>
-            <a:off x="566928" y="3538728"/>
-            <a:ext cx="1700784" cy="740664"/>
+            <a:off x="972998" y="3685032"/>
+            <a:ext cx="888644" cy="448056"/>
           </a:xfrm>
           <a:prstGeom prst="rect">
             <a:avLst/>
@@ -14437,7 +16813,7 @@
       </p:pic>
       <p:pic>
         <p:nvPicPr>
-          <p:cNvPr id="13" name="Image 9" descr="/var/folders/hm/sgq6d80d0vq133k7n8dc9bnw0000gn/T/maiershirts-fAJE9f/ph-logo-446x194.png">    </p:cNvPr>
+          <p:cNvPr id="13" name="Image 9" descr="/var/folders/hm/sgq6d80d0vq133k7n8dc9bnw0000gn/T/maiershirts-H73pRN/ref-unternehmen-0-9.png">    </p:cNvPr>
           <p:cNvPicPr>
             <a:picLocks noChangeAspect="1"/>
           </p:cNvPicPr>
@@ -14453,8 +16829,8 @@
         </p:blipFill>
         <p:spPr>
           <a:xfrm>
-            <a:off x="2670048" y="3538728"/>
-            <a:ext cx="1700784" cy="740664"/>
+            <a:off x="3186157" y="3685032"/>
+            <a:ext cx="668565" cy="448056"/>
           </a:xfrm>
           <a:prstGeom prst="rect">
             <a:avLst/>
@@ -14463,7 +16839,7 @@
       </p:pic>
       <p:pic>
         <p:nvPicPr>
-          <p:cNvPr id="14" name="Image 10" descr="/var/folders/hm/sgq6d80d0vq133k7n8dc9bnw0000gn/T/maiershirts-fAJE9f/ph-logo-446x194.png">    </p:cNvPr>
+          <p:cNvPr id="14" name="Image 10" descr="/var/folders/hm/sgq6d80d0vq133k7n8dc9bnw0000gn/T/maiershirts-H73pRN/ref-unternehmen-0-10.png">    </p:cNvPr>
           <p:cNvPicPr>
             <a:picLocks noChangeAspect="1"/>
           </p:cNvPicPr>
@@ -14479,8 +16855,8 @@
         </p:blipFill>
         <p:spPr>
           <a:xfrm>
-            <a:off x="4773168" y="3538728"/>
-            <a:ext cx="1700784" cy="740664"/>
+            <a:off x="5398727" y="3685032"/>
+            <a:ext cx="449666" cy="448056"/>
           </a:xfrm>
           <a:prstGeom prst="rect">
             <a:avLst/>
@@ -14489,7 +16865,7 @@
       </p:pic>
       <p:pic>
         <p:nvPicPr>
-          <p:cNvPr id="15" name="Image 11" descr="/var/folders/hm/sgq6d80d0vq133k7n8dc9bnw0000gn/T/maiershirts-fAJE9f/ph-logo-446x194.png">    </p:cNvPr>
+          <p:cNvPr id="15" name="Image 11" descr="/var/folders/hm/sgq6d80d0vq133k7n8dc9bnw0000gn/T/maiershirts-H73pRN/ref-unternehmen-0-11.png">    </p:cNvPr>
           <p:cNvPicPr>
             <a:picLocks noChangeAspect="1"/>
           </p:cNvPicPr>
@@ -14505,8 +16881,8 @@
         </p:blipFill>
         <p:spPr>
           <a:xfrm>
-            <a:off x="6876288" y="3538728"/>
-            <a:ext cx="1700784" cy="740664"/>
+            <a:off x="7022592" y="3765694"/>
+            <a:ext cx="1408176" cy="286733"/>
           </a:xfrm>
           <a:prstGeom prst="rect">
             <a:avLst/>
@@ -14621,7 +16997,7 @@
                 <a:ea typeface="Inter" pitchFamily="34" charset="-122"/>
                 <a:cs typeface="Inter" pitchFamily="34" charset="-120"/>
               </a:rPr>
-              <a:t>Vereine, die uns vertrauen</a:t>
+              <a:t>Unternehmen, die uns vertrauen (2/2)</a:t>
             </a:r>
             <a:endParaRPr lang="en-US" sz="2800" dirty="0"/>
           </a:p>
@@ -14664,7 +17040,7 @@
                 <a:ea typeface="Inter" pitchFamily="34" charset="-122"/>
                 <a:cs typeface="Inter" pitchFamily="34" charset="-120"/>
               </a:rPr>
-              <a:t>Eine Auswahl. Vom Trikotsatz bis zur Fanausstattung, für Vereine aus der ganzen Region.</a:t>
+              <a:t>Eine Auswahl. Viele weitere Unternehmen und Teams aus der Region lassen bei uns veredeln.</a:t>
             </a:r>
             <a:endParaRPr lang="en-US" sz="1200" dirty="0"/>
           </a:p>
@@ -14672,7 +17048,7 @@
       </p:sp>
       <p:pic>
         <p:nvPicPr>
-          <p:cNvPr id="4" name="Image 0" descr="/var/folders/hm/sgq6d80d0vq133k7n8dc9bnw0000gn/T/maiershirts-fAJE9f/ref-vereine-0-0.png">    </p:cNvPr>
+          <p:cNvPr id="4" name="Image 0" descr="/var/folders/hm/sgq6d80d0vq133k7n8dc9bnw0000gn/T/maiershirts-H73pRN/ref-unternehmen-1-0.png">    </p:cNvPr>
           <p:cNvPicPr>
             <a:picLocks noChangeAspect="1"/>
           </p:cNvPicPr>
@@ -14688,63 +17064,22 @@
         </p:blipFill>
         <p:spPr>
           <a:xfrm>
-            <a:off x="843422" y="1490472"/>
-            <a:ext cx="1147795" cy="667512"/>
+            <a:off x="1169090" y="1490472"/>
+            <a:ext cx="496461" cy="448056"/>
           </a:xfrm>
           <a:prstGeom prst="rect">
             <a:avLst/>
           </a:prstGeom>
         </p:spPr>
       </p:pic>
-      <p:sp>
-        <p:nvSpPr>
-          <p:cNvPr id="5" name="Text 0"/>
-          <p:cNvSpPr txBox="1"/>
-          <p:nvPr>
-            <p:ph idx="104" type="body" hasCustomPrompt="1"/>
-          </p:nvPr>
-        </p:nvSpPr>
-        <p:spPr>
-          <a:xfrm>
-            <a:off x="566928" y="2414016"/>
-            <a:ext cx="1700784" cy="274320"/>
-          </a:xfrm>
-          <a:prstGeom prst="rect">
-            <a:avLst/>
-          </a:prstGeom>
-          <a:noFill/>
-          <a:ln/>
-        </p:spPr>
-        <p:txBody>
-          <a:bodyPr wrap="square" lIns="0" tIns="0" rIns="0" bIns="0" rtlCol="0" anchor="ctr"/>
-          <a:lstStyle/>
-          <a:p>
-            <a:pPr algn="ctr" indent="0" marL="0">
-              <a:buNone/>
-            </a:pPr>
-            <a:r>
-              <a:rPr lang="en-US" sz="1100" b="1" dirty="0">
-                <a:solidFill>
-                  <a:srgbClr val="0F0F0F"/>
-                </a:solidFill>
-                <a:latin typeface="Inter" pitchFamily="34" charset="0"/>
-                <a:ea typeface="Inter" pitchFamily="34" charset="-122"/>
-                <a:cs typeface="Inter" pitchFamily="34" charset="-120"/>
-              </a:rPr>
-              <a:t>DAV Sektion Tübingen</a:t>
-            </a:r>
-            <a:endParaRPr lang="en-US" sz="1100" dirty="0"/>
-          </a:p>
-        </p:txBody>
-      </p:sp>
       <p:pic>
         <p:nvPicPr>
-          <p:cNvPr id="6" name="Image 1" descr="/var/folders/hm/sgq6d80d0vq133k7n8dc9bnw0000gn/T/maiershirts-fAJE9f/ref-vereine-0-1.png">    </p:cNvPr>
+          <p:cNvPr id="5" name="Image 1" descr="/var/folders/hm/sgq6d80d0vq133k7n8dc9bnw0000gn/T/maiershirts-H73pRN/ph-logo-446x194.png">    </p:cNvPr>
           <p:cNvPicPr>
             <a:picLocks noChangeAspect="1"/>
           </p:cNvPicPr>
           <p:nvPr>
-            <p:ph idx="105" type="pic" hasCustomPrompt="1"/>
+            <p:ph idx="104" type="pic" hasCustomPrompt="1"/>
           </p:nvPr>
         </p:nvPicPr>
         <p:blipFill>
@@ -14755,63 +17090,22 @@
         </p:blipFill>
         <p:spPr>
           <a:xfrm>
-            <a:off x="2858236" y="1490472"/>
-            <a:ext cx="1324409" cy="667512"/>
+            <a:off x="2670048" y="1344168"/>
+            <a:ext cx="1700784" cy="740664"/>
           </a:xfrm>
           <a:prstGeom prst="rect">
             <a:avLst/>
           </a:prstGeom>
         </p:spPr>
       </p:pic>
-      <p:sp>
-        <p:nvSpPr>
-          <p:cNvPr id="7" name="Text 0"/>
-          <p:cNvSpPr txBox="1"/>
-          <p:nvPr>
-            <p:ph idx="106" type="body" hasCustomPrompt="1"/>
-          </p:nvPr>
-        </p:nvSpPr>
-        <p:spPr>
-          <a:xfrm>
-            <a:off x="2670048" y="2414016"/>
-            <a:ext cx="1700784" cy="274320"/>
-          </a:xfrm>
-          <a:prstGeom prst="rect">
-            <a:avLst/>
-          </a:prstGeom>
-          <a:noFill/>
-          <a:ln/>
-        </p:spPr>
-        <p:txBody>
-          <a:bodyPr wrap="square" lIns="0" tIns="0" rIns="0" bIns="0" rtlCol="0" anchor="ctr"/>
-          <a:lstStyle/>
-          <a:p>
-            <a:pPr algn="ctr" indent="0" marL="0">
-              <a:buNone/>
-            </a:pPr>
-            <a:r>
-              <a:rPr lang="en-US" sz="1100" b="1" dirty="0">
-                <a:solidFill>
-                  <a:srgbClr val="0F0F0F"/>
-                </a:solidFill>
-                <a:latin typeface="Inter" pitchFamily="34" charset="0"/>
-                <a:ea typeface="Inter" pitchFamily="34" charset="-122"/>
-                <a:cs typeface="Inter" pitchFamily="34" charset="-120"/>
-              </a:rPr>
-              <a:t>Tennisclub Ammerbuch</a:t>
-            </a:r>
-            <a:endParaRPr lang="en-US" sz="1100" dirty="0"/>
-          </a:p>
-        </p:txBody>
-      </p:sp>
       <p:pic>
         <p:nvPicPr>
-          <p:cNvPr id="8" name="Image 2" descr="/var/folders/hm/sgq6d80d0vq133k7n8dc9bnw0000gn/T/maiershirts-fAJE9f/ref-vereine-0-2.png">    </p:cNvPr>
+          <p:cNvPr id="6" name="Image 2" descr="/var/folders/hm/sgq6d80d0vq133k7n8dc9bnw0000gn/T/maiershirts-H73pRN/ph-logo-446x194.png">    </p:cNvPr>
           <p:cNvPicPr>
             <a:picLocks noChangeAspect="1"/>
           </p:cNvPicPr>
           <p:nvPr>
-            <p:ph idx="107" type="pic" hasCustomPrompt="1"/>
+            <p:ph idx="105" type="pic" hasCustomPrompt="1"/>
           </p:nvPr>
         </p:nvPicPr>
         <p:blipFill>
@@ -14822,63 +17116,22 @@
         </p:blipFill>
         <p:spPr>
           <a:xfrm>
-            <a:off x="5369071" y="1490472"/>
-            <a:ext cx="508978" cy="667512"/>
+            <a:off x="4773168" y="1344168"/>
+            <a:ext cx="1700784" cy="740664"/>
           </a:xfrm>
           <a:prstGeom prst="rect">
             <a:avLst/>
           </a:prstGeom>
         </p:spPr>
       </p:pic>
-      <p:sp>
-        <p:nvSpPr>
-          <p:cNvPr id="9" name="Text 0"/>
-          <p:cNvSpPr txBox="1"/>
-          <p:nvPr>
-            <p:ph idx="108" type="body" hasCustomPrompt="1"/>
-          </p:nvPr>
-        </p:nvSpPr>
-        <p:spPr>
-          <a:xfrm>
-            <a:off x="4773168" y="2414016"/>
-            <a:ext cx="1700784" cy="274320"/>
-          </a:xfrm>
-          <a:prstGeom prst="rect">
-            <a:avLst/>
-          </a:prstGeom>
-          <a:noFill/>
-          <a:ln/>
-        </p:spPr>
-        <p:txBody>
-          <a:bodyPr wrap="square" lIns="0" tIns="0" rIns="0" bIns="0" rtlCol="0" anchor="ctr"/>
-          <a:lstStyle/>
-          <a:p>
-            <a:pPr algn="ctr" indent="0" marL="0">
-              <a:buNone/>
-            </a:pPr>
-            <a:r>
-              <a:rPr lang="en-US" sz="1100" b="1" dirty="0">
-                <a:solidFill>
-                  <a:srgbClr val="0F0F0F"/>
-                </a:solidFill>
-                <a:latin typeface="Inter" pitchFamily="34" charset="0"/>
-                <a:ea typeface="Inter" pitchFamily="34" charset="-122"/>
-                <a:cs typeface="Inter" pitchFamily="34" charset="-120"/>
-              </a:rPr>
-              <a:t>TGV Entringen</a:t>
-            </a:r>
-            <a:endParaRPr lang="en-US" sz="1100" dirty="0"/>
-          </a:p>
-        </p:txBody>
-      </p:sp>
       <p:pic>
         <p:nvPicPr>
-          <p:cNvPr id="10" name="Image 3" descr="/var/folders/hm/sgq6d80d0vq133k7n8dc9bnw0000gn/T/maiershirts-fAJE9f/ref-vereine-0-3.png">    </p:cNvPr>
+          <p:cNvPr id="7" name="Image 3" descr="/var/folders/hm/sgq6d80d0vq133k7n8dc9bnw0000gn/T/maiershirts-H73pRN/ph-logo-446x194.png">    </p:cNvPr>
           <p:cNvPicPr>
             <a:picLocks noChangeAspect="1"/>
           </p:cNvPicPr>
           <p:nvPr>
-            <p:ph idx="109" type="pic" hasCustomPrompt="1"/>
+            <p:ph idx="106" type="pic" hasCustomPrompt="1"/>
           </p:nvPr>
         </p:nvPicPr>
         <p:blipFill>
@@ -14889,63 +17142,22 @@
         </p:blipFill>
         <p:spPr>
           <a:xfrm>
-            <a:off x="7392924" y="1490472"/>
-            <a:ext cx="667512" cy="667512"/>
+            <a:off x="6876288" y="1344168"/>
+            <a:ext cx="1700784" cy="740664"/>
           </a:xfrm>
           <a:prstGeom prst="rect">
             <a:avLst/>
           </a:prstGeom>
         </p:spPr>
       </p:pic>
-      <p:sp>
-        <p:nvSpPr>
-          <p:cNvPr id="11" name="Text 0"/>
-          <p:cNvSpPr txBox="1"/>
-          <p:nvPr>
-            <p:ph idx="110" type="body" hasCustomPrompt="1"/>
-          </p:nvPr>
-        </p:nvSpPr>
-        <p:spPr>
-          <a:xfrm>
-            <a:off x="6876288" y="2414016"/>
-            <a:ext cx="1700784" cy="274320"/>
-          </a:xfrm>
-          <a:prstGeom prst="rect">
-            <a:avLst/>
-          </a:prstGeom>
-          <a:noFill/>
-          <a:ln/>
-        </p:spPr>
-        <p:txBody>
-          <a:bodyPr wrap="square" lIns="0" tIns="0" rIns="0" bIns="0" rtlCol="0" anchor="ctr"/>
-          <a:lstStyle/>
-          <a:p>
-            <a:pPr algn="ctr" indent="0" marL="0">
-              <a:buNone/>
-            </a:pPr>
-            <a:r>
-              <a:rPr lang="en-US" sz="1100" b="1" dirty="0">
-                <a:solidFill>
-                  <a:srgbClr val="0F0F0F"/>
-                </a:solidFill>
-                <a:latin typeface="Inter" pitchFamily="34" charset="0"/>
-                <a:ea typeface="Inter" pitchFamily="34" charset="-122"/>
-                <a:cs typeface="Inter" pitchFamily="34" charset="-120"/>
-              </a:rPr>
-              <a:t>Hooriger Hund Sulzbach</a:t>
-            </a:r>
-            <a:endParaRPr lang="en-US" sz="1100" dirty="0"/>
-          </a:p>
-        </p:txBody>
-      </p:sp>
       <p:pic>
         <p:nvPicPr>
-          <p:cNvPr id="12" name="Image 4" descr="/var/folders/hm/sgq6d80d0vq133k7n8dc9bnw0000gn/T/maiershirts-fAJE9f/ref-vereine-0-4.png">    </p:cNvPr>
+          <p:cNvPr id="8" name="Image 4" descr="/var/folders/hm/sgq6d80d0vq133k7n8dc9bnw0000gn/T/maiershirts-H73pRN/ph-logo-446x194.png">    </p:cNvPr>
           <p:cNvPicPr>
             <a:picLocks noChangeAspect="1"/>
           </p:cNvPicPr>
           <p:nvPr>
-            <p:ph idx="111" type="pic" hasCustomPrompt="1"/>
+            <p:ph idx="107" type="pic" hasCustomPrompt="1"/>
           </p:nvPr>
         </p:nvPicPr>
         <p:blipFill>
@@ -14956,63 +17168,22 @@
         </p:blipFill>
         <p:spPr>
           <a:xfrm>
-            <a:off x="1073295" y="3090672"/>
-            <a:ext cx="688051" cy="667512"/>
+            <a:off x="566928" y="2441448"/>
+            <a:ext cx="1700784" cy="740664"/>
           </a:xfrm>
           <a:prstGeom prst="rect">
             <a:avLst/>
           </a:prstGeom>
         </p:spPr>
       </p:pic>
-      <p:sp>
-        <p:nvSpPr>
-          <p:cNvPr id="13" name="Text 0"/>
-          <p:cNvSpPr txBox="1"/>
-          <p:nvPr>
-            <p:ph idx="112" type="body" hasCustomPrompt="1"/>
-          </p:nvPr>
-        </p:nvSpPr>
-        <p:spPr>
-          <a:xfrm>
-            <a:off x="566928" y="4014216"/>
-            <a:ext cx="1700784" cy="274320"/>
-          </a:xfrm>
-          <a:prstGeom prst="rect">
-            <a:avLst/>
-          </a:prstGeom>
-          <a:noFill/>
-          <a:ln/>
-        </p:spPr>
-        <p:txBody>
-          <a:bodyPr wrap="square" lIns="0" tIns="0" rIns="0" bIns="0" rtlCol="0" anchor="ctr"/>
-          <a:lstStyle/>
-          <a:p>
-            <a:pPr algn="ctr" indent="0" marL="0">
-              <a:buNone/>
-            </a:pPr>
-            <a:r>
-              <a:rPr lang="en-US" sz="1100" b="1" dirty="0">
-                <a:solidFill>
-                  <a:srgbClr val="0F0F0F"/>
-                </a:solidFill>
-                <a:latin typeface="Inter" pitchFamily="34" charset="0"/>
-                <a:ea typeface="Inter" pitchFamily="34" charset="-122"/>
-                <a:cs typeface="Inter" pitchFamily="34" charset="-120"/>
-              </a:rPr>
-              <a:t>Sportfreunde Dußlingen</a:t>
-            </a:r>
-            <a:endParaRPr lang="en-US" sz="1100" dirty="0"/>
-          </a:p>
-        </p:txBody>
-      </p:sp>
       <p:pic>
         <p:nvPicPr>
-          <p:cNvPr id="14" name="Image 5" descr="/var/folders/hm/sgq6d80d0vq133k7n8dc9bnw0000gn/T/maiershirts-fAJE9f/ref-vereine-0-5.png">    </p:cNvPr>
+          <p:cNvPr id="9" name="Image 5" descr="/var/folders/hm/sgq6d80d0vq133k7n8dc9bnw0000gn/T/maiershirts-H73pRN/ph-logo-446x194.png">    </p:cNvPr>
           <p:cNvPicPr>
             <a:picLocks noChangeAspect="1"/>
           </p:cNvPicPr>
           <p:nvPr>
-            <p:ph idx="113" type="pic" hasCustomPrompt="1"/>
+            <p:ph idx="108" type="pic" hasCustomPrompt="1"/>
           </p:nvPr>
         </p:nvPicPr>
         <p:blipFill>
@@ -15023,63 +17194,22 @@
         </p:blipFill>
         <p:spPr>
           <a:xfrm>
-            <a:off x="3186684" y="3090672"/>
-            <a:ext cx="667512" cy="667512"/>
+            <a:off x="2670048" y="2441448"/>
+            <a:ext cx="1700784" cy="740664"/>
           </a:xfrm>
           <a:prstGeom prst="rect">
             <a:avLst/>
           </a:prstGeom>
         </p:spPr>
       </p:pic>
-      <p:sp>
-        <p:nvSpPr>
-          <p:cNvPr id="15" name="Text 0"/>
-          <p:cNvSpPr txBox="1"/>
-          <p:nvPr>
-            <p:ph idx="114" type="body" hasCustomPrompt="1"/>
-          </p:nvPr>
-        </p:nvSpPr>
-        <p:spPr>
-          <a:xfrm>
-            <a:off x="2670048" y="4014216"/>
-            <a:ext cx="1700784" cy="274320"/>
-          </a:xfrm>
-          <a:prstGeom prst="rect">
-            <a:avLst/>
-          </a:prstGeom>
-          <a:noFill/>
-          <a:ln/>
-        </p:spPr>
-        <p:txBody>
-          <a:bodyPr wrap="square" lIns="0" tIns="0" rIns="0" bIns="0" rtlCol="0" anchor="ctr"/>
-          <a:lstStyle/>
-          <a:p>
-            <a:pPr algn="ctr" indent="0" marL="0">
-              <a:buNone/>
-            </a:pPr>
-            <a:r>
-              <a:rPr lang="en-US" sz="1100" b="1" dirty="0">
-                <a:solidFill>
-                  <a:srgbClr val="0F0F0F"/>
-                </a:solidFill>
-                <a:latin typeface="Inter" pitchFamily="34" charset="0"/>
-                <a:ea typeface="Inter" pitchFamily="34" charset="-122"/>
-                <a:cs typeface="Inter" pitchFamily="34" charset="-120"/>
-              </a:rPr>
-              <a:t>SV Germania Bietigheim</a:t>
-            </a:r>
-            <a:endParaRPr lang="en-US" sz="1100" dirty="0"/>
-          </a:p>
-        </p:txBody>
-      </p:sp>
       <p:pic>
         <p:nvPicPr>
-          <p:cNvPr id="16" name="Image 6" descr="/var/folders/hm/sgq6d80d0vq133k7n8dc9bnw0000gn/T/maiershirts-fAJE9f/ref-vereine-0-6.png">    </p:cNvPr>
+          <p:cNvPr id="10" name="Image 6" descr="/var/folders/hm/sgq6d80d0vq133k7n8dc9bnw0000gn/T/maiershirts-H73pRN/ph-logo-446x194.png">    </p:cNvPr>
           <p:cNvPicPr>
             <a:picLocks noChangeAspect="1"/>
           </p:cNvPicPr>
           <p:nvPr>
-            <p:ph idx="115" type="pic" hasCustomPrompt="1"/>
+            <p:ph idx="109" type="pic" hasCustomPrompt="1"/>
           </p:nvPr>
         </p:nvPicPr>
         <p:blipFill>
@@ -15090,63 +17220,22 @@
         </p:blipFill>
         <p:spPr>
           <a:xfrm>
-            <a:off x="5288359" y="3090672"/>
-            <a:ext cx="670402" cy="667512"/>
+            <a:off x="4773168" y="2441448"/>
+            <a:ext cx="1700784" cy="740664"/>
           </a:xfrm>
           <a:prstGeom prst="rect">
             <a:avLst/>
           </a:prstGeom>
         </p:spPr>
       </p:pic>
-      <p:sp>
-        <p:nvSpPr>
-          <p:cNvPr id="17" name="Text 0"/>
-          <p:cNvSpPr txBox="1"/>
-          <p:nvPr>
-            <p:ph idx="116" type="body" hasCustomPrompt="1"/>
-          </p:nvPr>
-        </p:nvSpPr>
-        <p:spPr>
-          <a:xfrm>
-            <a:off x="4773168" y="4014216"/>
-            <a:ext cx="1700784" cy="274320"/>
-          </a:xfrm>
-          <a:prstGeom prst="rect">
-            <a:avLst/>
-          </a:prstGeom>
-          <a:noFill/>
-          <a:ln/>
-        </p:spPr>
-        <p:txBody>
-          <a:bodyPr wrap="square" lIns="0" tIns="0" rIns="0" bIns="0" rtlCol="0" anchor="ctr"/>
-          <a:lstStyle/>
-          <a:p>
-            <a:pPr algn="ctr" indent="0" marL="0">
-              <a:buNone/>
-            </a:pPr>
-            <a:r>
-              <a:rPr lang="en-US" sz="1100" b="1" dirty="0">
-                <a:solidFill>
-                  <a:srgbClr val="0F0F0F"/>
-                </a:solidFill>
-                <a:latin typeface="Inter" pitchFamily="34" charset="0"/>
-                <a:ea typeface="Inter" pitchFamily="34" charset="-122"/>
-                <a:cs typeface="Inter" pitchFamily="34" charset="-120"/>
-              </a:rPr>
-              <a:t>TV Mühlacker</a:t>
-            </a:r>
-            <a:endParaRPr lang="en-US" sz="1100" dirty="0"/>
-          </a:p>
-        </p:txBody>
-      </p:sp>
       <p:pic>
         <p:nvPicPr>
-          <p:cNvPr id="18" name="Image 7" descr="/var/folders/hm/sgq6d80d0vq133k7n8dc9bnw0000gn/T/maiershirts-fAJE9f/ref-vereine-0-7.png">    </p:cNvPr>
+          <p:cNvPr id="11" name="Image 7" descr="/var/folders/hm/sgq6d80d0vq133k7n8dc9bnw0000gn/T/maiershirts-H73pRN/ph-logo-446x194.png">    </p:cNvPr>
           <p:cNvPicPr>
             <a:picLocks noChangeAspect="1"/>
           </p:cNvPicPr>
           <p:nvPr>
-            <p:ph idx="117" type="pic" hasCustomPrompt="1"/>
+            <p:ph idx="110" type="pic" hasCustomPrompt="1"/>
           </p:nvPr>
         </p:nvPicPr>
         <p:blipFill>
@@ -15157,55 +17246,118 @@
         </p:blipFill>
         <p:spPr>
           <a:xfrm>
-            <a:off x="7022592" y="3098331"/>
-            <a:ext cx="1408176" cy="652193"/>
+            <a:off x="6876288" y="2441448"/>
+            <a:ext cx="1700784" cy="740664"/>
           </a:xfrm>
           <a:prstGeom prst="rect">
             <a:avLst/>
           </a:prstGeom>
         </p:spPr>
       </p:pic>
-      <p:sp>
-        <p:nvSpPr>
-          <p:cNvPr id="19" name="Text 0"/>
-          <p:cNvSpPr txBox="1"/>
-          <p:nvPr>
-            <p:ph idx="118" type="body" hasCustomPrompt="1"/>
-          </p:nvPr>
-        </p:nvSpPr>
-        <p:spPr>
-          <a:xfrm>
-            <a:off x="6876288" y="4014216"/>
-            <a:ext cx="1700784" cy="274320"/>
-          </a:xfrm>
-          <a:prstGeom prst="rect">
-            <a:avLst/>
-          </a:prstGeom>
-          <a:noFill/>
-          <a:ln/>
-        </p:spPr>
-        <p:txBody>
-          <a:bodyPr wrap="square" lIns="0" tIns="0" rIns="0" bIns="0" rtlCol="0" anchor="ctr"/>
-          <a:lstStyle/>
-          <a:p>
-            <a:pPr algn="ctr" indent="0" marL="0">
-              <a:buNone/>
-            </a:pPr>
-            <a:r>
-              <a:rPr lang="en-US" sz="1100" b="1" dirty="0">
-                <a:solidFill>
-                  <a:srgbClr val="0F0F0F"/>
-                </a:solidFill>
-                <a:latin typeface="Inter" pitchFamily="34" charset="0"/>
-                <a:ea typeface="Inter" pitchFamily="34" charset="-122"/>
-                <a:cs typeface="Inter" pitchFamily="34" charset="-120"/>
-              </a:rPr>
-              <a:t>Tennisclub Wurmlingen</a:t>
-            </a:r>
-            <a:endParaRPr lang="en-US" sz="1100" dirty="0"/>
-          </a:p>
-        </p:txBody>
-      </p:sp>
+      <p:pic>
+        <p:nvPicPr>
+          <p:cNvPr id="12" name="Image 8" descr="/var/folders/hm/sgq6d80d0vq133k7n8dc9bnw0000gn/T/maiershirts-H73pRN/ph-logo-446x194.png">    </p:cNvPr>
+          <p:cNvPicPr>
+            <a:picLocks noChangeAspect="1"/>
+          </p:cNvPicPr>
+          <p:nvPr>
+            <p:ph idx="111" type="pic" hasCustomPrompt="1"/>
+          </p:nvPr>
+        </p:nvPicPr>
+        <p:blipFill>
+          <a:blip r:embed="rId9"/>
+          <a:stretch>
+            <a:fillRect/>
+          </a:stretch>
+        </p:blipFill>
+        <p:spPr>
+          <a:xfrm>
+            <a:off x="566928" y="3538728"/>
+            <a:ext cx="1700784" cy="740664"/>
+          </a:xfrm>
+          <a:prstGeom prst="rect">
+            <a:avLst/>
+          </a:prstGeom>
+        </p:spPr>
+      </p:pic>
+      <p:pic>
+        <p:nvPicPr>
+          <p:cNvPr id="13" name="Image 9" descr="/var/folders/hm/sgq6d80d0vq133k7n8dc9bnw0000gn/T/maiershirts-H73pRN/ph-logo-446x194.png">    </p:cNvPr>
+          <p:cNvPicPr>
+            <a:picLocks noChangeAspect="1"/>
+          </p:cNvPicPr>
+          <p:nvPr>
+            <p:ph idx="112" type="pic" hasCustomPrompt="1"/>
+          </p:nvPr>
+        </p:nvPicPr>
+        <p:blipFill>
+          <a:blip r:embed="rId10"/>
+          <a:stretch>
+            <a:fillRect/>
+          </a:stretch>
+        </p:blipFill>
+        <p:spPr>
+          <a:xfrm>
+            <a:off x="2670048" y="3538728"/>
+            <a:ext cx="1700784" cy="740664"/>
+          </a:xfrm>
+          <a:prstGeom prst="rect">
+            <a:avLst/>
+          </a:prstGeom>
+        </p:spPr>
+      </p:pic>
+      <p:pic>
+        <p:nvPicPr>
+          <p:cNvPr id="14" name="Image 10" descr="/var/folders/hm/sgq6d80d0vq133k7n8dc9bnw0000gn/T/maiershirts-H73pRN/ph-logo-446x194.png">    </p:cNvPr>
+          <p:cNvPicPr>
+            <a:picLocks noChangeAspect="1"/>
+          </p:cNvPicPr>
+          <p:nvPr>
+            <p:ph idx="113" type="pic" hasCustomPrompt="1"/>
+          </p:nvPr>
+        </p:nvPicPr>
+        <p:blipFill>
+          <a:blip r:embed="rId11"/>
+          <a:stretch>
+            <a:fillRect/>
+          </a:stretch>
+        </p:blipFill>
+        <p:spPr>
+          <a:xfrm>
+            <a:off x="4773168" y="3538728"/>
+            <a:ext cx="1700784" cy="740664"/>
+          </a:xfrm>
+          <a:prstGeom prst="rect">
+            <a:avLst/>
+          </a:prstGeom>
+        </p:spPr>
+      </p:pic>
+      <p:pic>
+        <p:nvPicPr>
+          <p:cNvPr id="15" name="Image 11" descr="/var/folders/hm/sgq6d80d0vq133k7n8dc9bnw0000gn/T/maiershirts-H73pRN/ph-logo-446x194.png">    </p:cNvPr>
+          <p:cNvPicPr>
+            <a:picLocks noChangeAspect="1"/>
+          </p:cNvPicPr>
+          <p:nvPr>
+            <p:ph idx="114" type="pic" hasCustomPrompt="1"/>
+          </p:nvPr>
+        </p:nvPicPr>
+        <p:blipFill>
+          <a:blip r:embed="rId12"/>
+          <a:stretch>
+            <a:fillRect/>
+          </a:stretch>
+        </p:blipFill>
+        <p:spPr>
+          <a:xfrm>
+            <a:off x="6876288" y="3538728"/>
+            <a:ext cx="1700784" cy="740664"/>
+          </a:xfrm>
+          <a:prstGeom prst="rect">
+            <a:avLst/>
+          </a:prstGeom>
+        </p:spPr>
+      </p:pic>
       <p:sp>
         <p:nvSpPr>
           <p:cNvPr id="25" name="Slide Number Placeholder 0"/>
@@ -15314,20 +17466,63 @@
                 <a:ea typeface="Inter" pitchFamily="34" charset="-122"/>
                 <a:cs typeface="Inter" pitchFamily="34" charset="-120"/>
               </a:rPr>
-              <a:t>Stickerei im Detail</a:t>
+              <a:t>Vereine, die uns vertrauen</a:t>
             </a:r>
             <a:endParaRPr lang="en-US" sz="2800" dirty="0"/>
+          </a:p>
+        </p:txBody>
+      </p:sp>
+      <p:sp>
+        <p:nvSpPr>
+          <p:cNvPr id="3" name="Text 0"/>
+          <p:cNvSpPr txBox="1"/>
+          <p:nvPr>
+            <p:ph idx="102" type="body" hasCustomPrompt="1"/>
+          </p:nvPr>
+        </p:nvSpPr>
+        <p:spPr>
+          <a:xfrm>
+            <a:off x="457200" y="914400"/>
+            <a:ext cx="7132320" cy="274320"/>
+          </a:xfrm>
+          <a:prstGeom prst="rect">
+            <a:avLst/>
+          </a:prstGeom>
+          <a:noFill/>
+          <a:ln/>
+        </p:spPr>
+        <p:txBody>
+          <a:bodyPr wrap="square" lIns="0" tIns="0" rIns="0" bIns="0" rtlCol="0" anchor="ctr"/>
+          <a:lstStyle/>
+          <a:p>
+            <a:pPr algn="l" indent="0" marL="0">
+              <a:buNone/>
+            </a:pPr>
+            <a:r>
+              <a:rPr lang="en-US" sz="1200" dirty="0">
+                <a:solidFill>
+                  <a:srgbClr val="0F0F0F">
+                    <a:alpha val="60000"/>
+                  </a:srgbClr>
+                </a:solidFill>
+                <a:latin typeface="Inter" pitchFamily="34" charset="0"/>
+                <a:ea typeface="Inter" pitchFamily="34" charset="-122"/>
+                <a:cs typeface="Inter" pitchFamily="34" charset="-120"/>
+              </a:rPr>
+              <a:t>Eine Auswahl. Vom Trikotsatz bis zur Fanausstattung, für Vereine aus der ganzen Region.</a:t>
+            </a:r>
+            <a:endParaRPr lang="en-US" sz="1200" dirty="0"/>
           </a:p>
         </p:txBody>
       </p:sp>
       <p:pic>
         <p:nvPicPr>
-          <p:cNvPr id="3" name="Image 0" descr="/var/folders/hm/sgq6d80d0vq133k7n8dc9bnw0000gn/T/maiershirts-fAJE9f/ph-foto-1056x840.png">    </p:cNvPr>
+          <p:cNvPr id="4" name="Image 0" descr="/var/folders/hm/sgq6d80d0vq133k7n8dc9bnw0000gn/T/maiershirts-H73pRN/ref-vereine-0-0.png">    </p:cNvPr>
           <p:cNvPicPr>
             <a:picLocks noChangeAspect="1"/>
           </p:cNvPicPr>
           <p:nvPr>
-            <p:ph idx="102" type="pic" hasCustomPrompt="1"/>
+            <p:ph idx="103" type="pic" hasCustomPrompt="1"/>
           </p:nvPr>
         </p:nvPicPr>
         <p:blipFill>
@@ -15338,8 +17533,8 @@
         </p:blipFill>
         <p:spPr>
           <a:xfrm>
-            <a:off x="457200" y="1234440"/>
-            <a:ext cx="4023360" cy="3200400"/>
+            <a:off x="843422" y="1490472"/>
+            <a:ext cx="1147795" cy="667512"/>
           </a:xfrm>
           <a:prstGeom prst="rect">
             <a:avLst/>
@@ -15348,109 +17543,511 @@
       </p:pic>
       <p:sp>
         <p:nvSpPr>
-          <p:cNvPr id="4" name="Text 0"/>
+          <p:cNvPr id="5" name="Text 0"/>
           <p:cNvSpPr txBox="1"/>
           <p:nvPr>
-            <p:ph idx="103" type="body" hasCustomPrompt="1"/>
-          </p:nvPr>
-        </p:nvSpPr>
-        <p:spPr>
-          <a:xfrm>
-            <a:off x="4846320" y="1234440"/>
-            <a:ext cx="3840480" cy="3200400"/>
-          </a:xfrm>
-          <a:prstGeom prst="rect">
-            <a:avLst/>
-          </a:prstGeom>
-          <a:noFill/>
-          <a:ln/>
-        </p:spPr>
-        <p:txBody>
-          <a:bodyPr wrap="square" lIns="0" tIns="0" rIns="0" bIns="0" rtlCol="0" anchor="t"/>
+            <p:ph idx="104" type="body" hasCustomPrompt="1"/>
+          </p:nvPr>
+        </p:nvSpPr>
+        <p:spPr>
+          <a:xfrm>
+            <a:off x="566928" y="2414016"/>
+            <a:ext cx="1700784" cy="274320"/>
+          </a:xfrm>
+          <a:prstGeom prst="rect">
+            <a:avLst/>
+          </a:prstGeom>
+          <a:noFill/>
+          <a:ln/>
+        </p:spPr>
+        <p:txBody>
+          <a:bodyPr wrap="square" lIns="0" tIns="0" rIns="0" bIns="0" rtlCol="0" anchor="ctr"/>
           <a:lstStyle/>
           <a:p>
-            <a:pPr algn="l" marL="342900" indent="-342900">
-              <a:spcAft>
-                <a:spcPts val="800"/>
-              </a:spcAft>
-              <a:buSzPct val="100000"/>
-              <a:buChar char="•"/>
-            </a:pPr>
-            <a:r>
-              <a:rPr lang="en-US" sz="1600" dirty="0">
-                <a:solidFill>
-                  <a:srgbClr val="0F0F0F"/>
-                </a:solidFill>
-                <a:latin typeface="Inter" pitchFamily="34" charset="0"/>
-                <a:ea typeface="Inter" pitchFamily="34" charset="-122"/>
-                <a:cs typeface="Inter" pitchFamily="34" charset="-120"/>
-              </a:rPr>
-              <a:t>Bis zu 12 Garnfarben pro Motiv</a:t>
-            </a:r>
-            <a:endParaRPr lang="en-US" sz="1600" dirty="0"/>
-          </a:p>
-          <a:p>
-            <a:pPr algn="l" marL="342900" indent="-342900">
-              <a:spcAft>
-                <a:spcPts val="800"/>
-              </a:spcAft>
-              <a:buSzPct val="100000"/>
-              <a:buChar char="•"/>
-            </a:pPr>
-            <a:r>
-              <a:rPr lang="en-US" sz="1600" dirty="0">
-                <a:solidFill>
-                  <a:srgbClr val="0F0F0F"/>
-                </a:solidFill>
-                <a:latin typeface="Inter" pitchFamily="34" charset="0"/>
-                <a:ea typeface="Inter" pitchFamily="34" charset="-122"/>
-                <a:cs typeface="Inter" pitchFamily="34" charset="-120"/>
-              </a:rPr>
-              <a:t>Waschbeständig bis 60 °C</a:t>
-            </a:r>
-            <a:endParaRPr lang="en-US" sz="1600" dirty="0"/>
-          </a:p>
-          <a:p>
-            <a:pPr algn="l" marL="342900" indent="-342900">
-              <a:spcAft>
-                <a:spcPts val="800"/>
-              </a:spcAft>
-              <a:buSzPct val="100000"/>
-              <a:buChar char="•"/>
-            </a:pPr>
-            <a:r>
-              <a:rPr lang="en-US" sz="1600" dirty="0">
-                <a:solidFill>
-                  <a:srgbClr val="0F0F0F"/>
-                </a:solidFill>
-                <a:latin typeface="Inter" pitchFamily="34" charset="0"/>
-                <a:ea typeface="Inter" pitchFamily="34" charset="-122"/>
-                <a:cs typeface="Inter" pitchFamily="34" charset="-120"/>
-              </a:rPr>
-              <a:t>Ideal für Polos, Jacken und Caps</a:t>
-            </a:r>
-            <a:endParaRPr lang="en-US" sz="1600" dirty="0"/>
-          </a:p>
-          <a:p>
-            <a:pPr algn="l" marL="342900" indent="-342900">
-              <a:spcAft>
-                <a:spcPts val="800"/>
-              </a:spcAft>
-              <a:buSzPct val="100000"/>
-              <a:buChar char="•"/>
-            </a:pPr>
-            <a:r>
-              <a:rPr lang="en-US" sz="1600" dirty="0">
-                <a:solidFill>
-                  <a:srgbClr val="0F0F0F"/>
-                </a:solidFill>
-                <a:latin typeface="Inter" pitchFamily="34" charset="0"/>
-                <a:ea typeface="Inter" pitchFamily="34" charset="-122"/>
-                <a:cs typeface="Inter" pitchFamily="34" charset="-120"/>
-              </a:rPr>
-              <a:t>Motivdigitalisierung im Haus</a:t>
-            </a:r>
-            <a:endParaRPr lang="en-US" sz="1600" dirty="0"/>
+            <a:pPr algn="ctr" indent="0" marL="0">
+              <a:buNone/>
+            </a:pPr>
+            <a:r>
+              <a:rPr lang="en-US" sz="1100" b="1" dirty="0">
+                <a:solidFill>
+                  <a:srgbClr val="0F0F0F"/>
+                </a:solidFill>
+                <a:latin typeface="Inter" pitchFamily="34" charset="0"/>
+                <a:ea typeface="Inter" pitchFamily="34" charset="-122"/>
+                <a:cs typeface="Inter" pitchFamily="34" charset="-120"/>
+              </a:rPr>
+              <a:t>DAV Sektion Tübingen</a:t>
+            </a:r>
+            <a:endParaRPr lang="en-US" sz="1100" dirty="0"/>
+          </a:p>
+        </p:txBody>
+      </p:sp>
+      <p:pic>
+        <p:nvPicPr>
+          <p:cNvPr id="6" name="Image 1" descr="/var/folders/hm/sgq6d80d0vq133k7n8dc9bnw0000gn/T/maiershirts-H73pRN/ref-vereine-0-1.png">    </p:cNvPr>
+          <p:cNvPicPr>
+            <a:picLocks noChangeAspect="1"/>
+          </p:cNvPicPr>
+          <p:nvPr>
+            <p:ph idx="105" type="pic" hasCustomPrompt="1"/>
+          </p:nvPr>
+        </p:nvPicPr>
+        <p:blipFill>
+          <a:blip r:embed="rId2"/>
+          <a:stretch>
+            <a:fillRect/>
+          </a:stretch>
+        </p:blipFill>
+        <p:spPr>
+          <a:xfrm>
+            <a:off x="2858236" y="1490472"/>
+            <a:ext cx="1324409" cy="667512"/>
+          </a:xfrm>
+          <a:prstGeom prst="rect">
+            <a:avLst/>
+          </a:prstGeom>
+        </p:spPr>
+      </p:pic>
+      <p:sp>
+        <p:nvSpPr>
+          <p:cNvPr id="7" name="Text 0"/>
+          <p:cNvSpPr txBox="1"/>
+          <p:nvPr>
+            <p:ph idx="106" type="body" hasCustomPrompt="1"/>
+          </p:nvPr>
+        </p:nvSpPr>
+        <p:spPr>
+          <a:xfrm>
+            <a:off x="2670048" y="2414016"/>
+            <a:ext cx="1700784" cy="274320"/>
+          </a:xfrm>
+          <a:prstGeom prst="rect">
+            <a:avLst/>
+          </a:prstGeom>
+          <a:noFill/>
+          <a:ln/>
+        </p:spPr>
+        <p:txBody>
+          <a:bodyPr wrap="square" lIns="0" tIns="0" rIns="0" bIns="0" rtlCol="0" anchor="ctr"/>
+          <a:lstStyle/>
+          <a:p>
+            <a:pPr algn="ctr" indent="0" marL="0">
+              <a:buNone/>
+            </a:pPr>
+            <a:r>
+              <a:rPr lang="en-US" sz="1100" b="1" dirty="0">
+                <a:solidFill>
+                  <a:srgbClr val="0F0F0F"/>
+                </a:solidFill>
+                <a:latin typeface="Inter" pitchFamily="34" charset="0"/>
+                <a:ea typeface="Inter" pitchFamily="34" charset="-122"/>
+                <a:cs typeface="Inter" pitchFamily="34" charset="-120"/>
+              </a:rPr>
+              <a:t>Tennisclub Ammerbuch</a:t>
+            </a:r>
+            <a:endParaRPr lang="en-US" sz="1100" dirty="0"/>
+          </a:p>
+        </p:txBody>
+      </p:sp>
+      <p:pic>
+        <p:nvPicPr>
+          <p:cNvPr id="8" name="Image 2" descr="/var/folders/hm/sgq6d80d0vq133k7n8dc9bnw0000gn/T/maiershirts-H73pRN/ref-vereine-0-2.png">    </p:cNvPr>
+          <p:cNvPicPr>
+            <a:picLocks noChangeAspect="1"/>
+          </p:cNvPicPr>
+          <p:nvPr>
+            <p:ph idx="107" type="pic" hasCustomPrompt="1"/>
+          </p:nvPr>
+        </p:nvPicPr>
+        <p:blipFill>
+          <a:blip r:embed="rId3"/>
+          <a:stretch>
+            <a:fillRect/>
+          </a:stretch>
+        </p:blipFill>
+        <p:spPr>
+          <a:xfrm>
+            <a:off x="5369071" y="1490472"/>
+            <a:ext cx="508978" cy="667512"/>
+          </a:xfrm>
+          <a:prstGeom prst="rect">
+            <a:avLst/>
+          </a:prstGeom>
+        </p:spPr>
+      </p:pic>
+      <p:sp>
+        <p:nvSpPr>
+          <p:cNvPr id="9" name="Text 0"/>
+          <p:cNvSpPr txBox="1"/>
+          <p:nvPr>
+            <p:ph idx="108" type="body" hasCustomPrompt="1"/>
+          </p:nvPr>
+        </p:nvSpPr>
+        <p:spPr>
+          <a:xfrm>
+            <a:off x="4773168" y="2414016"/>
+            <a:ext cx="1700784" cy="274320"/>
+          </a:xfrm>
+          <a:prstGeom prst="rect">
+            <a:avLst/>
+          </a:prstGeom>
+          <a:noFill/>
+          <a:ln/>
+        </p:spPr>
+        <p:txBody>
+          <a:bodyPr wrap="square" lIns="0" tIns="0" rIns="0" bIns="0" rtlCol="0" anchor="ctr"/>
+          <a:lstStyle/>
+          <a:p>
+            <a:pPr algn="ctr" indent="0" marL="0">
+              <a:buNone/>
+            </a:pPr>
+            <a:r>
+              <a:rPr lang="en-US" sz="1100" b="1" dirty="0">
+                <a:solidFill>
+                  <a:srgbClr val="0F0F0F"/>
+                </a:solidFill>
+                <a:latin typeface="Inter" pitchFamily="34" charset="0"/>
+                <a:ea typeface="Inter" pitchFamily="34" charset="-122"/>
+                <a:cs typeface="Inter" pitchFamily="34" charset="-120"/>
+              </a:rPr>
+              <a:t>TGV Entringen</a:t>
+            </a:r>
+            <a:endParaRPr lang="en-US" sz="1100" dirty="0"/>
+          </a:p>
+        </p:txBody>
+      </p:sp>
+      <p:pic>
+        <p:nvPicPr>
+          <p:cNvPr id="10" name="Image 3" descr="/var/folders/hm/sgq6d80d0vq133k7n8dc9bnw0000gn/T/maiershirts-H73pRN/ref-vereine-0-3.png">    </p:cNvPr>
+          <p:cNvPicPr>
+            <a:picLocks noChangeAspect="1"/>
+          </p:cNvPicPr>
+          <p:nvPr>
+            <p:ph idx="109" type="pic" hasCustomPrompt="1"/>
+          </p:nvPr>
+        </p:nvPicPr>
+        <p:blipFill>
+          <a:blip r:embed="rId4"/>
+          <a:stretch>
+            <a:fillRect/>
+          </a:stretch>
+        </p:blipFill>
+        <p:spPr>
+          <a:xfrm>
+            <a:off x="7392924" y="1490472"/>
+            <a:ext cx="667512" cy="667512"/>
+          </a:xfrm>
+          <a:prstGeom prst="rect">
+            <a:avLst/>
+          </a:prstGeom>
+        </p:spPr>
+      </p:pic>
+      <p:sp>
+        <p:nvSpPr>
+          <p:cNvPr id="11" name="Text 0"/>
+          <p:cNvSpPr txBox="1"/>
+          <p:nvPr>
+            <p:ph idx="110" type="body" hasCustomPrompt="1"/>
+          </p:nvPr>
+        </p:nvSpPr>
+        <p:spPr>
+          <a:xfrm>
+            <a:off x="6876288" y="2414016"/>
+            <a:ext cx="1700784" cy="274320"/>
+          </a:xfrm>
+          <a:prstGeom prst="rect">
+            <a:avLst/>
+          </a:prstGeom>
+          <a:noFill/>
+          <a:ln/>
+        </p:spPr>
+        <p:txBody>
+          <a:bodyPr wrap="square" lIns="0" tIns="0" rIns="0" bIns="0" rtlCol="0" anchor="ctr"/>
+          <a:lstStyle/>
+          <a:p>
+            <a:pPr algn="ctr" indent="0" marL="0">
+              <a:buNone/>
+            </a:pPr>
+            <a:r>
+              <a:rPr lang="en-US" sz="1100" b="1" dirty="0">
+                <a:solidFill>
+                  <a:srgbClr val="0F0F0F"/>
+                </a:solidFill>
+                <a:latin typeface="Inter" pitchFamily="34" charset="0"/>
+                <a:ea typeface="Inter" pitchFamily="34" charset="-122"/>
+                <a:cs typeface="Inter" pitchFamily="34" charset="-120"/>
+              </a:rPr>
+              <a:t>Hooriger Hund Sulzbach</a:t>
+            </a:r>
+            <a:endParaRPr lang="en-US" sz="1100" dirty="0"/>
+          </a:p>
+        </p:txBody>
+      </p:sp>
+      <p:pic>
+        <p:nvPicPr>
+          <p:cNvPr id="12" name="Image 4" descr="/var/folders/hm/sgq6d80d0vq133k7n8dc9bnw0000gn/T/maiershirts-H73pRN/ref-vereine-0-4.png">    </p:cNvPr>
+          <p:cNvPicPr>
+            <a:picLocks noChangeAspect="1"/>
+          </p:cNvPicPr>
+          <p:nvPr>
+            <p:ph idx="111" type="pic" hasCustomPrompt="1"/>
+          </p:nvPr>
+        </p:nvPicPr>
+        <p:blipFill>
+          <a:blip r:embed="rId5"/>
+          <a:stretch>
+            <a:fillRect/>
+          </a:stretch>
+        </p:blipFill>
+        <p:spPr>
+          <a:xfrm>
+            <a:off x="1073295" y="3090672"/>
+            <a:ext cx="688051" cy="667512"/>
+          </a:xfrm>
+          <a:prstGeom prst="rect">
+            <a:avLst/>
+          </a:prstGeom>
+        </p:spPr>
+      </p:pic>
+      <p:sp>
+        <p:nvSpPr>
+          <p:cNvPr id="13" name="Text 0"/>
+          <p:cNvSpPr txBox="1"/>
+          <p:nvPr>
+            <p:ph idx="112" type="body" hasCustomPrompt="1"/>
+          </p:nvPr>
+        </p:nvSpPr>
+        <p:spPr>
+          <a:xfrm>
+            <a:off x="566928" y="4014216"/>
+            <a:ext cx="1700784" cy="274320"/>
+          </a:xfrm>
+          <a:prstGeom prst="rect">
+            <a:avLst/>
+          </a:prstGeom>
+          <a:noFill/>
+          <a:ln/>
+        </p:spPr>
+        <p:txBody>
+          <a:bodyPr wrap="square" lIns="0" tIns="0" rIns="0" bIns="0" rtlCol="0" anchor="ctr"/>
+          <a:lstStyle/>
+          <a:p>
+            <a:pPr algn="ctr" indent="0" marL="0">
+              <a:buNone/>
+            </a:pPr>
+            <a:r>
+              <a:rPr lang="en-US" sz="1100" b="1" dirty="0">
+                <a:solidFill>
+                  <a:srgbClr val="0F0F0F"/>
+                </a:solidFill>
+                <a:latin typeface="Inter" pitchFamily="34" charset="0"/>
+                <a:ea typeface="Inter" pitchFamily="34" charset="-122"/>
+                <a:cs typeface="Inter" pitchFamily="34" charset="-120"/>
+              </a:rPr>
+              <a:t>Sportfreunde Dußlingen</a:t>
+            </a:r>
+            <a:endParaRPr lang="en-US" sz="1100" dirty="0"/>
+          </a:p>
+        </p:txBody>
+      </p:sp>
+      <p:pic>
+        <p:nvPicPr>
+          <p:cNvPr id="14" name="Image 5" descr="/var/folders/hm/sgq6d80d0vq133k7n8dc9bnw0000gn/T/maiershirts-H73pRN/ref-vereine-0-5.png">    </p:cNvPr>
+          <p:cNvPicPr>
+            <a:picLocks noChangeAspect="1"/>
+          </p:cNvPicPr>
+          <p:nvPr>
+            <p:ph idx="113" type="pic" hasCustomPrompt="1"/>
+          </p:nvPr>
+        </p:nvPicPr>
+        <p:blipFill>
+          <a:blip r:embed="rId6"/>
+          <a:stretch>
+            <a:fillRect/>
+          </a:stretch>
+        </p:blipFill>
+        <p:spPr>
+          <a:xfrm>
+            <a:off x="3186684" y="3090672"/>
+            <a:ext cx="667512" cy="667512"/>
+          </a:xfrm>
+          <a:prstGeom prst="rect">
+            <a:avLst/>
+          </a:prstGeom>
+        </p:spPr>
+      </p:pic>
+      <p:sp>
+        <p:nvSpPr>
+          <p:cNvPr id="15" name="Text 0"/>
+          <p:cNvSpPr txBox="1"/>
+          <p:nvPr>
+            <p:ph idx="114" type="body" hasCustomPrompt="1"/>
+          </p:nvPr>
+        </p:nvSpPr>
+        <p:spPr>
+          <a:xfrm>
+            <a:off x="2670048" y="4014216"/>
+            <a:ext cx="1700784" cy="274320"/>
+          </a:xfrm>
+          <a:prstGeom prst="rect">
+            <a:avLst/>
+          </a:prstGeom>
+          <a:noFill/>
+          <a:ln/>
+        </p:spPr>
+        <p:txBody>
+          <a:bodyPr wrap="square" lIns="0" tIns="0" rIns="0" bIns="0" rtlCol="0" anchor="ctr"/>
+          <a:lstStyle/>
+          <a:p>
+            <a:pPr algn="ctr" indent="0" marL="0">
+              <a:buNone/>
+            </a:pPr>
+            <a:r>
+              <a:rPr lang="en-US" sz="1100" b="1" dirty="0">
+                <a:solidFill>
+                  <a:srgbClr val="0F0F0F"/>
+                </a:solidFill>
+                <a:latin typeface="Inter" pitchFamily="34" charset="0"/>
+                <a:ea typeface="Inter" pitchFamily="34" charset="-122"/>
+                <a:cs typeface="Inter" pitchFamily="34" charset="-120"/>
+              </a:rPr>
+              <a:t>SV Germania Bietigheim</a:t>
+            </a:r>
+            <a:endParaRPr lang="en-US" sz="1100" dirty="0"/>
+          </a:p>
+        </p:txBody>
+      </p:sp>
+      <p:pic>
+        <p:nvPicPr>
+          <p:cNvPr id="16" name="Image 6" descr="/var/folders/hm/sgq6d80d0vq133k7n8dc9bnw0000gn/T/maiershirts-H73pRN/ref-vereine-0-6.png">    </p:cNvPr>
+          <p:cNvPicPr>
+            <a:picLocks noChangeAspect="1"/>
+          </p:cNvPicPr>
+          <p:nvPr>
+            <p:ph idx="115" type="pic" hasCustomPrompt="1"/>
+          </p:nvPr>
+        </p:nvPicPr>
+        <p:blipFill>
+          <a:blip r:embed="rId7"/>
+          <a:stretch>
+            <a:fillRect/>
+          </a:stretch>
+        </p:blipFill>
+        <p:spPr>
+          <a:xfrm>
+            <a:off x="5288359" y="3090672"/>
+            <a:ext cx="670402" cy="667512"/>
+          </a:xfrm>
+          <a:prstGeom prst="rect">
+            <a:avLst/>
+          </a:prstGeom>
+        </p:spPr>
+      </p:pic>
+      <p:sp>
+        <p:nvSpPr>
+          <p:cNvPr id="17" name="Text 0"/>
+          <p:cNvSpPr txBox="1"/>
+          <p:nvPr>
+            <p:ph idx="116" type="body" hasCustomPrompt="1"/>
+          </p:nvPr>
+        </p:nvSpPr>
+        <p:spPr>
+          <a:xfrm>
+            <a:off x="4773168" y="4014216"/>
+            <a:ext cx="1700784" cy="274320"/>
+          </a:xfrm>
+          <a:prstGeom prst="rect">
+            <a:avLst/>
+          </a:prstGeom>
+          <a:noFill/>
+          <a:ln/>
+        </p:spPr>
+        <p:txBody>
+          <a:bodyPr wrap="square" lIns="0" tIns="0" rIns="0" bIns="0" rtlCol="0" anchor="ctr"/>
+          <a:lstStyle/>
+          <a:p>
+            <a:pPr algn="ctr" indent="0" marL="0">
+              <a:buNone/>
+            </a:pPr>
+            <a:r>
+              <a:rPr lang="en-US" sz="1100" b="1" dirty="0">
+                <a:solidFill>
+                  <a:srgbClr val="0F0F0F"/>
+                </a:solidFill>
+                <a:latin typeface="Inter" pitchFamily="34" charset="0"/>
+                <a:ea typeface="Inter" pitchFamily="34" charset="-122"/>
+                <a:cs typeface="Inter" pitchFamily="34" charset="-120"/>
+              </a:rPr>
+              <a:t>TV Mühlacker</a:t>
+            </a:r>
+            <a:endParaRPr lang="en-US" sz="1100" dirty="0"/>
+          </a:p>
+        </p:txBody>
+      </p:sp>
+      <p:pic>
+        <p:nvPicPr>
+          <p:cNvPr id="18" name="Image 7" descr="/var/folders/hm/sgq6d80d0vq133k7n8dc9bnw0000gn/T/maiershirts-H73pRN/ref-vereine-0-7.png">    </p:cNvPr>
+          <p:cNvPicPr>
+            <a:picLocks noChangeAspect="1"/>
+          </p:cNvPicPr>
+          <p:nvPr>
+            <p:ph idx="117" type="pic" hasCustomPrompt="1"/>
+          </p:nvPr>
+        </p:nvPicPr>
+        <p:blipFill>
+          <a:blip r:embed="rId8"/>
+          <a:stretch>
+            <a:fillRect/>
+          </a:stretch>
+        </p:blipFill>
+        <p:spPr>
+          <a:xfrm>
+            <a:off x="7022592" y="3098331"/>
+            <a:ext cx="1408176" cy="652193"/>
+          </a:xfrm>
+          <a:prstGeom prst="rect">
+            <a:avLst/>
+          </a:prstGeom>
+        </p:spPr>
+      </p:pic>
+      <p:sp>
+        <p:nvSpPr>
+          <p:cNvPr id="19" name="Text 0"/>
+          <p:cNvSpPr txBox="1"/>
+          <p:nvPr>
+            <p:ph idx="118" type="body" hasCustomPrompt="1"/>
+          </p:nvPr>
+        </p:nvSpPr>
+        <p:spPr>
+          <a:xfrm>
+            <a:off x="6876288" y="4014216"/>
+            <a:ext cx="1700784" cy="274320"/>
+          </a:xfrm>
+          <a:prstGeom prst="rect">
+            <a:avLst/>
+          </a:prstGeom>
+          <a:noFill/>
+          <a:ln/>
+        </p:spPr>
+        <p:txBody>
+          <a:bodyPr wrap="square" lIns="0" tIns="0" rIns="0" bIns="0" rtlCol="0" anchor="ctr"/>
+          <a:lstStyle/>
+          <a:p>
+            <a:pPr algn="ctr" indent="0" marL="0">
+              <a:buNone/>
+            </a:pPr>
+            <a:r>
+              <a:rPr lang="en-US" sz="1100" b="1" dirty="0">
+                <a:solidFill>
+                  <a:srgbClr val="0F0F0F"/>
+                </a:solidFill>
+                <a:latin typeface="Inter" pitchFamily="34" charset="0"/>
+                <a:ea typeface="Inter" pitchFamily="34" charset="-122"/>
+                <a:cs typeface="Inter" pitchFamily="34" charset="-120"/>
+              </a:rPr>
+              <a:t>Tennisclub Wurmlingen</a:t>
+            </a:r>
+            <a:endParaRPr lang="en-US" sz="1100" dirty="0"/>
           </a:p>
         </p:txBody>
       </p:sp>
@@ -15562,145 +18159,50 @@
                 <a:ea typeface="Inter" pitchFamily="34" charset="-122"/>
                 <a:cs typeface="Inter" pitchFamily="34" charset="-120"/>
               </a:rPr>
-              <a:t>Auftragsvolumen nach Produktgruppe</a:t>
+              <a:t>Stickerei im Detail</a:t>
             </a:r>
             <a:endParaRPr lang="en-US" sz="2800" dirty="0"/>
           </a:p>
         </p:txBody>
       </p:sp>
-      <p:graphicFrame>
-        <p:nvGraphicFramePr>
-          <p:cNvPr id="3" name="Chart 0" descr=""/>
-          <p:cNvGraphicFramePr/>
-          <p:nvPr/>
-        </p:nvGraphicFramePr>
-        <p:xfrm>
-          <a:off x="457200" y="1188720"/>
-          <a:ext cx="5303520" cy="3291840"/>
-        </p:xfrm>
-        <a:graphic xmlns:a="http://schemas.openxmlformats.org/drawingml/2006/main">
-          <a:graphicData uri="http://schemas.openxmlformats.org/drawingml/2006/chart">
-            <c:chart xmlns:c="http://schemas.openxmlformats.org/drawingml/2006/chart" r:id="rId1"/>
-          </a:graphicData>
-        </a:graphic>
-      </p:graphicFrame>
-      <p:sp>
-        <p:nvSpPr>
-          <p:cNvPr id="4" name="Shape 1"/>
-          <p:cNvSpPr/>
-          <p:nvPr/>
-        </p:nvSpPr>
-        <p:spPr>
-          <a:xfrm>
-            <a:off x="6035040" y="1188720"/>
-            <a:ext cx="2651760" cy="3291840"/>
-          </a:xfrm>
-          <a:prstGeom prst="roundRect">
-            <a:avLst>
-              <a:gd name="adj" fmla="val 4138"/>
-            </a:avLst>
-          </a:prstGeom>
-          <a:solidFill>
-            <a:srgbClr val="E8DFD0"/>
-          </a:solidFill>
-          <a:ln w="12700">
-            <a:solidFill>
-              <a:srgbClr val="E8DFD0"/>
-            </a:solidFill>
-            <a:prstDash val="solid"/>
-          </a:ln>
-        </p:spPr>
-      </p:sp>
-      <p:sp>
-        <p:nvSpPr>
-          <p:cNvPr id="5" name="Text 2"/>
+      <p:pic>
+        <p:nvPicPr>
+          <p:cNvPr id="3" name="Image 0" descr="/var/folders/hm/sgq6d80d0vq133k7n8dc9bnw0000gn/T/maiershirts-H73pRN/ph-foto-1056x840.png">    </p:cNvPr>
+          <p:cNvPicPr>
+            <a:picLocks noChangeAspect="1"/>
+          </p:cNvPicPr>
+          <p:nvPr>
+            <p:ph idx="102" type="pic" hasCustomPrompt="1"/>
+          </p:nvPr>
+        </p:nvPicPr>
+        <p:blipFill>
+          <a:blip r:embed="rId1"/>
+          <a:stretch>
+            <a:fillRect/>
+          </a:stretch>
+        </p:blipFill>
+        <p:spPr>
+          <a:xfrm>
+            <a:off x="457200" y="1234440"/>
+            <a:ext cx="4023360" cy="3200400"/>
+          </a:xfrm>
+          <a:prstGeom prst="rect">
+            <a:avLst/>
+          </a:prstGeom>
+        </p:spPr>
+      </p:pic>
+      <p:sp>
+        <p:nvSpPr>
+          <p:cNvPr id="4" name="Text 0"/>
           <p:cNvSpPr txBox="1"/>
-          <p:nvPr/>
-        </p:nvSpPr>
-        <p:spPr>
-          <a:xfrm>
-            <a:off x="6263640" y="1371600"/>
-            <a:ext cx="2194560" cy="274320"/>
-          </a:xfrm>
-          <a:prstGeom prst="rect">
-            <a:avLst/>
-          </a:prstGeom>
-          <a:noFill/>
-          <a:ln/>
-        </p:spPr>
-        <p:txBody>
-          <a:bodyPr wrap="square" lIns="0" tIns="0" rIns="0" bIns="0" rtlCol="0" anchor="ctr"/>
-          <a:lstStyle/>
-          <a:p>
-            <a:pPr indent="0" marL="0">
-              <a:buNone/>
-            </a:pPr>
-            <a:r>
-              <a:rPr lang="en-US" sz="1200" dirty="0">
-                <a:solidFill>
-                  <a:srgbClr val="0F0F0F">
-                    <a:alpha val="60000"/>
-                  </a:srgbClr>
-                </a:solidFill>
-                <a:latin typeface="Inter" pitchFamily="34" charset="0"/>
-                <a:ea typeface="Inter" pitchFamily="34" charset="-122"/>
-                <a:cs typeface="Inter" pitchFamily="34" charset="-120"/>
-              </a:rPr>
-              <a:t>Beispieldaten</a:t>
-            </a:r>
-            <a:endParaRPr lang="en-US" sz="1200" dirty="0"/>
-          </a:p>
-        </p:txBody>
-      </p:sp>
-      <p:sp>
-        <p:nvSpPr>
-          <p:cNvPr id="6" name="Text 3"/>
-          <p:cNvSpPr txBox="1"/>
-          <p:nvPr/>
-        </p:nvSpPr>
-        <p:spPr>
-          <a:xfrm>
-            <a:off x="6263640" y="1691640"/>
-            <a:ext cx="2194560" cy="640080"/>
-          </a:xfrm>
-          <a:prstGeom prst="rect">
-            <a:avLst/>
-          </a:prstGeom>
-          <a:noFill/>
-          <a:ln/>
-        </p:spPr>
-        <p:txBody>
-          <a:bodyPr wrap="square" lIns="0" tIns="0" rIns="0" bIns="0" rtlCol="0" anchor="ctr"/>
-          <a:lstStyle/>
-          <a:p>
-            <a:pPr indent="0" marL="0">
-              <a:buNone/>
-            </a:pPr>
-            <a:r>
-              <a:rPr lang="en-US" sz="1600" b="1" dirty="0">
-                <a:solidFill>
-                  <a:srgbClr val="0F0F0F"/>
-                </a:solidFill>
-                <a:latin typeface="Inter" pitchFamily="34" charset="0"/>
-                <a:ea typeface="Inter" pitchFamily="34" charset="-122"/>
-                <a:cs typeface="Inter" pitchFamily="34" charset="-120"/>
-              </a:rPr>
-              <a:t>T-Shirts machen den größten Anteil aus</a:t>
-            </a:r>
-            <a:endParaRPr lang="en-US" sz="1600" dirty="0"/>
-          </a:p>
-        </p:txBody>
-      </p:sp>
-      <p:sp>
-        <p:nvSpPr>
-          <p:cNvPr id="7" name="Text 4"/>
-          <p:cNvSpPr txBox="1"/>
-          <p:nvPr/>
-        </p:nvSpPr>
-        <p:spPr>
-          <a:xfrm>
-            <a:off x="6263640" y="2423160"/>
-            <a:ext cx="2194560" cy="1097280"/>
+          <p:nvPr>
+            <p:ph idx="103" type="body" hasCustomPrompt="1"/>
+          </p:nvPr>
+        </p:nvSpPr>
+        <p:spPr>
+          <a:xfrm>
+            <a:off x="4846320" y="1234440"/>
+            <a:ext cx="3840480" cy="3200400"/>
           </a:xfrm>
           <a:prstGeom prst="rect">
             <a:avLst/>
@@ -15712,23 +18214,88 @@
           <a:bodyPr wrap="square" lIns="0" tIns="0" rIns="0" bIns="0" rtlCol="0" anchor="t"/>
           <a:lstStyle/>
           <a:p>
-            <a:pPr indent="0" marL="0">
-              <a:buNone/>
-            </a:pPr>
-            <a:r>
-              <a:rPr lang="en-US" sz="1200" dirty="0">
-                <a:solidFill>
-                  <a:srgbClr val="0F0F0F">
-                    <a:alpha val="60000"/>
-                  </a:srgbClr>
-                </a:solidFill>
-                <a:latin typeface="Inter" pitchFamily="34" charset="0"/>
-                <a:ea typeface="Inter" pitchFamily="34" charset="-122"/>
-                <a:cs typeface="Inter" pitchFamily="34" charset="-120"/>
-              </a:rPr>
-              <a:t>Natives Diagramm: Werte per Rechtsklick → „Daten bearbeiten“ ändern.</a:t>
-            </a:r>
-            <a:endParaRPr lang="en-US" sz="1200" dirty="0"/>
+            <a:pPr algn="l" marL="342900" indent="-342900">
+              <a:spcAft>
+                <a:spcPts val="800"/>
+              </a:spcAft>
+              <a:buSzPct val="100000"/>
+              <a:buChar char="•"/>
+            </a:pPr>
+            <a:r>
+              <a:rPr lang="en-US" sz="1600" dirty="0">
+                <a:solidFill>
+                  <a:srgbClr val="0F0F0F"/>
+                </a:solidFill>
+                <a:latin typeface="Inter" pitchFamily="34" charset="0"/>
+                <a:ea typeface="Inter" pitchFamily="34" charset="-122"/>
+                <a:cs typeface="Inter" pitchFamily="34" charset="-120"/>
+              </a:rPr>
+              <a:t>Bis zu 12 Garnfarben pro Motiv</a:t>
+            </a:r>
+            <a:endParaRPr lang="en-US" sz="1600" dirty="0"/>
+          </a:p>
+          <a:p>
+            <a:pPr algn="l" marL="342900" indent="-342900">
+              <a:spcAft>
+                <a:spcPts val="800"/>
+              </a:spcAft>
+              <a:buSzPct val="100000"/>
+              <a:buChar char="•"/>
+            </a:pPr>
+            <a:r>
+              <a:rPr lang="en-US" sz="1600" dirty="0">
+                <a:solidFill>
+                  <a:srgbClr val="0F0F0F"/>
+                </a:solidFill>
+                <a:latin typeface="Inter" pitchFamily="34" charset="0"/>
+                <a:ea typeface="Inter" pitchFamily="34" charset="-122"/>
+                <a:cs typeface="Inter" pitchFamily="34" charset="-120"/>
+              </a:rPr>
+              <a:t>Waschbeständig bis 60 °C</a:t>
+            </a:r>
+            <a:endParaRPr lang="en-US" sz="1600" dirty="0"/>
+          </a:p>
+          <a:p>
+            <a:pPr algn="l" marL="342900" indent="-342900">
+              <a:spcAft>
+                <a:spcPts val="800"/>
+              </a:spcAft>
+              <a:buSzPct val="100000"/>
+              <a:buChar char="•"/>
+            </a:pPr>
+            <a:r>
+              <a:rPr lang="en-US" sz="1600" dirty="0">
+                <a:solidFill>
+                  <a:srgbClr val="0F0F0F"/>
+                </a:solidFill>
+                <a:latin typeface="Inter" pitchFamily="34" charset="0"/>
+                <a:ea typeface="Inter" pitchFamily="34" charset="-122"/>
+                <a:cs typeface="Inter" pitchFamily="34" charset="-120"/>
+              </a:rPr>
+              <a:t>Ideal für Polos, Jacken und Caps</a:t>
+            </a:r>
+            <a:endParaRPr lang="en-US" sz="1600" dirty="0"/>
+          </a:p>
+          <a:p>
+            <a:pPr algn="l" marL="342900" indent="-342900">
+              <a:spcAft>
+                <a:spcPts val="800"/>
+              </a:spcAft>
+              <a:buSzPct val="100000"/>
+              <a:buChar char="•"/>
+            </a:pPr>
+            <a:r>
+              <a:rPr lang="en-US" sz="1600" dirty="0">
+                <a:solidFill>
+                  <a:srgbClr val="0F0F0F"/>
+                </a:solidFill>
+                <a:latin typeface="Inter" pitchFamily="34" charset="0"/>
+                <a:ea typeface="Inter" pitchFamily="34" charset="-122"/>
+                <a:cs typeface="Inter" pitchFamily="34" charset="-120"/>
+              </a:rPr>
+              <a:t>Motivdigitalisierung im Haus</a:t>
+            </a:r>
+            <a:endParaRPr lang="en-US" sz="1600" dirty="0"/>
           </a:p>
         </p:txBody>
       </p:sp>
@@ -15840,24 +18407,145 @@
                 <a:ea typeface="Inter" pitchFamily="34" charset="-122"/>
                 <a:cs typeface="Inter" pitchFamily="34" charset="-120"/>
               </a:rPr>
-              <a:t>Folientitel</a:t>
+              <a:t>Auftragsvolumen nach Produktgruppe</a:t>
             </a:r>
             <a:endParaRPr lang="en-US" sz="2800" dirty="0"/>
           </a:p>
         </p:txBody>
       </p:sp>
-      <p:sp>
-        <p:nvSpPr>
-          <p:cNvPr id="3" name="Text 0"/>
+      <p:graphicFrame>
+        <p:nvGraphicFramePr>
+          <p:cNvPr id="3" name="Chart 0" descr=""/>
+          <p:cNvGraphicFramePr/>
+          <p:nvPr/>
+        </p:nvGraphicFramePr>
+        <p:xfrm>
+          <a:off x="457200" y="1188720"/>
+          <a:ext cx="5303520" cy="3291840"/>
+        </p:xfrm>
+        <a:graphic xmlns:a="http://schemas.openxmlformats.org/drawingml/2006/main">
+          <a:graphicData uri="http://schemas.openxmlformats.org/drawingml/2006/chart">
+            <c:chart xmlns:c="http://schemas.openxmlformats.org/drawingml/2006/chart" r:id="rId1"/>
+          </a:graphicData>
+        </a:graphic>
+      </p:graphicFrame>
+      <p:sp>
+        <p:nvSpPr>
+          <p:cNvPr id="4" name="Shape 1"/>
+          <p:cNvSpPr/>
+          <p:nvPr/>
+        </p:nvSpPr>
+        <p:spPr>
+          <a:xfrm>
+            <a:off x="6035040" y="1188720"/>
+            <a:ext cx="2651760" cy="3291840"/>
+          </a:xfrm>
+          <a:prstGeom prst="roundRect">
+            <a:avLst>
+              <a:gd name="adj" fmla="val 4138"/>
+            </a:avLst>
+          </a:prstGeom>
+          <a:solidFill>
+            <a:srgbClr val="E8DFD0"/>
+          </a:solidFill>
+          <a:ln w="12700">
+            <a:solidFill>
+              <a:srgbClr val="E8DFD0"/>
+            </a:solidFill>
+            <a:prstDash val="solid"/>
+          </a:ln>
+        </p:spPr>
+      </p:sp>
+      <p:sp>
+        <p:nvSpPr>
+          <p:cNvPr id="5" name="Text 2"/>
           <p:cNvSpPr txBox="1"/>
-          <p:nvPr>
-            <p:ph idx="102" type="body" hasCustomPrompt="1"/>
-          </p:nvPr>
-        </p:nvSpPr>
-        <p:spPr>
-          <a:xfrm>
-            <a:off x="457200" y="1234440"/>
-            <a:ext cx="8229600" cy="3200400"/>
+          <p:nvPr/>
+        </p:nvSpPr>
+        <p:spPr>
+          <a:xfrm>
+            <a:off x="6263640" y="1371600"/>
+            <a:ext cx="2194560" cy="274320"/>
+          </a:xfrm>
+          <a:prstGeom prst="rect">
+            <a:avLst/>
+          </a:prstGeom>
+          <a:noFill/>
+          <a:ln/>
+        </p:spPr>
+        <p:txBody>
+          <a:bodyPr wrap="square" lIns="0" tIns="0" rIns="0" bIns="0" rtlCol="0" anchor="ctr"/>
+          <a:lstStyle/>
+          <a:p>
+            <a:pPr indent="0" marL="0">
+              <a:buNone/>
+            </a:pPr>
+            <a:r>
+              <a:rPr lang="en-US" sz="1200" dirty="0">
+                <a:solidFill>
+                  <a:srgbClr val="0F0F0F">
+                    <a:alpha val="60000"/>
+                  </a:srgbClr>
+                </a:solidFill>
+                <a:latin typeface="Inter" pitchFamily="34" charset="0"/>
+                <a:ea typeface="Inter" pitchFamily="34" charset="-122"/>
+                <a:cs typeface="Inter" pitchFamily="34" charset="-120"/>
+              </a:rPr>
+              <a:t>Beispieldaten</a:t>
+            </a:r>
+            <a:endParaRPr lang="en-US" sz="1200" dirty="0"/>
+          </a:p>
+        </p:txBody>
+      </p:sp>
+      <p:sp>
+        <p:nvSpPr>
+          <p:cNvPr id="6" name="Text 3"/>
+          <p:cNvSpPr txBox="1"/>
+          <p:nvPr/>
+        </p:nvSpPr>
+        <p:spPr>
+          <a:xfrm>
+            <a:off x="6263640" y="1691640"/>
+            <a:ext cx="2194560" cy="640080"/>
+          </a:xfrm>
+          <a:prstGeom prst="rect">
+            <a:avLst/>
+          </a:prstGeom>
+          <a:noFill/>
+          <a:ln/>
+        </p:spPr>
+        <p:txBody>
+          <a:bodyPr wrap="square" lIns="0" tIns="0" rIns="0" bIns="0" rtlCol="0" anchor="ctr"/>
+          <a:lstStyle/>
+          <a:p>
+            <a:pPr indent="0" marL="0">
+              <a:buNone/>
+            </a:pPr>
+            <a:r>
+              <a:rPr lang="en-US" sz="1600" b="1" dirty="0">
+                <a:solidFill>
+                  <a:srgbClr val="0F0F0F"/>
+                </a:solidFill>
+                <a:latin typeface="Inter" pitchFamily="34" charset="0"/>
+                <a:ea typeface="Inter" pitchFamily="34" charset="-122"/>
+                <a:cs typeface="Inter" pitchFamily="34" charset="-120"/>
+              </a:rPr>
+              <a:t>T-Shirts machen den größten Anteil aus</a:t>
+            </a:r>
+            <a:endParaRPr lang="en-US" sz="1600" dirty="0"/>
+          </a:p>
+        </p:txBody>
+      </p:sp>
+      <p:sp>
+        <p:nvSpPr>
+          <p:cNvPr id="7" name="Text 4"/>
+          <p:cNvSpPr txBox="1"/>
+          <p:nvPr/>
+        </p:nvSpPr>
+        <p:spPr>
+          <a:xfrm>
+            <a:off x="6263640" y="2423160"/>
+            <a:ext cx="2194560" cy="1097280"/>
           </a:xfrm>
           <a:prstGeom prst="rect">
             <a:avLst/>
@@ -15869,109 +18557,23 @@
           <a:bodyPr wrap="square" lIns="0" tIns="0" rIns="0" bIns="0" rtlCol="0" anchor="t"/>
           <a:lstStyle/>
           <a:p>
-            <a:pPr algn="l" marL="342900" indent="-342900">
-              <a:spcAft>
-                <a:spcPts val="800"/>
-              </a:spcAft>
-              <a:buSzPct val="100000"/>
-              <a:buChar char="•"/>
-            </a:pPr>
-            <a:r>
-              <a:rPr lang="en-US" sz="1600" dirty="0">
-                <a:solidFill>
-                  <a:srgbClr val="0F0F0F"/>
-                </a:solidFill>
-                <a:latin typeface="Inter" pitchFamily="34" charset="0"/>
-                <a:ea typeface="Inter" pitchFamily="34" charset="-122"/>
-                <a:cs typeface="Inter" pitchFamily="34" charset="-120"/>
-              </a:rPr>
-              <a:t>Erste Aussage der Folie</a:t>
-            </a:r>
-            <a:endParaRPr lang="en-US" sz="1600" dirty="0"/>
-          </a:p>
-          <a:p>
-            <a:pPr algn="l" marL="342900" indent="-342900">
-              <a:spcAft>
-                <a:spcPts val="800"/>
-              </a:spcAft>
-              <a:buSzPct val="100000"/>
-              <a:buChar char="•"/>
-            </a:pPr>
-            <a:r>
-              <a:rPr lang="en-US" sz="1600" dirty="0">
-                <a:solidFill>
-                  <a:srgbClr val="0F0F0F"/>
-                </a:solidFill>
-                <a:latin typeface="Inter" pitchFamily="34" charset="0"/>
-                <a:ea typeface="Inter" pitchFamily="34" charset="-122"/>
-                <a:cs typeface="Inter" pitchFamily="34" charset="-120"/>
-              </a:rPr>
-              <a:t>Zweite Aussage mit einer kurzen Erläuterung</a:t>
-            </a:r>
-            <a:endParaRPr lang="en-US" sz="1600" dirty="0"/>
-          </a:p>
-          <a:p>
-            <a:pPr algn="l" marL="342900" indent="-342900">
-              <a:spcAft>
-                <a:spcPts val="800"/>
-              </a:spcAft>
-              <a:buSzPct val="100000"/>
-              <a:buChar char="•"/>
-            </a:pPr>
-            <a:r>
-              <a:rPr lang="en-US" sz="1600" dirty="0">
-                <a:solidFill>
-                  <a:srgbClr val="0F0F0F"/>
-                </a:solidFill>
-                <a:latin typeface="Inter" pitchFamily="34" charset="0"/>
-                <a:ea typeface="Inter" pitchFamily="34" charset="-122"/>
-                <a:cs typeface="Inter" pitchFamily="34" charset="-120"/>
-              </a:rPr>
-              <a:t>Dritte Aussage</a:t>
-            </a:r>
-            <a:endParaRPr lang="en-US" sz="1600" dirty="0"/>
-          </a:p>
-          <a:p>
-            <a:pPr algn="l" lvl="1" marL="685800" indent="-342900">
-              <a:spcAft>
-                <a:spcPts val="800"/>
-              </a:spcAft>
-              <a:buSzPct val="100000"/>
-              <a:buChar char="•"/>
-            </a:pPr>
-            <a:r>
-              <a:rPr lang="en-US" sz="1600" dirty="0">
-                <a:solidFill>
-                  <a:srgbClr val="0F0F0F"/>
-                </a:solidFill>
-                <a:latin typeface="Inter" pitchFamily="34" charset="0"/>
-                <a:ea typeface="Inter" pitchFamily="34" charset="-122"/>
-                <a:cs typeface="Inter" pitchFamily="34" charset="-120"/>
-              </a:rPr>
-              <a:t>Unterpunkt zur dritten Aussage</a:t>
-            </a:r>
-            <a:endParaRPr lang="en-US" sz="1600" dirty="0"/>
-          </a:p>
-          <a:p>
-            <a:pPr algn="l" lvl="1" marL="685800" indent="-342900">
-              <a:spcAft>
-                <a:spcPts val="800"/>
-              </a:spcAft>
-              <a:buSzPct val="100000"/>
-              <a:buChar char="•"/>
-            </a:pPr>
-            <a:r>
-              <a:rPr lang="en-US" sz="1600" dirty="0">
-                <a:solidFill>
-                  <a:srgbClr val="0F0F0F"/>
-                </a:solidFill>
-                <a:latin typeface="Inter" pitchFamily="34" charset="0"/>
-                <a:ea typeface="Inter" pitchFamily="34" charset="-122"/>
-                <a:cs typeface="Inter" pitchFamily="34" charset="-120"/>
-              </a:rPr>
-              <a:t>Weiterer Unterpunkt</a:t>
-            </a:r>
-            <a:endParaRPr lang="en-US" sz="1600" dirty="0"/>
+            <a:pPr indent="0" marL="0">
+              <a:buNone/>
+            </a:pPr>
+            <a:r>
+              <a:rPr lang="en-US" sz="1200" dirty="0">
+                <a:solidFill>
+                  <a:srgbClr val="0F0F0F">
+                    <a:alpha val="60000"/>
+                  </a:srgbClr>
+                </a:solidFill>
+                <a:latin typeface="Inter" pitchFamily="34" charset="0"/>
+                <a:ea typeface="Inter" pitchFamily="34" charset="-122"/>
+                <a:cs typeface="Inter" pitchFamily="34" charset="-120"/>
+              </a:rPr>
+              <a:t>Natives Diagramm: Werte per Rechtsklick → „Daten bearbeiten“ ändern.</a:t>
+            </a:r>
+            <a:endParaRPr lang="en-US" sz="1200" dirty="0"/>
           </a:p>
         </p:txBody>
       </p:sp>
@@ -16058,6 +18660,249 @@
         </p:nvSpPr>
         <p:spPr>
           <a:xfrm>
+            <a:off x="457200" y="320040"/>
+            <a:ext cx="7132320" cy="640080"/>
+          </a:xfrm>
+          <a:prstGeom prst="rect">
+            <a:avLst/>
+          </a:prstGeom>
+          <a:noFill/>
+          <a:ln/>
+        </p:spPr>
+        <p:txBody>
+          <a:bodyPr wrap="square" lIns="0" tIns="0" rIns="0" bIns="0" rtlCol="0" anchor="ctr"/>
+          <a:lstStyle/>
+          <a:p>
+            <a:pPr algn="l" indent="0" marL="0">
+              <a:buNone/>
+            </a:pPr>
+            <a:r>
+              <a:rPr lang="en-US" sz="2800" b="1" dirty="0">
+                <a:solidFill>
+                  <a:srgbClr val="0F0F0F"/>
+                </a:solidFill>
+                <a:latin typeface="Inter" pitchFamily="34" charset="0"/>
+                <a:ea typeface="Inter" pitchFamily="34" charset="-122"/>
+                <a:cs typeface="Inter" pitchFamily="34" charset="-120"/>
+              </a:rPr>
+              <a:t>Folientitel</a:t>
+            </a:r>
+            <a:endParaRPr lang="en-US" sz="2800" dirty="0"/>
+          </a:p>
+        </p:txBody>
+      </p:sp>
+      <p:sp>
+        <p:nvSpPr>
+          <p:cNvPr id="3" name="Text 0"/>
+          <p:cNvSpPr txBox="1"/>
+          <p:nvPr>
+            <p:ph idx="102" type="body" hasCustomPrompt="1"/>
+          </p:nvPr>
+        </p:nvSpPr>
+        <p:spPr>
+          <a:xfrm>
+            <a:off x="457200" y="1234440"/>
+            <a:ext cx="8229600" cy="3200400"/>
+          </a:xfrm>
+          <a:prstGeom prst="rect">
+            <a:avLst/>
+          </a:prstGeom>
+          <a:noFill/>
+          <a:ln/>
+        </p:spPr>
+        <p:txBody>
+          <a:bodyPr wrap="square" lIns="0" tIns="0" rIns="0" bIns="0" rtlCol="0" anchor="t"/>
+          <a:lstStyle/>
+          <a:p>
+            <a:pPr algn="l" marL="342900" indent="-342900">
+              <a:spcAft>
+                <a:spcPts val="800"/>
+              </a:spcAft>
+              <a:buSzPct val="100000"/>
+              <a:buChar char="•"/>
+            </a:pPr>
+            <a:r>
+              <a:rPr lang="en-US" sz="1600" dirty="0">
+                <a:solidFill>
+                  <a:srgbClr val="0F0F0F"/>
+                </a:solidFill>
+                <a:latin typeface="Inter" pitchFamily="34" charset="0"/>
+                <a:ea typeface="Inter" pitchFamily="34" charset="-122"/>
+                <a:cs typeface="Inter" pitchFamily="34" charset="-120"/>
+              </a:rPr>
+              <a:t>Erste Aussage der Folie</a:t>
+            </a:r>
+            <a:endParaRPr lang="en-US" sz="1600" dirty="0"/>
+          </a:p>
+          <a:p>
+            <a:pPr algn="l" marL="342900" indent="-342900">
+              <a:spcAft>
+                <a:spcPts val="800"/>
+              </a:spcAft>
+              <a:buSzPct val="100000"/>
+              <a:buChar char="•"/>
+            </a:pPr>
+            <a:r>
+              <a:rPr lang="en-US" sz="1600" dirty="0">
+                <a:solidFill>
+                  <a:srgbClr val="0F0F0F"/>
+                </a:solidFill>
+                <a:latin typeface="Inter" pitchFamily="34" charset="0"/>
+                <a:ea typeface="Inter" pitchFamily="34" charset="-122"/>
+                <a:cs typeface="Inter" pitchFamily="34" charset="-120"/>
+              </a:rPr>
+              <a:t>Zweite Aussage mit einer kurzen Erläuterung</a:t>
+            </a:r>
+            <a:endParaRPr lang="en-US" sz="1600" dirty="0"/>
+          </a:p>
+          <a:p>
+            <a:pPr algn="l" marL="342900" indent="-342900">
+              <a:spcAft>
+                <a:spcPts val="800"/>
+              </a:spcAft>
+              <a:buSzPct val="100000"/>
+              <a:buChar char="•"/>
+            </a:pPr>
+            <a:r>
+              <a:rPr lang="en-US" sz="1600" dirty="0">
+                <a:solidFill>
+                  <a:srgbClr val="0F0F0F"/>
+                </a:solidFill>
+                <a:latin typeface="Inter" pitchFamily="34" charset="0"/>
+                <a:ea typeface="Inter" pitchFamily="34" charset="-122"/>
+                <a:cs typeface="Inter" pitchFamily="34" charset="-120"/>
+              </a:rPr>
+              <a:t>Dritte Aussage</a:t>
+            </a:r>
+            <a:endParaRPr lang="en-US" sz="1600" dirty="0"/>
+          </a:p>
+          <a:p>
+            <a:pPr algn="l" lvl="1" marL="685800" indent="-342900">
+              <a:spcAft>
+                <a:spcPts val="800"/>
+              </a:spcAft>
+              <a:buSzPct val="100000"/>
+              <a:buChar char="•"/>
+            </a:pPr>
+            <a:r>
+              <a:rPr lang="en-US" sz="1600" dirty="0">
+                <a:solidFill>
+                  <a:srgbClr val="0F0F0F"/>
+                </a:solidFill>
+                <a:latin typeface="Inter" pitchFamily="34" charset="0"/>
+                <a:ea typeface="Inter" pitchFamily="34" charset="-122"/>
+                <a:cs typeface="Inter" pitchFamily="34" charset="-120"/>
+              </a:rPr>
+              <a:t>Unterpunkt zur dritten Aussage</a:t>
+            </a:r>
+            <a:endParaRPr lang="en-US" sz="1600" dirty="0"/>
+          </a:p>
+          <a:p>
+            <a:pPr algn="l" lvl="1" marL="685800" indent="-342900">
+              <a:spcAft>
+                <a:spcPts val="800"/>
+              </a:spcAft>
+              <a:buSzPct val="100000"/>
+              <a:buChar char="•"/>
+            </a:pPr>
+            <a:r>
+              <a:rPr lang="en-US" sz="1600" dirty="0">
+                <a:solidFill>
+                  <a:srgbClr val="0F0F0F"/>
+                </a:solidFill>
+                <a:latin typeface="Inter" pitchFamily="34" charset="0"/>
+                <a:ea typeface="Inter" pitchFamily="34" charset="-122"/>
+                <a:cs typeface="Inter" pitchFamily="34" charset="-120"/>
+              </a:rPr>
+              <a:t>Weiterer Unterpunkt</a:t>
+            </a:r>
+            <a:endParaRPr lang="en-US" sz="1600" dirty="0"/>
+          </a:p>
+        </p:txBody>
+      </p:sp>
+      <p:sp>
+        <p:nvSpPr>
+          <p:cNvPr id="25" name="Slide Number Placeholder 0"/>
+          <p:cNvSpPr>
+            <a:spLocks noGrp="1"/>
+          </p:cNvSpPr>
+          <p:nvPr>
+            <p:ph type="sldNum" sz="quarter" idx="4294967295"/>
+          </p:nvPr>
+        </p:nvSpPr>
+        <p:spPr>
+          <a:xfrm>
+            <a:off x="8229600" y="4709160"/>
+            <a:ext cx="457200" cy="274320"/>
+          </a:xfrm>
+          <a:prstGeom prst="rect">
+            <a:avLst/>
+          </a:prstGeom>
+          <a:extLst>
+            <a:ext uri="{C572A759-6A51-4108-AA02-DFA0A04FC94B}">
+              <ma14:wrappingTextBoxFlag xmlns:ma14="http://schemas.microsoft.com/office/mac/drawingml/2011/main" val="0"/>
+            </a:ext>
+          </a:extLst>
+        </p:spPr>
+        <p:txBody>
+          <a:bodyPr lIns="0" tIns="0" rIns="0" bIns="0"/>
+          <a:lstStyle>
+            <a:lvl1pPr>
+              <a:defRPr sz="1000">
+                <a:solidFill>
+                  <a:srgbClr val="0F0F0F"/>
+                </a:solidFill>
+                <a:latin typeface="Inter"/>
+                <a:ea typeface="Inter"/>
+                <a:cs typeface="Inter"/>
+              </a:defRPr>
+            </a:lvl1pPr>
+          </a:lstStyle>
+          <a:p>
+            <a:pPr algn="r"/>
+            <a:fld id="{F7021451-1387-4CA6-816F-3879F97B5CBC}" type="slidenum">
+              <a:rPr b="0" lang="en-US"/>
+              <a:t>17</a:t>
+            </a:fld>
+            <a:endParaRPr lang="en-US"/>
+          </a:p>
+        </p:txBody>
+      </p:sp>
+    </p:spTree>
+  </p:cSld>
+  <p:clrMapOvr>
+    <a:masterClrMapping/>
+  </p:clrMapOvr>
+</p:sld>
+</file>
+
+<file path=ppt/slides/slide18.xml><?xml version="1.0" encoding="utf-8"?>
+<p:sld xmlns:a="http://schemas.openxmlformats.org/drawingml/2006/main" xmlns:r="http://schemas.openxmlformats.org/officeDocument/2006/relationships" xmlns:p="http://schemas.openxmlformats.org/presentationml/2006/main">
+  <p:cSld name="Slide 18">
+    <p:spTree>
+      <p:nvGrpSpPr>
+        <p:cNvPr id="1" name=""/>
+        <p:cNvGrpSpPr/>
+        <p:nvPr/>
+      </p:nvGrpSpPr>
+      <p:grpSpPr>
+        <a:xfrm>
+          <a:off x="0" y="0"/>
+          <a:ext cx="0" cy="0"/>
+          <a:chOff x="0" y="0"/>
+          <a:chExt cx="0" cy="0"/>
+        </a:xfrm>
+      </p:grpSpPr>
+      <p:sp>
+        <p:nvSpPr>
+          <p:cNvPr id="2" name="Text 0"/>
+          <p:cNvSpPr txBox="1"/>
+          <p:nvPr>
+            <p:ph idx="101" type="title" hasCustomPrompt="1"/>
+          </p:nvPr>
+        </p:nvSpPr>
+        <p:spPr>
+          <a:xfrm>
             <a:off x="548640" y="1371600"/>
             <a:ext cx="4846320" cy="1005840"/>
           </a:xfrm>
@@ -16134,7 +18979,7 @@
       </p:sp>
       <p:pic>
         <p:nvPicPr>
-          <p:cNvPr id="4" name="Image 0" descr="/var/folders/hm/sgq6d80d0vq133k7n8dc9bnw0000gn/T/maiershirts-fAJE9f/ph-portrait-252x252.png">    </p:cNvPr>
+          <p:cNvPr id="4" name="Image 0" descr="/var/folders/hm/sgq6d80d0vq133k7n8dc9bnw0000gn/T/maiershirts-H73pRN/ph-portrait-252x252.png">    </p:cNvPr>
           <p:cNvPicPr>
             <a:picLocks noChangeAspect="1"/>
           </p:cNvPicPr>
@@ -16343,7 +19188,7 @@
       </p:sp>
       <p:pic>
         <p:nvPicPr>
-          <p:cNvPr id="9" name="Image 1" descr="/var/folders/hm/sgq6d80d0vq133k7n8dc9bnw0000gn/T/maiershirts-fAJE9f/ph-qr-240x240.png">    </p:cNvPr>
+          <p:cNvPr id="9" name="Image 1" descr="/var/folders/hm/sgq6d80d0vq133k7n8dc9bnw0000gn/T/maiershirts-H73pRN/ph-qr-240x240.png">    </p:cNvPr>
           <p:cNvPicPr>
             <a:picLocks noChangeAspect="1"/>
           </p:cNvPicPr>
@@ -17759,7 +20604,7 @@
       </p:grpSpPr>
       <p:pic>
         <p:nvPicPr>
-          <p:cNvPr id="2" name="Image 0" descr="/var/folders/hm/sgq6d80d0vq133k7n8dc9bnw0000gn/T/maiershirts-fAJE9f/ph-foto-2400x1008.png">    </p:cNvPr>
+          <p:cNvPr id="2" name="Image 0" descr="/var/folders/hm/sgq6d80d0vq133k7n8dc9bnw0000gn/T/maiershirts-H73pRN/ph-foto-2400x1008.png">    </p:cNvPr>
           <p:cNvPicPr>
             <a:picLocks noChangeAspect="1"/>
           </p:cNvPicPr>
@@ -18909,100 +21754,33 @@
                 <a:ea typeface="Inter" pitchFamily="34" charset="-122"/>
                 <a:cs typeface="Inter" pitchFamily="34" charset="-120"/>
               </a:rPr>
-              <a:t>Textilien für Ihr Projekt</a:t>
+              <a:t>Vier Verfahren, ein Anspruch</a:t>
             </a:r>
             <a:endParaRPr lang="en-US" sz="2800" dirty="0"/>
           </a:p>
         </p:txBody>
       </p:sp>
-      <p:pic>
-        <p:nvPicPr>
-          <p:cNvPr id="3" name="Image 0" descr="/var/folders/hm/sgq6d80d0vq133k7n8dc9bnw0000gn/T/maiershirts-fAJE9f/ph-foto-696x456.png">    </p:cNvPr>
-          <p:cNvPicPr>
-            <a:picLocks noChangeAspect="1"/>
-          </p:cNvPicPr>
-          <p:nvPr>
-            <p:ph idx="102" type="pic" hasCustomPrompt="1"/>
-          </p:nvPr>
-        </p:nvPicPr>
-        <p:blipFill>
-          <a:blip r:embed="rId1"/>
-          <a:stretch>
-            <a:fillRect/>
-          </a:stretch>
-        </p:blipFill>
-        <p:spPr>
-          <a:xfrm>
-            <a:off x="457200" y="1234440"/>
-            <a:ext cx="2651760" cy="1737360"/>
-          </a:xfrm>
-          <a:prstGeom prst="rect">
-            <a:avLst/>
-          </a:prstGeom>
-        </p:spPr>
-      </p:pic>
-      <p:sp>
-        <p:nvSpPr>
-          <p:cNvPr id="4" name="Text 0"/>
+      <p:sp>
+        <p:nvSpPr>
+          <p:cNvPr id="3" name="Text 0"/>
           <p:cNvSpPr txBox="1"/>
           <p:nvPr>
-            <p:ph idx="103" type="body" hasCustomPrompt="1"/>
-          </p:nvPr>
-        </p:nvSpPr>
-        <p:spPr>
-          <a:xfrm>
-            <a:off x="457200" y="3063240"/>
-            <a:ext cx="2651760" cy="320040"/>
-          </a:xfrm>
-          <a:prstGeom prst="rect">
-            <a:avLst/>
-          </a:prstGeom>
-          <a:noFill/>
-          <a:ln/>
-        </p:spPr>
-        <p:txBody>
-          <a:bodyPr wrap="square" lIns="0" tIns="0" rIns="0" bIns="0" rtlCol="0" anchor="t"/>
-          <a:lstStyle/>
-          <a:p>
-            <a:pPr algn="l" indent="0" marL="0">
-              <a:buNone/>
-            </a:pPr>
-            <a:r>
-              <a:rPr lang="en-US" sz="1600" b="1" dirty="0">
-                <a:solidFill>
-                  <a:srgbClr val="0F0F0F"/>
-                </a:solidFill>
-                <a:latin typeface="Inter" pitchFamily="34" charset="0"/>
-                <a:ea typeface="Inter" pitchFamily="34" charset="-122"/>
-                <a:cs typeface="Inter" pitchFamily="34" charset="-120"/>
-              </a:rPr>
-              <a:t>T-Shirt Bio-Baumwolle</a:t>
-            </a:r>
-            <a:endParaRPr lang="en-US" sz="1600" dirty="0"/>
-          </a:p>
-        </p:txBody>
-      </p:sp>
-      <p:sp>
-        <p:nvSpPr>
-          <p:cNvPr id="5" name="Text 0"/>
-          <p:cNvSpPr txBox="1"/>
-          <p:nvPr>
-            <p:ph idx="104" type="body" hasCustomPrompt="1"/>
-          </p:nvPr>
-        </p:nvSpPr>
-        <p:spPr>
-          <a:xfrm>
-            <a:off x="457200" y="3383280"/>
-            <a:ext cx="2651760" cy="685800"/>
-          </a:xfrm>
-          <a:prstGeom prst="rect">
-            <a:avLst/>
-          </a:prstGeom>
-          <a:noFill/>
-          <a:ln/>
-        </p:spPr>
-        <p:txBody>
-          <a:bodyPr wrap="square" lIns="0" tIns="0" rIns="0" bIns="0" rtlCol="0" anchor="t"/>
+            <p:ph idx="102" type="body" hasCustomPrompt="1"/>
+          </p:nvPr>
+        </p:nvSpPr>
+        <p:spPr>
+          <a:xfrm>
+            <a:off x="457200" y="914400"/>
+            <a:ext cx="7132320" cy="274320"/>
+          </a:xfrm>
+          <a:prstGeom prst="rect">
+            <a:avLst/>
+          </a:prstGeom>
+          <a:noFill/>
+          <a:ln/>
+        </p:spPr>
+        <p:txBody>
+          <a:bodyPr wrap="square" lIns="0" tIns="0" rIns="0" bIns="0" rtlCol="0" anchor="ctr"/>
           <a:lstStyle/>
           <a:p>
             <a:pPr algn="l" indent="0" marL="0">
@@ -19019,34 +21797,56 @@
                 <a:ea typeface="Inter" pitchFamily="34" charset="-122"/>
                 <a:cs typeface="Inter" pitchFamily="34" charset="-120"/>
               </a:rPr>
-              <a:t>B&amp;C Inspire T · 140 g/m²</a:t>
+              <a:t>Ehrlich mit Stärken und Grenzen, damit Ihr Motiv da landet, wo es am besten sitzt.</a:t>
             </a:r>
             <a:endParaRPr lang="en-US" sz="1200" dirty="0"/>
           </a:p>
+        </p:txBody>
+      </p:sp>
+      <p:sp>
+        <p:nvSpPr>
+          <p:cNvPr id="4" name="Text 1"/>
+          <p:cNvSpPr txBox="1"/>
+          <p:nvPr>
+            <p:ph idx="104" type="body" hasCustomPrompt="1"/>
+          </p:nvPr>
+        </p:nvSpPr>
+        <p:spPr>
+          <a:xfrm>
+            <a:off x="621792" y="1600200"/>
+            <a:ext cx="1645920" cy="320040"/>
+          </a:xfrm>
+          <a:prstGeom prst="rect">
+            <a:avLst/>
+          </a:prstGeom>
+          <a:noFill/>
+          <a:ln/>
+        </p:spPr>
+        <p:txBody>
+          <a:bodyPr wrap="square" lIns="0" tIns="0" rIns="0" bIns="0" rtlCol="0" anchor="ctr"/>
+          <a:lstStyle/>
           <a:p>
             <a:pPr algn="l" indent="0" marL="0">
               <a:buNone/>
             </a:pPr>
             <a:r>
-              <a:rPr lang="en-US" sz="1200" dirty="0">
-                <a:solidFill>
-                  <a:srgbClr val="0F0F0F">
-                    <a:alpha val="60000"/>
-                  </a:srgbClr>
-                </a:solidFill>
-                <a:latin typeface="Inter" pitchFamily="34" charset="0"/>
-                <a:ea typeface="Inter" pitchFamily="34" charset="-122"/>
-                <a:cs typeface="Inter" pitchFamily="34" charset="-120"/>
-              </a:rPr>
-              <a:t>12 Farben · XS bis 3XL</a:t>
-            </a:r>
-            <a:endParaRPr lang="en-US" sz="1200" dirty="0"/>
-          </a:p>
-        </p:txBody>
-      </p:sp>
-      <p:sp>
-        <p:nvSpPr>
-          <p:cNvPr id="6" name="Text 0"/>
+              <a:rPr lang="en-US" sz="1600" b="1" dirty="0">
+                <a:solidFill>
+                  <a:srgbClr val="0F0F0F"/>
+                </a:solidFill>
+                <a:latin typeface="Inter" pitchFamily="34" charset="0"/>
+                <a:ea typeface="Inter" pitchFamily="34" charset="-122"/>
+                <a:cs typeface="Inter" pitchFamily="34" charset="-120"/>
+              </a:rPr>
+              <a:t>Digitaldruck</a:t>
+            </a:r>
+            <a:endParaRPr lang="en-US" sz="1600" dirty="0"/>
+          </a:p>
+        </p:txBody>
+      </p:sp>
+      <p:sp>
+        <p:nvSpPr>
+          <p:cNvPr id="5" name="Text 1"/>
           <p:cNvSpPr txBox="1"/>
           <p:nvPr>
             <p:ph idx="105" type="body" hasCustomPrompt="1"/>
@@ -19054,8 +21854,8 @@
         </p:nvSpPr>
         <p:spPr>
           <a:xfrm>
-            <a:off x="457200" y="4069080"/>
-            <a:ext cx="2651760" cy="320040"/>
+            <a:off x="621792" y="1938528"/>
+            <a:ext cx="1645920" cy="1097280"/>
           </a:xfrm>
           <a:prstGeom prst="rect">
             <a:avLst/>
@@ -19071,58 +21871,196 @@
               <a:buNone/>
             </a:pPr>
             <a:r>
+              <a:rPr lang="en-US" sz="1200" dirty="0">
+                <a:solidFill>
+                  <a:srgbClr val="0F0F0F"/>
+                </a:solidFill>
+                <a:latin typeface="Inter" pitchFamily="34" charset="0"/>
+                <a:ea typeface="Inter" pitchFamily="34" charset="-122"/>
+                <a:cs typeface="Inter" pitchFamily="34" charset="-120"/>
+              </a:rPr>
+              <a:t>Fotos, viele Farben, Namen und Nummern. Kleine Mengen, gemischte Größen, fast jedes Material.</a:t>
+            </a:r>
+            <a:endParaRPr lang="en-US" sz="1200" dirty="0"/>
+          </a:p>
+        </p:txBody>
+      </p:sp>
+      <p:sp>
+        <p:nvSpPr>
+          <p:cNvPr id="6" name="Text 2"/>
+          <p:cNvSpPr txBox="1"/>
+          <p:nvPr>
+            <p:ph idx="107" type="body" hasCustomPrompt="1"/>
+          </p:nvPr>
+        </p:nvSpPr>
+        <p:spPr>
+          <a:xfrm>
+            <a:off x="1261872" y="3090672"/>
+            <a:ext cx="1005840" cy="310896"/>
+          </a:xfrm>
+          <a:prstGeom prst="rect">
+            <a:avLst/>
+          </a:prstGeom>
+          <a:noFill/>
+          <a:ln/>
+        </p:spPr>
+        <p:txBody>
+          <a:bodyPr wrap="square" lIns="0" tIns="0" rIns="0" bIns="0" rtlCol="0" anchor="ctr"/>
+          <a:lstStyle/>
+          <a:p>
+            <a:pPr algn="l" indent="0" marL="0">
+              <a:buNone/>
+            </a:pPr>
+            <a:r>
+              <a:rPr lang="en-US" sz="1200" b="1" dirty="0">
+                <a:solidFill>
+                  <a:srgbClr val="0F0F0F"/>
+                </a:solidFill>
+                <a:latin typeface="Inter" pitchFamily="34" charset="0"/>
+                <a:ea typeface="Inter" pitchFamily="34" charset="-122"/>
+                <a:cs typeface="Inter" pitchFamily="34" charset="-120"/>
+              </a:rPr>
+              <a:t>bis 60 °C</a:t>
+            </a:r>
+            <a:endParaRPr lang="en-US" sz="1200" dirty="0"/>
+          </a:p>
+        </p:txBody>
+      </p:sp>
+      <p:sp>
+        <p:nvSpPr>
+          <p:cNvPr id="7" name="Text 3"/>
+          <p:cNvSpPr txBox="1"/>
+          <p:nvPr>
+            <p:ph idx="109" type="body" hasCustomPrompt="1"/>
+          </p:nvPr>
+        </p:nvSpPr>
+        <p:spPr>
+          <a:xfrm>
+            <a:off x="1261872" y="3419856"/>
+            <a:ext cx="1005840" cy="310896"/>
+          </a:xfrm>
+          <a:prstGeom prst="rect">
+            <a:avLst/>
+          </a:prstGeom>
+          <a:noFill/>
+          <a:ln/>
+        </p:spPr>
+        <p:txBody>
+          <a:bodyPr wrap="square" lIns="0" tIns="0" rIns="0" bIns="0" rtlCol="0" anchor="ctr"/>
+          <a:lstStyle/>
+          <a:p>
+            <a:pPr algn="l" indent="0" marL="0">
+              <a:buNone/>
+            </a:pPr>
+            <a:r>
+              <a:rPr lang="en-US" sz="1200" b="1" dirty="0">
+                <a:solidFill>
+                  <a:srgbClr val="0F0F0F"/>
+                </a:solidFill>
+                <a:latin typeface="Inter" pitchFamily="34" charset="0"/>
+                <a:ea typeface="Inter" pitchFamily="34" charset="-122"/>
+                <a:cs typeface="Inter" pitchFamily="34" charset="-120"/>
+              </a:rPr>
+              <a:t>ab 1 Stück</a:t>
+            </a:r>
+            <a:endParaRPr lang="en-US" sz="1200" dirty="0"/>
+          </a:p>
+        </p:txBody>
+      </p:sp>
+      <p:sp>
+        <p:nvSpPr>
+          <p:cNvPr id="8" name="Text 4"/>
+          <p:cNvSpPr txBox="1"/>
+          <p:nvPr>
+            <p:ph idx="111" type="body" hasCustomPrompt="1"/>
+          </p:nvPr>
+        </p:nvSpPr>
+        <p:spPr>
+          <a:xfrm>
+            <a:off x="1261872" y="3749040"/>
+            <a:ext cx="1005840" cy="310896"/>
+          </a:xfrm>
+          <a:prstGeom prst="rect">
+            <a:avLst/>
+          </a:prstGeom>
+          <a:noFill/>
+          <a:ln/>
+        </p:spPr>
+        <p:txBody>
+          <a:bodyPr wrap="square" lIns="0" tIns="0" rIns="0" bIns="0" rtlCol="0" anchor="ctr"/>
+          <a:lstStyle/>
+          <a:p>
+            <a:pPr algn="l" indent="0" marL="0">
+              <a:buNone/>
+            </a:pPr>
+            <a:r>
+              <a:rPr lang="en-US" sz="1200" b="1" dirty="0">
+                <a:solidFill>
+                  <a:srgbClr val="0F0F0F"/>
+                </a:solidFill>
+                <a:latin typeface="Inter" pitchFamily="34" charset="0"/>
+                <a:ea typeface="Inter" pitchFamily="34" charset="-122"/>
+                <a:cs typeface="Inter" pitchFamily="34" charset="-120"/>
+              </a:rPr>
+              <a:t>Vollfarbe</a:t>
+            </a:r>
+            <a:endParaRPr lang="en-US" sz="1200" dirty="0"/>
+          </a:p>
+        </p:txBody>
+      </p:sp>
+      <p:sp>
+        <p:nvSpPr>
+          <p:cNvPr id="9" name="Text 5"/>
+          <p:cNvSpPr txBox="1"/>
+          <p:nvPr>
+            <p:ph idx="113" type="body" hasCustomPrompt="1"/>
+          </p:nvPr>
+        </p:nvSpPr>
+        <p:spPr>
+          <a:xfrm>
+            <a:off x="2724912" y="1600200"/>
+            <a:ext cx="1645920" cy="320040"/>
+          </a:xfrm>
+          <a:prstGeom prst="rect">
+            <a:avLst/>
+          </a:prstGeom>
+          <a:noFill/>
+          <a:ln/>
+        </p:spPr>
+        <p:txBody>
+          <a:bodyPr wrap="square" lIns="0" tIns="0" rIns="0" bIns="0" rtlCol="0" anchor="ctr"/>
+          <a:lstStyle/>
+          <a:p>
+            <a:pPr algn="l" indent="0" marL="0">
+              <a:buNone/>
+            </a:pPr>
+            <a:r>
               <a:rPr lang="en-US" sz="1600" b="1" dirty="0">
                 <a:solidFill>
-                  <a:srgbClr val="677E5B"/>
-                </a:solidFill>
-                <a:latin typeface="Inter" pitchFamily="34" charset="0"/>
-                <a:ea typeface="Inter" pitchFamily="34" charset="-122"/>
-                <a:cs typeface="Inter" pitchFamily="34" charset="-120"/>
-              </a:rPr>
-              <a:t>ab 9,90 €</a:t>
+                  <a:srgbClr val="0F0F0F"/>
+                </a:solidFill>
+                <a:latin typeface="Inter" pitchFamily="34" charset="0"/>
+                <a:ea typeface="Inter" pitchFamily="34" charset="-122"/>
+                <a:cs typeface="Inter" pitchFamily="34" charset="-120"/>
+              </a:rPr>
+              <a:t>Siebdrucktransfer</a:t>
             </a:r>
             <a:endParaRPr lang="en-US" sz="1600" dirty="0"/>
           </a:p>
         </p:txBody>
       </p:sp>
-      <p:pic>
-        <p:nvPicPr>
-          <p:cNvPr id="7" name="Image 1" descr="/var/folders/hm/sgq6d80d0vq133k7n8dc9bnw0000gn/T/maiershirts-fAJE9f/ph-foto-696x456.png">    </p:cNvPr>
-          <p:cNvPicPr>
-            <a:picLocks noChangeAspect="1"/>
-          </p:cNvPicPr>
-          <p:nvPr>
-            <p:ph idx="106" type="pic" hasCustomPrompt="1"/>
-          </p:nvPr>
-        </p:nvPicPr>
-        <p:blipFill>
-          <a:blip r:embed="rId2"/>
-          <a:stretch>
-            <a:fillRect/>
-          </a:stretch>
-        </p:blipFill>
-        <p:spPr>
-          <a:xfrm>
-            <a:off x="3246120" y="1234440"/>
-            <a:ext cx="2651760" cy="1737360"/>
-          </a:xfrm>
-          <a:prstGeom prst="rect">
-            <a:avLst/>
-          </a:prstGeom>
-        </p:spPr>
-      </p:pic>
-      <p:sp>
-        <p:nvSpPr>
-          <p:cNvPr id="8" name="Text 0"/>
+      <p:sp>
+        <p:nvSpPr>
+          <p:cNvPr id="10" name="Text 5"/>
           <p:cNvSpPr txBox="1"/>
           <p:nvPr>
-            <p:ph idx="107" type="body" hasCustomPrompt="1"/>
-          </p:nvPr>
-        </p:nvSpPr>
-        <p:spPr>
-          <a:xfrm>
-            <a:off x="3246120" y="3063240"/>
-            <a:ext cx="2651760" cy="320040"/>
+            <p:ph idx="114" type="body" hasCustomPrompt="1"/>
+          </p:nvPr>
+        </p:nvSpPr>
+        <p:spPr>
+          <a:xfrm>
+            <a:off x="2724912" y="1938528"/>
+            <a:ext cx="1645920" cy="1097280"/>
           </a:xfrm>
           <a:prstGeom prst="rect">
             <a:avLst/>
@@ -19138,6 +22076,170 @@
               <a:buNone/>
             </a:pPr>
             <a:r>
+              <a:rPr lang="en-US" sz="1200" dirty="0">
+                <a:solidFill>
+                  <a:srgbClr val="0F0F0F"/>
+                </a:solidFill>
+                <a:latin typeface="Inter" pitchFamily="34" charset="0"/>
+                <a:ea typeface="Inter" pitchFamily="34" charset="-122"/>
+                <a:cs typeface="Inter" pitchFamily="34" charset="-120"/>
+              </a:rPr>
+              <a:t>Serien mit gleichem Motiv: Team-, Vereins- und Workwear. Exaktes Farb-Match, lagerbar für Nachbestellungen.</a:t>
+            </a:r>
+            <a:endParaRPr lang="en-US" sz="1200" dirty="0"/>
+          </a:p>
+        </p:txBody>
+      </p:sp>
+      <p:sp>
+        <p:nvSpPr>
+          <p:cNvPr id="11" name="Text 6"/>
+          <p:cNvSpPr txBox="1"/>
+          <p:nvPr>
+            <p:ph idx="116" type="body" hasCustomPrompt="1"/>
+          </p:nvPr>
+        </p:nvSpPr>
+        <p:spPr>
+          <a:xfrm>
+            <a:off x="3364992" y="3090672"/>
+            <a:ext cx="1005840" cy="310896"/>
+          </a:xfrm>
+          <a:prstGeom prst="rect">
+            <a:avLst/>
+          </a:prstGeom>
+          <a:noFill/>
+          <a:ln/>
+        </p:spPr>
+        <p:txBody>
+          <a:bodyPr wrap="square" lIns="0" tIns="0" rIns="0" bIns="0" rtlCol="0" anchor="ctr"/>
+          <a:lstStyle/>
+          <a:p>
+            <a:pPr algn="l" indent="0" marL="0">
+              <a:buNone/>
+            </a:pPr>
+            <a:r>
+              <a:rPr lang="en-US" sz="1200" b="1" dirty="0">
+                <a:solidFill>
+                  <a:srgbClr val="0F0F0F"/>
+                </a:solidFill>
+                <a:latin typeface="Inter" pitchFamily="34" charset="0"/>
+                <a:ea typeface="Inter" pitchFamily="34" charset="-122"/>
+                <a:cs typeface="Inter" pitchFamily="34" charset="-120"/>
+              </a:rPr>
+              <a:t>50+ Wäschen</a:t>
+            </a:r>
+            <a:endParaRPr lang="en-US" sz="1200" dirty="0"/>
+          </a:p>
+        </p:txBody>
+      </p:sp>
+      <p:sp>
+        <p:nvSpPr>
+          <p:cNvPr id="12" name="Text 7"/>
+          <p:cNvSpPr txBox="1"/>
+          <p:nvPr>
+            <p:ph idx="118" type="body" hasCustomPrompt="1"/>
+          </p:nvPr>
+        </p:nvSpPr>
+        <p:spPr>
+          <a:xfrm>
+            <a:off x="3364992" y="3419856"/>
+            <a:ext cx="1005840" cy="310896"/>
+          </a:xfrm>
+          <a:prstGeom prst="rect">
+            <a:avLst/>
+          </a:prstGeom>
+          <a:noFill/>
+          <a:ln/>
+        </p:spPr>
+        <p:txBody>
+          <a:bodyPr wrap="square" lIns="0" tIns="0" rIns="0" bIns="0" rtlCol="0" anchor="ctr"/>
+          <a:lstStyle/>
+          <a:p>
+            <a:pPr algn="l" indent="0" marL="0">
+              <a:buNone/>
+            </a:pPr>
+            <a:r>
+              <a:rPr lang="en-US" sz="1200" b="1" dirty="0">
+                <a:solidFill>
+                  <a:srgbClr val="0F0F0F"/>
+                </a:solidFill>
+                <a:latin typeface="Inter" pitchFamily="34" charset="0"/>
+                <a:ea typeface="Inter" pitchFamily="34" charset="-122"/>
+                <a:cs typeface="Inter" pitchFamily="34" charset="-120"/>
+              </a:rPr>
+              <a:t>ab 25 Stück</a:t>
+            </a:r>
+            <a:endParaRPr lang="en-US" sz="1200" dirty="0"/>
+          </a:p>
+        </p:txBody>
+      </p:sp>
+      <p:sp>
+        <p:nvSpPr>
+          <p:cNvPr id="13" name="Text 8"/>
+          <p:cNvSpPr txBox="1"/>
+          <p:nvPr>
+            <p:ph idx="120" type="body" hasCustomPrompt="1"/>
+          </p:nvPr>
+        </p:nvSpPr>
+        <p:spPr>
+          <a:xfrm>
+            <a:off x="3364992" y="3749040"/>
+            <a:ext cx="1005840" cy="310896"/>
+          </a:xfrm>
+          <a:prstGeom prst="rect">
+            <a:avLst/>
+          </a:prstGeom>
+          <a:noFill/>
+          <a:ln/>
+        </p:spPr>
+        <p:txBody>
+          <a:bodyPr wrap="square" lIns="0" tIns="0" rIns="0" bIns="0" rtlCol="0" anchor="ctr"/>
+          <a:lstStyle/>
+          <a:p>
+            <a:pPr algn="l" indent="0" marL="0">
+              <a:buNone/>
+            </a:pPr>
+            <a:r>
+              <a:rPr lang="en-US" sz="1200" b="1" dirty="0">
+                <a:solidFill>
+                  <a:srgbClr val="0F0F0F"/>
+                </a:solidFill>
+                <a:latin typeface="Inter" pitchFamily="34" charset="0"/>
+                <a:ea typeface="Inter" pitchFamily="34" charset="-122"/>
+                <a:cs typeface="Inter" pitchFamily="34" charset="-120"/>
+              </a:rPr>
+              <a:t>Sonderfarben</a:t>
+            </a:r>
+            <a:endParaRPr lang="en-US" sz="1200" dirty="0"/>
+          </a:p>
+        </p:txBody>
+      </p:sp>
+      <p:sp>
+        <p:nvSpPr>
+          <p:cNvPr id="14" name="Text 9"/>
+          <p:cNvSpPr txBox="1"/>
+          <p:nvPr>
+            <p:ph idx="122" type="body" hasCustomPrompt="1"/>
+          </p:nvPr>
+        </p:nvSpPr>
+        <p:spPr>
+          <a:xfrm>
+            <a:off x="4828032" y="1600200"/>
+            <a:ext cx="1645920" cy="320040"/>
+          </a:xfrm>
+          <a:prstGeom prst="rect">
+            <a:avLst/>
+          </a:prstGeom>
+          <a:noFill/>
+          <a:ln/>
+        </p:spPr>
+        <p:txBody>
+          <a:bodyPr wrap="square" lIns="0" tIns="0" rIns="0" bIns="0" rtlCol="0" anchor="ctr"/>
+          <a:lstStyle/>
+          <a:p>
+            <a:pPr algn="l" indent="0" marL="0">
+              <a:buNone/>
+            </a:pPr>
+            <a:r>
               <a:rPr lang="en-US" sz="1600" b="1" dirty="0">
                 <a:solidFill>
                   <a:srgbClr val="0F0F0F"/>
@@ -19146,7 +22248,7 @@
                 <a:ea typeface="Inter" pitchFamily="34" charset="-122"/>
                 <a:cs typeface="Inter" pitchFamily="34" charset="-120"/>
               </a:rPr>
-              <a:t>Polo-Shirt Piqué</a:t>
+              <a:t>Spezialtransfer</a:t>
             </a:r>
             <a:endParaRPr lang="en-US" sz="1600" dirty="0"/>
           </a:p>
@@ -19154,16 +22256,16 @@
       </p:sp>
       <p:sp>
         <p:nvSpPr>
-          <p:cNvPr id="9" name="Text 0"/>
+          <p:cNvPr id="15" name="Text 9"/>
           <p:cNvSpPr txBox="1"/>
           <p:nvPr>
-            <p:ph idx="108" type="body" hasCustomPrompt="1"/>
-          </p:nvPr>
-        </p:nvSpPr>
-        <p:spPr>
-          <a:xfrm>
-            <a:off x="3246120" y="3383280"/>
-            <a:ext cx="2651760" cy="685800"/>
+            <p:ph idx="123" type="body" hasCustomPrompt="1"/>
+          </p:nvPr>
+        </p:nvSpPr>
+        <p:spPr>
+          <a:xfrm>
+            <a:off x="4828032" y="1938528"/>
+            <a:ext cx="1645920" cy="1097280"/>
           </a:xfrm>
           <a:prstGeom prst="rect">
             <a:avLst/>
@@ -19181,34 +22283,54 @@
             <a:r>
               <a:rPr lang="en-US" sz="1200" dirty="0">
                 <a:solidFill>
-                  <a:srgbClr val="0F0F0F">
-                    <a:alpha val="60000"/>
-                  </a:srgbClr>
-                </a:solidFill>
-                <a:latin typeface="Inter" pitchFamily="34" charset="0"/>
-                <a:ea typeface="Inter" pitchFamily="34" charset="-122"/>
-                <a:cs typeface="Inter" pitchFamily="34" charset="-120"/>
-              </a:rPr>
-              <a:t>Kariban Piqué · 220 g/m²</a:t>
+                  <a:srgbClr val="0F0F0F"/>
+                </a:solidFill>
+                <a:latin typeface="Inter" pitchFamily="34" charset="0"/>
+                <a:ea typeface="Inter" pitchFamily="34" charset="-122"/>
+                <a:cs typeface="Inter" pitchFamily="34" charset="-120"/>
+              </a:rPr>
+              <a:t>Berufskleidung mit Industriewäsche: Handwerk, Pflege, Gastro. Übersteht, wo normale Drucke versagen.</a:t>
             </a:r>
             <a:endParaRPr lang="en-US" sz="1200" dirty="0"/>
           </a:p>
+        </p:txBody>
+      </p:sp>
+      <p:sp>
+        <p:nvSpPr>
+          <p:cNvPr id="16" name="Text 10"/>
+          <p:cNvSpPr txBox="1"/>
+          <p:nvPr>
+            <p:ph idx="125" type="body" hasCustomPrompt="1"/>
+          </p:nvPr>
+        </p:nvSpPr>
+        <p:spPr>
+          <a:xfrm>
+            <a:off x="5468112" y="3090672"/>
+            <a:ext cx="1005840" cy="310896"/>
+          </a:xfrm>
+          <a:prstGeom prst="rect">
+            <a:avLst/>
+          </a:prstGeom>
+          <a:noFill/>
+          <a:ln/>
+        </p:spPr>
+        <p:txBody>
+          <a:bodyPr wrap="square" lIns="0" tIns="0" rIns="0" bIns="0" rtlCol="0" anchor="ctr"/>
+          <a:lstStyle/>
           <a:p>
             <a:pPr algn="l" indent="0" marL="0">
               <a:buNone/>
             </a:pPr>
             <a:r>
-              <a:rPr lang="en-US" sz="1200" dirty="0">
-                <a:solidFill>
-                  <a:srgbClr val="0F0F0F">
-                    <a:alpha val="60000"/>
-                  </a:srgbClr>
-                </a:solidFill>
-                <a:latin typeface="Inter" pitchFamily="34" charset="0"/>
-                <a:ea typeface="Inter" pitchFamily="34" charset="-122"/>
-                <a:cs typeface="Inter" pitchFamily="34" charset="-120"/>
-              </a:rPr>
-              <a:t>8 Farben · S bis 4XL</a:t>
+              <a:rPr lang="en-US" sz="1200" b="1" dirty="0">
+                <a:solidFill>
+                  <a:srgbClr val="0F0F0F"/>
+                </a:solidFill>
+                <a:latin typeface="Inter" pitchFamily="34" charset="0"/>
+                <a:ea typeface="Inter" pitchFamily="34" charset="-122"/>
+                <a:cs typeface="Inter" pitchFamily="34" charset="-120"/>
+              </a:rPr>
+              <a:t>bis 90 °C</a:t>
             </a:r>
             <a:endParaRPr lang="en-US" sz="1200" dirty="0"/>
           </a:p>
@@ -19216,16 +22338,139 @@
       </p:sp>
       <p:sp>
         <p:nvSpPr>
-          <p:cNvPr id="10" name="Text 0"/>
+          <p:cNvPr id="17" name="Text 11"/>
           <p:cNvSpPr txBox="1"/>
           <p:nvPr>
-            <p:ph idx="109" type="body" hasCustomPrompt="1"/>
-          </p:nvPr>
-        </p:nvSpPr>
-        <p:spPr>
-          <a:xfrm>
-            <a:off x="3246120" y="4069080"/>
-            <a:ext cx="2651760" cy="320040"/>
+            <p:ph idx="127" type="body" hasCustomPrompt="1"/>
+          </p:nvPr>
+        </p:nvSpPr>
+        <p:spPr>
+          <a:xfrm>
+            <a:off x="5468112" y="3419856"/>
+            <a:ext cx="1005840" cy="310896"/>
+          </a:xfrm>
+          <a:prstGeom prst="rect">
+            <a:avLst/>
+          </a:prstGeom>
+          <a:noFill/>
+          <a:ln/>
+        </p:spPr>
+        <p:txBody>
+          <a:bodyPr wrap="square" lIns="0" tIns="0" rIns="0" bIns="0" rtlCol="0" anchor="ctr"/>
+          <a:lstStyle/>
+          <a:p>
+            <a:pPr algn="l" indent="0" marL="0">
+              <a:buNone/>
+            </a:pPr>
+            <a:r>
+              <a:rPr lang="en-US" sz="1200" b="1" dirty="0">
+                <a:solidFill>
+                  <a:srgbClr val="0F0F0F"/>
+                </a:solidFill>
+                <a:latin typeface="Inter" pitchFamily="34" charset="0"/>
+                <a:ea typeface="Inter" pitchFamily="34" charset="-122"/>
+                <a:cs typeface="Inter" pitchFamily="34" charset="-120"/>
+              </a:rPr>
+              <a:t>ab 50 Stück</a:t>
+            </a:r>
+            <a:endParaRPr lang="en-US" sz="1200" dirty="0"/>
+          </a:p>
+        </p:txBody>
+      </p:sp>
+      <p:sp>
+        <p:nvSpPr>
+          <p:cNvPr id="18" name="Text 12"/>
+          <p:cNvSpPr txBox="1"/>
+          <p:nvPr>
+            <p:ph idx="129" type="body" hasCustomPrompt="1"/>
+          </p:nvPr>
+        </p:nvSpPr>
+        <p:spPr>
+          <a:xfrm>
+            <a:off x="5468112" y="3749040"/>
+            <a:ext cx="1005840" cy="310896"/>
+          </a:xfrm>
+          <a:prstGeom prst="rect">
+            <a:avLst/>
+          </a:prstGeom>
+          <a:noFill/>
+          <a:ln/>
+        </p:spPr>
+        <p:txBody>
+          <a:bodyPr wrap="square" lIns="0" tIns="0" rIns="0" bIns="0" rtlCol="0" anchor="ctr"/>
+          <a:lstStyle/>
+          <a:p>
+            <a:pPr algn="l" indent="0" marL="0">
+              <a:buNone/>
+            </a:pPr>
+            <a:r>
+              <a:rPr lang="en-US" sz="1200" b="1" dirty="0">
+                <a:solidFill>
+                  <a:srgbClr val="0F0F0F"/>
+                </a:solidFill>
+                <a:latin typeface="Inter" pitchFamily="34" charset="0"/>
+                <a:ea typeface="Inter" pitchFamily="34" charset="-122"/>
+                <a:cs typeface="Inter" pitchFamily="34" charset="-120"/>
+              </a:rPr>
+              <a:t>Vollton</a:t>
+            </a:r>
+            <a:endParaRPr lang="en-US" sz="1200" dirty="0"/>
+          </a:p>
+        </p:txBody>
+      </p:sp>
+      <p:sp>
+        <p:nvSpPr>
+          <p:cNvPr id="19" name="Text 13"/>
+          <p:cNvSpPr txBox="1"/>
+          <p:nvPr>
+            <p:ph idx="131" type="body" hasCustomPrompt="1"/>
+          </p:nvPr>
+        </p:nvSpPr>
+        <p:spPr>
+          <a:xfrm>
+            <a:off x="6931152" y="1600200"/>
+            <a:ext cx="1645920" cy="320040"/>
+          </a:xfrm>
+          <a:prstGeom prst="rect">
+            <a:avLst/>
+          </a:prstGeom>
+          <a:noFill/>
+          <a:ln/>
+        </p:spPr>
+        <p:txBody>
+          <a:bodyPr wrap="square" lIns="0" tIns="0" rIns="0" bIns="0" rtlCol="0" anchor="ctr"/>
+          <a:lstStyle/>
+          <a:p>
+            <a:pPr algn="l" indent="0" marL="0">
+              <a:buNone/>
+            </a:pPr>
+            <a:r>
+              <a:rPr lang="en-US" sz="1600" b="1" dirty="0">
+                <a:solidFill>
+                  <a:srgbClr val="0F0F0F"/>
+                </a:solidFill>
+                <a:latin typeface="Inter" pitchFamily="34" charset="0"/>
+                <a:ea typeface="Inter" pitchFamily="34" charset="-122"/>
+                <a:cs typeface="Inter" pitchFamily="34" charset="-120"/>
+              </a:rPr>
+              <a:t>Stickerei</a:t>
+            </a:r>
+            <a:endParaRPr lang="en-US" sz="1600" dirty="0"/>
+          </a:p>
+        </p:txBody>
+      </p:sp>
+      <p:sp>
+        <p:nvSpPr>
+          <p:cNvPr id="20" name="Text 13"/>
+          <p:cNvSpPr txBox="1"/>
+          <p:nvPr>
+            <p:ph idx="132" type="body" hasCustomPrompt="1"/>
+          </p:nvPr>
+        </p:nvSpPr>
+        <p:spPr>
+          <a:xfrm>
+            <a:off x="6931152" y="1938528"/>
+            <a:ext cx="1645920" cy="1097280"/>
           </a:xfrm>
           <a:prstGeom prst="rect">
             <a:avLst/>
@@ -19241,58 +22486,155 @@
               <a:buNone/>
             </a:pPr>
             <a:r>
-              <a:rPr lang="en-US" sz="1600" b="1" dirty="0">
-                <a:solidFill>
-                  <a:srgbClr val="677E5B"/>
-                </a:solidFill>
-                <a:latin typeface="Inter" pitchFamily="34" charset="0"/>
-                <a:ea typeface="Inter" pitchFamily="34" charset="-122"/>
-                <a:cs typeface="Inter" pitchFamily="34" charset="-120"/>
-              </a:rPr>
-              <a:t>ab 17,50 €</a:t>
-            </a:r>
-            <a:endParaRPr lang="en-US" sz="1600" dirty="0"/>
-          </a:p>
-        </p:txBody>
-      </p:sp>
-      <p:pic>
-        <p:nvPicPr>
-          <p:cNvPr id="11" name="Image 2" descr="/var/folders/hm/sgq6d80d0vq133k7n8dc9bnw0000gn/T/maiershirts-fAJE9f/ph-foto-696x456.png">    </p:cNvPr>
-          <p:cNvPicPr>
-            <a:picLocks noChangeAspect="1"/>
-          </p:cNvPicPr>
-          <p:nvPr>
-            <p:ph idx="110" type="pic" hasCustomPrompt="1"/>
-          </p:nvPr>
-        </p:nvPicPr>
-        <p:blipFill>
-          <a:blip r:embed="rId3"/>
-          <a:stretch>
-            <a:fillRect/>
-          </a:stretch>
-        </p:blipFill>
-        <p:spPr>
-          <a:xfrm>
-            <a:off x="6035040" y="1234440"/>
-            <a:ext cx="2651760" cy="1737360"/>
-          </a:xfrm>
-          <a:prstGeom prst="rect">
-            <a:avLst/>
-          </a:prstGeom>
-        </p:spPr>
-      </p:pic>
-      <p:sp>
-        <p:nvSpPr>
-          <p:cNvPr id="12" name="Text 0"/>
+              <a:rPr lang="en-US" sz="1200" dirty="0">
+                <a:solidFill>
+                  <a:srgbClr val="0F0F0F"/>
+                </a:solidFill>
+                <a:latin typeface="Inter" pitchFamily="34" charset="0"/>
+                <a:ea typeface="Inter" pitchFamily="34" charset="-122"/>
+                <a:cs typeface="Inter" pitchFamily="34" charset="-120"/>
+              </a:rPr>
+              <a:t>Polos, Caps, Jacken und Workwear. Edler, erhabener Look für Logos. Schrift ab ca. 6 mm Höhe.</a:t>
+            </a:r>
+            <a:endParaRPr lang="en-US" sz="1200" dirty="0"/>
+          </a:p>
+        </p:txBody>
+      </p:sp>
+      <p:sp>
+        <p:nvSpPr>
+          <p:cNvPr id="21" name="Text 14"/>
           <p:cNvSpPr txBox="1"/>
           <p:nvPr>
-            <p:ph idx="111" type="body" hasCustomPrompt="1"/>
-          </p:nvPr>
-        </p:nvSpPr>
-        <p:spPr>
-          <a:xfrm>
-            <a:off x="6035040" y="3063240"/>
-            <a:ext cx="2651760" cy="320040"/>
+            <p:ph idx="134" type="body" hasCustomPrompt="1"/>
+          </p:nvPr>
+        </p:nvSpPr>
+        <p:spPr>
+          <a:xfrm>
+            <a:off x="7571232" y="3090672"/>
+            <a:ext cx="1005840" cy="310896"/>
+          </a:xfrm>
+          <a:prstGeom prst="rect">
+            <a:avLst/>
+          </a:prstGeom>
+          <a:noFill/>
+          <a:ln/>
+        </p:spPr>
+        <p:txBody>
+          <a:bodyPr wrap="square" lIns="0" tIns="0" rIns="0" bIns="0" rtlCol="0" anchor="ctr"/>
+          <a:lstStyle/>
+          <a:p>
+            <a:pPr algn="l" indent="0" marL="0">
+              <a:buNone/>
+            </a:pPr>
+            <a:r>
+              <a:rPr lang="en-US" sz="1200" b="1" dirty="0">
+                <a:solidFill>
+                  <a:srgbClr val="0F0F0F"/>
+                </a:solidFill>
+                <a:latin typeface="Inter" pitchFamily="34" charset="0"/>
+                <a:ea typeface="Inter" pitchFamily="34" charset="-122"/>
+                <a:cs typeface="Inter" pitchFamily="34" charset="-120"/>
+              </a:rPr>
+              <a:t>bis 95 °C</a:t>
+            </a:r>
+            <a:endParaRPr lang="en-US" sz="1200" dirty="0"/>
+          </a:p>
+        </p:txBody>
+      </p:sp>
+      <p:sp>
+        <p:nvSpPr>
+          <p:cNvPr id="22" name="Text 15"/>
+          <p:cNvSpPr txBox="1"/>
+          <p:nvPr>
+            <p:ph idx="136" type="body" hasCustomPrompt="1"/>
+          </p:nvPr>
+        </p:nvSpPr>
+        <p:spPr>
+          <a:xfrm>
+            <a:off x="7571232" y="3419856"/>
+            <a:ext cx="1005840" cy="310896"/>
+          </a:xfrm>
+          <a:prstGeom prst="rect">
+            <a:avLst/>
+          </a:prstGeom>
+          <a:noFill/>
+          <a:ln/>
+        </p:spPr>
+        <p:txBody>
+          <a:bodyPr wrap="square" lIns="0" tIns="0" rIns="0" bIns="0" rtlCol="0" anchor="ctr"/>
+          <a:lstStyle/>
+          <a:p>
+            <a:pPr algn="l" indent="0" marL="0">
+              <a:buNone/>
+            </a:pPr>
+            <a:r>
+              <a:rPr lang="en-US" sz="1200" b="1" dirty="0">
+                <a:solidFill>
+                  <a:srgbClr val="0F0F0F"/>
+                </a:solidFill>
+                <a:latin typeface="Inter" pitchFamily="34" charset="0"/>
+                <a:ea typeface="Inter" pitchFamily="34" charset="-122"/>
+                <a:cs typeface="Inter" pitchFamily="34" charset="-120"/>
+              </a:rPr>
+              <a:t>ab 1 Stück</a:t>
+            </a:r>
+            <a:endParaRPr lang="en-US" sz="1200" dirty="0"/>
+          </a:p>
+        </p:txBody>
+      </p:sp>
+      <p:sp>
+        <p:nvSpPr>
+          <p:cNvPr id="23" name="Text 16"/>
+          <p:cNvSpPr txBox="1"/>
+          <p:nvPr>
+            <p:ph idx="138" type="body" hasCustomPrompt="1"/>
+          </p:nvPr>
+        </p:nvSpPr>
+        <p:spPr>
+          <a:xfrm>
+            <a:off x="7571232" y="3749040"/>
+            <a:ext cx="1005840" cy="310896"/>
+          </a:xfrm>
+          <a:prstGeom prst="rect">
+            <a:avLst/>
+          </a:prstGeom>
+          <a:noFill/>
+          <a:ln/>
+        </p:spPr>
+        <p:txBody>
+          <a:bodyPr wrap="square" lIns="0" tIns="0" rIns="0" bIns="0" rtlCol="0" anchor="ctr"/>
+          <a:lstStyle/>
+          <a:p>
+            <a:pPr algn="l" indent="0" marL="0">
+              <a:buNone/>
+            </a:pPr>
+            <a:r>
+              <a:rPr lang="en-US" sz="1200" b="1" dirty="0">
+                <a:solidFill>
+                  <a:srgbClr val="0F0F0F"/>
+                </a:solidFill>
+                <a:latin typeface="Inter" pitchFamily="34" charset="0"/>
+                <a:ea typeface="Inter" pitchFamily="34" charset="-122"/>
+                <a:cs typeface="Inter" pitchFamily="34" charset="-120"/>
+              </a:rPr>
+              <a:t>Garnfarben</a:t>
+            </a:r>
+            <a:endParaRPr lang="en-US" sz="1200" dirty="0"/>
+          </a:p>
+        </p:txBody>
+      </p:sp>
+      <p:sp>
+        <p:nvSpPr>
+          <p:cNvPr id="24" name="Text 16"/>
+          <p:cNvSpPr txBox="1"/>
+          <p:nvPr>
+            <p:ph idx="139" type="body" hasCustomPrompt="1"/>
+          </p:nvPr>
+        </p:nvSpPr>
+        <p:spPr>
+          <a:xfrm>
+            <a:off x="457200" y="4251960"/>
+            <a:ext cx="8229600" cy="411480"/>
           </a:xfrm>
           <a:prstGeom prst="rect">
             <a:avLst/>
@@ -19308,120 +22650,31 @@
               <a:buNone/>
             </a:pPr>
             <a:r>
-              <a:rPr lang="en-US" sz="1600" b="1" dirty="0">
-                <a:solidFill>
-                  <a:srgbClr val="0F0F0F"/>
-                </a:solidFill>
-                <a:latin typeface="Inter" pitchFamily="34" charset="0"/>
-                <a:ea typeface="Inter" pitchFamily="34" charset="-122"/>
-                <a:cs typeface="Inter" pitchFamily="34" charset="-120"/>
-              </a:rPr>
-              <a:t>Hoodie Bio</a:t>
-            </a:r>
-            <a:endParaRPr lang="en-US" sz="1600" dirty="0"/>
-          </a:p>
-        </p:txBody>
-      </p:sp>
-      <p:sp>
-        <p:nvSpPr>
-          <p:cNvPr id="13" name="Text 0"/>
-          <p:cNvSpPr txBox="1"/>
-          <p:nvPr>
-            <p:ph idx="112" type="body" hasCustomPrompt="1"/>
-          </p:nvPr>
-        </p:nvSpPr>
-        <p:spPr>
-          <a:xfrm>
-            <a:off x="6035040" y="3383280"/>
-            <a:ext cx="2651760" cy="685800"/>
-          </a:xfrm>
-          <a:prstGeom prst="rect">
-            <a:avLst/>
-          </a:prstGeom>
-          <a:noFill/>
-          <a:ln/>
-        </p:spPr>
-        <p:txBody>
-          <a:bodyPr wrap="square" lIns="0" tIns="0" rIns="0" bIns="0" rtlCol="0" anchor="t"/>
-          <a:lstStyle/>
-          <a:p>
+              <a:rPr lang="en-US" sz="1200" b="1" dirty="0">
+                <a:solidFill>
+                  <a:srgbClr val="0F0F0F"/>
+                </a:solidFill>
+                <a:latin typeface="Inter" pitchFamily="34" charset="0"/>
+                <a:ea typeface="Inter" pitchFamily="34" charset="-122"/>
+                <a:cs typeface="Inter" pitchFamily="34" charset="-120"/>
+              </a:rPr>
+              <a:t>Kurz entschieden: </a:t>
+            </a:r>
             <a:pPr algn="l" indent="0" marL="0">
               <a:buNone/>
             </a:pPr>
             <a:r>
               <a:rPr lang="en-US" sz="1200" dirty="0">
                 <a:solidFill>
-                  <a:srgbClr val="0F0F0F">
-                    <a:alpha val="60000"/>
-                  </a:srgbClr>
-                </a:solidFill>
-                <a:latin typeface="Inter" pitchFamily="34" charset="0"/>
-                <a:ea typeface="Inter" pitchFamily="34" charset="-122"/>
-                <a:cs typeface="Inter" pitchFamily="34" charset="-120"/>
-              </a:rPr>
-              <a:t>Stanley/Stella Cruiser · 350 g/m²</a:t>
+                  <a:srgbClr val="0F0F0F"/>
+                </a:solidFill>
+                <a:latin typeface="Inter" pitchFamily="34" charset="0"/>
+                <a:ea typeface="Inter" pitchFamily="34" charset="-122"/>
+                <a:cs typeface="Inter" pitchFamily="34" charset="-120"/>
+              </a:rPr>
+              <a:t>Foto und viele Farben → Digitaldruck · Exakte Farbe in Serie → Siebdrucktransfer · Industriewäsche → Spezialtransfer · Edler Logo-Look → Stickerei. Auf Anfrage: Sublimation und Siebdruck direkt.</a:t>
             </a:r>
             <a:endParaRPr lang="en-US" sz="1200" dirty="0"/>
-          </a:p>
-          <a:p>
-            <a:pPr algn="l" indent="0" marL="0">
-              <a:buNone/>
-            </a:pPr>
-            <a:r>
-              <a:rPr lang="en-US" sz="1200" dirty="0">
-                <a:solidFill>
-                  <a:srgbClr val="0F0F0F">
-                    <a:alpha val="60000"/>
-                  </a:srgbClr>
-                </a:solidFill>
-                <a:latin typeface="Inter" pitchFamily="34" charset="0"/>
-                <a:ea typeface="Inter" pitchFamily="34" charset="-122"/>
-                <a:cs typeface="Inter" pitchFamily="34" charset="-120"/>
-              </a:rPr>
-              <a:t>10 Farben · XS bis 3XL</a:t>
-            </a:r>
-            <a:endParaRPr lang="en-US" sz="1200" dirty="0"/>
-          </a:p>
-        </p:txBody>
-      </p:sp>
-      <p:sp>
-        <p:nvSpPr>
-          <p:cNvPr id="14" name="Text 0"/>
-          <p:cNvSpPr txBox="1"/>
-          <p:nvPr>
-            <p:ph idx="113" type="body" hasCustomPrompt="1"/>
-          </p:nvPr>
-        </p:nvSpPr>
-        <p:spPr>
-          <a:xfrm>
-            <a:off x="6035040" y="4069080"/>
-            <a:ext cx="2651760" cy="320040"/>
-          </a:xfrm>
-          <a:prstGeom prst="rect">
-            <a:avLst/>
-          </a:prstGeom>
-          <a:noFill/>
-          <a:ln/>
-        </p:spPr>
-        <p:txBody>
-          <a:bodyPr wrap="square" lIns="0" tIns="0" rIns="0" bIns="0" rtlCol="0" anchor="t"/>
-          <a:lstStyle/>
-          <a:p>
-            <a:pPr algn="l" indent="0" marL="0">
-              <a:buNone/>
-            </a:pPr>
-            <a:r>
-              <a:rPr lang="en-US" sz="1600" b="1" dirty="0">
-                <a:solidFill>
-                  <a:srgbClr val="677E5B"/>
-                </a:solidFill>
-                <a:latin typeface="Inter" pitchFamily="34" charset="0"/>
-                <a:ea typeface="Inter" pitchFamily="34" charset="-122"/>
-                <a:cs typeface="Inter" pitchFamily="34" charset="-120"/>
-              </a:rPr>
-              <a:t>ab 29,90 €</a:t>
-            </a:r>
-            <a:endParaRPr lang="en-US" sz="1600" dirty="0"/>
           </a:p>
         </p:txBody>
       </p:sp>
@@ -19533,53 +22786,38 @@
                 <a:ea typeface="Inter" pitchFamily="34" charset="-122"/>
                 <a:cs typeface="Inter" pitchFamily="34" charset="-120"/>
               </a:rPr>
-              <a:t>Preisstaffel T-Shirt, Brustdruck 1-farbig</a:t>
+              <a:t>Textilien für Ihr Projekt</a:t>
             </a:r>
             <a:endParaRPr lang="en-US" sz="2800" dirty="0"/>
           </a:p>
         </p:txBody>
       </p:sp>
-      <p:sp>
-        <p:nvSpPr>
-          <p:cNvPr id="3" name="Text 0"/>
-          <p:cNvSpPr txBox="1"/>
-          <p:nvPr>
-            <p:ph idx="102" type="body" hasCustomPrompt="1"/>
-          </p:nvPr>
-        </p:nvSpPr>
-        <p:spPr>
-          <a:xfrm>
-            <a:off x="640080" y="1554480"/>
-            <a:ext cx="1600200" cy="365760"/>
-          </a:xfrm>
-          <a:prstGeom prst="rect">
-            <a:avLst/>
-          </a:prstGeom>
-          <a:noFill/>
-          <a:ln/>
-        </p:spPr>
-        <p:txBody>
-          <a:bodyPr wrap="square" lIns="0" tIns="0" rIns="0" bIns="0" rtlCol="0" anchor="ctr"/>
-          <a:lstStyle/>
-          <a:p>
-            <a:pPr algn="l" indent="0" marL="0">
-              <a:buNone/>
-            </a:pPr>
-            <a:r>
-              <a:rPr lang="en-US" sz="1400" b="1" dirty="0">
-                <a:solidFill>
-                  <a:srgbClr val="0F0F0F"/>
-                </a:solidFill>
-                <a:latin typeface="Inter" pitchFamily="34" charset="0"/>
-                <a:ea typeface="Inter" pitchFamily="34" charset="-122"/>
-                <a:cs typeface="Inter" pitchFamily="34" charset="-120"/>
-              </a:rPr>
-              <a:t>ab 10 Stück</a:t>
-            </a:r>
-            <a:endParaRPr lang="en-US" sz="1400" dirty="0"/>
-          </a:p>
-        </p:txBody>
-      </p:sp>
+      <p:pic>
+        <p:nvPicPr>
+          <p:cNvPr id="3" name="Image 0" descr="/var/folders/hm/sgq6d80d0vq133k7n8dc9bnw0000gn/T/maiershirts-H73pRN/ph-foto-696x456.png">    </p:cNvPr>
+          <p:cNvPicPr>
+            <a:picLocks noChangeAspect="1"/>
+          </p:cNvPicPr>
+          <p:nvPr>
+            <p:ph idx="102" type="pic" hasCustomPrompt="1"/>
+          </p:nvPr>
+        </p:nvPicPr>
+        <p:blipFill>
+          <a:blip r:embed="rId1"/>
+          <a:stretch>
+            <a:fillRect/>
+          </a:stretch>
+        </p:blipFill>
+        <p:spPr>
+          <a:xfrm>
+            <a:off x="457200" y="1234440"/>
+            <a:ext cx="2651760" cy="1737360"/>
+          </a:xfrm>
+          <a:prstGeom prst="rect">
+            <a:avLst/>
+          </a:prstGeom>
+        </p:spPr>
+      </p:pic>
       <p:sp>
         <p:nvSpPr>
           <p:cNvPr id="4" name="Text 0"/>
@@ -19590,34 +22828,34 @@
         </p:nvSpPr>
         <p:spPr>
           <a:xfrm>
-            <a:off x="640080" y="1965960"/>
-            <a:ext cx="1600200" cy="731520"/>
-          </a:xfrm>
-          <a:prstGeom prst="rect">
-            <a:avLst/>
-          </a:prstGeom>
-          <a:noFill/>
-          <a:ln/>
-        </p:spPr>
-        <p:txBody>
-          <a:bodyPr wrap="square" lIns="0" tIns="0" rIns="0" bIns="0" rtlCol="0" anchor="ctr"/>
+            <a:off x="457200" y="3063240"/>
+            <a:ext cx="2651760" cy="320040"/>
+          </a:xfrm>
+          <a:prstGeom prst="rect">
+            <a:avLst/>
+          </a:prstGeom>
+          <a:noFill/>
+          <a:ln/>
+        </p:spPr>
+        <p:txBody>
+          <a:bodyPr wrap="square" lIns="0" tIns="0" rIns="0" bIns="0" rtlCol="0" anchor="t"/>
           <a:lstStyle/>
           <a:p>
             <a:pPr algn="l" indent="0" marL="0">
               <a:buNone/>
             </a:pPr>
             <a:r>
-              <a:rPr lang="en-US" sz="3200" b="1" dirty="0">
-                <a:solidFill>
-                  <a:srgbClr val="677E5B"/>
-                </a:solidFill>
-                <a:latin typeface="Inter" pitchFamily="34" charset="0"/>
-                <a:ea typeface="Inter" pitchFamily="34" charset="-122"/>
-                <a:cs typeface="Inter" pitchFamily="34" charset="-120"/>
-              </a:rPr>
-              <a:t>14,90 €</a:t>
-            </a:r>
-            <a:endParaRPr lang="en-US" sz="3200" dirty="0"/>
+              <a:rPr lang="en-US" sz="1600" b="1" dirty="0">
+                <a:solidFill>
+                  <a:srgbClr val="0F0F0F"/>
+                </a:solidFill>
+                <a:latin typeface="Inter" pitchFamily="34" charset="0"/>
+                <a:ea typeface="Inter" pitchFamily="34" charset="-122"/>
+                <a:cs typeface="Inter" pitchFamily="34" charset="-120"/>
+              </a:rPr>
+              <a:t>T-Shirt Bio-Baumwolle</a:t>
+            </a:r>
+            <a:endParaRPr lang="en-US" sz="1600" dirty="0"/>
           </a:p>
         </p:txBody>
       </p:sp>
@@ -19631,8 +22869,8 @@
         </p:nvSpPr>
         <p:spPr>
           <a:xfrm>
-            <a:off x="640080" y="2743200"/>
-            <a:ext cx="1600200" cy="502920"/>
+            <a:off x="457200" y="3383280"/>
+            <a:ext cx="2651760" cy="685800"/>
           </a:xfrm>
           <a:prstGeom prst="rect">
             <a:avLst/>
@@ -19658,7 +22896,7 @@
                 <a:ea typeface="Inter" pitchFamily="34" charset="-122"/>
                 <a:cs typeface="Inter" pitchFamily="34" charset="-120"/>
               </a:rPr>
-              <a:t>pro Stück, netto</a:t>
+              <a:t>B&amp;C Inspire T · 140 g/m²</a:t>
             </a:r>
             <a:endParaRPr lang="en-US" sz="1200" dirty="0"/>
           </a:p>
@@ -19677,7 +22915,7 @@
                 <a:ea typeface="Inter" pitchFamily="34" charset="-122"/>
                 <a:cs typeface="Inter" pitchFamily="34" charset="-120"/>
               </a:rPr>
-              <a:t>inkl. Textil und Druck</a:t>
+              <a:t>12 Farben · XS bis 3XL</a:t>
             </a:r>
             <a:endParaRPr lang="en-US" sz="1200" dirty="0"/>
           </a:p>
@@ -19693,65 +22931,24 @@
         </p:nvSpPr>
         <p:spPr>
           <a:xfrm>
-            <a:off x="2743200" y="1554480"/>
-            <a:ext cx="1600200" cy="365760"/>
-          </a:xfrm>
-          <a:prstGeom prst="rect">
-            <a:avLst/>
-          </a:prstGeom>
-          <a:noFill/>
-          <a:ln/>
-        </p:spPr>
-        <p:txBody>
-          <a:bodyPr wrap="square" lIns="0" tIns="0" rIns="0" bIns="0" rtlCol="0" anchor="ctr"/>
+            <a:off x="457200" y="4069080"/>
+            <a:ext cx="2651760" cy="320040"/>
+          </a:xfrm>
+          <a:prstGeom prst="rect">
+            <a:avLst/>
+          </a:prstGeom>
+          <a:noFill/>
+          <a:ln/>
+        </p:spPr>
+        <p:txBody>
+          <a:bodyPr wrap="square" lIns="0" tIns="0" rIns="0" bIns="0" rtlCol="0" anchor="t"/>
           <a:lstStyle/>
           <a:p>
             <a:pPr algn="l" indent="0" marL="0">
               <a:buNone/>
             </a:pPr>
             <a:r>
-              <a:rPr lang="en-US" sz="1400" b="1" dirty="0">
-                <a:solidFill>
-                  <a:srgbClr val="0F0F0F"/>
-                </a:solidFill>
-                <a:latin typeface="Inter" pitchFamily="34" charset="0"/>
-                <a:ea typeface="Inter" pitchFamily="34" charset="-122"/>
-                <a:cs typeface="Inter" pitchFamily="34" charset="-120"/>
-              </a:rPr>
-              <a:t>ab 25 Stück</a:t>
-            </a:r>
-            <a:endParaRPr lang="en-US" sz="1400" dirty="0"/>
-          </a:p>
-        </p:txBody>
-      </p:sp>
-      <p:sp>
-        <p:nvSpPr>
-          <p:cNvPr id="7" name="Text 0"/>
-          <p:cNvSpPr txBox="1"/>
-          <p:nvPr>
-            <p:ph idx="106" type="body" hasCustomPrompt="1"/>
-          </p:nvPr>
-        </p:nvSpPr>
-        <p:spPr>
-          <a:xfrm>
-            <a:off x="2743200" y="1965960"/>
-            <a:ext cx="1600200" cy="731520"/>
-          </a:xfrm>
-          <a:prstGeom prst="rect">
-            <a:avLst/>
-          </a:prstGeom>
-          <a:noFill/>
-          <a:ln/>
-        </p:spPr>
-        <p:txBody>
-          <a:bodyPr wrap="square" lIns="0" tIns="0" rIns="0" bIns="0" rtlCol="0" anchor="ctr"/>
-          <a:lstStyle/>
-          <a:p>
-            <a:pPr algn="l" indent="0" marL="0">
-              <a:buNone/>
-            </a:pPr>
-            <a:r>
-              <a:rPr lang="en-US" sz="3200" b="1" dirty="0">
+              <a:rPr lang="en-US" sz="1600" b="1" dirty="0">
                 <a:solidFill>
                   <a:srgbClr val="677E5B"/>
                 </a:solidFill>
@@ -19759,12 +22956,38 @@
                 <a:ea typeface="Inter" pitchFamily="34" charset="-122"/>
                 <a:cs typeface="Inter" pitchFamily="34" charset="-120"/>
               </a:rPr>
-              <a:t>12,90 €</a:t>
-            </a:r>
-            <a:endParaRPr lang="en-US" sz="3200" dirty="0"/>
-          </a:p>
-        </p:txBody>
-      </p:sp>
+              <a:t>ab 9,90 €</a:t>
+            </a:r>
+            <a:endParaRPr lang="en-US" sz="1600" dirty="0"/>
+          </a:p>
+        </p:txBody>
+      </p:sp>
+      <p:pic>
+        <p:nvPicPr>
+          <p:cNvPr id="7" name="Image 1" descr="/var/folders/hm/sgq6d80d0vq133k7n8dc9bnw0000gn/T/maiershirts-H73pRN/ph-foto-696x456.png">    </p:cNvPr>
+          <p:cNvPicPr>
+            <a:picLocks noChangeAspect="1"/>
+          </p:cNvPicPr>
+          <p:nvPr>
+            <p:ph idx="106" type="pic" hasCustomPrompt="1"/>
+          </p:nvPr>
+        </p:nvPicPr>
+        <p:blipFill>
+          <a:blip r:embed="rId2"/>
+          <a:stretch>
+            <a:fillRect/>
+          </a:stretch>
+        </p:blipFill>
+        <p:spPr>
+          <a:xfrm>
+            <a:off x="3246120" y="1234440"/>
+            <a:ext cx="2651760" cy="1737360"/>
+          </a:xfrm>
+          <a:prstGeom prst="rect">
+            <a:avLst/>
+          </a:prstGeom>
+        </p:spPr>
+      </p:pic>
       <p:sp>
         <p:nvSpPr>
           <p:cNvPr id="8" name="Text 0"/>
@@ -19775,8 +22998,49 @@
         </p:nvSpPr>
         <p:spPr>
           <a:xfrm>
-            <a:off x="2743200" y="2743200"/>
-            <a:ext cx="1600200" cy="502920"/>
+            <a:off x="3246120" y="3063240"/>
+            <a:ext cx="2651760" cy="320040"/>
+          </a:xfrm>
+          <a:prstGeom prst="rect">
+            <a:avLst/>
+          </a:prstGeom>
+          <a:noFill/>
+          <a:ln/>
+        </p:spPr>
+        <p:txBody>
+          <a:bodyPr wrap="square" lIns="0" tIns="0" rIns="0" bIns="0" rtlCol="0" anchor="t"/>
+          <a:lstStyle/>
+          <a:p>
+            <a:pPr algn="l" indent="0" marL="0">
+              <a:buNone/>
+            </a:pPr>
+            <a:r>
+              <a:rPr lang="en-US" sz="1600" b="1" dirty="0">
+                <a:solidFill>
+                  <a:srgbClr val="0F0F0F"/>
+                </a:solidFill>
+                <a:latin typeface="Inter" pitchFamily="34" charset="0"/>
+                <a:ea typeface="Inter" pitchFamily="34" charset="-122"/>
+                <a:cs typeface="Inter" pitchFamily="34" charset="-120"/>
+              </a:rPr>
+              <a:t>Polo-Shirt Piqué</a:t>
+            </a:r>
+            <a:endParaRPr lang="en-US" sz="1600" dirty="0"/>
+          </a:p>
+        </p:txBody>
+      </p:sp>
+      <p:sp>
+        <p:nvSpPr>
+          <p:cNvPr id="9" name="Text 0"/>
+          <p:cNvSpPr txBox="1"/>
+          <p:nvPr>
+            <p:ph idx="108" type="body" hasCustomPrompt="1"/>
+          </p:nvPr>
+        </p:nvSpPr>
+        <p:spPr>
+          <a:xfrm>
+            <a:off x="3246120" y="3383280"/>
+            <a:ext cx="2651760" cy="685800"/>
           </a:xfrm>
           <a:prstGeom prst="rect">
             <a:avLst/>
@@ -19802,7 +23066,7 @@
                 <a:ea typeface="Inter" pitchFamily="34" charset="-122"/>
                 <a:cs typeface="Inter" pitchFamily="34" charset="-120"/>
               </a:rPr>
-              <a:t>pro Stück, netto</a:t>
+              <a:t>Kariban Piqué · 220 g/m²</a:t>
             </a:r>
             <a:endParaRPr lang="en-US" sz="1200" dirty="0"/>
           </a:p>
@@ -19821,50 +23085,9 @@
                 <a:ea typeface="Inter" pitchFamily="34" charset="-122"/>
                 <a:cs typeface="Inter" pitchFamily="34" charset="-120"/>
               </a:rPr>
-              <a:t>inkl. Textil und Druck</a:t>
+              <a:t>8 Farben · S bis 4XL</a:t>
             </a:r>
             <a:endParaRPr lang="en-US" sz="1200" dirty="0"/>
-          </a:p>
-        </p:txBody>
-      </p:sp>
-      <p:sp>
-        <p:nvSpPr>
-          <p:cNvPr id="9" name="Text 0"/>
-          <p:cNvSpPr txBox="1"/>
-          <p:nvPr>
-            <p:ph idx="108" type="body" hasCustomPrompt="1"/>
-          </p:nvPr>
-        </p:nvSpPr>
-        <p:spPr>
-          <a:xfrm>
-            <a:off x="4846320" y="1554480"/>
-            <a:ext cx="1600200" cy="365760"/>
-          </a:xfrm>
-          <a:prstGeom prst="rect">
-            <a:avLst/>
-          </a:prstGeom>
-          <a:noFill/>
-          <a:ln/>
-        </p:spPr>
-        <p:txBody>
-          <a:bodyPr wrap="square" lIns="0" tIns="0" rIns="0" bIns="0" rtlCol="0" anchor="ctr"/>
-          <a:lstStyle/>
-          <a:p>
-            <a:pPr algn="l" indent="0" marL="0">
-              <a:buNone/>
-            </a:pPr>
-            <a:r>
-              <a:rPr lang="en-US" sz="1400" b="1" dirty="0">
-                <a:solidFill>
-                  <a:srgbClr val="0F0F0F"/>
-                </a:solidFill>
-                <a:latin typeface="Inter" pitchFamily="34" charset="0"/>
-                <a:ea typeface="Inter" pitchFamily="34" charset="-122"/>
-                <a:cs typeface="Inter" pitchFamily="34" charset="-120"/>
-              </a:rPr>
-              <a:t>ab 50 Stück</a:t>
-            </a:r>
-            <a:endParaRPr lang="en-US" sz="1400" dirty="0"/>
           </a:p>
         </p:txBody>
       </p:sp>
@@ -19878,24 +23101,24 @@
         </p:nvSpPr>
         <p:spPr>
           <a:xfrm>
-            <a:off x="4846320" y="1965960"/>
-            <a:ext cx="1600200" cy="731520"/>
-          </a:xfrm>
-          <a:prstGeom prst="rect">
-            <a:avLst/>
-          </a:prstGeom>
-          <a:noFill/>
-          <a:ln/>
-        </p:spPr>
-        <p:txBody>
-          <a:bodyPr wrap="square" lIns="0" tIns="0" rIns="0" bIns="0" rtlCol="0" anchor="ctr"/>
+            <a:off x="3246120" y="4069080"/>
+            <a:ext cx="2651760" cy="320040"/>
+          </a:xfrm>
+          <a:prstGeom prst="rect">
+            <a:avLst/>
+          </a:prstGeom>
+          <a:noFill/>
+          <a:ln/>
+        </p:spPr>
+        <p:txBody>
+          <a:bodyPr wrap="square" lIns="0" tIns="0" rIns="0" bIns="0" rtlCol="0" anchor="t"/>
           <a:lstStyle/>
           <a:p>
             <a:pPr algn="l" indent="0" marL="0">
               <a:buNone/>
             </a:pPr>
             <a:r>
-              <a:rPr lang="en-US" sz="3200" b="1" dirty="0">
+              <a:rPr lang="en-US" sz="1600" b="1" dirty="0">
                 <a:solidFill>
                   <a:srgbClr val="677E5B"/>
                 </a:solidFill>
@@ -19903,24 +23126,91 @@
                 <a:ea typeface="Inter" pitchFamily="34" charset="-122"/>
                 <a:cs typeface="Inter" pitchFamily="34" charset="-120"/>
               </a:rPr>
-              <a:t>11,50 €</a:t>
-            </a:r>
-            <a:endParaRPr lang="en-US" sz="3200" dirty="0"/>
-          </a:p>
-        </p:txBody>
-      </p:sp>
-      <p:sp>
-        <p:nvSpPr>
-          <p:cNvPr id="11" name="Text 0"/>
+              <a:t>ab 17,50 €</a:t>
+            </a:r>
+            <a:endParaRPr lang="en-US" sz="1600" dirty="0"/>
+          </a:p>
+        </p:txBody>
+      </p:sp>
+      <p:pic>
+        <p:nvPicPr>
+          <p:cNvPr id="11" name="Image 2" descr="/var/folders/hm/sgq6d80d0vq133k7n8dc9bnw0000gn/T/maiershirts-H73pRN/ph-foto-696x456.png">    </p:cNvPr>
+          <p:cNvPicPr>
+            <a:picLocks noChangeAspect="1"/>
+          </p:cNvPicPr>
+          <p:nvPr>
+            <p:ph idx="110" type="pic" hasCustomPrompt="1"/>
+          </p:nvPr>
+        </p:nvPicPr>
+        <p:blipFill>
+          <a:blip r:embed="rId3"/>
+          <a:stretch>
+            <a:fillRect/>
+          </a:stretch>
+        </p:blipFill>
+        <p:spPr>
+          <a:xfrm>
+            <a:off x="6035040" y="1234440"/>
+            <a:ext cx="2651760" cy="1737360"/>
+          </a:xfrm>
+          <a:prstGeom prst="rect">
+            <a:avLst/>
+          </a:prstGeom>
+        </p:spPr>
+      </p:pic>
+      <p:sp>
+        <p:nvSpPr>
+          <p:cNvPr id="12" name="Text 0"/>
           <p:cNvSpPr txBox="1"/>
           <p:nvPr>
-            <p:ph idx="110" type="body" hasCustomPrompt="1"/>
-          </p:nvPr>
-        </p:nvSpPr>
-        <p:spPr>
-          <a:xfrm>
-            <a:off x="4846320" y="2743200"/>
-            <a:ext cx="1600200" cy="502920"/>
+            <p:ph idx="111" type="body" hasCustomPrompt="1"/>
+          </p:nvPr>
+        </p:nvSpPr>
+        <p:spPr>
+          <a:xfrm>
+            <a:off x="6035040" y="3063240"/>
+            <a:ext cx="2651760" cy="320040"/>
+          </a:xfrm>
+          <a:prstGeom prst="rect">
+            <a:avLst/>
+          </a:prstGeom>
+          <a:noFill/>
+          <a:ln/>
+        </p:spPr>
+        <p:txBody>
+          <a:bodyPr wrap="square" lIns="0" tIns="0" rIns="0" bIns="0" rtlCol="0" anchor="t"/>
+          <a:lstStyle/>
+          <a:p>
+            <a:pPr algn="l" indent="0" marL="0">
+              <a:buNone/>
+            </a:pPr>
+            <a:r>
+              <a:rPr lang="en-US" sz="1600" b="1" dirty="0">
+                <a:solidFill>
+                  <a:srgbClr val="0F0F0F"/>
+                </a:solidFill>
+                <a:latin typeface="Inter" pitchFamily="34" charset="0"/>
+                <a:ea typeface="Inter" pitchFamily="34" charset="-122"/>
+                <a:cs typeface="Inter" pitchFamily="34" charset="-120"/>
+              </a:rPr>
+              <a:t>Hoodie Bio</a:t>
+            </a:r>
+            <a:endParaRPr lang="en-US" sz="1600" dirty="0"/>
+          </a:p>
+        </p:txBody>
+      </p:sp>
+      <p:sp>
+        <p:nvSpPr>
+          <p:cNvPr id="13" name="Text 0"/>
+          <p:cNvSpPr txBox="1"/>
+          <p:nvPr>
+            <p:ph idx="112" type="body" hasCustomPrompt="1"/>
+          </p:nvPr>
+        </p:nvSpPr>
+        <p:spPr>
+          <a:xfrm>
+            <a:off x="6035040" y="3383280"/>
+            <a:ext cx="2651760" cy="685800"/>
           </a:xfrm>
           <a:prstGeom prst="rect">
             <a:avLst/>
@@ -19946,7 +23236,7 @@
                 <a:ea typeface="Inter" pitchFamily="34" charset="-122"/>
                 <a:cs typeface="Inter" pitchFamily="34" charset="-120"/>
               </a:rPr>
-              <a:t>pro Stück, netto</a:t>
+              <a:t>Stanley/Stella Cruiser · 350 g/m²</a:t>
             </a:r>
             <a:endParaRPr lang="en-US" sz="1200" dirty="0"/>
           </a:p>
@@ -19965,91 +23255,9 @@
                 <a:ea typeface="Inter" pitchFamily="34" charset="-122"/>
                 <a:cs typeface="Inter" pitchFamily="34" charset="-120"/>
               </a:rPr>
-              <a:t>inkl. Textil und Druck</a:t>
+              <a:t>10 Farben · XS bis 3XL</a:t>
             </a:r>
             <a:endParaRPr lang="en-US" sz="1200" dirty="0"/>
-          </a:p>
-        </p:txBody>
-      </p:sp>
-      <p:sp>
-        <p:nvSpPr>
-          <p:cNvPr id="12" name="Text 0"/>
-          <p:cNvSpPr txBox="1"/>
-          <p:nvPr>
-            <p:ph idx="111" type="body" hasCustomPrompt="1"/>
-          </p:nvPr>
-        </p:nvSpPr>
-        <p:spPr>
-          <a:xfrm>
-            <a:off x="6949440" y="1554480"/>
-            <a:ext cx="1600200" cy="365760"/>
-          </a:xfrm>
-          <a:prstGeom prst="rect">
-            <a:avLst/>
-          </a:prstGeom>
-          <a:noFill/>
-          <a:ln/>
-        </p:spPr>
-        <p:txBody>
-          <a:bodyPr wrap="square" lIns="0" tIns="0" rIns="0" bIns="0" rtlCol="0" anchor="ctr"/>
-          <a:lstStyle/>
-          <a:p>
-            <a:pPr algn="l" indent="0" marL="0">
-              <a:buNone/>
-            </a:pPr>
-            <a:r>
-              <a:rPr lang="en-US" sz="1400" b="1" dirty="0">
-                <a:solidFill>
-                  <a:srgbClr val="0F0F0F"/>
-                </a:solidFill>
-                <a:latin typeface="Inter" pitchFamily="34" charset="0"/>
-                <a:ea typeface="Inter" pitchFamily="34" charset="-122"/>
-                <a:cs typeface="Inter" pitchFamily="34" charset="-120"/>
-              </a:rPr>
-              <a:t>ab 100 Stück</a:t>
-            </a:r>
-            <a:endParaRPr lang="en-US" sz="1400" dirty="0"/>
-          </a:p>
-        </p:txBody>
-      </p:sp>
-      <p:sp>
-        <p:nvSpPr>
-          <p:cNvPr id="13" name="Text 0"/>
-          <p:cNvSpPr txBox="1"/>
-          <p:nvPr>
-            <p:ph idx="112" type="body" hasCustomPrompt="1"/>
-          </p:nvPr>
-        </p:nvSpPr>
-        <p:spPr>
-          <a:xfrm>
-            <a:off x="6949440" y="1965960"/>
-            <a:ext cx="1600200" cy="731520"/>
-          </a:xfrm>
-          <a:prstGeom prst="rect">
-            <a:avLst/>
-          </a:prstGeom>
-          <a:noFill/>
-          <a:ln/>
-        </p:spPr>
-        <p:txBody>
-          <a:bodyPr wrap="square" lIns="0" tIns="0" rIns="0" bIns="0" rtlCol="0" anchor="ctr"/>
-          <a:lstStyle/>
-          <a:p>
-            <a:pPr algn="l" indent="0" marL="0">
-              <a:buNone/>
-            </a:pPr>
-            <a:r>
-              <a:rPr lang="en-US" sz="3200" b="1" dirty="0">
-                <a:solidFill>
-                  <a:srgbClr val="677E5B"/>
-                </a:solidFill>
-                <a:latin typeface="Inter" pitchFamily="34" charset="0"/>
-                <a:ea typeface="Inter" pitchFamily="34" charset="-122"/>
-                <a:cs typeface="Inter" pitchFamily="34" charset="-120"/>
-              </a:rPr>
-              <a:t>9,90 €</a:t>
-            </a:r>
-            <a:endParaRPr lang="en-US" sz="3200" dirty="0"/>
           </a:p>
         </p:txBody>
       </p:sp>
@@ -20063,8 +23271,8 @@
         </p:nvSpPr>
         <p:spPr>
           <a:xfrm>
-            <a:off x="6949440" y="2743200"/>
-            <a:ext cx="1600200" cy="502920"/>
+            <a:off x="6035040" y="4069080"/>
+            <a:ext cx="2651760" cy="320040"/>
           </a:xfrm>
           <a:prstGeom prst="rect">
             <a:avLst/>
@@ -20080,81 +23288,17 @@
               <a:buNone/>
             </a:pPr>
             <a:r>
-              <a:rPr lang="en-US" sz="1200" dirty="0">
-                <a:solidFill>
-                  <a:srgbClr val="0F0F0F">
-                    <a:alpha val="60000"/>
-                  </a:srgbClr>
-                </a:solidFill>
-                <a:latin typeface="Inter" pitchFamily="34" charset="0"/>
-                <a:ea typeface="Inter" pitchFamily="34" charset="-122"/>
-                <a:cs typeface="Inter" pitchFamily="34" charset="-120"/>
-              </a:rPr>
-              <a:t>pro Stück, netto</a:t>
-            </a:r>
-            <a:endParaRPr lang="en-US" sz="1200" dirty="0"/>
-          </a:p>
-          <a:p>
-            <a:pPr algn="l" indent="0" marL="0">
-              <a:buNone/>
-            </a:pPr>
-            <a:r>
-              <a:rPr lang="en-US" sz="1200" dirty="0">
-                <a:solidFill>
-                  <a:srgbClr val="0F0F0F">
-                    <a:alpha val="60000"/>
-                  </a:srgbClr>
-                </a:solidFill>
-                <a:latin typeface="Inter" pitchFamily="34" charset="0"/>
-                <a:ea typeface="Inter" pitchFamily="34" charset="-122"/>
-                <a:cs typeface="Inter" pitchFamily="34" charset="-120"/>
-              </a:rPr>
-              <a:t>inkl. Textil und Druck</a:t>
-            </a:r>
-            <a:endParaRPr lang="en-US" sz="1200" dirty="0"/>
-          </a:p>
-        </p:txBody>
-      </p:sp>
-      <p:sp>
-        <p:nvSpPr>
-          <p:cNvPr id="15" name="Text 0"/>
-          <p:cNvSpPr txBox="1"/>
-          <p:nvPr>
-            <p:ph idx="114" type="body" hasCustomPrompt="1"/>
-          </p:nvPr>
-        </p:nvSpPr>
-        <p:spPr>
-          <a:xfrm>
-            <a:off x="457200" y="3657600"/>
-            <a:ext cx="8229600" cy="731520"/>
-          </a:xfrm>
-          <a:prstGeom prst="rect">
-            <a:avLst/>
-          </a:prstGeom>
-          <a:noFill/>
-          <a:ln/>
-        </p:spPr>
-        <p:txBody>
-          <a:bodyPr wrap="square" lIns="0" tIns="0" rIns="0" bIns="0" rtlCol="0" anchor="t"/>
-          <a:lstStyle/>
-          <a:p>
-            <a:pPr algn="l" indent="0" marL="0">
-              <a:buNone/>
-            </a:pPr>
-            <a:r>
-              <a:rPr lang="en-US" sz="1200" dirty="0">
-                <a:solidFill>
-                  <a:srgbClr val="0F0F0F">
-                    <a:alpha val="60000"/>
-                  </a:srgbClr>
-                </a:solidFill>
-                <a:latin typeface="Inter" pitchFamily="34" charset="0"/>
-                <a:ea typeface="Inter" pitchFamily="34" charset="-122"/>
-                <a:cs typeface="Inter" pitchFamily="34" charset="-120"/>
-              </a:rPr>
-              <a:t>Beispielwerte. Staffelpreise gelten je Motiv und Textil; Einrichtungskosten für den Siebdruck fallen einmalig an. Verbindlich ist das Angebot aus Lexware.</a:t>
-            </a:r>
-            <a:endParaRPr lang="en-US" sz="1200" dirty="0"/>
+              <a:rPr lang="en-US" sz="1600" b="1" dirty="0">
+                <a:solidFill>
+                  <a:srgbClr val="677E5B"/>
+                </a:solidFill>
+                <a:latin typeface="Inter" pitchFamily="34" charset="0"/>
+                <a:ea typeface="Inter" pitchFamily="34" charset="-122"/>
+                <a:cs typeface="Inter" pitchFamily="34" charset="-120"/>
+              </a:rPr>
+              <a:t>ab 29,90 €</a:t>
+            </a:r>
+            <a:endParaRPr lang="en-US" sz="1600" dirty="0"/>
           </a:p>
         </p:txBody>
       </p:sp>
